--- a/AWS_Features_Tracker_Innovation_Demo.pptx
+++ b/AWS_Features_Tracker_Innovation_Demo.pptx
@@ -18,7 +18,7 @@
     <p:sldId id="266" r:id="rId17"/>
     <p:sldId id="267" r:id="rId18"/>
   </p:sldIdLst>
-  <p:sldSz cx="12188952" cy="6858000" type="screen4x3"/>
+  <p:sldSz cx="12192000" cy="6858000" type="custom"/>
   <p:notesSz cx="6858000" cy="9144000"/>
   <p:defaultTextStyle>
     <a:defPPr>
@@ -3108,7 +3108,7 @@
         <p:spPr>
           <a:xfrm>
             <a:off x="0" y="0"/>
-            <a:ext cx="12188952" cy="6858000"/>
+            <a:ext cx="12192000" cy="6858000"/>
           </a:xfrm>
           <a:prstGeom prst="rect">
             <a:avLst/>
@@ -3193,8 +3193,8 @@
         </p:nvSpPr>
         <p:spPr>
           <a:xfrm>
-            <a:off x="1523619" y="0"/>
-            <a:ext cx="6350" cy="6858000"/>
+            <a:off x="1523961" y="0"/>
+            <a:ext cx="18288" cy="6858000"/>
           </a:xfrm>
           <a:prstGeom prst="rect">
             <a:avLst/>
@@ -3236,8 +3236,8 @@
         </p:nvSpPr>
         <p:spPr>
           <a:xfrm>
-            <a:off x="3047238" y="0"/>
-            <a:ext cx="6350" cy="6858000"/>
+            <a:off x="3047923" y="0"/>
+            <a:ext cx="18288" cy="6858000"/>
           </a:xfrm>
           <a:prstGeom prst="rect">
             <a:avLst/>
@@ -3279,8 +3279,8 @@
         </p:nvSpPr>
         <p:spPr>
           <a:xfrm>
-            <a:off x="4570857" y="0"/>
-            <a:ext cx="6350" cy="6858000"/>
+            <a:off x="4571885" y="0"/>
+            <a:ext cx="18288" cy="6858000"/>
           </a:xfrm>
           <a:prstGeom prst="rect">
             <a:avLst/>
@@ -3322,8 +3322,8 @@
         </p:nvSpPr>
         <p:spPr>
           <a:xfrm>
-            <a:off x="6094476" y="0"/>
-            <a:ext cx="6350" cy="6858000"/>
+            <a:off x="6095847" y="0"/>
+            <a:ext cx="18288" cy="6858000"/>
           </a:xfrm>
           <a:prstGeom prst="rect">
             <a:avLst/>
@@ -3365,8 +3365,8 @@
         </p:nvSpPr>
         <p:spPr>
           <a:xfrm>
-            <a:off x="7618095" y="0"/>
-            <a:ext cx="6350" cy="6858000"/>
+            <a:off x="7619809" y="0"/>
+            <a:ext cx="18288" cy="6858000"/>
           </a:xfrm>
           <a:prstGeom prst="rect">
             <a:avLst/>
@@ -3408,8 +3408,8 @@
         </p:nvSpPr>
         <p:spPr>
           <a:xfrm>
-            <a:off x="9141714" y="0"/>
-            <a:ext cx="6350" cy="6858000"/>
+            <a:off x="9143771" y="0"/>
+            <a:ext cx="18288" cy="6858000"/>
           </a:xfrm>
           <a:prstGeom prst="rect">
             <a:avLst/>
@@ -3451,8 +3451,8 @@
         </p:nvSpPr>
         <p:spPr>
           <a:xfrm>
-            <a:off x="10665333" y="0"/>
-            <a:ext cx="6350" cy="6858000"/>
+            <a:off x="10667733" y="0"/>
+            <a:ext cx="18288" cy="6858000"/>
           </a:xfrm>
           <a:prstGeom prst="rect">
             <a:avLst/>
@@ -3494,8 +3494,8 @@
         </p:nvSpPr>
         <p:spPr>
           <a:xfrm>
-            <a:off x="12188952" y="0"/>
-            <a:ext cx="6350" cy="6858000"/>
+            <a:off x="12191695" y="0"/>
+            <a:ext cx="18288" cy="6858000"/>
           </a:xfrm>
           <a:prstGeom prst="rect">
             <a:avLst/>
@@ -3537,7 +3537,7 @@
         </p:nvSpPr>
         <p:spPr>
           <a:xfrm>
-            <a:off x="594360" y="1005840"/>
+            <a:off x="594360" y="960120"/>
             <a:ext cx="658368" cy="438912"/>
           </a:xfrm>
           <a:prstGeom prst="rect">
@@ -3580,8 +3580,8 @@
         </p:nvSpPr>
         <p:spPr>
           <a:xfrm>
-            <a:off x="621792" y="1024128"/>
-            <a:ext cx="603504" cy="402336"/>
+            <a:off x="612648" y="987552"/>
+            <a:ext cx="621792" cy="384048"/>
           </a:xfrm>
           <a:prstGeom prst="rect">
             <a:avLst/>
@@ -3614,8 +3614,8 @@
         </p:nvSpPr>
         <p:spPr>
           <a:xfrm>
-            <a:off x="594360" y="1572768"/>
-            <a:ext cx="9144000" cy="502920"/>
+            <a:off x="594360" y="1554480"/>
+            <a:ext cx="9144000" cy="274320"/>
           </a:xfrm>
           <a:prstGeom prst="rect">
             <a:avLst/>
@@ -3630,7 +3630,7 @@
           <a:p>
             <a:pPr algn="l"/>
             <a:r>
-              <a:rPr sz="1100" b="1" i="0">
+              <a:rPr sz="1000" b="1" i="0">
                 <a:solidFill>
                   <a:srgbClr val="FF9900"/>
                 </a:solidFill>
@@ -3648,8 +3648,8 @@
         </p:nvSpPr>
         <p:spPr>
           <a:xfrm>
-            <a:off x="594360" y="2194560"/>
-            <a:ext cx="9144000" cy="960120"/>
+            <a:off x="594360" y="2103120"/>
+            <a:ext cx="10058400" cy="914400"/>
           </a:xfrm>
           <a:prstGeom prst="rect">
             <a:avLst/>
@@ -3682,8 +3682,8 @@
         </p:nvSpPr>
         <p:spPr>
           <a:xfrm>
-            <a:off x="594360" y="3218688"/>
-            <a:ext cx="8686800" cy="502920"/>
+            <a:off x="594360" y="3154680"/>
+            <a:ext cx="9144000" cy="457200"/>
           </a:xfrm>
           <a:prstGeom prst="rect">
             <a:avLst/>
@@ -3698,7 +3698,7 @@
           <a:p>
             <a:pPr algn="l"/>
             <a:r>
-              <a:rPr sz="2200" b="0" i="1">
+              <a:rPr sz="2100" b="0" i="1">
                 <a:solidFill>
                   <a:srgbClr val="CBD5E1"/>
                 </a:solidFill>
@@ -3716,8 +3716,8 @@
         </p:nvSpPr>
         <p:spPr>
           <a:xfrm>
-            <a:off x="594360" y="3931920"/>
-            <a:ext cx="2743200" cy="365760"/>
+            <a:off x="594360" y="3886200"/>
+            <a:ext cx="2788920" cy="384048"/>
           </a:xfrm>
           <a:prstGeom prst="rect">
             <a:avLst/>
@@ -3759,8 +3759,8 @@
         </p:nvSpPr>
         <p:spPr>
           <a:xfrm>
-            <a:off x="594360" y="3941063"/>
-            <a:ext cx="2743200" cy="347472"/>
+            <a:off x="594360" y="3904487"/>
+            <a:ext cx="2788920" cy="347472"/>
           </a:xfrm>
           <a:prstGeom prst="rect">
             <a:avLst/>
@@ -3793,8 +3793,8 @@
         </p:nvSpPr>
         <p:spPr>
           <a:xfrm>
-            <a:off x="3611879" y="3931920"/>
-            <a:ext cx="2743200" cy="365760"/>
+            <a:off x="3611879" y="3886200"/>
+            <a:ext cx="2788920" cy="384048"/>
           </a:xfrm>
           <a:prstGeom prst="rect">
             <a:avLst/>
@@ -3836,8 +3836,8 @@
         </p:nvSpPr>
         <p:spPr>
           <a:xfrm>
-            <a:off x="3611879" y="3941063"/>
-            <a:ext cx="2743200" cy="347472"/>
+            <a:off x="3611879" y="3904487"/>
+            <a:ext cx="2788920" cy="347472"/>
           </a:xfrm>
           <a:prstGeom prst="rect">
             <a:avLst/>
@@ -3870,8 +3870,8 @@
         </p:nvSpPr>
         <p:spPr>
           <a:xfrm>
-            <a:off x="6629400" y="3931920"/>
-            <a:ext cx="2743200" cy="365760"/>
+            <a:off x="6629400" y="3886200"/>
+            <a:ext cx="2788920" cy="384048"/>
           </a:xfrm>
           <a:prstGeom prst="rect">
             <a:avLst/>
@@ -3913,8 +3913,8 @@
         </p:nvSpPr>
         <p:spPr>
           <a:xfrm>
-            <a:off x="6629400" y="3941063"/>
-            <a:ext cx="2743200" cy="347472"/>
+            <a:off x="6629400" y="3904487"/>
+            <a:ext cx="2788920" cy="347472"/>
           </a:xfrm>
           <a:prstGeom prst="rect">
             <a:avLst/>
@@ -3947,8 +3947,8 @@
         </p:nvSpPr>
         <p:spPr>
           <a:xfrm>
-            <a:off x="0" y="6400800"/>
-            <a:ext cx="12188952" cy="457200"/>
+            <a:off x="0" y="6419088"/>
+            <a:ext cx="12192000" cy="438912"/>
           </a:xfrm>
           <a:prstGeom prst="rect">
             <a:avLst/>
@@ -3990,8 +3990,8 @@
         </p:nvSpPr>
         <p:spPr>
           <a:xfrm>
-            <a:off x="0" y="6437376"/>
-            <a:ext cx="12188952" cy="384048"/>
+            <a:off x="0" y="6455664"/>
+            <a:ext cx="12192000" cy="365760"/>
           </a:xfrm>
           <a:prstGeom prst="rect">
             <a:avLst/>
@@ -4043,7 +4043,7 @@
         <p:spPr>
           <a:xfrm>
             <a:off x="0" y="0"/>
-            <a:ext cx="12188952" cy="6858000"/>
+            <a:ext cx="12192000" cy="6858000"/>
           </a:xfrm>
           <a:prstGeom prst="rect">
             <a:avLst/>
@@ -4086,7 +4086,7 @@
         <p:spPr>
           <a:xfrm>
             <a:off x="0" y="0"/>
-            <a:ext cx="12188952" cy="1005840"/>
+            <a:ext cx="12192000" cy="960120"/>
           </a:xfrm>
           <a:prstGeom prst="rect">
             <a:avLst/>
@@ -4128,8 +4128,8 @@
         </p:nvSpPr>
         <p:spPr>
           <a:xfrm>
-            <a:off x="0" y="6748272"/>
-            <a:ext cx="12188952" cy="109728"/>
+            <a:off x="0" y="6766560"/>
+            <a:ext cx="12192000" cy="91440"/>
           </a:xfrm>
           <a:prstGeom prst="rect">
             <a:avLst/>
@@ -4171,7 +4171,7 @@
         </p:nvSpPr>
         <p:spPr>
           <a:xfrm>
-            <a:off x="502920" y="182880"/>
+            <a:off x="502920" y="164592"/>
             <a:ext cx="10058400" cy="512064"/>
           </a:xfrm>
           <a:prstGeom prst="rect">
@@ -4205,7 +4205,7 @@
         </p:nvSpPr>
         <p:spPr>
           <a:xfrm>
-            <a:off x="502920" y="694944"/>
+            <a:off x="502920" y="676656"/>
             <a:ext cx="10058400" cy="256032"/>
           </a:xfrm>
           <a:prstGeom prst="rect">
@@ -4226,7 +4226,7 @@
                   <a:srgbClr val="FF9900"/>
                 </a:solidFill>
               </a:rPr>
-              <a:t>Minimal cost, FedRAMP-aligned services, least-privilege IAM, and full observability.</a:t>
+              <a:t>Minimal cost, FedRAMP-aligned services, least-privilege IAM, full observability.</a:t>
             </a:r>
           </a:p>
         </p:txBody>
@@ -4239,8 +4239,51 @@
         </p:nvSpPr>
         <p:spPr>
           <a:xfrm>
-            <a:off x="411480" y="1097280"/>
-            <a:ext cx="5303520" cy="4389120"/>
+            <a:off x="438912" y="1106424"/>
+            <a:ext cx="5321808" cy="4462272"/>
+          </a:xfrm>
+          <a:prstGeom prst="rect">
+            <a:avLst/>
+          </a:prstGeom>
+          <a:solidFill>
+            <a:srgbClr val="CBD5E1"/>
+          </a:solidFill>
+          <a:ln>
+            <a:noFill/>
+          </a:ln>
+        </p:spPr>
+        <p:style>
+          <a:lnRef idx="1">
+            <a:schemeClr val="accent1"/>
+          </a:lnRef>
+          <a:fillRef idx="3">
+            <a:schemeClr val="accent1"/>
+          </a:fillRef>
+          <a:effectRef idx="2">
+            <a:schemeClr val="accent1"/>
+          </a:effectRef>
+          <a:fontRef idx="minor">
+            <a:schemeClr val="lt1"/>
+          </a:fontRef>
+        </p:style>
+        <p:txBody>
+          <a:bodyPr rtlCol="0" anchor="ctr"/>
+          <a:lstStyle/>
+          <a:p>
+            <a:pPr algn="ctr"/>
+          </a:p>
+        </p:txBody>
+      </p:sp>
+      <p:sp>
+        <p:nvSpPr>
+          <p:cNvPr id="8" name="Rectangle 7"/>
+          <p:cNvSpPr/>
+          <p:nvPr/>
+        </p:nvSpPr>
+        <p:spPr>
+          <a:xfrm>
+            <a:off x="411480" y="1078992"/>
+            <a:ext cx="5321808" cy="4462272"/>
           </a:xfrm>
           <a:prstGeom prst="rect">
             <a:avLst/>
@@ -4248,7 +4291,7 @@
           <a:solidFill>
             <a:srgbClr val="FFFFFF"/>
           </a:solidFill>
-          <a:ln w="12700">
+          <a:ln w="9525">
             <a:solidFill>
               <a:srgbClr val="E2E8F0"/>
             </a:solidFill>
@@ -4278,13 +4321,13 @@
       </p:sp>
       <p:sp>
         <p:nvSpPr>
-          <p:cNvPr id="8" name="TextBox 7"/>
-          <p:cNvSpPr txBox="1"/>
-          <p:nvPr/>
-        </p:nvSpPr>
-        <p:spPr>
-          <a:xfrm>
-            <a:off x="548640" y="1188720"/>
+          <p:cNvPr id="9" name="TextBox 8"/>
+          <p:cNvSpPr txBox="1"/>
+          <p:nvPr/>
+        </p:nvSpPr>
+        <p:spPr>
+          <a:xfrm>
+            <a:off x="548640" y="1170432"/>
             <a:ext cx="5029200" cy="274320"/>
           </a:xfrm>
           <a:prstGeom prst="rect">
@@ -4312,14 +4355,14 @@
       </p:sp>
       <p:sp>
         <p:nvSpPr>
-          <p:cNvPr id="9" name="Rectangle 8"/>
-          <p:cNvSpPr/>
-          <p:nvPr/>
-        </p:nvSpPr>
-        <p:spPr>
-          <a:xfrm>
-            <a:off x="411480" y="1572768"/>
-            <a:ext cx="5303520" cy="402336"/>
+          <p:cNvPr id="10" name="Rectangle 9"/>
+          <p:cNvSpPr/>
+          <p:nvPr/>
+        </p:nvSpPr>
+        <p:spPr>
+          <a:xfrm>
+            <a:off x="411480" y="1554480"/>
+            <a:ext cx="5321808" cy="420624"/>
           </a:xfrm>
           <a:prstGeom prst="rect">
             <a:avLst/>
@@ -4355,13 +4398,13 @@
       </p:sp>
       <p:sp>
         <p:nvSpPr>
-          <p:cNvPr id="10" name="TextBox 9"/>
-          <p:cNvSpPr txBox="1"/>
-          <p:nvPr/>
-        </p:nvSpPr>
-        <p:spPr>
-          <a:xfrm>
-            <a:off x="548640" y="1664208"/>
+          <p:cNvPr id="11" name="TextBox 10"/>
+          <p:cNvSpPr txBox="1"/>
+          <p:nvPr/>
+        </p:nvSpPr>
+        <p:spPr>
+          <a:xfrm>
+            <a:off x="548640" y="1645920"/>
             <a:ext cx="3474720" cy="256032"/>
           </a:xfrm>
           <a:prstGeom prst="rect">
@@ -4389,13 +4432,13 @@
       </p:sp>
       <p:sp>
         <p:nvSpPr>
-          <p:cNvPr id="11" name="TextBox 10"/>
-          <p:cNvSpPr txBox="1"/>
-          <p:nvPr/>
-        </p:nvSpPr>
-        <p:spPr>
-          <a:xfrm>
-            <a:off x="4114800" y="1664208"/>
+          <p:cNvPr id="12" name="TextBox 11"/>
+          <p:cNvSpPr txBox="1"/>
+          <p:nvPr/>
+        </p:nvSpPr>
+        <p:spPr>
+          <a:xfrm>
+            <a:off x="4160520" y="1645920"/>
             <a:ext cx="1371600" cy="256032"/>
           </a:xfrm>
           <a:prstGeom prst="rect">
@@ -4423,7 +4466,7 @@
       </p:sp>
       <p:sp>
         <p:nvSpPr>
-          <p:cNvPr id="12" name="TextBox 11"/>
+          <p:cNvPr id="13" name="TextBox 12"/>
           <p:cNvSpPr txBox="1"/>
           <p:nvPr/>
         </p:nvSpPr>
@@ -4457,13 +4500,13 @@
       </p:sp>
       <p:sp>
         <p:nvSpPr>
-          <p:cNvPr id="13" name="TextBox 12"/>
-          <p:cNvSpPr txBox="1"/>
-          <p:nvPr/>
-        </p:nvSpPr>
-        <p:spPr>
-          <a:xfrm>
-            <a:off x="4114800" y="2066544"/>
+          <p:cNvPr id="14" name="TextBox 13"/>
+          <p:cNvSpPr txBox="1"/>
+          <p:nvPr/>
+        </p:nvSpPr>
+        <p:spPr>
+          <a:xfrm>
+            <a:off x="4160520" y="2066544"/>
             <a:ext cx="1371600" cy="256032"/>
           </a:xfrm>
           <a:prstGeom prst="rect">
@@ -4491,14 +4534,14 @@
       </p:sp>
       <p:sp>
         <p:nvSpPr>
-          <p:cNvPr id="14" name="Rectangle 13"/>
-          <p:cNvSpPr/>
-          <p:nvPr/>
-        </p:nvSpPr>
-        <p:spPr>
-          <a:xfrm>
-            <a:off x="411480" y="2377440"/>
-            <a:ext cx="5303520" cy="402336"/>
+          <p:cNvPr id="15" name="Rectangle 14"/>
+          <p:cNvSpPr/>
+          <p:nvPr/>
+        </p:nvSpPr>
+        <p:spPr>
+          <a:xfrm>
+            <a:off x="411480" y="2395728"/>
+            <a:ext cx="5321808" cy="420624"/>
           </a:xfrm>
           <a:prstGeom prst="rect">
             <a:avLst/>
@@ -4534,13 +4577,13 @@
       </p:sp>
       <p:sp>
         <p:nvSpPr>
-          <p:cNvPr id="15" name="TextBox 14"/>
-          <p:cNvSpPr txBox="1"/>
-          <p:nvPr/>
-        </p:nvSpPr>
-        <p:spPr>
-          <a:xfrm>
-            <a:off x="548640" y="2468880"/>
+          <p:cNvPr id="16" name="TextBox 15"/>
+          <p:cNvSpPr txBox="1"/>
+          <p:nvPr/>
+        </p:nvSpPr>
+        <p:spPr>
+          <a:xfrm>
+            <a:off x="548640" y="2487168"/>
             <a:ext cx="3474720" cy="256032"/>
           </a:xfrm>
           <a:prstGeom prst="rect">
@@ -4568,13 +4611,13 @@
       </p:sp>
       <p:sp>
         <p:nvSpPr>
-          <p:cNvPr id="16" name="TextBox 15"/>
-          <p:cNvSpPr txBox="1"/>
-          <p:nvPr/>
-        </p:nvSpPr>
-        <p:spPr>
-          <a:xfrm>
-            <a:off x="4114800" y="2468880"/>
+          <p:cNvPr id="17" name="TextBox 16"/>
+          <p:cNvSpPr txBox="1"/>
+          <p:nvPr/>
+        </p:nvSpPr>
+        <p:spPr>
+          <a:xfrm>
+            <a:off x="4160520" y="2487168"/>
             <a:ext cx="1371600" cy="256032"/>
           </a:xfrm>
           <a:prstGeom prst="rect">
@@ -4602,13 +4645,13 @@
       </p:sp>
       <p:sp>
         <p:nvSpPr>
-          <p:cNvPr id="17" name="TextBox 16"/>
-          <p:cNvSpPr txBox="1"/>
-          <p:nvPr/>
-        </p:nvSpPr>
-        <p:spPr>
-          <a:xfrm>
-            <a:off x="548640" y="2871216"/>
+          <p:cNvPr id="18" name="TextBox 17"/>
+          <p:cNvSpPr txBox="1"/>
+          <p:nvPr/>
+        </p:nvSpPr>
+        <p:spPr>
+          <a:xfrm>
+            <a:off x="548640" y="2907792"/>
             <a:ext cx="3474720" cy="256032"/>
           </a:xfrm>
           <a:prstGeom prst="rect">
@@ -4636,13 +4679,13 @@
       </p:sp>
       <p:sp>
         <p:nvSpPr>
-          <p:cNvPr id="18" name="TextBox 17"/>
-          <p:cNvSpPr txBox="1"/>
-          <p:nvPr/>
-        </p:nvSpPr>
-        <p:spPr>
-          <a:xfrm>
-            <a:off x="4114800" y="2871216"/>
+          <p:cNvPr id="19" name="TextBox 18"/>
+          <p:cNvSpPr txBox="1"/>
+          <p:nvPr/>
+        </p:nvSpPr>
+        <p:spPr>
+          <a:xfrm>
+            <a:off x="4160520" y="2907792"/>
             <a:ext cx="1371600" cy="256032"/>
           </a:xfrm>
           <a:prstGeom prst="rect">
@@ -4670,14 +4713,14 @@
       </p:sp>
       <p:sp>
         <p:nvSpPr>
-          <p:cNvPr id="19" name="Rectangle 18"/>
-          <p:cNvSpPr/>
-          <p:nvPr/>
-        </p:nvSpPr>
-        <p:spPr>
-          <a:xfrm>
-            <a:off x="411480" y="3182112"/>
-            <a:ext cx="5303520" cy="402336"/>
+          <p:cNvPr id="20" name="Rectangle 19"/>
+          <p:cNvSpPr/>
+          <p:nvPr/>
+        </p:nvSpPr>
+        <p:spPr>
+          <a:xfrm>
+            <a:off x="411480" y="3236976"/>
+            <a:ext cx="5321808" cy="420624"/>
           </a:xfrm>
           <a:prstGeom prst="rect">
             <a:avLst/>
@@ -4713,13 +4756,13 @@
       </p:sp>
       <p:sp>
         <p:nvSpPr>
-          <p:cNvPr id="20" name="TextBox 19"/>
-          <p:cNvSpPr txBox="1"/>
-          <p:nvPr/>
-        </p:nvSpPr>
-        <p:spPr>
-          <a:xfrm>
-            <a:off x="548640" y="3273552"/>
+          <p:cNvPr id="21" name="TextBox 20"/>
+          <p:cNvSpPr txBox="1"/>
+          <p:nvPr/>
+        </p:nvSpPr>
+        <p:spPr>
+          <a:xfrm>
+            <a:off x="548640" y="3328416"/>
             <a:ext cx="3474720" cy="256032"/>
           </a:xfrm>
           <a:prstGeom prst="rect">
@@ -4747,13 +4790,13 @@
       </p:sp>
       <p:sp>
         <p:nvSpPr>
-          <p:cNvPr id="21" name="TextBox 20"/>
-          <p:cNvSpPr txBox="1"/>
-          <p:nvPr/>
-        </p:nvSpPr>
-        <p:spPr>
-          <a:xfrm>
-            <a:off x="4114800" y="3273552"/>
+          <p:cNvPr id="22" name="TextBox 21"/>
+          <p:cNvSpPr txBox="1"/>
+          <p:nvPr/>
+        </p:nvSpPr>
+        <p:spPr>
+          <a:xfrm>
+            <a:off x="4160520" y="3328416"/>
             <a:ext cx="1371600" cy="256032"/>
           </a:xfrm>
           <a:prstGeom prst="rect">
@@ -4781,13 +4824,13 @@
       </p:sp>
       <p:sp>
         <p:nvSpPr>
-          <p:cNvPr id="22" name="TextBox 21"/>
-          <p:cNvSpPr txBox="1"/>
-          <p:nvPr/>
-        </p:nvSpPr>
-        <p:spPr>
-          <a:xfrm>
-            <a:off x="548640" y="3675888"/>
+          <p:cNvPr id="23" name="TextBox 22"/>
+          <p:cNvSpPr txBox="1"/>
+          <p:nvPr/>
+        </p:nvSpPr>
+        <p:spPr>
+          <a:xfrm>
+            <a:off x="548640" y="3749040"/>
             <a:ext cx="3474720" cy="256032"/>
           </a:xfrm>
           <a:prstGeom prst="rect">
@@ -4815,13 +4858,13 @@
       </p:sp>
       <p:sp>
         <p:nvSpPr>
-          <p:cNvPr id="23" name="TextBox 22"/>
-          <p:cNvSpPr txBox="1"/>
-          <p:nvPr/>
-        </p:nvSpPr>
-        <p:spPr>
-          <a:xfrm>
-            <a:off x="4114800" y="3675888"/>
+          <p:cNvPr id="24" name="TextBox 23"/>
+          <p:cNvSpPr txBox="1"/>
+          <p:nvPr/>
+        </p:nvSpPr>
+        <p:spPr>
+          <a:xfrm>
+            <a:off x="4160520" y="3749040"/>
             <a:ext cx="1371600" cy="256032"/>
           </a:xfrm>
           <a:prstGeom prst="rect">
@@ -4849,14 +4892,14 @@
       </p:sp>
       <p:sp>
         <p:nvSpPr>
-          <p:cNvPr id="24" name="Rectangle 23"/>
-          <p:cNvSpPr/>
-          <p:nvPr/>
-        </p:nvSpPr>
-        <p:spPr>
-          <a:xfrm>
-            <a:off x="411480" y="3986784"/>
-            <a:ext cx="5303520" cy="402336"/>
+          <p:cNvPr id="25" name="Rectangle 24"/>
+          <p:cNvSpPr/>
+          <p:nvPr/>
+        </p:nvSpPr>
+        <p:spPr>
+          <a:xfrm>
+            <a:off x="411480" y="4078224"/>
+            <a:ext cx="5321808" cy="420624"/>
           </a:xfrm>
           <a:prstGeom prst="rect">
             <a:avLst/>
@@ -4892,13 +4935,13 @@
       </p:sp>
       <p:sp>
         <p:nvSpPr>
-          <p:cNvPr id="25" name="TextBox 24"/>
-          <p:cNvSpPr txBox="1"/>
-          <p:nvPr/>
-        </p:nvSpPr>
-        <p:spPr>
-          <a:xfrm>
-            <a:off x="548640" y="4078224"/>
+          <p:cNvPr id="26" name="TextBox 25"/>
+          <p:cNvSpPr txBox="1"/>
+          <p:nvPr/>
+        </p:nvSpPr>
+        <p:spPr>
+          <a:xfrm>
+            <a:off x="548640" y="4169664"/>
             <a:ext cx="3474720" cy="256032"/>
           </a:xfrm>
           <a:prstGeom prst="rect">
@@ -4926,13 +4969,13 @@
       </p:sp>
       <p:sp>
         <p:nvSpPr>
-          <p:cNvPr id="26" name="TextBox 25"/>
-          <p:cNvSpPr txBox="1"/>
-          <p:nvPr/>
-        </p:nvSpPr>
-        <p:spPr>
-          <a:xfrm>
-            <a:off x="4114800" y="4078224"/>
+          <p:cNvPr id="27" name="TextBox 26"/>
+          <p:cNvSpPr txBox="1"/>
+          <p:nvPr/>
+        </p:nvSpPr>
+        <p:spPr>
+          <a:xfrm>
+            <a:off x="4160520" y="4169664"/>
             <a:ext cx="1371600" cy="256032"/>
           </a:xfrm>
           <a:prstGeom prst="rect">
@@ -4953,21 +4996,21 @@
                   <a:srgbClr val="16A34A"/>
                 </a:solidFill>
               </a:rPr>
-              <a:t>$0.00 (free tier)</a:t>
-            </a:r>
-          </a:p>
-        </p:txBody>
-      </p:sp>
-      <p:sp>
-        <p:nvSpPr>
-          <p:cNvPr id="27" name="Rectangle 26"/>
-          <p:cNvSpPr/>
-          <p:nvPr/>
-        </p:nvSpPr>
-        <p:spPr>
-          <a:xfrm>
-            <a:off x="411480" y="4389120"/>
-            <a:ext cx="5303520" cy="402336"/>
+              <a:t>$0.00  (free tier)</a:t>
+            </a:r>
+          </a:p>
+        </p:txBody>
+      </p:sp>
+      <p:sp>
+        <p:nvSpPr>
+          <p:cNvPr id="28" name="Rectangle 27"/>
+          <p:cNvSpPr/>
+          <p:nvPr/>
+        </p:nvSpPr>
+        <p:spPr>
+          <a:xfrm>
+            <a:off x="411480" y="4498848"/>
+            <a:ext cx="5321808" cy="420624"/>
           </a:xfrm>
           <a:prstGeom prst="rect">
             <a:avLst/>
@@ -5003,13 +5046,13 @@
       </p:sp>
       <p:sp>
         <p:nvSpPr>
-          <p:cNvPr id="28" name="TextBox 27"/>
-          <p:cNvSpPr txBox="1"/>
-          <p:nvPr/>
-        </p:nvSpPr>
-        <p:spPr>
-          <a:xfrm>
-            <a:off x="548640" y="4480560"/>
+          <p:cNvPr id="29" name="TextBox 28"/>
+          <p:cNvSpPr txBox="1"/>
+          <p:nvPr/>
+        </p:nvSpPr>
+        <p:spPr>
+          <a:xfrm>
+            <a:off x="548640" y="4590288"/>
             <a:ext cx="3474720" cy="256032"/>
           </a:xfrm>
           <a:prstGeom prst="rect">
@@ -5030,20 +5073,20 @@
                   <a:srgbClr val="1E293B"/>
                 </a:solidFill>
               </a:rPr>
-              <a:t>Total</a:t>
-            </a:r>
-          </a:p>
-        </p:txBody>
-      </p:sp>
-      <p:sp>
-        <p:nvSpPr>
-          <p:cNvPr id="29" name="TextBox 28"/>
-          <p:cNvSpPr txBox="1"/>
-          <p:nvPr/>
-        </p:nvSpPr>
-        <p:spPr>
-          <a:xfrm>
-            <a:off x="4114800" y="4480560"/>
+              <a:t>TOTAL</a:t>
+            </a:r>
+          </a:p>
+        </p:txBody>
+      </p:sp>
+      <p:sp>
+        <p:nvSpPr>
+          <p:cNvPr id="30" name="TextBox 29"/>
+          <p:cNvSpPr txBox="1"/>
+          <p:nvPr/>
+        </p:nvSpPr>
+        <p:spPr>
+          <a:xfrm>
+            <a:off x="4160520" y="4590288"/>
             <a:ext cx="1371600" cy="256032"/>
           </a:xfrm>
           <a:prstGeom prst="rect">
@@ -5071,14 +5114,57 @@
       </p:sp>
       <p:sp>
         <p:nvSpPr>
-          <p:cNvPr id="30" name="Rectangle 29"/>
-          <p:cNvSpPr/>
-          <p:nvPr/>
-        </p:nvSpPr>
-        <p:spPr>
-          <a:xfrm>
-            <a:off x="6035040" y="1097280"/>
-            <a:ext cx="5715000" cy="2011680"/>
+          <p:cNvPr id="31" name="Rectangle 30"/>
+          <p:cNvSpPr/>
+          <p:nvPr/>
+        </p:nvSpPr>
+        <p:spPr>
+          <a:xfrm>
+            <a:off x="6080760" y="1106424"/>
+            <a:ext cx="5596128" cy="2057400"/>
+          </a:xfrm>
+          <a:prstGeom prst="rect">
+            <a:avLst/>
+          </a:prstGeom>
+          <a:solidFill>
+            <a:srgbClr val="CBD5E1"/>
+          </a:solidFill>
+          <a:ln>
+            <a:noFill/>
+          </a:ln>
+        </p:spPr>
+        <p:style>
+          <a:lnRef idx="1">
+            <a:schemeClr val="accent1"/>
+          </a:lnRef>
+          <a:fillRef idx="3">
+            <a:schemeClr val="accent1"/>
+          </a:fillRef>
+          <a:effectRef idx="2">
+            <a:schemeClr val="accent1"/>
+          </a:effectRef>
+          <a:fontRef idx="minor">
+            <a:schemeClr val="lt1"/>
+          </a:fontRef>
+        </p:style>
+        <p:txBody>
+          <a:bodyPr rtlCol="0" anchor="ctr"/>
+          <a:lstStyle/>
+          <a:p>
+            <a:pPr algn="ctr"/>
+          </a:p>
+        </p:txBody>
+      </p:sp>
+      <p:sp>
+        <p:nvSpPr>
+          <p:cNvPr id="32" name="Rectangle 31"/>
+          <p:cNvSpPr/>
+          <p:nvPr/>
+        </p:nvSpPr>
+        <p:spPr>
+          <a:xfrm>
+            <a:off x="6053328" y="1078992"/>
+            <a:ext cx="5596128" cy="2057400"/>
           </a:xfrm>
           <a:prstGeom prst="rect">
             <a:avLst/>
@@ -5086,7 +5172,7 @@
           <a:solidFill>
             <a:srgbClr val="FFFFFF"/>
           </a:solidFill>
-          <a:ln w="12700">
+          <a:ln w="9525">
             <a:solidFill>
               <a:srgbClr val="E2E8F0"/>
             </a:solidFill>
@@ -5116,14 +5202,14 @@
       </p:sp>
       <p:sp>
         <p:nvSpPr>
-          <p:cNvPr id="31" name="TextBox 30"/>
-          <p:cNvSpPr txBox="1"/>
-          <p:nvPr/>
-        </p:nvSpPr>
-        <p:spPr>
-          <a:xfrm>
-            <a:off x="6172200" y="1188720"/>
-            <a:ext cx="5486400" cy="274320"/>
+          <p:cNvPr id="33" name="TextBox 32"/>
+          <p:cNvSpPr txBox="1"/>
+          <p:nvPr/>
+        </p:nvSpPr>
+        <p:spPr>
+          <a:xfrm>
+            <a:off x="6199632" y="1170432"/>
+            <a:ext cx="5303520" cy="274320"/>
           </a:xfrm>
           <a:prstGeom prst="rect">
             <a:avLst/>
@@ -5150,14 +5236,14 @@
       </p:sp>
       <p:sp>
         <p:nvSpPr>
-          <p:cNvPr id="32" name="Rectangle 31"/>
-          <p:cNvSpPr/>
-          <p:nvPr/>
-        </p:nvSpPr>
-        <p:spPr>
-          <a:xfrm>
-            <a:off x="6172200" y="1572387"/>
-            <a:ext cx="109728" cy="109728"/>
+          <p:cNvPr id="34" name="Rectangle 33"/>
+          <p:cNvSpPr/>
+          <p:nvPr/>
+        </p:nvSpPr>
+        <p:spPr>
+          <a:xfrm>
+            <a:off x="6199632" y="1692554"/>
+            <a:ext cx="91440" cy="91440"/>
           </a:xfrm>
           <a:prstGeom prst="rect">
             <a:avLst/>
@@ -5193,28 +5279,29 @@
       </p:sp>
       <p:sp>
         <p:nvSpPr>
-          <p:cNvPr id="33" name="TextBox 32"/>
-          <p:cNvSpPr txBox="1"/>
-          <p:nvPr/>
-        </p:nvSpPr>
-        <p:spPr>
-          <a:xfrm>
-            <a:off x="6373368" y="1536192"/>
-            <a:ext cx="5193792" cy="256032"/>
-          </a:xfrm>
-          <a:prstGeom prst="rect">
-            <a:avLst/>
-          </a:prstGeom>
-          <a:noFill/>
-        </p:spPr>
-        <p:txBody>
-          <a:bodyPr wrap="square">
-            <a:spAutoFit/>
-          </a:bodyPr>
-          <a:lstStyle/>
-          <a:p>
-            <a:r>
-              <a:rPr sz="950">
+          <p:cNvPr id="35" name="TextBox 34"/>
+          <p:cNvSpPr txBox="1"/>
+          <p:nvPr/>
+        </p:nvSpPr>
+        <p:spPr>
+          <a:xfrm>
+            <a:off x="6364224" y="1536192"/>
+            <a:ext cx="5138928" cy="256032"/>
+          </a:xfrm>
+          <a:prstGeom prst="rect">
+            <a:avLst/>
+          </a:prstGeom>
+          <a:noFill/>
+        </p:spPr>
+        <p:txBody>
+          <a:bodyPr wrap="square">
+            <a:spAutoFit/>
+          </a:bodyPr>
+          <a:lstStyle/>
+          <a:p>
+            <a:pPr algn="l"/>
+            <a:r>
+              <a:rPr sz="950" b="0" i="0">
                 <a:solidFill>
                   <a:srgbClr val="1E293B"/>
                 </a:solidFill>
@@ -5226,14 +5313,14 @@
       </p:sp>
       <p:sp>
         <p:nvSpPr>
-          <p:cNvPr id="34" name="Rectangle 33"/>
-          <p:cNvSpPr/>
-          <p:nvPr/>
-        </p:nvSpPr>
-        <p:spPr>
-          <a:xfrm>
-            <a:off x="6172200" y="1846707"/>
-            <a:ext cx="109728" cy="109728"/>
+          <p:cNvPr id="36" name="Rectangle 35"/>
+          <p:cNvSpPr/>
+          <p:nvPr/>
+        </p:nvSpPr>
+        <p:spPr>
+          <a:xfrm>
+            <a:off x="6199632" y="1966874"/>
+            <a:ext cx="91440" cy="91440"/>
           </a:xfrm>
           <a:prstGeom prst="rect">
             <a:avLst/>
@@ -5269,47 +5356,48 @@
       </p:sp>
       <p:sp>
         <p:nvSpPr>
-          <p:cNvPr id="35" name="TextBox 34"/>
-          <p:cNvSpPr txBox="1"/>
-          <p:nvPr/>
-        </p:nvSpPr>
-        <p:spPr>
-          <a:xfrm>
-            <a:off x="6373368" y="1810512"/>
-            <a:ext cx="5193792" cy="256032"/>
-          </a:xfrm>
-          <a:prstGeom prst="rect">
-            <a:avLst/>
-          </a:prstGeom>
-          <a:noFill/>
-        </p:spPr>
-        <p:txBody>
-          <a:bodyPr wrap="square">
-            <a:spAutoFit/>
-          </a:bodyPr>
-          <a:lstStyle/>
-          <a:p>
-            <a:r>
-              <a:rPr sz="950">
+          <p:cNvPr id="37" name="TextBox 36"/>
+          <p:cNvSpPr txBox="1"/>
+          <p:nvPr/>
+        </p:nvSpPr>
+        <p:spPr>
+          <a:xfrm>
+            <a:off x="6364224" y="1810512"/>
+            <a:ext cx="5138928" cy="256032"/>
+          </a:xfrm>
+          <a:prstGeom prst="rect">
+            <a:avLst/>
+          </a:prstGeom>
+          <a:noFill/>
+        </p:spPr>
+        <p:txBody>
+          <a:bodyPr wrap="square">
+            <a:spAutoFit/>
+          </a:bodyPr>
+          <a:lstStyle/>
+          <a:p>
+            <a:pPr algn="l"/>
+            <a:r>
+              <a:rPr sz="950" b="0" i="0">
                 <a:solidFill>
                   <a:srgbClr val="1E293B"/>
                 </a:solidFill>
               </a:rPr>
-              <a:t>IAM least-privilege: each Lambda has only the permissions it needs</a:t>
-            </a:r>
-          </a:p>
-        </p:txBody>
-      </p:sp>
-      <p:sp>
-        <p:nvSpPr>
-          <p:cNvPr id="36" name="Rectangle 35"/>
-          <p:cNvSpPr/>
-          <p:nvPr/>
-        </p:nvSpPr>
-        <p:spPr>
-          <a:xfrm>
-            <a:off x="6172200" y="2121026"/>
-            <a:ext cx="109728" cy="109728"/>
+              <a:t>IAM least-privilege — each Lambda has only the permissions it needs</a:t>
+            </a:r>
+          </a:p>
+        </p:txBody>
+      </p:sp>
+      <p:sp>
+        <p:nvSpPr>
+          <p:cNvPr id="38" name="Rectangle 37"/>
+          <p:cNvSpPr/>
+          <p:nvPr/>
+        </p:nvSpPr>
+        <p:spPr>
+          <a:xfrm>
+            <a:off x="6199632" y="2241193"/>
+            <a:ext cx="91440" cy="91440"/>
           </a:xfrm>
           <a:prstGeom prst="rect">
             <a:avLst/>
@@ -5345,47 +5433,48 @@
       </p:sp>
       <p:sp>
         <p:nvSpPr>
-          <p:cNvPr id="37" name="TextBox 36"/>
-          <p:cNvSpPr txBox="1"/>
-          <p:nvPr/>
-        </p:nvSpPr>
-        <p:spPr>
-          <a:xfrm>
-            <a:off x="6373368" y="2084831"/>
-            <a:ext cx="5193792" cy="256032"/>
-          </a:xfrm>
-          <a:prstGeom prst="rect">
-            <a:avLst/>
-          </a:prstGeom>
-          <a:noFill/>
-        </p:spPr>
-        <p:txBody>
-          <a:bodyPr wrap="square">
-            <a:spAutoFit/>
-          </a:bodyPr>
-          <a:lstStyle/>
-          <a:p>
-            <a:r>
-              <a:rPr sz="950">
+          <p:cNvPr id="39" name="TextBox 38"/>
+          <p:cNvSpPr txBox="1"/>
+          <p:nvPr/>
+        </p:nvSpPr>
+        <p:spPr>
+          <a:xfrm>
+            <a:off x="6364224" y="2084831"/>
+            <a:ext cx="5138928" cy="256032"/>
+          </a:xfrm>
+          <a:prstGeom prst="rect">
+            <a:avLst/>
+          </a:prstGeom>
+          <a:noFill/>
+        </p:spPr>
+        <p:txBody>
+          <a:bodyPr wrap="square">
+            <a:spAutoFit/>
+          </a:bodyPr>
+          <a:lstStyle/>
+          <a:p>
+            <a:pPr algn="l"/>
+            <a:r>
+              <a:rPr sz="950" b="0" i="0">
                 <a:solidFill>
                   <a:srgbClr val="1E293B"/>
                 </a:solidFill>
               </a:rPr>
-              <a:t>S3 Block Public Access ON — CloudFront OAC for SPA, no direct access</a:t>
-            </a:r>
-          </a:p>
-        </p:txBody>
-      </p:sp>
-      <p:sp>
-        <p:nvSpPr>
-          <p:cNvPr id="38" name="Rectangle 37"/>
-          <p:cNvSpPr/>
-          <p:nvPr/>
-        </p:nvSpPr>
-        <p:spPr>
-          <a:xfrm>
-            <a:off x="6172200" y="2395347"/>
-            <a:ext cx="109728" cy="109728"/>
+              <a:t>S3 Block Public Access ON — CloudFront OAC, no direct bucket access</a:t>
+            </a:r>
+          </a:p>
+        </p:txBody>
+      </p:sp>
+      <p:sp>
+        <p:nvSpPr>
+          <p:cNvPr id="40" name="Rectangle 39"/>
+          <p:cNvSpPr/>
+          <p:nvPr/>
+        </p:nvSpPr>
+        <p:spPr>
+          <a:xfrm>
+            <a:off x="6199632" y="2515514"/>
+            <a:ext cx="91440" cy="91440"/>
           </a:xfrm>
           <a:prstGeom prst="rect">
             <a:avLst/>
@@ -5421,28 +5510,29 @@
       </p:sp>
       <p:sp>
         <p:nvSpPr>
-          <p:cNvPr id="39" name="TextBox 38"/>
-          <p:cNvSpPr txBox="1"/>
-          <p:nvPr/>
-        </p:nvSpPr>
-        <p:spPr>
-          <a:xfrm>
-            <a:off x="6373368" y="2359152"/>
-            <a:ext cx="5193792" cy="256032"/>
-          </a:xfrm>
-          <a:prstGeom prst="rect">
-            <a:avLst/>
-          </a:prstGeom>
-          <a:noFill/>
-        </p:spPr>
-        <p:txBody>
-          <a:bodyPr wrap="square">
-            <a:spAutoFit/>
-          </a:bodyPr>
-          <a:lstStyle/>
-          <a:p>
-            <a:r>
-              <a:rPr sz="950">
+          <p:cNvPr id="41" name="TextBox 40"/>
+          <p:cNvSpPr txBox="1"/>
+          <p:nvPr/>
+        </p:nvSpPr>
+        <p:spPr>
+          <a:xfrm>
+            <a:off x="6364224" y="2359152"/>
+            <a:ext cx="5138928" cy="256032"/>
+          </a:xfrm>
+          <a:prstGeom prst="rect">
+            <a:avLst/>
+          </a:prstGeom>
+          <a:noFill/>
+        </p:spPr>
+        <p:txBody>
+          <a:bodyPr wrap="square">
+            <a:spAutoFit/>
+          </a:bodyPr>
+          <a:lstStyle/>
+          <a:p>
+            <a:pPr algn="l"/>
+            <a:r>
+              <a:rPr sz="950" b="0" i="0">
                 <a:solidFill>
                   <a:srgbClr val="1E293B"/>
                 </a:solidFill>
@@ -5454,14 +5544,14 @@
       </p:sp>
       <p:sp>
         <p:nvSpPr>
-          <p:cNvPr id="40" name="Rectangle 39"/>
-          <p:cNvSpPr/>
-          <p:nvPr/>
-        </p:nvSpPr>
-        <p:spPr>
-          <a:xfrm>
-            <a:off x="6172200" y="2669667"/>
-            <a:ext cx="109728" cy="109728"/>
+          <p:cNvPr id="42" name="Rectangle 41"/>
+          <p:cNvSpPr/>
+          <p:nvPr/>
+        </p:nvSpPr>
+        <p:spPr>
+          <a:xfrm>
+            <a:off x="6199632" y="2789834"/>
+            <a:ext cx="91440" cy="91440"/>
           </a:xfrm>
           <a:prstGeom prst="rect">
             <a:avLst/>
@@ -5497,47 +5587,91 @@
       </p:sp>
       <p:sp>
         <p:nvSpPr>
-          <p:cNvPr id="41" name="TextBox 40"/>
-          <p:cNvSpPr txBox="1"/>
-          <p:nvPr/>
-        </p:nvSpPr>
-        <p:spPr>
-          <a:xfrm>
-            <a:off x="6373368" y="2633472"/>
-            <a:ext cx="5193792" cy="256032"/>
-          </a:xfrm>
-          <a:prstGeom prst="rect">
-            <a:avLst/>
-          </a:prstGeom>
-          <a:noFill/>
-        </p:spPr>
-        <p:txBody>
-          <a:bodyPr wrap="square">
-            <a:spAutoFit/>
-          </a:bodyPr>
-          <a:lstStyle/>
-          <a:p>
-            <a:r>
-              <a:rPr sz="950">
+          <p:cNvPr id="43" name="TextBox 42"/>
+          <p:cNvSpPr txBox="1"/>
+          <p:nvPr/>
+        </p:nvSpPr>
+        <p:spPr>
+          <a:xfrm>
+            <a:off x="6364224" y="2633472"/>
+            <a:ext cx="5138928" cy="256032"/>
+          </a:xfrm>
+          <a:prstGeom prst="rect">
+            <a:avLst/>
+          </a:prstGeom>
+          <a:noFill/>
+        </p:spPr>
+        <p:txBody>
+          <a:bodyPr wrap="square">
+            <a:spAutoFit/>
+          </a:bodyPr>
+          <a:lstStyle/>
+          <a:p>
+            <a:pPr algn="l"/>
+            <a:r>
+              <a:rPr sz="950" b="0" i="0">
                 <a:solidFill>
                   <a:srgbClr val="1E293B"/>
                 </a:solidFill>
               </a:rPr>
-              <a:t>API Gateway public read-only (no write surface exposed)</a:t>
-            </a:r>
-          </a:p>
-        </p:txBody>
-      </p:sp>
-      <p:sp>
-        <p:nvSpPr>
-          <p:cNvPr id="42" name="Rectangle 41"/>
-          <p:cNvSpPr/>
-          <p:nvPr/>
-        </p:nvSpPr>
-        <p:spPr>
-          <a:xfrm>
-            <a:off x="6035040" y="3246120"/>
-            <a:ext cx="5715000" cy="2240280"/>
+              <a:t>API Gateway public read-only — no write surface exposed</a:t>
+            </a:r>
+          </a:p>
+        </p:txBody>
+      </p:sp>
+      <p:sp>
+        <p:nvSpPr>
+          <p:cNvPr id="44" name="Rectangle 43"/>
+          <p:cNvSpPr/>
+          <p:nvPr/>
+        </p:nvSpPr>
+        <p:spPr>
+          <a:xfrm>
+            <a:off x="6080760" y="3273552"/>
+            <a:ext cx="5596128" cy="2304288"/>
+          </a:xfrm>
+          <a:prstGeom prst="rect">
+            <a:avLst/>
+          </a:prstGeom>
+          <a:solidFill>
+            <a:srgbClr val="CBD5E1"/>
+          </a:solidFill>
+          <a:ln>
+            <a:noFill/>
+          </a:ln>
+        </p:spPr>
+        <p:style>
+          <a:lnRef idx="1">
+            <a:schemeClr val="accent1"/>
+          </a:lnRef>
+          <a:fillRef idx="3">
+            <a:schemeClr val="accent1"/>
+          </a:fillRef>
+          <a:effectRef idx="2">
+            <a:schemeClr val="accent1"/>
+          </a:effectRef>
+          <a:fontRef idx="minor">
+            <a:schemeClr val="lt1"/>
+          </a:fontRef>
+        </p:style>
+        <p:txBody>
+          <a:bodyPr rtlCol="0" anchor="ctr"/>
+          <a:lstStyle/>
+          <a:p>
+            <a:pPr algn="ctr"/>
+          </a:p>
+        </p:txBody>
+      </p:sp>
+      <p:sp>
+        <p:nvSpPr>
+          <p:cNvPr id="45" name="Rectangle 44"/>
+          <p:cNvSpPr/>
+          <p:nvPr/>
+        </p:nvSpPr>
+        <p:spPr>
+          <a:xfrm>
+            <a:off x="6053328" y="3246120"/>
+            <a:ext cx="5596128" cy="2304288"/>
           </a:xfrm>
           <a:prstGeom prst="rect">
             <a:avLst/>
@@ -5545,7 +5679,7 @@
           <a:solidFill>
             <a:srgbClr val="FFFFFF"/>
           </a:solidFill>
-          <a:ln w="12700">
+          <a:ln w="9525">
             <a:solidFill>
               <a:srgbClr val="E2E8F0"/>
             </a:solidFill>
@@ -5575,14 +5709,14 @@
       </p:sp>
       <p:sp>
         <p:nvSpPr>
-          <p:cNvPr id="43" name="TextBox 42"/>
-          <p:cNvSpPr txBox="1"/>
-          <p:nvPr/>
-        </p:nvSpPr>
-        <p:spPr>
-          <a:xfrm>
-            <a:off x="6172200" y="3337560"/>
-            <a:ext cx="5486400" cy="274320"/>
+          <p:cNvPr id="46" name="TextBox 45"/>
+          <p:cNvSpPr txBox="1"/>
+          <p:nvPr/>
+        </p:nvSpPr>
+        <p:spPr>
+          <a:xfrm>
+            <a:off x="6199632" y="3337560"/>
+            <a:ext cx="5303520" cy="274320"/>
           </a:xfrm>
           <a:prstGeom prst="rect">
             <a:avLst/>
@@ -5609,14 +5743,14 @@
       </p:sp>
       <p:sp>
         <p:nvSpPr>
-          <p:cNvPr id="44" name="Rectangle 43"/>
-          <p:cNvSpPr/>
-          <p:nvPr/>
-        </p:nvSpPr>
-        <p:spPr>
-          <a:xfrm>
-            <a:off x="6172200" y="3748658"/>
-            <a:ext cx="109728" cy="109728"/>
+          <p:cNvPr id="47" name="Rectangle 46"/>
+          <p:cNvSpPr/>
+          <p:nvPr/>
+        </p:nvSpPr>
+        <p:spPr>
+          <a:xfrm>
+            <a:off x="6199632" y="3887114"/>
+            <a:ext cx="91440" cy="91440"/>
           </a:xfrm>
           <a:prstGeom prst="rect">
             <a:avLst/>
@@ -5652,28 +5786,29 @@
       </p:sp>
       <p:sp>
         <p:nvSpPr>
-          <p:cNvPr id="45" name="TextBox 44"/>
-          <p:cNvSpPr txBox="1"/>
-          <p:nvPr/>
-        </p:nvSpPr>
-        <p:spPr>
-          <a:xfrm>
-            <a:off x="6373368" y="3712463"/>
-            <a:ext cx="5193792" cy="256032"/>
-          </a:xfrm>
-          <a:prstGeom prst="rect">
-            <a:avLst/>
-          </a:prstGeom>
-          <a:noFill/>
-        </p:spPr>
-        <p:txBody>
-          <a:bodyPr wrap="square">
-            <a:spAutoFit/>
-          </a:bodyPr>
-          <a:lstStyle/>
-          <a:p>
-            <a:r>
-              <a:rPr sz="950">
+          <p:cNvPr id="48" name="TextBox 47"/>
+          <p:cNvSpPr txBox="1"/>
+          <p:nvPr/>
+        </p:nvSpPr>
+        <p:spPr>
+          <a:xfrm>
+            <a:off x="6364224" y="3730752"/>
+            <a:ext cx="5138928" cy="256032"/>
+          </a:xfrm>
+          <a:prstGeom prst="rect">
+            <a:avLst/>
+          </a:prstGeom>
+          <a:noFill/>
+        </p:spPr>
+        <p:txBody>
+          <a:bodyPr wrap="square">
+            <a:spAutoFit/>
+          </a:bodyPr>
+          <a:lstStyle/>
+          <a:p>
+            <a:pPr algn="l"/>
+            <a:r>
+              <a:rPr sz="950" b="0" i="0">
                 <a:solidFill>
                   <a:srgbClr val="1E293B"/>
                 </a:solidFill>
@@ -5685,14 +5820,14 @@
       </p:sp>
       <p:sp>
         <p:nvSpPr>
-          <p:cNvPr id="46" name="Rectangle 45"/>
-          <p:cNvSpPr/>
-          <p:nvPr/>
-        </p:nvSpPr>
-        <p:spPr>
-          <a:xfrm>
-            <a:off x="6172200" y="4022978"/>
-            <a:ext cx="109728" cy="109728"/>
+          <p:cNvPr id="49" name="Rectangle 48"/>
+          <p:cNvSpPr/>
+          <p:nvPr/>
+        </p:nvSpPr>
+        <p:spPr>
+          <a:xfrm>
+            <a:off x="6199632" y="4161434"/>
+            <a:ext cx="91440" cy="91440"/>
           </a:xfrm>
           <a:prstGeom prst="rect">
             <a:avLst/>
@@ -5728,47 +5863,48 @@
       </p:sp>
       <p:sp>
         <p:nvSpPr>
-          <p:cNvPr id="47" name="TextBox 46"/>
-          <p:cNvSpPr txBox="1"/>
-          <p:nvPr/>
-        </p:nvSpPr>
-        <p:spPr>
-          <a:xfrm>
-            <a:off x="6373368" y="3986783"/>
-            <a:ext cx="5193792" cy="256032"/>
-          </a:xfrm>
-          <a:prstGeom prst="rect">
-            <a:avLst/>
-          </a:prstGeom>
-          <a:noFill/>
-        </p:spPr>
-        <p:txBody>
-          <a:bodyPr wrap="square">
-            <a:spAutoFit/>
-          </a:bodyPr>
-          <a:lstStyle/>
-          <a:p>
-            <a:r>
-              <a:rPr sz="950">
+          <p:cNvPr id="50" name="TextBox 49"/>
+          <p:cNvSpPr txBox="1"/>
+          <p:nvPr/>
+        </p:nvSpPr>
+        <p:spPr>
+          <a:xfrm>
+            <a:off x="6364224" y="4005072"/>
+            <a:ext cx="5138928" cy="256032"/>
+          </a:xfrm>
+          <a:prstGeom prst="rect">
+            <a:avLst/>
+          </a:prstGeom>
+          <a:noFill/>
+        </p:spPr>
+        <p:txBody>
+          <a:bodyPr wrap="square">
+            <a:spAutoFit/>
+          </a:bodyPr>
+          <a:lstStyle/>
+          <a:p>
+            <a:pPr algn="l"/>
+            <a:r>
+              <a:rPr sz="950" b="0" i="0">
                 <a:solidFill>
                   <a:srgbClr val="1E293B"/>
                 </a:solidFill>
               </a:rPr>
-              <a:t>Up to 3 automatic retries on Bedrock failures before DLQ</a:t>
-            </a:r>
-          </a:p>
-        </p:txBody>
-      </p:sp>
-      <p:sp>
-        <p:nvSpPr>
-          <p:cNvPr id="48" name="Rectangle 47"/>
-          <p:cNvSpPr/>
-          <p:nvPr/>
-        </p:nvSpPr>
-        <p:spPr>
-          <a:xfrm>
-            <a:off x="6172200" y="4297298"/>
-            <a:ext cx="109728" cy="109728"/>
+              <a:t>Up to 3 automatic Bedrock retries before dead-lettering</a:t>
+            </a:r>
+          </a:p>
+        </p:txBody>
+      </p:sp>
+      <p:sp>
+        <p:nvSpPr>
+          <p:cNvPr id="51" name="Rectangle 50"/>
+          <p:cNvSpPr/>
+          <p:nvPr/>
+        </p:nvSpPr>
+        <p:spPr>
+          <a:xfrm>
+            <a:off x="6199632" y="4435754"/>
+            <a:ext cx="91440" cy="91440"/>
           </a:xfrm>
           <a:prstGeom prst="rect">
             <a:avLst/>
@@ -5804,47 +5940,48 @@
       </p:sp>
       <p:sp>
         <p:nvSpPr>
-          <p:cNvPr id="49" name="TextBox 48"/>
-          <p:cNvSpPr txBox="1"/>
-          <p:nvPr/>
-        </p:nvSpPr>
-        <p:spPr>
-          <a:xfrm>
-            <a:off x="6373368" y="4261103"/>
-            <a:ext cx="5193792" cy="256032"/>
-          </a:xfrm>
-          <a:prstGeom prst="rect">
-            <a:avLst/>
-          </a:prstGeom>
-          <a:noFill/>
-        </p:spPr>
-        <p:txBody>
-          <a:bodyPr wrap="square">
-            <a:spAutoFit/>
-          </a:bodyPr>
-          <a:lstStyle/>
-          <a:p>
-            <a:r>
-              <a:rPr sz="950">
+          <p:cNvPr id="52" name="TextBox 51"/>
+          <p:cNvSpPr txBox="1"/>
+          <p:nvPr/>
+        </p:nvSpPr>
+        <p:spPr>
+          <a:xfrm>
+            <a:off x="6364224" y="4279392"/>
+            <a:ext cx="5138928" cy="256032"/>
+          </a:xfrm>
+          <a:prstGeom prst="rect">
+            <a:avLst/>
+          </a:prstGeom>
+          <a:noFill/>
+        </p:spPr>
+        <p:txBody>
+          <a:bodyPr wrap="square">
+            <a:spAutoFit/>
+          </a:bodyPr>
+          <a:lstStyle/>
+          <a:p>
+            <a:pPr algn="l"/>
+            <a:r>
+              <a:rPr sz="950" b="0" i="0">
                 <a:solidFill>
                   <a:srgbClr val="1E293B"/>
                 </a:solidFill>
               </a:rPr>
-              <a:t>CloudWatch Alarm: Summarizer errors &gt; 10/hr → alert</a:t>
-            </a:r>
-          </a:p>
-        </p:txBody>
-      </p:sp>
-      <p:sp>
-        <p:nvSpPr>
-          <p:cNvPr id="50" name="Rectangle 49"/>
-          <p:cNvSpPr/>
-          <p:nvPr/>
-        </p:nvSpPr>
-        <p:spPr>
-          <a:xfrm>
-            <a:off x="6172200" y="4571618"/>
-            <a:ext cx="109728" cy="109728"/>
+              <a:t>CloudWatch Alarm: Summarizer errors &gt; 10/hr</a:t>
+            </a:r>
+          </a:p>
+        </p:txBody>
+      </p:sp>
+      <p:sp>
+        <p:nvSpPr>
+          <p:cNvPr id="53" name="Rectangle 52"/>
+          <p:cNvSpPr/>
+          <p:nvPr/>
+        </p:nvSpPr>
+        <p:spPr>
+          <a:xfrm>
+            <a:off x="6199632" y="4710074"/>
+            <a:ext cx="91440" cy="91440"/>
           </a:xfrm>
           <a:prstGeom prst="rect">
             <a:avLst/>
@@ -5880,47 +6017,48 @@
       </p:sp>
       <p:sp>
         <p:nvSpPr>
-          <p:cNvPr id="51" name="TextBox 50"/>
-          <p:cNvSpPr txBox="1"/>
-          <p:nvPr/>
-        </p:nvSpPr>
-        <p:spPr>
-          <a:xfrm>
-            <a:off x="6373368" y="4535423"/>
-            <a:ext cx="5193792" cy="256032"/>
-          </a:xfrm>
-          <a:prstGeom prst="rect">
-            <a:avLst/>
-          </a:prstGeom>
-          <a:noFill/>
-        </p:spPr>
-        <p:txBody>
-          <a:bodyPr wrap="square">
-            <a:spAutoFit/>
-          </a:bodyPr>
-          <a:lstStyle/>
-          <a:p>
-            <a:r>
-              <a:rPr sz="950">
+          <p:cNvPr id="54" name="TextBox 53"/>
+          <p:cNvSpPr txBox="1"/>
+          <p:nvPr/>
+        </p:nvSpPr>
+        <p:spPr>
+          <a:xfrm>
+            <a:off x="6364224" y="4553712"/>
+            <a:ext cx="5138928" cy="256032"/>
+          </a:xfrm>
+          <a:prstGeom prst="rect">
+            <a:avLst/>
+          </a:prstGeom>
+          <a:noFill/>
+        </p:spPr>
+        <p:txBody>
+          <a:bodyPr wrap="square">
+            <a:spAutoFit/>
+          </a:bodyPr>
+          <a:lstStyle/>
+          <a:p>
+            <a:pPr algn="l"/>
+            <a:r>
+              <a:rPr sz="950" b="0" i="0">
                 <a:solidFill>
                   <a:srgbClr val="1E293B"/>
                 </a:solidFill>
               </a:rPr>
-              <a:t>CloudWatch Alarm: DLQ messages &gt; 0 → alert</a:t>
-            </a:r>
-          </a:p>
-        </p:txBody>
-      </p:sp>
-      <p:sp>
-        <p:nvSpPr>
-          <p:cNvPr id="52" name="Rectangle 51"/>
-          <p:cNvSpPr/>
-          <p:nvPr/>
-        </p:nvSpPr>
-        <p:spPr>
-          <a:xfrm>
-            <a:off x="6172200" y="4845939"/>
-            <a:ext cx="109728" cy="109728"/>
+              <a:t>CloudWatch Alarm: DLQ messages &gt; 0</a:t>
+            </a:r>
+          </a:p>
+        </p:txBody>
+      </p:sp>
+      <p:sp>
+        <p:nvSpPr>
+          <p:cNvPr id="55" name="Rectangle 54"/>
+          <p:cNvSpPr/>
+          <p:nvPr/>
+        </p:nvSpPr>
+        <p:spPr>
+          <a:xfrm>
+            <a:off x="6199632" y="4984394"/>
+            <a:ext cx="91440" cy="91440"/>
           </a:xfrm>
           <a:prstGeom prst="rect">
             <a:avLst/>
@@ -5956,33 +6094,34 @@
       </p:sp>
       <p:sp>
         <p:nvSpPr>
-          <p:cNvPr id="53" name="TextBox 52"/>
-          <p:cNvSpPr txBox="1"/>
-          <p:nvPr/>
-        </p:nvSpPr>
-        <p:spPr>
-          <a:xfrm>
-            <a:off x="6373368" y="4809744"/>
-            <a:ext cx="5193792" cy="256032"/>
-          </a:xfrm>
-          <a:prstGeom prst="rect">
-            <a:avLst/>
-          </a:prstGeom>
-          <a:noFill/>
-        </p:spPr>
-        <p:txBody>
-          <a:bodyPr wrap="square">
-            <a:spAutoFit/>
-          </a:bodyPr>
-          <a:lstStyle/>
-          <a:p>
-            <a:r>
-              <a:rPr sz="950">
+          <p:cNvPr id="56" name="TextBox 55"/>
+          <p:cNvSpPr txBox="1"/>
+          <p:nvPr/>
+        </p:nvSpPr>
+        <p:spPr>
+          <a:xfrm>
+            <a:off x="6364224" y="4828032"/>
+            <a:ext cx="5138928" cy="256032"/>
+          </a:xfrm>
+          <a:prstGeom prst="rect">
+            <a:avLst/>
+          </a:prstGeom>
+          <a:noFill/>
+        </p:spPr>
+        <p:txBody>
+          <a:bodyPr wrap="square">
+            <a:spAutoFit/>
+          </a:bodyPr>
+          <a:lstStyle/>
+          <a:p>
+            <a:pPr algn="l"/>
+            <a:r>
+              <a:rPr sz="950" b="0" i="0">
                 <a:solidFill>
                   <a:srgbClr val="1E293B"/>
                 </a:solidFill>
               </a:rPr>
-              <a:t>CloudFront + Lambda arm64 = low-latency, globally available</a:t>
+              <a:t>CloudFront + Lambda arm64 — low-latency, globally available</a:t>
             </a:r>
           </a:p>
         </p:txBody>
@@ -6014,7 +6153,7 @@
         <p:spPr>
           <a:xfrm>
             <a:off x="0" y="0"/>
-            <a:ext cx="12188952" cy="6858000"/>
+            <a:ext cx="12192000" cy="6858000"/>
           </a:xfrm>
           <a:prstGeom prst="rect">
             <a:avLst/>
@@ -6056,8 +6195,8 @@
         </p:nvSpPr>
         <p:spPr>
           <a:xfrm>
-            <a:off x="0" y="6748272"/>
-            <a:ext cx="12188952" cy="109728"/>
+            <a:off x="0" y="6766560"/>
+            <a:ext cx="12192000" cy="91440"/>
           </a:xfrm>
           <a:prstGeom prst="rect">
             <a:avLst/>
@@ -6099,8 +6238,8 @@
         </p:nvSpPr>
         <p:spPr>
           <a:xfrm>
-            <a:off x="502920" y="256032"/>
-            <a:ext cx="3657600" cy="274320"/>
+            <a:off x="502920" y="201168"/>
+            <a:ext cx="5486400" cy="256032"/>
           </a:xfrm>
           <a:prstGeom prst="rect">
             <a:avLst/>
@@ -6133,7 +6272,7 @@
         </p:nvSpPr>
         <p:spPr>
           <a:xfrm>
-            <a:off x="502920" y="402336"/>
+            <a:off x="502920" y="384048"/>
             <a:ext cx="9144000" cy="475488"/>
           </a:xfrm>
           <a:prstGeom prst="rect">
@@ -6167,8 +6306,8 @@
         </p:nvSpPr>
         <p:spPr>
           <a:xfrm>
-            <a:off x="411480" y="1005840"/>
-            <a:ext cx="3703320" cy="5029200"/>
+            <a:off x="384048" y="960120"/>
+            <a:ext cx="3703320" cy="5193792"/>
           </a:xfrm>
           <a:prstGeom prst="rect">
             <a:avLst/>
@@ -6176,7 +6315,7 @@
           <a:solidFill>
             <a:srgbClr val="1A2635"/>
           </a:solidFill>
-          <a:ln w="25400">
+          <a:ln w="19050">
             <a:solidFill>
               <a:srgbClr val="FF9900"/>
             </a:solidFill>
@@ -6212,7 +6351,7 @@
         </p:nvSpPr>
         <p:spPr>
           <a:xfrm>
-            <a:off x="411480" y="1005840"/>
+            <a:off x="384048" y="960120"/>
             <a:ext cx="3703320" cy="402336"/>
           </a:xfrm>
           <a:prstGeom prst="rect">
@@ -6255,7 +6394,7 @@
         </p:nvSpPr>
         <p:spPr>
           <a:xfrm>
-            <a:off x="411480" y="1060704"/>
+            <a:off x="384048" y="1014984"/>
             <a:ext cx="3703320" cy="310896"/>
           </a:xfrm>
           <a:prstGeom prst="rect">
@@ -6289,8 +6428,8 @@
         </p:nvSpPr>
         <p:spPr>
           <a:xfrm>
-            <a:off x="612648" y="1554480"/>
-            <a:ext cx="3310128" cy="1280160"/>
+            <a:off x="585216" y="1490472"/>
+            <a:ext cx="3310128" cy="1335024"/>
           </a:xfrm>
           <a:prstGeom prst="rect">
             <a:avLst/>
@@ -6332,8 +6471,8 @@
         </p:nvSpPr>
         <p:spPr>
           <a:xfrm>
-            <a:off x="704088" y="1687830"/>
-            <a:ext cx="109728" cy="109728"/>
+            <a:off x="694944" y="1781251"/>
+            <a:ext cx="91440" cy="91440"/>
           </a:xfrm>
           <a:prstGeom prst="rect">
             <a:avLst/>
@@ -6375,7 +6514,7 @@
         </p:nvSpPr>
         <p:spPr>
           <a:xfrm>
-            <a:off x="905256" y="1645920"/>
+            <a:off x="859536" y="1600200"/>
             <a:ext cx="2926080" cy="1097280"/>
           </a:xfrm>
           <a:prstGeom prst="rect">
@@ -6389,13 +6528,14 @@
           </a:bodyPr>
           <a:lstStyle/>
           <a:p>
-            <a:r>
-              <a:rPr sz="1100">
+            <a:pPr algn="l"/>
+            <a:r>
+              <a:rPr sz="1100" b="0" i="0">
                 <a:solidFill>
                   <a:srgbClr val="CBD5E1"/>
                 </a:solidFill>
               </a:rPr>
-              <a:t>SNS / Slack notifications — ping #aws-updates when new features match watchlist</a:t>
+              <a:t>SNS / Slack alerts — ping #aws-updates when new features match your watchlist</a:t>
             </a:r>
           </a:p>
         </p:txBody>
@@ -6408,8 +6548,8 @@
         </p:nvSpPr>
         <p:spPr>
           <a:xfrm>
-            <a:off x="612648" y="2944368"/>
-            <a:ext cx="3310128" cy="1280160"/>
+            <a:off x="585216" y="2971800"/>
+            <a:ext cx="3310128" cy="1335024"/>
           </a:xfrm>
           <a:prstGeom prst="rect">
             <a:avLst/>
@@ -6451,8 +6591,8 @@
         </p:nvSpPr>
         <p:spPr>
           <a:xfrm>
-            <a:off x="704088" y="3077718"/>
-            <a:ext cx="109728" cy="109728"/>
+            <a:off x="694944" y="3262579"/>
+            <a:ext cx="91440" cy="91440"/>
           </a:xfrm>
           <a:prstGeom prst="rect">
             <a:avLst/>
@@ -6494,7 +6634,7 @@
         </p:nvSpPr>
         <p:spPr>
           <a:xfrm>
-            <a:off x="905256" y="3035808"/>
+            <a:off x="859536" y="3081528"/>
             <a:ext cx="2926080" cy="1097280"/>
           </a:xfrm>
           <a:prstGeom prst="rect">
@@ -6508,13 +6648,14 @@
           </a:bodyPr>
           <a:lstStyle/>
           <a:p>
-            <a:r>
-              <a:rPr sz="1100">
+            <a:pPr algn="l"/>
+            <a:r>
+              <a:rPr sz="1100" b="0" i="0">
                 <a:solidFill>
                   <a:srgbClr val="CBD5E1"/>
                 </a:solidFill>
               </a:rPr>
-              <a:t>Service watchlist per admin — personalized feed based on your AWS footprint</a:t>
+              <a:t>Per-admin service watchlist — personalized feed based on your AWS footprint</a:t>
             </a:r>
           </a:p>
         </p:txBody>
@@ -6527,8 +6668,8 @@
         </p:nvSpPr>
         <p:spPr>
           <a:xfrm>
-            <a:off x="612648" y="4334256"/>
-            <a:ext cx="3310128" cy="1280160"/>
+            <a:off x="585216" y="4453128"/>
+            <a:ext cx="3310128" cy="1335024"/>
           </a:xfrm>
           <a:prstGeom prst="rect">
             <a:avLst/>
@@ -6570,8 +6711,8 @@
         </p:nvSpPr>
         <p:spPr>
           <a:xfrm>
-            <a:off x="704088" y="4467606"/>
-            <a:ext cx="109728" cy="109728"/>
+            <a:off x="694944" y="4743907"/>
+            <a:ext cx="91440" cy="91440"/>
           </a:xfrm>
           <a:prstGeom prst="rect">
             <a:avLst/>
@@ -6613,7 +6754,7 @@
         </p:nvSpPr>
         <p:spPr>
           <a:xfrm>
-            <a:off x="905256" y="4425696"/>
+            <a:off x="859536" y="4562856"/>
             <a:ext cx="2926080" cy="1097280"/>
           </a:xfrm>
           <a:prstGeom prst="rect">
@@ -6627,8 +6768,9 @@
           </a:bodyPr>
           <a:lstStyle/>
           <a:p>
-            <a:r>
-              <a:rPr sz="1100">
+            <a:pPr algn="l"/>
+            <a:r>
+              <a:rPr sz="1100" b="0" i="0">
                 <a:solidFill>
                   <a:srgbClr val="CBD5E1"/>
                 </a:solidFill>
@@ -6646,8 +6788,8 @@
         </p:nvSpPr>
         <p:spPr>
           <a:xfrm>
-            <a:off x="4325112" y="1005840"/>
-            <a:ext cx="3703320" cy="5029200"/>
+            <a:off x="4297680" y="960120"/>
+            <a:ext cx="3703320" cy="5193792"/>
           </a:xfrm>
           <a:prstGeom prst="rect">
             <a:avLst/>
@@ -6655,7 +6797,7 @@
           <a:solidFill>
             <a:srgbClr val="1A2635"/>
           </a:solidFill>
-          <a:ln w="25400">
+          <a:ln w="19050">
             <a:solidFill>
               <a:srgbClr val="146EB4"/>
             </a:solidFill>
@@ -6691,7 +6833,7 @@
         </p:nvSpPr>
         <p:spPr>
           <a:xfrm>
-            <a:off x="4325112" y="1005840"/>
+            <a:off x="4297680" y="960120"/>
             <a:ext cx="3703320" cy="402336"/>
           </a:xfrm>
           <a:prstGeom prst="rect">
@@ -6734,7 +6876,7 @@
         </p:nvSpPr>
         <p:spPr>
           <a:xfrm>
-            <a:off x="4325112" y="1060704"/>
+            <a:off x="4297680" y="1014984"/>
             <a:ext cx="3703320" cy="310896"/>
           </a:xfrm>
           <a:prstGeom prst="rect">
@@ -6768,8 +6910,8 @@
         </p:nvSpPr>
         <p:spPr>
           <a:xfrm>
-            <a:off x="4526280" y="1554480"/>
-            <a:ext cx="3310128" cy="1280160"/>
+            <a:off x="4498848" y="1490472"/>
+            <a:ext cx="3310128" cy="1335024"/>
           </a:xfrm>
           <a:prstGeom prst="rect">
             <a:avLst/>
@@ -6811,8 +6953,8 @@
         </p:nvSpPr>
         <p:spPr>
           <a:xfrm>
-            <a:off x="4617720" y="1687830"/>
-            <a:ext cx="109728" cy="109728"/>
+            <a:off x="4608576" y="1781251"/>
+            <a:ext cx="91440" cy="91440"/>
           </a:xfrm>
           <a:prstGeom prst="rect">
             <a:avLst/>
@@ -6854,7 +6996,7 @@
         </p:nvSpPr>
         <p:spPr>
           <a:xfrm>
-            <a:off x="4818888" y="1645920"/>
+            <a:off x="4773168" y="1600200"/>
             <a:ext cx="2926080" cy="1097280"/>
           </a:xfrm>
           <a:prstGeom prst="rect">
@@ -6868,8 +7010,9 @@
           </a:bodyPr>
           <a:lstStyle/>
           <a:p>
-            <a:r>
-              <a:rPr sz="1100">
+            <a:pPr algn="l"/>
+            <a:r>
+              <a:rPr sz="1100" b="0" i="0">
                 <a:solidFill>
                   <a:srgbClr val="CBD5E1"/>
                 </a:solidFill>
@@ -6887,8 +7030,8 @@
         </p:nvSpPr>
         <p:spPr>
           <a:xfrm>
-            <a:off x="4526280" y="2944368"/>
-            <a:ext cx="3310128" cy="1280160"/>
+            <a:off x="4498848" y="2971800"/>
+            <a:ext cx="3310128" cy="1335024"/>
           </a:xfrm>
           <a:prstGeom prst="rect">
             <a:avLst/>
@@ -6930,8 +7073,8 @@
         </p:nvSpPr>
         <p:spPr>
           <a:xfrm>
-            <a:off x="4617720" y="3077718"/>
-            <a:ext cx="109728" cy="109728"/>
+            <a:off x="4608576" y="3262579"/>
+            <a:ext cx="91440" cy="91440"/>
           </a:xfrm>
           <a:prstGeom prst="rect">
             <a:avLst/>
@@ -6973,7 +7116,7 @@
         </p:nvSpPr>
         <p:spPr>
           <a:xfrm>
-            <a:off x="4818888" y="3035808"/>
+            <a:off x="4773168" y="3081528"/>
             <a:ext cx="2926080" cy="1097280"/>
           </a:xfrm>
           <a:prstGeom prst="rect">
@@ -6987,8 +7130,9 @@
           </a:bodyPr>
           <a:lstStyle/>
           <a:p>
-            <a:r>
-              <a:rPr sz="1100">
+            <a:pPr algn="l"/>
+            <a:r>
+              <a:rPr sz="1100" b="0" i="0">
                 <a:solidFill>
                   <a:srgbClr val="CBD5E1"/>
                 </a:solidFill>
@@ -7006,8 +7150,8 @@
         </p:nvSpPr>
         <p:spPr>
           <a:xfrm>
-            <a:off x="4526280" y="4334256"/>
-            <a:ext cx="3310128" cy="1280160"/>
+            <a:off x="4498848" y="4453128"/>
+            <a:ext cx="3310128" cy="1335024"/>
           </a:xfrm>
           <a:prstGeom prst="rect">
             <a:avLst/>
@@ -7049,8 +7193,8 @@
         </p:nvSpPr>
         <p:spPr>
           <a:xfrm>
-            <a:off x="4617720" y="4467606"/>
-            <a:ext cx="109728" cy="109728"/>
+            <a:off x="4608576" y="4743907"/>
+            <a:ext cx="91440" cy="91440"/>
           </a:xfrm>
           <a:prstGeom prst="rect">
             <a:avLst/>
@@ -7092,7 +7236,7 @@
         </p:nvSpPr>
         <p:spPr>
           <a:xfrm>
-            <a:off x="4818888" y="4425696"/>
+            <a:off x="4773168" y="4562856"/>
             <a:ext cx="2926080" cy="1097280"/>
           </a:xfrm>
           <a:prstGeom prst="rect">
@@ -7106,13 +7250,14 @@
           </a:bodyPr>
           <a:lstStyle/>
           <a:p>
-            <a:r>
-              <a:rPr sz="1100">
+            <a:pPr algn="l"/>
+            <a:r>
+              <a:rPr sz="1100" b="0" i="0">
                 <a:solidFill>
                   <a:srgbClr val="CBD5E1"/>
                 </a:solidFill>
               </a:rPr>
-              <a:t>Internal comments &amp; status tracking (evaluating / piloting / adopted / declined)</a:t>
+              <a:t>Comments &amp; status: evaluating / piloting / adopted / declined per team</a:t>
             </a:r>
           </a:p>
         </p:txBody>
@@ -7125,8 +7270,8 @@
         </p:nvSpPr>
         <p:spPr>
           <a:xfrm>
-            <a:off x="8238744" y="1005840"/>
-            <a:ext cx="3703320" cy="5029200"/>
+            <a:off x="8211312" y="960120"/>
+            <a:ext cx="3703320" cy="5193792"/>
           </a:xfrm>
           <a:prstGeom prst="rect">
             <a:avLst/>
@@ -7134,7 +7279,7 @@
           <a:solidFill>
             <a:srgbClr val="1A2635"/>
           </a:solidFill>
-          <a:ln w="25400">
+          <a:ln w="19050">
             <a:solidFill>
               <a:srgbClr val="16A34A"/>
             </a:solidFill>
@@ -7170,7 +7315,7 @@
         </p:nvSpPr>
         <p:spPr>
           <a:xfrm>
-            <a:off x="8238744" y="1005840"/>
+            <a:off x="8211312" y="960120"/>
             <a:ext cx="3703320" cy="402336"/>
           </a:xfrm>
           <a:prstGeom prst="rect">
@@ -7213,7 +7358,7 @@
         </p:nvSpPr>
         <p:spPr>
           <a:xfrm>
-            <a:off x="8238744" y="1060704"/>
+            <a:off x="8211312" y="1014984"/>
             <a:ext cx="3703320" cy="310896"/>
           </a:xfrm>
           <a:prstGeom prst="rect">
@@ -7247,8 +7392,8 @@
         </p:nvSpPr>
         <p:spPr>
           <a:xfrm>
-            <a:off x="8439912" y="1554480"/>
-            <a:ext cx="3310128" cy="1280160"/>
+            <a:off x="8412480" y="1490472"/>
+            <a:ext cx="3310128" cy="1335024"/>
           </a:xfrm>
           <a:prstGeom prst="rect">
             <a:avLst/>
@@ -7290,8 +7435,8 @@
         </p:nvSpPr>
         <p:spPr>
           <a:xfrm>
-            <a:off x="8531352" y="1687830"/>
-            <a:ext cx="109728" cy="109728"/>
+            <a:off x="8522208" y="1781251"/>
+            <a:ext cx="91440" cy="91440"/>
           </a:xfrm>
           <a:prstGeom prst="rect">
             <a:avLst/>
@@ -7333,7 +7478,7 @@
         </p:nvSpPr>
         <p:spPr>
           <a:xfrm>
-            <a:off x="8732520" y="1645920"/>
+            <a:off x="8686800" y="1600200"/>
             <a:ext cx="2926080" cy="1097280"/>
           </a:xfrm>
           <a:prstGeom prst="rect">
@@ -7347,13 +7492,14 @@
           </a:bodyPr>
           <a:lstStyle/>
           <a:p>
-            <a:r>
-              <a:rPr sz="1100">
+            <a:pPr algn="l"/>
+            <a:r>
+              <a:rPr sz="1100" b="0" i="0">
                 <a:solidFill>
                   <a:srgbClr val="CBD5E1"/>
                 </a:solidFill>
               </a:rPr>
-              <a:t>Cost savings calculator — estimate savings from price-change announcements</a:t>
+              <a:t>Cost savings calculator — quantify savings from price-change announcements</a:t>
             </a:r>
           </a:p>
         </p:txBody>
@@ -7366,8 +7512,8 @@
         </p:nvSpPr>
         <p:spPr>
           <a:xfrm>
-            <a:off x="8439912" y="2944368"/>
-            <a:ext cx="3310128" cy="1280160"/>
+            <a:off x="8412480" y="2971800"/>
+            <a:ext cx="3310128" cy="1335024"/>
           </a:xfrm>
           <a:prstGeom prst="rect">
             <a:avLst/>
@@ -7409,8 +7555,8 @@
         </p:nvSpPr>
         <p:spPr>
           <a:xfrm>
-            <a:off x="8531352" y="3077718"/>
-            <a:ext cx="109728" cy="109728"/>
+            <a:off x="8522208" y="3262579"/>
+            <a:ext cx="91440" cy="91440"/>
           </a:xfrm>
           <a:prstGeom prst="rect">
             <a:avLst/>
@@ -7452,7 +7598,7 @@
         </p:nvSpPr>
         <p:spPr>
           <a:xfrm>
-            <a:off x="8732520" y="3035808"/>
+            <a:off x="8686800" y="3081528"/>
             <a:ext cx="2926080" cy="1097280"/>
           </a:xfrm>
           <a:prstGeom prst="rect">
@@ -7466,13 +7612,14 @@
           </a:bodyPr>
           <a:lstStyle/>
           <a:p>
-            <a:r>
-              <a:rPr sz="1100">
+            <a:pPr algn="l"/>
+            <a:r>
+              <a:rPr sz="1100" b="0" i="0">
                 <a:solidFill>
                   <a:srgbClr val="CBD5E1"/>
                 </a:solidFill>
               </a:rPr>
-              <a:t>Deprecation calendar — automatic JIRA tickets for EOL features</a:t>
+              <a:t>Deprecation calendar — auto JIRA tickets for EOL services</a:t>
             </a:r>
           </a:p>
         </p:txBody>
@@ -7485,8 +7632,8 @@
         </p:nvSpPr>
         <p:spPr>
           <a:xfrm>
-            <a:off x="8439912" y="4334256"/>
-            <a:ext cx="3310128" cy="1280160"/>
+            <a:off x="8412480" y="4453128"/>
+            <a:ext cx="3310128" cy="1335024"/>
           </a:xfrm>
           <a:prstGeom prst="rect">
             <a:avLst/>
@@ -7528,8 +7675,8 @@
         </p:nvSpPr>
         <p:spPr>
           <a:xfrm>
-            <a:off x="8531352" y="4467606"/>
-            <a:ext cx="109728" cy="109728"/>
+            <a:off x="8522208" y="4743907"/>
+            <a:ext cx="91440" cy="91440"/>
           </a:xfrm>
           <a:prstGeom prst="rect">
             <a:avLst/>
@@ -7571,7 +7718,7 @@
         </p:nvSpPr>
         <p:spPr>
           <a:xfrm>
-            <a:off x="8732520" y="4425696"/>
+            <a:off x="8686800" y="4562856"/>
             <a:ext cx="2926080" cy="1097280"/>
           </a:xfrm>
           <a:prstGeom prst="rect">
@@ -7585,13 +7732,14 @@
           </a:bodyPr>
           <a:lstStyle/>
           <a:p>
-            <a:r>
-              <a:rPr sz="1100">
+            <a:pPr algn="l"/>
+            <a:r>
+              <a:rPr sz="1100" b="0" i="0">
                 <a:solidFill>
                   <a:srgbClr val="CBD5E1"/>
                 </a:solidFill>
               </a:rPr>
-              <a:t>Executive dashboard — monthly report of adopted innovations and estimated savings</a:t>
+              <a:t>Executive dashboard — monthly report of adopted innovations &amp; saved $</a:t>
             </a:r>
           </a:p>
         </p:txBody>
@@ -7623,7 +7771,7 @@
         <p:spPr>
           <a:xfrm>
             <a:off x="0" y="0"/>
-            <a:ext cx="12188952" cy="6858000"/>
+            <a:ext cx="12192000" cy="6858000"/>
           </a:xfrm>
           <a:prstGeom prst="rect">
             <a:avLst/>
@@ -7708,8 +7856,8 @@
         </p:nvSpPr>
         <p:spPr>
           <a:xfrm>
-            <a:off x="1523619" y="0"/>
-            <a:ext cx="6350" cy="6858000"/>
+            <a:off x="1523961" y="0"/>
+            <a:ext cx="18288" cy="6858000"/>
           </a:xfrm>
           <a:prstGeom prst="rect">
             <a:avLst/>
@@ -7751,8 +7899,8 @@
         </p:nvSpPr>
         <p:spPr>
           <a:xfrm>
-            <a:off x="3047238" y="0"/>
-            <a:ext cx="6350" cy="6858000"/>
+            <a:off x="3047923" y="0"/>
+            <a:ext cx="18288" cy="6858000"/>
           </a:xfrm>
           <a:prstGeom prst="rect">
             <a:avLst/>
@@ -7794,8 +7942,8 @@
         </p:nvSpPr>
         <p:spPr>
           <a:xfrm>
-            <a:off x="4570857" y="0"/>
-            <a:ext cx="6350" cy="6858000"/>
+            <a:off x="4571885" y="0"/>
+            <a:ext cx="18288" cy="6858000"/>
           </a:xfrm>
           <a:prstGeom prst="rect">
             <a:avLst/>
@@ -7837,8 +7985,8 @@
         </p:nvSpPr>
         <p:spPr>
           <a:xfrm>
-            <a:off x="6094476" y="0"/>
-            <a:ext cx="6350" cy="6858000"/>
+            <a:off x="6095847" y="0"/>
+            <a:ext cx="18288" cy="6858000"/>
           </a:xfrm>
           <a:prstGeom prst="rect">
             <a:avLst/>
@@ -7880,8 +8028,8 @@
         </p:nvSpPr>
         <p:spPr>
           <a:xfrm>
-            <a:off x="7618095" y="0"/>
-            <a:ext cx="6350" cy="6858000"/>
+            <a:off x="7619809" y="0"/>
+            <a:ext cx="18288" cy="6858000"/>
           </a:xfrm>
           <a:prstGeom prst="rect">
             <a:avLst/>
@@ -7923,8 +8071,8 @@
         </p:nvSpPr>
         <p:spPr>
           <a:xfrm>
-            <a:off x="9141714" y="0"/>
-            <a:ext cx="6350" cy="6858000"/>
+            <a:off x="9143771" y="0"/>
+            <a:ext cx="18288" cy="6858000"/>
           </a:xfrm>
           <a:prstGeom prst="rect">
             <a:avLst/>
@@ -7966,8 +8114,8 @@
         </p:nvSpPr>
         <p:spPr>
           <a:xfrm>
-            <a:off x="10665333" y="0"/>
-            <a:ext cx="6350" cy="6858000"/>
+            <a:off x="10667733" y="0"/>
+            <a:ext cx="18288" cy="6858000"/>
           </a:xfrm>
           <a:prstGeom prst="rect">
             <a:avLst/>
@@ -8009,8 +8157,8 @@
         </p:nvSpPr>
         <p:spPr>
           <a:xfrm>
-            <a:off x="12188952" y="0"/>
-            <a:ext cx="6350" cy="6858000"/>
+            <a:off x="12191695" y="0"/>
+            <a:ext cx="18288" cy="6858000"/>
           </a:xfrm>
           <a:prstGeom prst="rect">
             <a:avLst/>
@@ -8052,7 +8200,7 @@
         </p:nvSpPr>
         <p:spPr>
           <a:xfrm>
-            <a:off x="594360" y="1005840"/>
+            <a:off x="594360" y="960120"/>
             <a:ext cx="10515600" cy="365760"/>
           </a:xfrm>
           <a:prstGeom prst="rect">
@@ -8068,7 +8216,7 @@
           <a:p>
             <a:pPr algn="l"/>
             <a:r>
-              <a:rPr sz="2400" b="0" i="1">
+              <a:rPr sz="2300" b="0" i="1">
                 <a:solidFill>
                   <a:srgbClr val="94A3B8"/>
                 </a:solidFill>
@@ -8086,7 +8234,7 @@
         </p:nvSpPr>
         <p:spPr>
           <a:xfrm>
-            <a:off x="594360" y="1508760"/>
+            <a:off x="594360" y="1463040"/>
             <a:ext cx="10515600" cy="914400"/>
           </a:xfrm>
           <a:prstGeom prst="rect">
@@ -8102,7 +8250,7 @@
           <a:p>
             <a:pPr algn="l"/>
             <a:r>
-              <a:rPr sz="5200" b="1" i="0">
+              <a:rPr sz="5000" b="1" i="0">
                 <a:solidFill>
                   <a:srgbClr val="FFFFFF"/>
                 </a:solidFill>
@@ -8120,7 +8268,7 @@
         </p:nvSpPr>
         <p:spPr>
           <a:xfrm>
-            <a:off x="594360" y="2578608"/>
+            <a:off x="594360" y="2514600"/>
             <a:ext cx="10058400" cy="384048"/>
           </a:xfrm>
           <a:prstGeom prst="rect">
@@ -8154,8 +8302,8 @@
         </p:nvSpPr>
         <p:spPr>
           <a:xfrm>
-            <a:off x="594360" y="3383280"/>
-            <a:ext cx="3566160" cy="2194560"/>
+            <a:off x="594360" y="3401568"/>
+            <a:ext cx="3566160" cy="2267712"/>
           </a:xfrm>
           <a:prstGeom prst="rect">
             <a:avLst/>
@@ -8197,8 +8345,8 @@
         </p:nvSpPr>
         <p:spPr>
           <a:xfrm>
-            <a:off x="594360" y="3383280"/>
-            <a:ext cx="3566160" cy="73152"/>
+            <a:off x="594360" y="3401568"/>
+            <a:ext cx="3566160" cy="64008"/>
           </a:xfrm>
           <a:prstGeom prst="rect">
             <a:avLst/>
@@ -8240,7 +8388,7 @@
         </p:nvSpPr>
         <p:spPr>
           <a:xfrm>
-            <a:off x="758952" y="3547872"/>
+            <a:off x="758952" y="3566160"/>
             <a:ext cx="3291840" cy="292608"/>
           </a:xfrm>
           <a:prstGeom prst="rect">
@@ -8274,8 +8422,8 @@
         </p:nvSpPr>
         <p:spPr>
           <a:xfrm>
-            <a:off x="758952" y="3913632"/>
-            <a:ext cx="3291840" cy="1508760"/>
+            <a:off x="758952" y="3931920"/>
+            <a:ext cx="3291840" cy="1554480"/>
           </a:xfrm>
           <a:prstGeom prst="rect">
             <a:avLst/>
@@ -8295,7 +8443,7 @@
                   <a:srgbClr val="CBD5E1"/>
                 </a:solidFill>
               </a:rPr>
-              <a:t>Open the app, search for any service you manage, and find features you may have missed.</a:t>
+              <a:t>Open the app, search for any service you manage, and find features you may have missed this quarter.</a:t>
             </a:r>
           </a:p>
         </p:txBody>
@@ -8308,8 +8456,8 @@
         </p:nvSpPr>
         <p:spPr>
           <a:xfrm>
-            <a:off x="4389120" y="3383280"/>
-            <a:ext cx="3566160" cy="2194560"/>
+            <a:off x="4416552" y="3401568"/>
+            <a:ext cx="3566160" cy="2267712"/>
           </a:xfrm>
           <a:prstGeom prst="rect">
             <a:avLst/>
@@ -8351,8 +8499,8 @@
         </p:nvSpPr>
         <p:spPr>
           <a:xfrm>
-            <a:off x="4389120" y="3383280"/>
-            <a:ext cx="3566160" cy="73152"/>
+            <a:off x="4416552" y="3401568"/>
+            <a:ext cx="3566160" cy="64008"/>
           </a:xfrm>
           <a:prstGeom prst="rect">
             <a:avLst/>
@@ -8394,7 +8542,7 @@
         </p:nvSpPr>
         <p:spPr>
           <a:xfrm>
-            <a:off x="4553712" y="3547872"/>
+            <a:off x="4581144" y="3566160"/>
             <a:ext cx="3291840" cy="292608"/>
           </a:xfrm>
           <a:prstGeom prst="rect">
@@ -8428,8 +8576,8 @@
         </p:nvSpPr>
         <p:spPr>
           <a:xfrm>
-            <a:off x="4553712" y="3913632"/>
-            <a:ext cx="3291840" cy="1508760"/>
+            <a:off x="4581144" y="3931920"/>
+            <a:ext cx="3291840" cy="1554480"/>
           </a:xfrm>
           <a:prstGeom prst="rect">
             <a:avLst/>
@@ -8449,7 +8597,7 @@
                   <a:srgbClr val="CBD5E1"/>
                 </a:solidFill>
               </a:rPr>
-              <a:t>Tell us the top 10 AWS services your team owns — we'll prioritize those in the next sprint.</a:t>
+              <a:t>Tell us the top 10 AWS services your team owns — we'll prioritize those filters in the next sprint.</a:t>
             </a:r>
           </a:p>
         </p:txBody>
@@ -8462,8 +8610,8 @@
         </p:nvSpPr>
         <p:spPr>
           <a:xfrm>
-            <a:off x="8183880" y="3383280"/>
-            <a:ext cx="3566160" cy="2194560"/>
+            <a:off x="8238744" y="3401568"/>
+            <a:ext cx="3566160" cy="2267712"/>
           </a:xfrm>
           <a:prstGeom prst="rect">
             <a:avLst/>
@@ -8505,8 +8653,8 @@
         </p:nvSpPr>
         <p:spPr>
           <a:xfrm>
-            <a:off x="8183880" y="3383280"/>
-            <a:ext cx="3566160" cy="73152"/>
+            <a:off x="8238744" y="3401568"/>
+            <a:ext cx="3566160" cy="64008"/>
           </a:xfrm>
           <a:prstGeom prst="rect">
             <a:avLst/>
@@ -8548,7 +8696,7 @@
         </p:nvSpPr>
         <p:spPr>
           <a:xfrm>
-            <a:off x="8348472" y="3547872"/>
+            <a:off x="8403336" y="3566160"/>
             <a:ext cx="3291840" cy="292608"/>
           </a:xfrm>
           <a:prstGeom prst="rect">
@@ -8582,8 +8730,8 @@
         </p:nvSpPr>
         <p:spPr>
           <a:xfrm>
-            <a:off x="8348472" y="3913632"/>
-            <a:ext cx="3291840" cy="1508760"/>
+            <a:off x="8403336" y="3931920"/>
+            <a:ext cx="3291840" cy="1554480"/>
           </a:xfrm>
           <a:prstGeom prst="rect">
             <a:avLst/>
@@ -8603,7 +8751,7 @@
                   <a:srgbClr val="CBD5E1"/>
                 </a:solidFill>
               </a:rPr>
-              <a:t>What filters, integrations, or views would make this indispensable for your workflow?</a:t>
+              <a:t>What integrations, views, or alerts would make this tool indispensable to your daily workflow?</a:t>
             </a:r>
           </a:p>
         </p:txBody>
@@ -8616,8 +8764,8 @@
         </p:nvSpPr>
         <p:spPr>
           <a:xfrm>
-            <a:off x="0" y="6400800"/>
-            <a:ext cx="12188952" cy="457200"/>
+            <a:off x="0" y="6419088"/>
+            <a:ext cx="12192000" cy="438912"/>
           </a:xfrm>
           <a:prstGeom prst="rect">
             <a:avLst/>
@@ -8659,8 +8807,8 @@
         </p:nvSpPr>
         <p:spPr>
           <a:xfrm>
-            <a:off x="0" y="6437376"/>
-            <a:ext cx="12188952" cy="384048"/>
+            <a:off x="0" y="6455664"/>
+            <a:ext cx="12192000" cy="365760"/>
           </a:xfrm>
           <a:prstGeom prst="rect">
             <a:avLst/>
@@ -8680,7 +8828,7 @@
                   <a:srgbClr val="94A3B8"/>
                 </a:solidFill>
               </a:rPr>
-              <a:t>AWS Features Tracker  ·  Built on AWS SAM · Lambda · Bedrock · DynamoDB · CloudFront  ·  ~$0.31/month  ·  April 2026</a:t>
+              <a:t>AWS Features Tracker  ·  Lambda · Bedrock · DynamoDB · CloudFront  ·  ~$0.31/month  ·  April 2026</a:t>
             </a:r>
           </a:p>
         </p:txBody>
@@ -8712,7 +8860,7 @@
         <p:spPr>
           <a:xfrm>
             <a:off x="0" y="0"/>
-            <a:ext cx="12188952" cy="6858000"/>
+            <a:ext cx="12192000" cy="6858000"/>
           </a:xfrm>
           <a:prstGeom prst="rect">
             <a:avLst/>
@@ -8755,7 +8903,7 @@
         <p:spPr>
           <a:xfrm>
             <a:off x="0" y="0"/>
-            <a:ext cx="12188952" cy="1005840"/>
+            <a:ext cx="12192000" cy="960120"/>
           </a:xfrm>
           <a:prstGeom prst="rect">
             <a:avLst/>
@@ -8797,8 +8945,8 @@
         </p:nvSpPr>
         <p:spPr>
           <a:xfrm>
-            <a:off x="0" y="6748272"/>
-            <a:ext cx="12188952" cy="109728"/>
+            <a:off x="0" y="6766560"/>
+            <a:ext cx="12192000" cy="91440"/>
           </a:xfrm>
           <a:prstGeom prst="rect">
             <a:avLst/>
@@ -8840,8 +8988,8 @@
         </p:nvSpPr>
         <p:spPr>
           <a:xfrm>
-            <a:off x="502920" y="201168"/>
-            <a:ext cx="9144000" cy="512064"/>
+            <a:off x="502920" y="164592"/>
+            <a:ext cx="9601200" cy="512064"/>
           </a:xfrm>
           <a:prstGeom prst="rect">
             <a:avLst/>
@@ -8874,8 +9022,8 @@
         </p:nvSpPr>
         <p:spPr>
           <a:xfrm>
-            <a:off x="502920" y="685800"/>
-            <a:ext cx="9144000" cy="256032"/>
+            <a:off x="502920" y="676656"/>
+            <a:ext cx="9601200" cy="256032"/>
           </a:xfrm>
           <a:prstGeom prst="rect">
             <a:avLst/>
@@ -8908,8 +9056,51 @@
         </p:nvSpPr>
         <p:spPr>
           <a:xfrm>
-            <a:off x="502920" y="1143000"/>
-            <a:ext cx="2651760" cy="1371600"/>
+            <a:off x="530352" y="1106424"/>
+            <a:ext cx="2651760" cy="1389888"/>
+          </a:xfrm>
+          <a:prstGeom prst="rect">
+            <a:avLst/>
+          </a:prstGeom>
+          <a:solidFill>
+            <a:srgbClr val="CBD5E1"/>
+          </a:solidFill>
+          <a:ln>
+            <a:noFill/>
+          </a:ln>
+        </p:spPr>
+        <p:style>
+          <a:lnRef idx="1">
+            <a:schemeClr val="accent1"/>
+          </a:lnRef>
+          <a:fillRef idx="3">
+            <a:schemeClr val="accent1"/>
+          </a:fillRef>
+          <a:effectRef idx="2">
+            <a:schemeClr val="accent1"/>
+          </a:effectRef>
+          <a:fontRef idx="minor">
+            <a:schemeClr val="lt1"/>
+          </a:fontRef>
+        </p:style>
+        <p:txBody>
+          <a:bodyPr rtlCol="0" anchor="ctr"/>
+          <a:lstStyle/>
+          <a:p>
+            <a:pPr algn="ctr"/>
+          </a:p>
+        </p:txBody>
+      </p:sp>
+      <p:sp>
+        <p:nvSpPr>
+          <p:cNvPr id="8" name="Rectangle 7"/>
+          <p:cNvSpPr/>
+          <p:nvPr/>
+        </p:nvSpPr>
+        <p:spPr>
+          <a:xfrm>
+            <a:off x="502920" y="1078992"/>
+            <a:ext cx="2651760" cy="1389888"/>
           </a:xfrm>
           <a:prstGeom prst="rect">
             <a:avLst/>
@@ -8917,7 +9108,7 @@
           <a:solidFill>
             <a:srgbClr val="FFFFFF"/>
           </a:solidFill>
-          <a:ln w="12700">
+          <a:ln w="9525">
             <a:solidFill>
               <a:srgbClr val="E2E8F0"/>
             </a:solidFill>
@@ -8947,13 +9138,13 @@
       </p:sp>
       <p:sp>
         <p:nvSpPr>
-          <p:cNvPr id="8" name="TextBox 7"/>
-          <p:cNvSpPr txBox="1"/>
-          <p:nvPr/>
-        </p:nvSpPr>
-        <p:spPr>
-          <a:xfrm>
-            <a:off x="502920" y="1234440"/>
+          <p:cNvPr id="9" name="TextBox 8"/>
+          <p:cNvSpPr txBox="1"/>
+          <p:nvPr/>
+        </p:nvSpPr>
+        <p:spPr>
+          <a:xfrm>
+            <a:off x="502920" y="1170432"/>
             <a:ext cx="2651760" cy="658368"/>
           </a:xfrm>
           <a:prstGeom prst="rect">
@@ -8981,13 +9172,13 @@
       </p:sp>
       <p:sp>
         <p:nvSpPr>
-          <p:cNvPr id="9" name="TextBox 8"/>
-          <p:cNvSpPr txBox="1"/>
-          <p:nvPr/>
-        </p:nvSpPr>
-        <p:spPr>
-          <a:xfrm>
-            <a:off x="502920" y="1874519"/>
+          <p:cNvPr id="10" name="TextBox 9"/>
+          <p:cNvSpPr txBox="1"/>
+          <p:nvPr/>
+        </p:nvSpPr>
+        <p:spPr>
+          <a:xfrm>
+            <a:off x="502920" y="1847088"/>
             <a:ext cx="2651760" cy="530352"/>
           </a:xfrm>
           <a:prstGeom prst="rect">
@@ -9016,14 +9207,57 @@
       </p:sp>
       <p:sp>
         <p:nvSpPr>
-          <p:cNvPr id="10" name="Rectangle 9"/>
-          <p:cNvSpPr/>
-          <p:nvPr/>
-        </p:nvSpPr>
-        <p:spPr>
-          <a:xfrm>
-            <a:off x="3355848" y="1143000"/>
-            <a:ext cx="2651760" cy="1371600"/>
+          <p:cNvPr id="11" name="Rectangle 10"/>
+          <p:cNvSpPr/>
+          <p:nvPr/>
+        </p:nvSpPr>
+        <p:spPr>
+          <a:xfrm>
+            <a:off x="3383280" y="1106424"/>
+            <a:ext cx="2651760" cy="1389888"/>
+          </a:xfrm>
+          <a:prstGeom prst="rect">
+            <a:avLst/>
+          </a:prstGeom>
+          <a:solidFill>
+            <a:srgbClr val="CBD5E1"/>
+          </a:solidFill>
+          <a:ln>
+            <a:noFill/>
+          </a:ln>
+        </p:spPr>
+        <p:style>
+          <a:lnRef idx="1">
+            <a:schemeClr val="accent1"/>
+          </a:lnRef>
+          <a:fillRef idx="3">
+            <a:schemeClr val="accent1"/>
+          </a:fillRef>
+          <a:effectRef idx="2">
+            <a:schemeClr val="accent1"/>
+          </a:effectRef>
+          <a:fontRef idx="minor">
+            <a:schemeClr val="lt1"/>
+          </a:fontRef>
+        </p:style>
+        <p:txBody>
+          <a:bodyPr rtlCol="0" anchor="ctr"/>
+          <a:lstStyle/>
+          <a:p>
+            <a:pPr algn="ctr"/>
+          </a:p>
+        </p:txBody>
+      </p:sp>
+      <p:sp>
+        <p:nvSpPr>
+          <p:cNvPr id="12" name="Rectangle 11"/>
+          <p:cNvSpPr/>
+          <p:nvPr/>
+        </p:nvSpPr>
+        <p:spPr>
+          <a:xfrm>
+            <a:off x="3355848" y="1078992"/>
+            <a:ext cx="2651760" cy="1389888"/>
           </a:xfrm>
           <a:prstGeom prst="rect">
             <a:avLst/>
@@ -9031,7 +9265,7 @@
           <a:solidFill>
             <a:srgbClr val="FFFFFF"/>
           </a:solidFill>
-          <a:ln w="12700">
+          <a:ln w="9525">
             <a:solidFill>
               <a:srgbClr val="E2E8F0"/>
             </a:solidFill>
@@ -9061,13 +9295,13 @@
       </p:sp>
       <p:sp>
         <p:nvSpPr>
-          <p:cNvPr id="11" name="TextBox 10"/>
-          <p:cNvSpPr txBox="1"/>
-          <p:nvPr/>
-        </p:nvSpPr>
-        <p:spPr>
-          <a:xfrm>
-            <a:off x="3355848" y="1234440"/>
+          <p:cNvPr id="13" name="TextBox 12"/>
+          <p:cNvSpPr txBox="1"/>
+          <p:nvPr/>
+        </p:nvSpPr>
+        <p:spPr>
+          <a:xfrm>
+            <a:off x="3355848" y="1170432"/>
             <a:ext cx="2651760" cy="658368"/>
           </a:xfrm>
           <a:prstGeom prst="rect">
@@ -9095,13 +9329,13 @@
       </p:sp>
       <p:sp>
         <p:nvSpPr>
-          <p:cNvPr id="12" name="TextBox 11"/>
-          <p:cNvSpPr txBox="1"/>
-          <p:nvPr/>
-        </p:nvSpPr>
-        <p:spPr>
-          <a:xfrm>
-            <a:off x="3355848" y="1874519"/>
+          <p:cNvPr id="14" name="TextBox 13"/>
+          <p:cNvSpPr txBox="1"/>
+          <p:nvPr/>
+        </p:nvSpPr>
+        <p:spPr>
+          <a:xfrm>
+            <a:off x="3355848" y="1847088"/>
             <a:ext cx="2651760" cy="530352"/>
           </a:xfrm>
           <a:prstGeom prst="rect">
@@ -9122,22 +9356,65 @@
                   <a:srgbClr val="1E293B"/>
                 </a:solidFill>
               </a:rPr>
-              <a:t>avg time to
-read each post</a:t>
-            </a:r>
-          </a:p>
-        </p:txBody>
-      </p:sp>
-      <p:sp>
-        <p:nvSpPr>
-          <p:cNvPr id="13" name="Rectangle 12"/>
-          <p:cNvSpPr/>
-          <p:nvPr/>
-        </p:nvSpPr>
-        <p:spPr>
-          <a:xfrm>
-            <a:off x="6208776" y="1143000"/>
-            <a:ext cx="2651760" cy="1371600"/>
+              <a:t>avg reading
+time each</a:t>
+            </a:r>
+          </a:p>
+        </p:txBody>
+      </p:sp>
+      <p:sp>
+        <p:nvSpPr>
+          <p:cNvPr id="15" name="Rectangle 14"/>
+          <p:cNvSpPr/>
+          <p:nvPr/>
+        </p:nvSpPr>
+        <p:spPr>
+          <a:xfrm>
+            <a:off x="6236208" y="1106424"/>
+            <a:ext cx="2651760" cy="1389888"/>
+          </a:xfrm>
+          <a:prstGeom prst="rect">
+            <a:avLst/>
+          </a:prstGeom>
+          <a:solidFill>
+            <a:srgbClr val="CBD5E1"/>
+          </a:solidFill>
+          <a:ln>
+            <a:noFill/>
+          </a:ln>
+        </p:spPr>
+        <p:style>
+          <a:lnRef idx="1">
+            <a:schemeClr val="accent1"/>
+          </a:lnRef>
+          <a:fillRef idx="3">
+            <a:schemeClr val="accent1"/>
+          </a:fillRef>
+          <a:effectRef idx="2">
+            <a:schemeClr val="accent1"/>
+          </a:effectRef>
+          <a:fontRef idx="minor">
+            <a:schemeClr val="lt1"/>
+          </a:fontRef>
+        </p:style>
+        <p:txBody>
+          <a:bodyPr rtlCol="0" anchor="ctr"/>
+          <a:lstStyle/>
+          <a:p>
+            <a:pPr algn="ctr"/>
+          </a:p>
+        </p:txBody>
+      </p:sp>
+      <p:sp>
+        <p:nvSpPr>
+          <p:cNvPr id="16" name="Rectangle 15"/>
+          <p:cNvSpPr/>
+          <p:nvPr/>
+        </p:nvSpPr>
+        <p:spPr>
+          <a:xfrm>
+            <a:off x="6208776" y="1078992"/>
+            <a:ext cx="2651760" cy="1389888"/>
           </a:xfrm>
           <a:prstGeom prst="rect">
             <a:avLst/>
@@ -9145,7 +9422,7 @@
           <a:solidFill>
             <a:srgbClr val="FFFFFF"/>
           </a:solidFill>
-          <a:ln w="12700">
+          <a:ln w="9525">
             <a:solidFill>
               <a:srgbClr val="E2E8F0"/>
             </a:solidFill>
@@ -9175,13 +9452,13 @@
       </p:sp>
       <p:sp>
         <p:nvSpPr>
-          <p:cNvPr id="14" name="TextBox 13"/>
-          <p:cNvSpPr txBox="1"/>
-          <p:nvPr/>
-        </p:nvSpPr>
-        <p:spPr>
-          <a:xfrm>
-            <a:off x="6208776" y="1234440"/>
+          <p:cNvPr id="17" name="TextBox 16"/>
+          <p:cNvSpPr txBox="1"/>
+          <p:nvPr/>
+        </p:nvSpPr>
+        <p:spPr>
+          <a:xfrm>
+            <a:off x="6208776" y="1170432"/>
             <a:ext cx="2651760" cy="658368"/>
           </a:xfrm>
           <a:prstGeom prst="rect">
@@ -9209,13 +9486,13 @@
       </p:sp>
       <p:sp>
         <p:nvSpPr>
-          <p:cNvPr id="15" name="TextBox 14"/>
-          <p:cNvSpPr txBox="1"/>
-          <p:nvPr/>
-        </p:nvSpPr>
-        <p:spPr>
-          <a:xfrm>
-            <a:off x="6208776" y="1874519"/>
+          <p:cNvPr id="18" name="TextBox 17"/>
+          <p:cNvSpPr txBox="1"/>
+          <p:nvPr/>
+        </p:nvSpPr>
+        <p:spPr>
+          <a:xfrm>
+            <a:off x="6208776" y="1847088"/>
             <a:ext cx="2651760" cy="530352"/>
           </a:xfrm>
           <a:prstGeom prst="rect">
@@ -9236,22 +9513,65 @@
                   <a:srgbClr val="1E293B"/>
                 </a:solidFill>
               </a:rPr>
-              <a:t>of reading
-annually</a:t>
-            </a:r>
-          </a:p>
-        </p:txBody>
-      </p:sp>
-      <p:sp>
-        <p:nvSpPr>
-          <p:cNvPr id="16" name="Rectangle 15"/>
-          <p:cNvSpPr/>
-          <p:nvPr/>
-        </p:nvSpPr>
-        <p:spPr>
-          <a:xfrm>
-            <a:off x="9061704" y="1143000"/>
-            <a:ext cx="2651760" cy="1371600"/>
+              <a:t>total annual
+reading time</a:t>
+            </a:r>
+          </a:p>
+        </p:txBody>
+      </p:sp>
+      <p:sp>
+        <p:nvSpPr>
+          <p:cNvPr id="19" name="Rectangle 18"/>
+          <p:cNvSpPr/>
+          <p:nvPr/>
+        </p:nvSpPr>
+        <p:spPr>
+          <a:xfrm>
+            <a:off x="9089136" y="1106424"/>
+            <a:ext cx="2651760" cy="1389888"/>
+          </a:xfrm>
+          <a:prstGeom prst="rect">
+            <a:avLst/>
+          </a:prstGeom>
+          <a:solidFill>
+            <a:srgbClr val="CBD5E1"/>
+          </a:solidFill>
+          <a:ln>
+            <a:noFill/>
+          </a:ln>
+        </p:spPr>
+        <p:style>
+          <a:lnRef idx="1">
+            <a:schemeClr val="accent1"/>
+          </a:lnRef>
+          <a:fillRef idx="3">
+            <a:schemeClr val="accent1"/>
+          </a:fillRef>
+          <a:effectRef idx="2">
+            <a:schemeClr val="accent1"/>
+          </a:effectRef>
+          <a:fontRef idx="minor">
+            <a:schemeClr val="lt1"/>
+          </a:fontRef>
+        </p:style>
+        <p:txBody>
+          <a:bodyPr rtlCol="0" anchor="ctr"/>
+          <a:lstStyle/>
+          <a:p>
+            <a:pPr algn="ctr"/>
+          </a:p>
+        </p:txBody>
+      </p:sp>
+      <p:sp>
+        <p:nvSpPr>
+          <p:cNvPr id="20" name="Rectangle 19"/>
+          <p:cNvSpPr/>
+          <p:nvPr/>
+        </p:nvSpPr>
+        <p:spPr>
+          <a:xfrm>
+            <a:off x="9061704" y="1078992"/>
+            <a:ext cx="2651760" cy="1389888"/>
           </a:xfrm>
           <a:prstGeom prst="rect">
             <a:avLst/>
@@ -9259,7 +9579,7 @@
           <a:solidFill>
             <a:srgbClr val="FFFFFF"/>
           </a:solidFill>
-          <a:ln w="12700">
+          <a:ln w="9525">
             <a:solidFill>
               <a:srgbClr val="E2E8F0"/>
             </a:solidFill>
@@ -9289,13 +9609,13 @@
       </p:sp>
       <p:sp>
         <p:nvSpPr>
-          <p:cNvPr id="17" name="TextBox 16"/>
-          <p:cNvSpPr txBox="1"/>
-          <p:nvPr/>
-        </p:nvSpPr>
-        <p:spPr>
-          <a:xfrm>
-            <a:off x="9061704" y="1234440"/>
+          <p:cNvPr id="21" name="TextBox 20"/>
+          <p:cNvSpPr txBox="1"/>
+          <p:nvPr/>
+        </p:nvSpPr>
+        <p:spPr>
+          <a:xfrm>
+            <a:off x="9061704" y="1170432"/>
             <a:ext cx="2651760" cy="658368"/>
           </a:xfrm>
           <a:prstGeom prst="rect">
@@ -9316,20 +9636,20 @@
                   <a:srgbClr val="FF9900"/>
                 </a:solidFill>
               </a:rPr>
-              <a:t>0%</a:t>
-            </a:r>
-          </a:p>
-        </p:txBody>
-      </p:sp>
-      <p:sp>
-        <p:nvSpPr>
-          <p:cNvPr id="18" name="TextBox 17"/>
-          <p:cNvSpPr txBox="1"/>
-          <p:nvPr/>
-        </p:nvSpPr>
-        <p:spPr>
-          <a:xfrm>
-            <a:off x="9061704" y="1874519"/>
+              <a:t>$0</a:t>
+            </a:r>
+          </a:p>
+        </p:txBody>
+      </p:sp>
+      <p:sp>
+        <p:nvSpPr>
+          <p:cNvPr id="22" name="TextBox 21"/>
+          <p:cNvSpPr txBox="1"/>
+          <p:nvPr/>
+        </p:nvSpPr>
+        <p:spPr>
+          <a:xfrm>
+            <a:off x="9061704" y="1847088"/>
             <a:ext cx="2651760" cy="530352"/>
           </a:xfrm>
           <a:prstGeom prst="rect">
@@ -9350,22 +9670,22 @@
                   <a:srgbClr val="1E293B"/>
                 </a:solidFill>
               </a:rPr>
-              <a:t>of that time
-billable</a:t>
-            </a:r>
-          </a:p>
-        </p:txBody>
-      </p:sp>
-      <p:sp>
-        <p:nvSpPr>
-          <p:cNvPr id="19" name="Rectangle 18"/>
-          <p:cNvSpPr/>
-          <p:nvPr/>
-        </p:nvSpPr>
-        <p:spPr>
-          <a:xfrm>
-            <a:off x="502920" y="2697480"/>
-            <a:ext cx="11183112" cy="12700"/>
+              <a:t>billable value
+of that time</a:t>
+            </a:r>
+          </a:p>
+        </p:txBody>
+      </p:sp>
+      <p:sp>
+        <p:nvSpPr>
+          <p:cNvPr id="23" name="Rectangle 22"/>
+          <p:cNvSpPr/>
+          <p:nvPr/>
+        </p:nvSpPr>
+        <p:spPr>
+          <a:xfrm>
+            <a:off x="502920" y="2633472"/>
+            <a:ext cx="11186160" cy="9144"/>
           </a:xfrm>
           <a:prstGeom prst="rect">
             <a:avLst/>
@@ -9401,14 +9721,14 @@
       </p:sp>
       <p:sp>
         <p:nvSpPr>
-          <p:cNvPr id="20" name="TextBox 19"/>
-          <p:cNvSpPr txBox="1"/>
-          <p:nvPr/>
-        </p:nvSpPr>
-        <p:spPr>
-          <a:xfrm>
-            <a:off x="502920" y="2788920"/>
-            <a:ext cx="5486400" cy="292608"/>
+          <p:cNvPr id="24" name="TextBox 23"/>
+          <p:cNvSpPr txBox="1"/>
+          <p:nvPr/>
+        </p:nvSpPr>
+        <p:spPr>
+          <a:xfrm>
+            <a:off x="502920" y="2715768"/>
+            <a:ext cx="5029200" cy="292608"/>
           </a:xfrm>
           <a:prstGeom prst="rect">
             <a:avLst/>
@@ -9435,14 +9755,14 @@
       </p:sp>
       <p:sp>
         <p:nvSpPr>
-          <p:cNvPr id="21" name="Rectangle 20"/>
-          <p:cNvSpPr/>
-          <p:nvPr/>
-        </p:nvSpPr>
-        <p:spPr>
-          <a:xfrm>
-            <a:off x="502920" y="3227831"/>
-            <a:ext cx="109728" cy="109728"/>
+          <p:cNvPr id="25" name="Rectangle 24"/>
+          <p:cNvSpPr/>
+          <p:nvPr/>
+        </p:nvSpPr>
+        <p:spPr>
+          <a:xfrm>
+            <a:off x="502920" y="3324758"/>
+            <a:ext cx="91440" cy="91440"/>
           </a:xfrm>
           <a:prstGeom prst="rect">
             <a:avLst/>
@@ -9478,47 +9798,48 @@
       </p:sp>
       <p:sp>
         <p:nvSpPr>
-          <p:cNvPr id="22" name="TextBox 21"/>
-          <p:cNvSpPr txBox="1"/>
-          <p:nvPr/>
-        </p:nvSpPr>
-        <p:spPr>
-          <a:xfrm>
-            <a:off x="704088" y="3182112"/>
-            <a:ext cx="7114032" cy="411480"/>
-          </a:xfrm>
-          <a:prstGeom prst="rect">
-            <a:avLst/>
-          </a:prstGeom>
-          <a:noFill/>
-        </p:spPr>
-        <p:txBody>
-          <a:bodyPr wrap="square">
-            <a:spAutoFit/>
-          </a:bodyPr>
-          <a:lstStyle/>
-          <a:p>
-            <a:r>
-              <a:rPr sz="1200">
+          <p:cNvPr id="26" name="TextBox 25"/>
+          <p:cNvSpPr txBox="1"/>
+          <p:nvPr/>
+        </p:nvSpPr>
+        <p:spPr>
+          <a:xfrm>
+            <a:off x="667512" y="3127248"/>
+            <a:ext cx="7333487" cy="420624"/>
+          </a:xfrm>
+          <a:prstGeom prst="rect">
+            <a:avLst/>
+          </a:prstGeom>
+          <a:noFill/>
+        </p:spPr>
+        <p:txBody>
+          <a:bodyPr wrap="square">
+            <a:spAutoFit/>
+          </a:bodyPr>
+          <a:lstStyle/>
+          <a:p>
+            <a:pPr algn="l"/>
+            <a:r>
+              <a:rPr sz="1200" b="0" i="0">
                 <a:solidFill>
                   <a:srgbClr val="1E293B"/>
                 </a:solidFill>
               </a:rPr>
-              <a:t>Manual RSS monitoring across dozens of categories — easy to miss critical announcements</a:t>
-            </a:r>
-          </a:p>
-        </p:txBody>
-      </p:sp>
-      <p:sp>
-        <p:nvSpPr>
-          <p:cNvPr id="23" name="Rectangle 22"/>
-          <p:cNvSpPr/>
-          <p:nvPr/>
-        </p:nvSpPr>
-        <p:spPr>
-          <a:xfrm>
-            <a:off x="502920" y="3703319"/>
-            <a:ext cx="109728" cy="109728"/>
+              <a:t>Manual RSS monitoring — easy to miss critical announcements across dozens of categories</a:t>
+            </a:r>
+          </a:p>
+        </p:txBody>
+      </p:sp>
+      <p:sp>
+        <p:nvSpPr>
+          <p:cNvPr id="27" name="Rectangle 26"/>
+          <p:cNvSpPr/>
+          <p:nvPr/>
+        </p:nvSpPr>
+        <p:spPr>
+          <a:xfrm>
+            <a:off x="502920" y="3781958"/>
+            <a:ext cx="91440" cy="91440"/>
           </a:xfrm>
           <a:prstGeom prst="rect">
             <a:avLst/>
@@ -9554,47 +9875,48 @@
       </p:sp>
       <p:sp>
         <p:nvSpPr>
-          <p:cNvPr id="24" name="TextBox 23"/>
-          <p:cNvSpPr txBox="1"/>
-          <p:nvPr/>
-        </p:nvSpPr>
-        <p:spPr>
-          <a:xfrm>
-            <a:off x="704088" y="3657600"/>
-            <a:ext cx="7114032" cy="411480"/>
-          </a:xfrm>
-          <a:prstGeom prst="rect">
-            <a:avLst/>
-          </a:prstGeom>
-          <a:noFill/>
-        </p:spPr>
-        <p:txBody>
-          <a:bodyPr wrap="square">
-            <a:spAutoFit/>
-          </a:bodyPr>
-          <a:lstStyle/>
-          <a:p>
-            <a:r>
-              <a:rPr sz="1200">
+          <p:cNvPr id="28" name="TextBox 27"/>
+          <p:cNvSpPr txBox="1"/>
+          <p:nvPr/>
+        </p:nvSpPr>
+        <p:spPr>
+          <a:xfrm>
+            <a:off x="667512" y="3584448"/>
+            <a:ext cx="7333487" cy="420624"/>
+          </a:xfrm>
+          <a:prstGeom prst="rect">
+            <a:avLst/>
+          </a:prstGeom>
+          <a:noFill/>
+        </p:spPr>
+        <p:txBody>
+          <a:bodyPr wrap="square">
+            <a:spAutoFit/>
+          </a:bodyPr>
+          <a:lstStyle/>
+          <a:p>
+            <a:pPr algn="l"/>
+            <a:r>
+              <a:rPr sz="1200" b="0" i="0">
                 <a:solidFill>
                   <a:srgbClr val="1E293B"/>
                 </a:solidFill>
               </a:rPr>
-              <a:t>No searchable history — can't quickly answer 'did AWS update Lambda timeouts this year?'</a:t>
-            </a:r>
-          </a:p>
-        </p:txBody>
-      </p:sp>
-      <p:sp>
-        <p:nvSpPr>
-          <p:cNvPr id="25" name="Rectangle 24"/>
-          <p:cNvSpPr/>
-          <p:nvPr/>
-        </p:nvSpPr>
-        <p:spPr>
-          <a:xfrm>
-            <a:off x="502920" y="4178806"/>
-            <a:ext cx="109728" cy="109728"/>
+              <a:t>No searchable history: 'Did AWS update Lambda concurrency limits this quarter?'</a:t>
+            </a:r>
+          </a:p>
+        </p:txBody>
+      </p:sp>
+      <p:sp>
+        <p:nvSpPr>
+          <p:cNvPr id="29" name="Rectangle 28"/>
+          <p:cNvSpPr/>
+          <p:nvPr/>
+        </p:nvSpPr>
+        <p:spPr>
+          <a:xfrm>
+            <a:off x="502920" y="4239158"/>
+            <a:ext cx="91440" cy="91440"/>
           </a:xfrm>
           <a:prstGeom prst="rect">
             <a:avLst/>
@@ -9630,47 +9952,48 @@
       </p:sp>
       <p:sp>
         <p:nvSpPr>
-          <p:cNvPr id="26" name="TextBox 25"/>
-          <p:cNvSpPr txBox="1"/>
-          <p:nvPr/>
-        </p:nvSpPr>
-        <p:spPr>
-          <a:xfrm>
-            <a:off x="704088" y="4133087"/>
-            <a:ext cx="7114032" cy="411480"/>
-          </a:xfrm>
-          <a:prstGeom prst="rect">
-            <a:avLst/>
-          </a:prstGeom>
-          <a:noFill/>
-        </p:spPr>
-        <p:txBody>
-          <a:bodyPr wrap="square">
-            <a:spAutoFit/>
-          </a:bodyPr>
-          <a:lstStyle/>
-          <a:p>
-            <a:r>
-              <a:rPr sz="1200">
+          <p:cNvPr id="30" name="TextBox 29"/>
+          <p:cNvSpPr txBox="1"/>
+          <p:nvPr/>
+        </p:nvSpPr>
+        <p:spPr>
+          <a:xfrm>
+            <a:off x="667512" y="4041648"/>
+            <a:ext cx="7333487" cy="420624"/>
+          </a:xfrm>
+          <a:prstGeom prst="rect">
+            <a:avLst/>
+          </a:prstGeom>
+          <a:noFill/>
+        </p:spPr>
+        <p:txBody>
+          <a:bodyPr wrap="square">
+            <a:spAutoFit/>
+          </a:bodyPr>
+          <a:lstStyle/>
+          <a:p>
+            <a:pPr algn="l"/>
+            <a:r>
+              <a:rPr sz="1200" b="0" i="0">
                 <a:solidFill>
                   <a:srgbClr val="1E293B"/>
                 </a:solidFill>
               </a:rPr>
-              <a:t>Raw HTML descriptions are noisy — critical details buried in marketing language</a:t>
-            </a:r>
-          </a:p>
-        </p:txBody>
-      </p:sp>
-      <p:sp>
-        <p:nvSpPr>
-          <p:cNvPr id="27" name="Rectangle 26"/>
-          <p:cNvSpPr/>
-          <p:nvPr/>
-        </p:nvSpPr>
-        <p:spPr>
-          <a:xfrm>
-            <a:off x="502920" y="4654295"/>
-            <a:ext cx="109728" cy="109728"/>
+              <a:t>Raw HTML descriptions bury critical details in marketing language</a:t>
+            </a:r>
+          </a:p>
+        </p:txBody>
+      </p:sp>
+      <p:sp>
+        <p:nvSpPr>
+          <p:cNvPr id="31" name="Rectangle 30"/>
+          <p:cNvSpPr/>
+          <p:nvPr/>
+        </p:nvSpPr>
+        <p:spPr>
+          <a:xfrm>
+            <a:off x="502920" y="4696358"/>
+            <a:ext cx="91440" cy="91440"/>
           </a:xfrm>
           <a:prstGeom prst="rect">
             <a:avLst/>
@@ -9706,47 +10029,48 @@
       </p:sp>
       <p:sp>
         <p:nvSpPr>
-          <p:cNvPr id="28" name="TextBox 27"/>
-          <p:cNvSpPr txBox="1"/>
-          <p:nvPr/>
-        </p:nvSpPr>
-        <p:spPr>
-          <a:xfrm>
-            <a:off x="704088" y="4608576"/>
-            <a:ext cx="7114032" cy="411480"/>
-          </a:xfrm>
-          <a:prstGeom prst="rect">
-            <a:avLst/>
-          </a:prstGeom>
-          <a:noFill/>
-        </p:spPr>
-        <p:txBody>
-          <a:bodyPr wrap="square">
-            <a:spAutoFit/>
-          </a:bodyPr>
-          <a:lstStyle/>
-          <a:p>
-            <a:r>
-              <a:rPr sz="1200">
+          <p:cNvPr id="32" name="TextBox 31"/>
+          <p:cNvSpPr txBox="1"/>
+          <p:nvPr/>
+        </p:nvSpPr>
+        <p:spPr>
+          <a:xfrm>
+            <a:off x="667512" y="4498848"/>
+            <a:ext cx="7333487" cy="420624"/>
+          </a:xfrm>
+          <a:prstGeom prst="rect">
+            <a:avLst/>
+          </a:prstGeom>
+          <a:noFill/>
+        </p:spPr>
+        <p:txBody>
+          <a:bodyPr wrap="square">
+            <a:spAutoFit/>
+          </a:bodyPr>
+          <a:lstStyle/>
+          <a:p>
+            <a:pPr algn="l"/>
+            <a:r>
+              <a:rPr sz="1200" b="0" i="0">
                 <a:solidFill>
                   <a:srgbClr val="1E293B"/>
                 </a:solidFill>
               </a:rPr>
-              <a:t>No way to filter by relevance to our specific services (EC2, RDS, Lambda, EKS, S3…)</a:t>
-            </a:r>
-          </a:p>
-        </p:txBody>
-      </p:sp>
-      <p:sp>
-        <p:nvSpPr>
-          <p:cNvPr id="29" name="Rectangle 28"/>
-          <p:cNvSpPr/>
-          <p:nvPr/>
-        </p:nvSpPr>
-        <p:spPr>
-          <a:xfrm>
-            <a:off x="502920" y="5129783"/>
-            <a:ext cx="109728" cy="109728"/>
+              <a:t>No service-level filtering — irrelevant noise drowns out what matters to your team</a:t>
+            </a:r>
+          </a:p>
+        </p:txBody>
+      </p:sp>
+      <p:sp>
+        <p:nvSpPr>
+          <p:cNvPr id="33" name="Rectangle 32"/>
+          <p:cNvSpPr/>
+          <p:nvPr/>
+        </p:nvSpPr>
+        <p:spPr>
+          <a:xfrm>
+            <a:off x="502920" y="5153558"/>
+            <a:ext cx="91440" cy="91440"/>
           </a:xfrm>
           <a:prstGeom prst="rect">
             <a:avLst/>
@@ -9782,57 +10106,101 @@
       </p:sp>
       <p:sp>
         <p:nvSpPr>
-          <p:cNvPr id="30" name="TextBox 29"/>
-          <p:cNvSpPr txBox="1"/>
-          <p:nvPr/>
-        </p:nvSpPr>
-        <p:spPr>
-          <a:xfrm>
-            <a:off x="704088" y="5084064"/>
-            <a:ext cx="7114032" cy="411480"/>
-          </a:xfrm>
-          <a:prstGeom prst="rect">
-            <a:avLst/>
-          </a:prstGeom>
-          <a:noFill/>
-        </p:spPr>
-        <p:txBody>
-          <a:bodyPr wrap="square">
-            <a:spAutoFit/>
-          </a:bodyPr>
-          <a:lstStyle/>
-          <a:p>
-            <a:r>
-              <a:rPr sz="1200">
+          <p:cNvPr id="34" name="TextBox 33"/>
+          <p:cNvSpPr txBox="1"/>
+          <p:nvPr/>
+        </p:nvSpPr>
+        <p:spPr>
+          <a:xfrm>
+            <a:off x="667512" y="4956048"/>
+            <a:ext cx="7333487" cy="420624"/>
+          </a:xfrm>
+          <a:prstGeom prst="rect">
+            <a:avLst/>
+          </a:prstGeom>
+          <a:noFill/>
+        </p:spPr>
+        <p:txBody>
+          <a:bodyPr wrap="square">
+            <a:spAutoFit/>
+          </a:bodyPr>
+          <a:lstStyle/>
+          <a:p>
+            <a:pPr algn="l"/>
+            <a:r>
+              <a:rPr sz="1200" b="0" i="0">
                 <a:solidFill>
                   <a:srgbClr val="1E293B"/>
                 </a:solidFill>
               </a:rPr>
-              <a:t>Team knowledge is siloed — each admin tracks different services independently</a:t>
-            </a:r>
-          </a:p>
-        </p:txBody>
-      </p:sp>
-      <p:sp>
-        <p:nvSpPr>
-          <p:cNvPr id="31" name="Rectangle 30"/>
-          <p:cNvSpPr/>
-          <p:nvPr/>
-        </p:nvSpPr>
-        <p:spPr>
-          <a:xfrm>
-            <a:off x="8275320" y="2788920"/>
-            <a:ext cx="3401568" cy="3154680"/>
-          </a:xfrm>
-          <a:prstGeom prst="rect">
-            <a:avLst/>
-          </a:prstGeom>
-          <a:solidFill>
-            <a:srgbClr val="FFF7ED"/>
-          </a:solidFill>
-          <a:ln w="25400">
+              <a:t>Knowledge is siloed — each admin tracks different services independently</a:t>
+            </a:r>
+          </a:p>
+        </p:txBody>
+      </p:sp>
+      <p:sp>
+        <p:nvSpPr>
+          <p:cNvPr id="35" name="Rectangle 34"/>
+          <p:cNvSpPr/>
+          <p:nvPr/>
+        </p:nvSpPr>
+        <p:spPr>
+          <a:xfrm>
+            <a:off x="8394192" y="2743200"/>
+            <a:ext cx="3310128" cy="3127248"/>
+          </a:xfrm>
+          <a:prstGeom prst="rect">
+            <a:avLst/>
+          </a:prstGeom>
+          <a:solidFill>
+            <a:srgbClr val="CBD5E1"/>
+          </a:solidFill>
+          <a:ln>
+            <a:noFill/>
+          </a:ln>
+        </p:spPr>
+        <p:style>
+          <a:lnRef idx="1">
+            <a:schemeClr val="accent1"/>
+          </a:lnRef>
+          <a:fillRef idx="3">
+            <a:schemeClr val="accent1"/>
+          </a:fillRef>
+          <a:effectRef idx="2">
+            <a:schemeClr val="accent1"/>
+          </a:effectRef>
+          <a:fontRef idx="minor">
+            <a:schemeClr val="lt1"/>
+          </a:fontRef>
+        </p:style>
+        <p:txBody>
+          <a:bodyPr rtlCol="0" anchor="ctr"/>
+          <a:lstStyle/>
+          <a:p>
+            <a:pPr algn="ctr"/>
+          </a:p>
+        </p:txBody>
+      </p:sp>
+      <p:sp>
+        <p:nvSpPr>
+          <p:cNvPr id="36" name="Rectangle 35"/>
+          <p:cNvSpPr/>
+          <p:nvPr/>
+        </p:nvSpPr>
+        <p:spPr>
+          <a:xfrm>
+            <a:off x="8366760" y="2715768"/>
+            <a:ext cx="3310128" cy="3127248"/>
+          </a:xfrm>
+          <a:prstGeom prst="rect">
+            <a:avLst/>
+          </a:prstGeom>
+          <a:solidFill>
+            <a:srgbClr val="FFFFFF"/>
+          </a:solidFill>
+          <a:ln w="9525">
             <a:solidFill>
-              <a:srgbClr val="FF9900"/>
+              <a:srgbClr val="E2E8F0"/>
             </a:solidFill>
           </a:ln>
         </p:spPr>
@@ -9860,14 +10228,14 @@
       </p:sp>
       <p:sp>
         <p:nvSpPr>
-          <p:cNvPr id="32" name="TextBox 31"/>
-          <p:cNvSpPr txBox="1"/>
-          <p:nvPr/>
-        </p:nvSpPr>
-        <p:spPr>
-          <a:xfrm>
-            <a:off x="8366760" y="2880360"/>
-            <a:ext cx="3218688" cy="329184"/>
+          <p:cNvPr id="37" name="TextBox 36"/>
+          <p:cNvSpPr txBox="1"/>
+          <p:nvPr/>
+        </p:nvSpPr>
+        <p:spPr>
+          <a:xfrm>
+            <a:off x="8485632" y="2816352"/>
+            <a:ext cx="3072384" cy="310896"/>
           </a:xfrm>
           <a:prstGeom prst="rect">
             <a:avLst/>
@@ -9894,14 +10262,14 @@
       </p:sp>
       <p:sp>
         <p:nvSpPr>
-          <p:cNvPr id="33" name="TextBox 32"/>
-          <p:cNvSpPr txBox="1"/>
-          <p:nvPr/>
-        </p:nvSpPr>
-        <p:spPr>
-          <a:xfrm>
-            <a:off x="8366760" y="3246120"/>
-            <a:ext cx="3218688" cy="2468880"/>
+          <p:cNvPr id="38" name="TextBox 37"/>
+          <p:cNvSpPr txBox="1"/>
+          <p:nvPr/>
+        </p:nvSpPr>
+        <p:spPr>
+          <a:xfrm>
+            <a:off x="8485632" y="3182112"/>
+            <a:ext cx="3072384" cy="2514600"/>
           </a:xfrm>
           <a:prstGeom prst="rect">
             <a:avLst/>
@@ -9953,7 +10321,7 @@
         <p:spPr>
           <a:xfrm>
             <a:off x="0" y="0"/>
-            <a:ext cx="12188952" cy="6858000"/>
+            <a:ext cx="12192000" cy="6858000"/>
           </a:xfrm>
           <a:prstGeom prst="rect">
             <a:avLst/>
@@ -9995,8 +10363,8 @@
         </p:nvSpPr>
         <p:spPr>
           <a:xfrm>
-            <a:off x="0" y="6748272"/>
-            <a:ext cx="12188952" cy="109728"/>
+            <a:off x="0" y="6766560"/>
+            <a:ext cx="12192000" cy="91440"/>
           </a:xfrm>
           <a:prstGeom prst="rect">
             <a:avLst/>
@@ -10038,8 +10406,8 @@
         </p:nvSpPr>
         <p:spPr>
           <a:xfrm>
-            <a:off x="502920" y="256032"/>
-            <a:ext cx="3657600" cy="274320"/>
+            <a:off x="502920" y="201168"/>
+            <a:ext cx="5486400" cy="256032"/>
           </a:xfrm>
           <a:prstGeom prst="rect">
             <a:avLst/>
@@ -10072,8 +10440,8 @@
         </p:nvSpPr>
         <p:spPr>
           <a:xfrm>
-            <a:off x="502920" y="457200"/>
-            <a:ext cx="9144000" cy="512064"/>
+            <a:off x="502920" y="438912"/>
+            <a:ext cx="9144000" cy="475488"/>
           </a:xfrm>
           <a:prstGeom prst="rect">
             <a:avLst/>
@@ -10088,7 +10456,7 @@
           <a:p>
             <a:pPr algn="l"/>
             <a:r>
-              <a:rPr sz="2800" b="1" i="0">
+              <a:rPr sz="2700" b="1" i="0">
                 <a:solidFill>
                   <a:srgbClr val="FFFFFF"/>
                 </a:solidFill>
@@ -10106,7 +10474,7 @@
         </p:nvSpPr>
         <p:spPr>
           <a:xfrm>
-            <a:off x="320040" y="1234440"/>
+            <a:off x="347472" y="1207008"/>
             <a:ext cx="1993392" cy="1005840"/>
           </a:xfrm>
           <a:prstGeom prst="rect">
@@ -10149,7 +10517,7 @@
         </p:nvSpPr>
         <p:spPr>
           <a:xfrm>
-            <a:off x="320040" y="1325880"/>
+            <a:off x="347472" y="1298448"/>
             <a:ext cx="1993392" cy="402336"/>
           </a:xfrm>
           <a:prstGeom prst="rect">
@@ -10184,8 +10552,8 @@
         </p:nvSpPr>
         <p:spPr>
           <a:xfrm>
-            <a:off x="320040" y="1728216"/>
-            <a:ext cx="1993392" cy="457200"/>
+            <a:off x="347472" y="1709928"/>
+            <a:ext cx="1993392" cy="438912"/>
           </a:xfrm>
           <a:prstGeom prst="rect">
             <a:avLst/>
@@ -10218,8 +10586,8 @@
         </p:nvSpPr>
         <p:spPr>
           <a:xfrm>
-            <a:off x="2359152" y="1627632"/>
-            <a:ext cx="274320" cy="256032"/>
+            <a:off x="2395728" y="1554480"/>
+            <a:ext cx="164592" cy="274320"/>
           </a:xfrm>
           <a:prstGeom prst="rect">
             <a:avLst/>
@@ -10252,7 +10620,7 @@
         </p:nvSpPr>
         <p:spPr>
           <a:xfrm>
-            <a:off x="2697480" y="1234440"/>
+            <a:off x="2596896" y="1207008"/>
             <a:ext cx="1993392" cy="1005840"/>
           </a:xfrm>
           <a:prstGeom prst="rect">
@@ -10295,7 +10663,7 @@
         </p:nvSpPr>
         <p:spPr>
           <a:xfrm>
-            <a:off x="2697480" y="1325880"/>
+            <a:off x="2596896" y="1298448"/>
             <a:ext cx="1993392" cy="402336"/>
           </a:xfrm>
           <a:prstGeom prst="rect">
@@ -10330,8 +10698,8 @@
         </p:nvSpPr>
         <p:spPr>
           <a:xfrm>
-            <a:off x="2697480" y="1728216"/>
-            <a:ext cx="1993392" cy="457200"/>
+            <a:off x="2596896" y="1709928"/>
+            <a:ext cx="1993392" cy="438912"/>
           </a:xfrm>
           <a:prstGeom prst="rect">
             <a:avLst/>
@@ -10351,8 +10719,7 @@
                   <a:srgbClr val="E2E8F0"/>
                 </a:solidFill>
               </a:rPr>
-              <a:t>Parses RSS XML
-Deduplicates GUIDs</a:t>
+              <a:t>Parses RSS · Dedupes</a:t>
             </a:r>
           </a:p>
         </p:txBody>
@@ -10365,8 +10732,8 @@
         </p:nvSpPr>
         <p:spPr>
           <a:xfrm>
-            <a:off x="4736592" y="1627632"/>
-            <a:ext cx="274320" cy="256032"/>
+            <a:off x="4645152" y="1554480"/>
+            <a:ext cx="164592" cy="274320"/>
           </a:xfrm>
           <a:prstGeom prst="rect">
             <a:avLst/>
@@ -10399,7 +10766,7 @@
         </p:nvSpPr>
         <p:spPr>
           <a:xfrm>
-            <a:off x="5074920" y="1234440"/>
+            <a:off x="4846320" y="1207008"/>
             <a:ext cx="1993392" cy="1005840"/>
           </a:xfrm>
           <a:prstGeom prst="rect">
@@ -10442,7 +10809,7 @@
         </p:nvSpPr>
         <p:spPr>
           <a:xfrm>
-            <a:off x="5074920" y="1325880"/>
+            <a:off x="4846320" y="1298448"/>
             <a:ext cx="1993392" cy="402336"/>
           </a:xfrm>
           <a:prstGeom prst="rect">
@@ -10476,8 +10843,8 @@
         </p:nvSpPr>
         <p:spPr>
           <a:xfrm>
-            <a:off x="5074920" y="1728216"/>
-            <a:ext cx="1993392" cy="457200"/>
+            <a:off x="4846320" y="1709928"/>
+            <a:ext cx="1993392" cy="438912"/>
           </a:xfrm>
           <a:prstGeom prst="rect">
             <a:avLst/>
@@ -10498,7 +10865,7 @@
                 </a:solidFill>
               </a:rPr>
               <a:t>Reliable delivery
-DLQ on failure</a:t>
+3× retry + DLQ</a:t>
             </a:r>
           </a:p>
         </p:txBody>
@@ -10511,8 +10878,8 @@
         </p:nvSpPr>
         <p:spPr>
           <a:xfrm>
-            <a:off x="7114032" y="1627632"/>
-            <a:ext cx="274320" cy="256032"/>
+            <a:off x="6894576" y="1554480"/>
+            <a:ext cx="164592" cy="274320"/>
           </a:xfrm>
           <a:prstGeom prst="rect">
             <a:avLst/>
@@ -10545,7 +10912,7 @@
         </p:nvSpPr>
         <p:spPr>
           <a:xfrm>
-            <a:off x="7452360" y="1234440"/>
+            <a:off x="7095744" y="1207008"/>
             <a:ext cx="1993392" cy="1005840"/>
           </a:xfrm>
           <a:prstGeom prst="rect">
@@ -10588,7 +10955,7 @@
         </p:nvSpPr>
         <p:spPr>
           <a:xfrm>
-            <a:off x="7452360" y="1325880"/>
+            <a:off x="7095744" y="1298448"/>
             <a:ext cx="1993392" cy="402336"/>
           </a:xfrm>
           <a:prstGeom prst="rect">
@@ -10623,8 +10990,8 @@
         </p:nvSpPr>
         <p:spPr>
           <a:xfrm>
-            <a:off x="7452360" y="1728216"/>
-            <a:ext cx="1993392" cy="457200"/>
+            <a:off x="7095744" y="1709928"/>
+            <a:ext cx="1993392" cy="438912"/>
           </a:xfrm>
           <a:prstGeom prst="rect">
             <a:avLst/>
@@ -10658,8 +11025,8 @@
         </p:nvSpPr>
         <p:spPr>
           <a:xfrm>
-            <a:off x="9491472" y="1627632"/>
-            <a:ext cx="274320" cy="256032"/>
+            <a:off x="9144000" y="1554480"/>
+            <a:ext cx="164592" cy="274320"/>
           </a:xfrm>
           <a:prstGeom prst="rect">
             <a:avLst/>
@@ -10692,7 +11059,7 @@
         </p:nvSpPr>
         <p:spPr>
           <a:xfrm>
-            <a:off x="9829800" y="1234440"/>
+            <a:off x="9345168" y="1207008"/>
             <a:ext cx="1993392" cy="1005840"/>
           </a:xfrm>
           <a:prstGeom prst="rect">
@@ -10735,7 +11102,7 @@
         </p:nvSpPr>
         <p:spPr>
           <a:xfrm>
-            <a:off x="9829800" y="1325880"/>
+            <a:off x="9345168" y="1298448"/>
             <a:ext cx="1993392" cy="402336"/>
           </a:xfrm>
           <a:prstGeom prst="rect">
@@ -10770,8 +11137,8 @@
         </p:nvSpPr>
         <p:spPr>
           <a:xfrm>
-            <a:off x="9829800" y="1728216"/>
-            <a:ext cx="1993392" cy="457200"/>
+            <a:off x="9345168" y="1709928"/>
+            <a:ext cx="1993392" cy="438912"/>
           </a:xfrm>
           <a:prstGeom prst="rect">
             <a:avLst/>
@@ -10805,8 +11172,8 @@
         </p:nvSpPr>
         <p:spPr>
           <a:xfrm>
-            <a:off x="320040" y="2468880"/>
-            <a:ext cx="11430000" cy="274320"/>
+            <a:off x="347472" y="2423160"/>
+            <a:ext cx="10972800" cy="256032"/>
           </a:xfrm>
           <a:prstGeom prst="rect">
             <a:avLst/>
@@ -10821,7 +11188,7 @@
           <a:p>
             <a:pPr algn="l"/>
             <a:r>
-              <a:rPr sz="1100" b="1" i="0">
+              <a:rPr sz="1000" b="1" i="0">
                 <a:solidFill>
                   <a:srgbClr val="94A3B8"/>
                 </a:solidFill>
@@ -10839,7 +11206,7 @@
         </p:nvSpPr>
         <p:spPr>
           <a:xfrm>
-            <a:off x="320040" y="2834640"/>
+            <a:off x="347472" y="2788920"/>
             <a:ext cx="1993392" cy="1005840"/>
           </a:xfrm>
           <a:prstGeom prst="rect">
@@ -10882,7 +11249,7 @@
         </p:nvSpPr>
         <p:spPr>
           <a:xfrm>
-            <a:off x="320040" y="2926080"/>
+            <a:off x="347472" y="2880360"/>
             <a:ext cx="1993392" cy="402336"/>
           </a:xfrm>
           <a:prstGeom prst="rect">
@@ -10904,7 +11271,7 @@
                 </a:solidFill>
               </a:rPr>
               <a:t>API Gateway
-(HTTP API)</a:t>
+HTTP API</a:t>
             </a:r>
           </a:p>
         </p:txBody>
@@ -10917,8 +11284,8 @@
         </p:nvSpPr>
         <p:spPr>
           <a:xfrm>
-            <a:off x="320040" y="3328416"/>
-            <a:ext cx="1993392" cy="457200"/>
+            <a:off x="347472" y="3291840"/>
+            <a:ext cx="1993392" cy="438912"/>
           </a:xfrm>
           <a:prstGeom prst="rect">
             <a:avLst/>
@@ -10938,8 +11305,8 @@
                   <a:srgbClr val="E2E8F0"/>
                 </a:solidFill>
               </a:rPr>
-              <a:t>REST endpoints
-No auth — read-only</a:t>
+              <a:t>5 REST routes
+Read-only, no auth</a:t>
             </a:r>
           </a:p>
         </p:txBody>
@@ -10952,8 +11319,8 @@
         </p:nvSpPr>
         <p:spPr>
           <a:xfrm>
-            <a:off x="2359152" y="3227832"/>
-            <a:ext cx="274320" cy="256032"/>
+            <a:off x="2395728" y="3136392"/>
+            <a:ext cx="164592" cy="274320"/>
           </a:xfrm>
           <a:prstGeom prst="rect">
             <a:avLst/>
@@ -10986,7 +11353,7 @@
         </p:nvSpPr>
         <p:spPr>
           <a:xfrm>
-            <a:off x="2697480" y="2834640"/>
+            <a:off x="2596896" y="2788920"/>
             <a:ext cx="1993392" cy="1005840"/>
           </a:xfrm>
           <a:prstGeom prst="rect">
@@ -11029,7 +11396,7 @@
         </p:nvSpPr>
         <p:spPr>
           <a:xfrm>
-            <a:off x="2697480" y="2926080"/>
+            <a:off x="2596896" y="2880360"/>
             <a:ext cx="1993392" cy="402336"/>
           </a:xfrm>
           <a:prstGeom prst="rect">
@@ -11063,8 +11430,8 @@
         </p:nvSpPr>
         <p:spPr>
           <a:xfrm>
-            <a:off x="2697480" y="3328416"/>
-            <a:ext cx="1993392" cy="457200"/>
+            <a:off x="2596896" y="3291840"/>
+            <a:ext cx="1993392" cy="438912"/>
           </a:xfrm>
           <a:prstGeom prst="rect">
             <a:avLst/>
@@ -11098,8 +11465,8 @@
         </p:nvSpPr>
         <p:spPr>
           <a:xfrm>
-            <a:off x="4736592" y="3227832"/>
-            <a:ext cx="274320" cy="256032"/>
+            <a:off x="4645152" y="3136392"/>
+            <a:ext cx="164592" cy="274320"/>
           </a:xfrm>
           <a:prstGeom prst="rect">
             <a:avLst/>
@@ -11132,7 +11499,7 @@
         </p:nvSpPr>
         <p:spPr>
           <a:xfrm>
-            <a:off x="5074920" y="2834640"/>
+            <a:off x="4846320" y="2788920"/>
             <a:ext cx="1993392" cy="1005840"/>
           </a:xfrm>
           <a:prstGeom prst="rect">
@@ -11175,7 +11542,7 @@
         </p:nvSpPr>
         <p:spPr>
           <a:xfrm>
-            <a:off x="5074920" y="2926080"/>
+            <a:off x="4846320" y="2880360"/>
             <a:ext cx="1993392" cy="402336"/>
           </a:xfrm>
           <a:prstGeom prst="rect">
@@ -11209,8 +11576,8 @@
         </p:nvSpPr>
         <p:spPr>
           <a:xfrm>
-            <a:off x="5074920" y="3328416"/>
-            <a:ext cx="1993392" cy="457200"/>
+            <a:off x="4846320" y="3291840"/>
+            <a:ext cx="1993392" cy="438912"/>
           </a:xfrm>
           <a:prstGeom prst="rect">
             <a:avLst/>
@@ -11230,8 +11597,8 @@
                   <a:srgbClr val="E2E8F0"/>
                 </a:solidFill>
               </a:rPr>
-              <a:t>Global edge caching
-SPA routing</a:t>
+              <a:t>Edge caching
+/api/* passthrough</a:t>
             </a:r>
           </a:p>
         </p:txBody>
@@ -11244,8 +11611,8 @@
         </p:nvSpPr>
         <p:spPr>
           <a:xfrm>
-            <a:off x="7114032" y="3227832"/>
-            <a:ext cx="274320" cy="256032"/>
+            <a:off x="6894576" y="3136392"/>
+            <a:ext cx="164592" cy="274320"/>
           </a:xfrm>
           <a:prstGeom prst="rect">
             <a:avLst/>
@@ -11278,7 +11645,7 @@
         </p:nvSpPr>
         <p:spPr>
           <a:xfrm>
-            <a:off x="7452360" y="2834640"/>
+            <a:off x="7095744" y="2788920"/>
             <a:ext cx="1993392" cy="1005840"/>
           </a:xfrm>
           <a:prstGeom prst="rect">
@@ -11321,7 +11688,7 @@
         </p:nvSpPr>
         <p:spPr>
           <a:xfrm>
-            <a:off x="7452360" y="2926080"/>
+            <a:off x="7095744" y="2880360"/>
             <a:ext cx="1993392" cy="402336"/>
           </a:xfrm>
           <a:prstGeom prst="rect">
@@ -11342,8 +11709,7 @@
                   <a:srgbClr val="FFFFFF"/>
                 </a:solidFill>
               </a:rPr>
-              <a:t>React SPA
-(S3)</a:t>
+              <a:t>React SPA (S3)</a:t>
             </a:r>
           </a:p>
         </p:txBody>
@@ -11356,8 +11722,8 @@
         </p:nvSpPr>
         <p:spPr>
           <a:xfrm>
-            <a:off x="7452360" y="3328416"/>
-            <a:ext cx="1993392" cy="457200"/>
+            <a:off x="7095744" y="3291840"/>
+            <a:ext cx="1993392" cy="438912"/>
           </a:xfrm>
           <a:prstGeom prst="rect">
             <a:avLst/>
@@ -11391,8 +11757,8 @@
         </p:nvSpPr>
         <p:spPr>
           <a:xfrm>
-            <a:off x="320040" y="4069080"/>
-            <a:ext cx="11430000" cy="274320"/>
+            <a:off x="347472" y="4005072"/>
+            <a:ext cx="10972800" cy="237744"/>
           </a:xfrm>
           <a:prstGeom prst="rect">
             <a:avLst/>
@@ -11407,7 +11773,7 @@
           <a:p>
             <a:pPr algn="l"/>
             <a:r>
-              <a:rPr sz="1100" b="1" i="0">
+              <a:rPr sz="1000" b="1" i="0">
                 <a:solidFill>
                   <a:srgbClr val="94A3B8"/>
                 </a:solidFill>
@@ -11425,8 +11791,8 @@
         </p:nvSpPr>
         <p:spPr>
           <a:xfrm>
-            <a:off x="320040" y="4389120"/>
-            <a:ext cx="1874519" cy="365760"/>
+            <a:off x="347472" y="4297680"/>
+            <a:ext cx="1865376" cy="365760"/>
           </a:xfrm>
           <a:prstGeom prst="rect">
             <a:avLst/>
@@ -11468,8 +11834,8 @@
         </p:nvSpPr>
         <p:spPr>
           <a:xfrm>
-            <a:off x="320040" y="4398264"/>
-            <a:ext cx="1874519" cy="347472"/>
+            <a:off x="347472" y="4315968"/>
+            <a:ext cx="1865376" cy="329184"/>
           </a:xfrm>
           <a:prstGeom prst="rect">
             <a:avLst/>
@@ -11502,8 +11868,8 @@
         </p:nvSpPr>
         <p:spPr>
           <a:xfrm>
-            <a:off x="2304288" y="4389120"/>
-            <a:ext cx="1874519" cy="365760"/>
+            <a:off x="2304288" y="4297680"/>
+            <a:ext cx="1865376" cy="365760"/>
           </a:xfrm>
           <a:prstGeom prst="rect">
             <a:avLst/>
@@ -11545,8 +11911,8 @@
         </p:nvSpPr>
         <p:spPr>
           <a:xfrm>
-            <a:off x="2304288" y="4398264"/>
-            <a:ext cx="1874519" cy="347472"/>
+            <a:off x="2304288" y="4315968"/>
+            <a:ext cx="1865376" cy="329184"/>
           </a:xfrm>
           <a:prstGeom prst="rect">
             <a:avLst/>
@@ -11579,8 +11945,8 @@
         </p:nvSpPr>
         <p:spPr>
           <a:xfrm>
-            <a:off x="4288536" y="4389120"/>
-            <a:ext cx="1874519" cy="365760"/>
+            <a:off x="4261104" y="4297680"/>
+            <a:ext cx="1865376" cy="365760"/>
           </a:xfrm>
           <a:prstGeom prst="rect">
             <a:avLst/>
@@ -11622,8 +11988,8 @@
         </p:nvSpPr>
         <p:spPr>
           <a:xfrm>
-            <a:off x="4288536" y="4398264"/>
-            <a:ext cx="1874519" cy="347472"/>
+            <a:off x="4261104" y="4315968"/>
+            <a:ext cx="1865376" cy="329184"/>
           </a:xfrm>
           <a:prstGeom prst="rect">
             <a:avLst/>
@@ -11643,7 +12009,7 @@
                   <a:srgbClr val="CBD5E1"/>
                 </a:solidFill>
               </a:rPr>
-              <a:t>DynamoDB on-demand</a:t>
+              <a:t>DynamoDB on-demand · S3</a:t>
             </a:r>
           </a:p>
         </p:txBody>
@@ -11656,8 +12022,8 @@
         </p:nvSpPr>
         <p:spPr>
           <a:xfrm>
-            <a:off x="6272783" y="4389120"/>
-            <a:ext cx="1874519" cy="365760"/>
+            <a:off x="6217920" y="4297680"/>
+            <a:ext cx="1865376" cy="365760"/>
           </a:xfrm>
           <a:prstGeom prst="rect">
             <a:avLst/>
@@ -11699,8 +12065,8 @@
         </p:nvSpPr>
         <p:spPr>
           <a:xfrm>
-            <a:off x="6272783" y="4398264"/>
-            <a:ext cx="1874519" cy="347472"/>
+            <a:off x="6217920" y="4315968"/>
+            <a:ext cx="1865376" cy="329184"/>
           </a:xfrm>
           <a:prstGeom prst="rect">
             <a:avLst/>
@@ -11733,8 +12099,8 @@
         </p:nvSpPr>
         <p:spPr>
           <a:xfrm>
-            <a:off x="8257031" y="4389120"/>
-            <a:ext cx="1874519" cy="365760"/>
+            <a:off x="8174736" y="4297680"/>
+            <a:ext cx="1865376" cy="365760"/>
           </a:xfrm>
           <a:prstGeom prst="rect">
             <a:avLst/>
@@ -11776,8 +12142,8 @@
         </p:nvSpPr>
         <p:spPr>
           <a:xfrm>
-            <a:off x="8257031" y="4398264"/>
-            <a:ext cx="1874519" cy="347472"/>
+            <a:off x="8174736" y="4315968"/>
+            <a:ext cx="1865376" cy="329184"/>
           </a:xfrm>
           <a:prstGeom prst="rect">
             <a:avLst/>
@@ -11797,7 +12163,7 @@
                   <a:srgbClr val="CBD5E1"/>
                 </a:solidFill>
               </a:rPr>
-              <a:t>AWS SAM (IaC)</a:t>
+              <a:t>AWS SAM (Infrastructure as Code)</a:t>
             </a:r>
           </a:p>
         </p:txBody>
@@ -11810,8 +12176,8 @@
         </p:nvSpPr>
         <p:spPr>
           <a:xfrm>
-            <a:off x="10241280" y="4389120"/>
-            <a:ext cx="1874519" cy="365760"/>
+            <a:off x="10131552" y="4297680"/>
+            <a:ext cx="1865376" cy="365760"/>
           </a:xfrm>
           <a:prstGeom prst="rect">
             <a:avLst/>
@@ -11853,8 +12219,8 @@
         </p:nvSpPr>
         <p:spPr>
           <a:xfrm>
-            <a:off x="10241280" y="4398264"/>
-            <a:ext cx="1874519" cy="347472"/>
+            <a:off x="10131552" y="4315968"/>
+            <a:ext cx="1865376" cy="329184"/>
           </a:xfrm>
           <a:prstGeom prst="rect">
             <a:avLst/>
@@ -11874,7 +12240,7 @@
                   <a:srgbClr val="CBD5E1"/>
                 </a:solidFill>
               </a:rPr>
-              <a:t>~$0.31/month</a:t>
+              <a:t>~$0.31 / month</a:t>
             </a:r>
           </a:p>
         </p:txBody>
@@ -11906,7 +12272,7 @@
         <p:spPr>
           <a:xfrm>
             <a:off x="0" y="0"/>
-            <a:ext cx="12188952" cy="6858000"/>
+            <a:ext cx="12192000" cy="6858000"/>
           </a:xfrm>
           <a:prstGeom prst="rect">
             <a:avLst/>
@@ -11949,7 +12315,7 @@
         <p:spPr>
           <a:xfrm>
             <a:off x="0" y="0"/>
-            <a:ext cx="12188952" cy="1005840"/>
+            <a:ext cx="12192000" cy="960120"/>
           </a:xfrm>
           <a:prstGeom prst="rect">
             <a:avLst/>
@@ -11991,8 +12357,8 @@
         </p:nvSpPr>
         <p:spPr>
           <a:xfrm>
-            <a:off x="0" y="6748272"/>
-            <a:ext cx="12188952" cy="109728"/>
+            <a:off x="0" y="6766560"/>
+            <a:ext cx="12192000" cy="91440"/>
           </a:xfrm>
           <a:prstGeom prst="rect">
             <a:avLst/>
@@ -12034,7 +12400,7 @@
         </p:nvSpPr>
         <p:spPr>
           <a:xfrm>
-            <a:off x="502920" y="182880"/>
+            <a:off x="502920" y="164592"/>
             <a:ext cx="10058400" cy="512064"/>
           </a:xfrm>
           <a:prstGeom prst="rect">
@@ -12068,7 +12434,7 @@
         </p:nvSpPr>
         <p:spPr>
           <a:xfrm>
-            <a:off x="502920" y="694944"/>
+            <a:off x="502920" y="676656"/>
             <a:ext cx="10058400" cy="256032"/>
           </a:xfrm>
           <a:prstGeom prst="rect">
@@ -12102,8 +12468,51 @@
         </p:nvSpPr>
         <p:spPr>
           <a:xfrm>
-            <a:off x="411480" y="1188720"/>
-            <a:ext cx="3749039" cy="1645920"/>
+            <a:off x="411480" y="1197864"/>
+            <a:ext cx="3703320" cy="1664208"/>
+          </a:xfrm>
+          <a:prstGeom prst="rect">
+            <a:avLst/>
+          </a:prstGeom>
+          <a:solidFill>
+            <a:srgbClr val="CBD5E1"/>
+          </a:solidFill>
+          <a:ln>
+            <a:noFill/>
+          </a:ln>
+        </p:spPr>
+        <p:style>
+          <a:lnRef idx="1">
+            <a:schemeClr val="accent1"/>
+          </a:lnRef>
+          <a:fillRef idx="3">
+            <a:schemeClr val="accent1"/>
+          </a:fillRef>
+          <a:effectRef idx="2">
+            <a:schemeClr val="accent1"/>
+          </a:effectRef>
+          <a:fontRef idx="minor">
+            <a:schemeClr val="lt1"/>
+          </a:fontRef>
+        </p:style>
+        <p:txBody>
+          <a:bodyPr rtlCol="0" anchor="ctr"/>
+          <a:lstStyle/>
+          <a:p>
+            <a:pPr algn="ctr"/>
+          </a:p>
+        </p:txBody>
+      </p:sp>
+      <p:sp>
+        <p:nvSpPr>
+          <p:cNvPr id="8" name="Rectangle 7"/>
+          <p:cNvSpPr/>
+          <p:nvPr/>
+        </p:nvSpPr>
+        <p:spPr>
+          <a:xfrm>
+            <a:off x="384048" y="1170432"/>
+            <a:ext cx="3703320" cy="1664208"/>
           </a:xfrm>
           <a:prstGeom prst="rect">
             <a:avLst/>
@@ -12111,7 +12520,7 @@
           <a:solidFill>
             <a:srgbClr val="FFFFFF"/>
           </a:solidFill>
-          <a:ln w="12700">
+          <a:ln w="9525">
             <a:solidFill>
               <a:srgbClr val="E2E8F0"/>
             </a:solidFill>
@@ -12141,14 +12550,14 @@
       </p:sp>
       <p:sp>
         <p:nvSpPr>
-          <p:cNvPr id="8" name="Rectangle 7"/>
-          <p:cNvSpPr/>
-          <p:nvPr/>
-        </p:nvSpPr>
-        <p:spPr>
-          <a:xfrm>
-            <a:off x="411480" y="1188720"/>
-            <a:ext cx="73152" cy="1645920"/>
+          <p:cNvPr id="9" name="Rectangle 8"/>
+          <p:cNvSpPr/>
+          <p:nvPr/>
+        </p:nvSpPr>
+        <p:spPr>
+          <a:xfrm>
+            <a:off x="384048" y="1170432"/>
+            <a:ext cx="73152" cy="1664208"/>
           </a:xfrm>
           <a:prstGeom prst="rect">
             <a:avLst/>
@@ -12184,14 +12593,14 @@
       </p:sp>
       <p:sp>
         <p:nvSpPr>
-          <p:cNvPr id="9" name="TextBox 8"/>
-          <p:cNvSpPr txBox="1"/>
-          <p:nvPr/>
-        </p:nvSpPr>
-        <p:spPr>
-          <a:xfrm>
-            <a:off x="548640" y="1280160"/>
-            <a:ext cx="3547871" cy="274320"/>
+          <p:cNvPr id="10" name="TextBox 9"/>
+          <p:cNvSpPr txBox="1"/>
+          <p:nvPr/>
+        </p:nvSpPr>
+        <p:spPr>
+          <a:xfrm>
+            <a:off x="521208" y="1261872"/>
+            <a:ext cx="3502152" cy="274320"/>
           </a:xfrm>
           <a:prstGeom prst="rect">
             <a:avLst/>
@@ -12218,14 +12627,14 @@
       </p:sp>
       <p:sp>
         <p:nvSpPr>
-          <p:cNvPr id="10" name="TextBox 9"/>
-          <p:cNvSpPr txBox="1"/>
-          <p:nvPr/>
-        </p:nvSpPr>
-        <p:spPr>
-          <a:xfrm>
-            <a:off x="548640" y="1572768"/>
-            <a:ext cx="3547871" cy="512064"/>
+          <p:cNvPr id="11" name="TextBox 10"/>
+          <p:cNvSpPr txBox="1"/>
+          <p:nvPr/>
+        </p:nvSpPr>
+        <p:spPr>
+          <a:xfrm>
+            <a:off x="521208" y="1572768"/>
+            <a:ext cx="3502152" cy="475488"/>
           </a:xfrm>
           <a:prstGeom prst="rect">
             <a:avLst/>
@@ -12245,21 +12654,21 @@
                   <a:srgbClr val="64748B"/>
                 </a:solidFill>
               </a:rPr>
-              <a:t>Fetches https://aws.amazon.com/new/feed/ every 6 hours via EventBridge Scheduler. Zero manual effort — new announcements appear within hours of posting.</a:t>
-            </a:r>
-          </a:p>
-        </p:txBody>
-      </p:sp>
-      <p:sp>
-        <p:nvSpPr>
-          <p:cNvPr id="11" name="Rectangle 10"/>
-          <p:cNvSpPr/>
-          <p:nvPr/>
-        </p:nvSpPr>
-        <p:spPr>
-          <a:xfrm>
-            <a:off x="548640" y="2155698"/>
-            <a:ext cx="109728" cy="109728"/>
+              <a:t>Fetches aws.amazon.com/new/feed/ every 6 hours via EventBridge Scheduler. Zero manual effort.</a:t>
+            </a:r>
+          </a:p>
+        </p:txBody>
+      </p:sp>
+      <p:sp>
+        <p:nvSpPr>
+          <p:cNvPr id="12" name="Rectangle 11"/>
+          <p:cNvSpPr/>
+          <p:nvPr/>
+        </p:nvSpPr>
+        <p:spPr>
+          <a:xfrm>
+            <a:off x="521208" y="2232964"/>
+            <a:ext cx="91440" cy="91440"/>
           </a:xfrm>
           <a:prstGeom prst="rect">
             <a:avLst/>
@@ -12295,47 +12704,48 @@
       </p:sp>
       <p:sp>
         <p:nvSpPr>
-          <p:cNvPr id="12" name="TextBox 11"/>
-          <p:cNvSpPr txBox="1"/>
-          <p:nvPr/>
-        </p:nvSpPr>
-        <p:spPr>
-          <a:xfrm>
-            <a:off x="749808" y="2121408"/>
-            <a:ext cx="3346703" cy="256032"/>
-          </a:xfrm>
-          <a:prstGeom prst="rect">
-            <a:avLst/>
-          </a:prstGeom>
-          <a:noFill/>
-        </p:spPr>
-        <p:txBody>
-          <a:bodyPr wrap="square">
-            <a:spAutoFit/>
-          </a:bodyPr>
-          <a:lstStyle/>
-          <a:p>
-            <a:r>
-              <a:rPr sz="900">
+          <p:cNvPr id="13" name="TextBox 12"/>
+          <p:cNvSpPr txBox="1"/>
+          <p:nvPr/>
+        </p:nvSpPr>
+        <p:spPr>
+          <a:xfrm>
+            <a:off x="685800" y="2084832"/>
+            <a:ext cx="3337560" cy="256032"/>
+          </a:xfrm>
+          <a:prstGeom prst="rect">
+            <a:avLst/>
+          </a:prstGeom>
+          <a:noFill/>
+        </p:spPr>
+        <p:txBody>
+          <a:bodyPr wrap="square">
+            <a:spAutoFit/>
+          </a:bodyPr>
+          <a:lstStyle/>
+          <a:p>
+            <a:pPr algn="l"/>
+            <a:r>
+              <a:rPr sz="900" b="0" i="0">
                 <a:solidFill>
                   <a:srgbClr val="1E293B"/>
                 </a:solidFill>
               </a:rPr>
-              <a:t>No manual RSS monitoring ever again</a:t>
-            </a:r>
-          </a:p>
-        </p:txBody>
-      </p:sp>
-      <p:sp>
-        <p:nvSpPr>
-          <p:cNvPr id="13" name="Rectangle 12"/>
-          <p:cNvSpPr/>
-          <p:nvPr/>
-        </p:nvSpPr>
-        <p:spPr>
-          <a:xfrm>
-            <a:off x="548640" y="2448306"/>
-            <a:ext cx="109728" cy="109728"/>
+              <a:t>No manual RSS monitoring</a:t>
+            </a:r>
+          </a:p>
+        </p:txBody>
+      </p:sp>
+      <p:sp>
+        <p:nvSpPr>
+          <p:cNvPr id="14" name="Rectangle 13"/>
+          <p:cNvSpPr/>
+          <p:nvPr/>
+        </p:nvSpPr>
+        <p:spPr>
+          <a:xfrm>
+            <a:off x="521208" y="2525572"/>
+            <a:ext cx="91440" cy="91440"/>
           </a:xfrm>
           <a:prstGeom prst="rect">
             <a:avLst/>
@@ -12371,47 +12781,91 @@
       </p:sp>
       <p:sp>
         <p:nvSpPr>
-          <p:cNvPr id="14" name="TextBox 13"/>
-          <p:cNvSpPr txBox="1"/>
-          <p:nvPr/>
-        </p:nvSpPr>
-        <p:spPr>
-          <a:xfrm>
-            <a:off x="749808" y="2414016"/>
-            <a:ext cx="3346703" cy="256032"/>
-          </a:xfrm>
-          <a:prstGeom prst="rect">
-            <a:avLst/>
-          </a:prstGeom>
-          <a:noFill/>
-        </p:spPr>
-        <p:txBody>
-          <a:bodyPr wrap="square">
-            <a:spAutoFit/>
-          </a:bodyPr>
-          <a:lstStyle/>
-          <a:p>
-            <a:r>
-              <a:rPr sz="900">
+          <p:cNvPr id="15" name="TextBox 14"/>
+          <p:cNvSpPr txBox="1"/>
+          <p:nvPr/>
+        </p:nvSpPr>
+        <p:spPr>
+          <a:xfrm>
+            <a:off x="685800" y="2377440"/>
+            <a:ext cx="3337560" cy="256032"/>
+          </a:xfrm>
+          <a:prstGeom prst="rect">
+            <a:avLst/>
+          </a:prstGeom>
+          <a:noFill/>
+        </p:spPr>
+        <p:txBody>
+          <a:bodyPr wrap="square">
+            <a:spAutoFit/>
+          </a:bodyPr>
+          <a:lstStyle/>
+          <a:p>
+            <a:pPr algn="l"/>
+            <a:r>
+              <a:rPr sz="900" b="0" i="0">
                 <a:solidFill>
                   <a:srgbClr val="1E293B"/>
                 </a:solidFill>
               </a:rPr>
-              <a:t>Deduplication ensures no double-processing</a:t>
-            </a:r>
-          </a:p>
-        </p:txBody>
-      </p:sp>
-      <p:sp>
-        <p:nvSpPr>
-          <p:cNvPr id="15" name="Rectangle 14"/>
-          <p:cNvSpPr/>
-          <p:nvPr/>
-        </p:nvSpPr>
-        <p:spPr>
-          <a:xfrm>
-            <a:off x="3528456956280" y="1188720"/>
-            <a:ext cx="3749039" cy="1645920"/>
+              <a:t>Deduplication on guid</a:t>
+            </a:r>
+          </a:p>
+        </p:txBody>
+      </p:sp>
+      <p:sp>
+        <p:nvSpPr>
+          <p:cNvPr id="16" name="Rectangle 15"/>
+          <p:cNvSpPr/>
+          <p:nvPr/>
+        </p:nvSpPr>
+        <p:spPr>
+          <a:xfrm>
+            <a:off x="4224528" y="1197864"/>
+            <a:ext cx="3703320" cy="1664208"/>
+          </a:xfrm>
+          <a:prstGeom prst="rect">
+            <a:avLst/>
+          </a:prstGeom>
+          <a:solidFill>
+            <a:srgbClr val="CBD5E1"/>
+          </a:solidFill>
+          <a:ln>
+            <a:noFill/>
+          </a:ln>
+        </p:spPr>
+        <p:style>
+          <a:lnRef idx="1">
+            <a:schemeClr val="accent1"/>
+          </a:lnRef>
+          <a:fillRef idx="3">
+            <a:schemeClr val="accent1"/>
+          </a:fillRef>
+          <a:effectRef idx="2">
+            <a:schemeClr val="accent1"/>
+          </a:effectRef>
+          <a:fontRef idx="minor">
+            <a:schemeClr val="lt1"/>
+          </a:fontRef>
+        </p:style>
+        <p:txBody>
+          <a:bodyPr rtlCol="0" anchor="ctr"/>
+          <a:lstStyle/>
+          <a:p>
+            <a:pPr algn="ctr"/>
+          </a:p>
+        </p:txBody>
+      </p:sp>
+      <p:sp>
+        <p:nvSpPr>
+          <p:cNvPr id="17" name="Rectangle 16"/>
+          <p:cNvSpPr/>
+          <p:nvPr/>
+        </p:nvSpPr>
+        <p:spPr>
+          <a:xfrm>
+            <a:off x="4197096" y="1170432"/>
+            <a:ext cx="3703320" cy="1664208"/>
           </a:xfrm>
           <a:prstGeom prst="rect">
             <a:avLst/>
@@ -12419,7 +12873,7 @@
           <a:solidFill>
             <a:srgbClr val="FFFFFF"/>
           </a:solidFill>
-          <a:ln w="12700">
+          <a:ln w="9525">
             <a:solidFill>
               <a:srgbClr val="E2E8F0"/>
             </a:solidFill>
@@ -12449,14 +12903,14 @@
       </p:sp>
       <p:sp>
         <p:nvSpPr>
-          <p:cNvPr id="16" name="Rectangle 15"/>
-          <p:cNvSpPr/>
-          <p:nvPr/>
-        </p:nvSpPr>
-        <p:spPr>
-          <a:xfrm>
-            <a:off x="3528456956280" y="1188720"/>
-            <a:ext cx="73152" cy="1645920"/>
+          <p:cNvPr id="18" name="Rectangle 17"/>
+          <p:cNvSpPr/>
+          <p:nvPr/>
+        </p:nvSpPr>
+        <p:spPr>
+          <a:xfrm>
+            <a:off x="4197096" y="1170432"/>
+            <a:ext cx="73152" cy="1664208"/>
           </a:xfrm>
           <a:prstGeom prst="rect">
             <a:avLst/>
@@ -12492,14 +12946,14 @@
       </p:sp>
       <p:sp>
         <p:nvSpPr>
-          <p:cNvPr id="17" name="TextBox 16"/>
-          <p:cNvSpPr txBox="1"/>
-          <p:nvPr/>
-        </p:nvSpPr>
-        <p:spPr>
-          <a:xfrm>
-            <a:off x="3528457093440" y="1280160"/>
-            <a:ext cx="3547871" cy="274320"/>
+          <p:cNvPr id="19" name="TextBox 18"/>
+          <p:cNvSpPr txBox="1"/>
+          <p:nvPr/>
+        </p:nvSpPr>
+        <p:spPr>
+          <a:xfrm>
+            <a:off x="4334256" y="1261872"/>
+            <a:ext cx="3502152" cy="274320"/>
           </a:xfrm>
           <a:prstGeom prst="rect">
             <a:avLst/>
@@ -12526,14 +12980,14 @@
       </p:sp>
       <p:sp>
         <p:nvSpPr>
-          <p:cNvPr id="18" name="TextBox 17"/>
-          <p:cNvSpPr txBox="1"/>
-          <p:nvPr/>
-        </p:nvSpPr>
-        <p:spPr>
-          <a:xfrm>
-            <a:off x="3528457093440" y="1572768"/>
-            <a:ext cx="3547871" cy="512064"/>
+          <p:cNvPr id="20" name="TextBox 19"/>
+          <p:cNvSpPr txBox="1"/>
+          <p:nvPr/>
+        </p:nvSpPr>
+        <p:spPr>
+          <a:xfrm>
+            <a:off x="4334256" y="1572768"/>
+            <a:ext cx="3502152" cy="475488"/>
           </a:xfrm>
           <a:prstGeom prst="rect">
             <a:avLst/>
@@ -12553,21 +13007,21 @@
                   <a:srgbClr val="64748B"/>
                 </a:solidFill>
               </a:rPr>
-              <a:t>Claude Haiku (Amazon Bedrock) summarizes each announcement into 3-5 actionable sentences focused on what changed, who it benefits, and key technical limits.</a:t>
-            </a:r>
-          </a:p>
-        </p:txBody>
-      </p:sp>
-      <p:sp>
-        <p:nvSpPr>
-          <p:cNvPr id="19" name="Rectangle 18"/>
-          <p:cNvSpPr/>
-          <p:nvPr/>
-        </p:nvSpPr>
-        <p:spPr>
-          <a:xfrm>
-            <a:off x="3528457093440" y="2155698"/>
-            <a:ext cx="109728" cy="109728"/>
+              <a:t>Claude Haiku (Bedrock) produces 3-5 sentence engineer-focused summaries with structured output.</a:t>
+            </a:r>
+          </a:p>
+        </p:txBody>
+      </p:sp>
+      <p:sp>
+        <p:nvSpPr>
+          <p:cNvPr id="21" name="Rectangle 20"/>
+          <p:cNvSpPr/>
+          <p:nvPr/>
+        </p:nvSpPr>
+        <p:spPr>
+          <a:xfrm>
+            <a:off x="4334256" y="2232964"/>
+            <a:ext cx="91440" cy="91440"/>
           </a:xfrm>
           <a:prstGeom prst="rect">
             <a:avLst/>
@@ -12603,47 +13057,48 @@
       </p:sp>
       <p:sp>
         <p:nvSpPr>
-          <p:cNvPr id="20" name="TextBox 19"/>
-          <p:cNvSpPr txBox="1"/>
-          <p:nvPr/>
-        </p:nvSpPr>
-        <p:spPr>
-          <a:xfrm>
-            <a:off x="3528457294608" y="2121408"/>
-            <a:ext cx="3346703" cy="256032"/>
-          </a:xfrm>
-          <a:prstGeom prst="rect">
-            <a:avLst/>
-          </a:prstGeom>
-          <a:noFill/>
-        </p:spPr>
-        <p:txBody>
-          <a:bodyPr wrap="square">
-            <a:spAutoFit/>
-          </a:bodyPr>
-          <a:lstStyle/>
-          <a:p>
-            <a:r>
-              <a:rPr sz="900">
+          <p:cNvPr id="22" name="TextBox 21"/>
+          <p:cNvSpPr txBox="1"/>
+          <p:nvPr/>
+        </p:nvSpPr>
+        <p:spPr>
+          <a:xfrm>
+            <a:off x="4498848" y="2084832"/>
+            <a:ext cx="3337560" cy="256032"/>
+          </a:xfrm>
+          <a:prstGeom prst="rect">
+            <a:avLst/>
+          </a:prstGeom>
+          <a:noFill/>
+        </p:spPr>
+        <p:txBody>
+          <a:bodyPr wrap="square">
+            <a:spAutoFit/>
+          </a:bodyPr>
+          <a:lstStyle/>
+          <a:p>
+            <a:pPr algn="l"/>
+            <a:r>
+              <a:rPr sz="900" b="0" i="0">
                 <a:solidFill>
                   <a:srgbClr val="1E293B"/>
                 </a:solidFill>
               </a:rPr>
-              <a:t>Feature type auto-classified: new-feature, GA, preview, deprecation...</a:t>
-            </a:r>
-          </a:p>
-        </p:txBody>
-      </p:sp>
-      <p:sp>
-        <p:nvSpPr>
-          <p:cNvPr id="21" name="Rectangle 20"/>
-          <p:cNvSpPr/>
-          <p:nvPr/>
-        </p:nvSpPr>
-        <p:spPr>
-          <a:xfrm>
-            <a:off x="3528457093440" y="2448306"/>
-            <a:ext cx="109728" cy="109728"/>
+              <a:t>Feature type auto-classified (8 categories)</a:t>
+            </a:r>
+          </a:p>
+        </p:txBody>
+      </p:sp>
+      <p:sp>
+        <p:nvSpPr>
+          <p:cNvPr id="23" name="Rectangle 22"/>
+          <p:cNvSpPr/>
+          <p:nvPr/>
+        </p:nvSpPr>
+        <p:spPr>
+          <a:xfrm>
+            <a:off x="4334256" y="2525572"/>
+            <a:ext cx="91440" cy="91440"/>
           </a:xfrm>
           <a:prstGeom prst="rect">
             <a:avLst/>
@@ -12679,47 +13134,91 @@
       </p:sp>
       <p:sp>
         <p:nvSpPr>
-          <p:cNvPr id="22" name="TextBox 21"/>
-          <p:cNvSpPr txBox="1"/>
-          <p:nvPr/>
-        </p:nvSpPr>
-        <p:spPr>
-          <a:xfrm>
-            <a:off x="3528457294608" y="2414016"/>
-            <a:ext cx="3346703" cy="256032"/>
-          </a:xfrm>
-          <a:prstGeom prst="rect">
-            <a:avLst/>
-          </a:prstGeom>
-          <a:noFill/>
-        </p:spPr>
-        <p:txBody>
-          <a:bodyPr wrap="square">
-            <a:spAutoFit/>
-          </a:bodyPr>
-          <a:lstStyle/>
-          <a:p>
-            <a:r>
-              <a:rPr sz="900">
+          <p:cNvPr id="24" name="TextBox 23"/>
+          <p:cNvSpPr txBox="1"/>
+          <p:nvPr/>
+        </p:nvSpPr>
+        <p:spPr>
+          <a:xfrm>
+            <a:off x="4498848" y="2377440"/>
+            <a:ext cx="3337560" cy="256032"/>
+          </a:xfrm>
+          <a:prstGeom prst="rect">
+            <a:avLst/>
+          </a:prstGeom>
+          <a:noFill/>
+        </p:spPr>
+        <p:txBody>
+          <a:bodyPr wrap="square">
+            <a:spAutoFit/>
+          </a:bodyPr>
+          <a:lstStyle/>
+          <a:p>
+            <a:pPr algn="l"/>
+            <a:r>
+              <a:rPr sz="900" b="0" i="0">
                 <a:solidFill>
                   <a:srgbClr val="1E293B"/>
                 </a:solidFill>
               </a:rPr>
-              <a:t>3 key bullet points extracted per announcement</a:t>
-            </a:r>
-          </a:p>
-        </p:txBody>
-      </p:sp>
-      <p:sp>
-        <p:nvSpPr>
-          <p:cNvPr id="23" name="Rectangle 22"/>
-          <p:cNvSpPr/>
-          <p:nvPr/>
-        </p:nvSpPr>
-        <p:spPr>
-          <a:xfrm>
-            <a:off x="7056913501080" y="1188720"/>
-            <a:ext cx="3749039" cy="1645920"/>
+              <a:t>3 key points extracted per announcement</a:t>
+            </a:r>
+          </a:p>
+        </p:txBody>
+      </p:sp>
+      <p:sp>
+        <p:nvSpPr>
+          <p:cNvPr id="25" name="Rectangle 24"/>
+          <p:cNvSpPr/>
+          <p:nvPr/>
+        </p:nvSpPr>
+        <p:spPr>
+          <a:xfrm>
+            <a:off x="8037576" y="1197864"/>
+            <a:ext cx="3703320" cy="1664208"/>
+          </a:xfrm>
+          <a:prstGeom prst="rect">
+            <a:avLst/>
+          </a:prstGeom>
+          <a:solidFill>
+            <a:srgbClr val="CBD5E1"/>
+          </a:solidFill>
+          <a:ln>
+            <a:noFill/>
+          </a:ln>
+        </p:spPr>
+        <p:style>
+          <a:lnRef idx="1">
+            <a:schemeClr val="accent1"/>
+          </a:lnRef>
+          <a:fillRef idx="3">
+            <a:schemeClr val="accent1"/>
+          </a:fillRef>
+          <a:effectRef idx="2">
+            <a:schemeClr val="accent1"/>
+          </a:effectRef>
+          <a:fontRef idx="minor">
+            <a:schemeClr val="lt1"/>
+          </a:fontRef>
+        </p:style>
+        <p:txBody>
+          <a:bodyPr rtlCol="0" anchor="ctr"/>
+          <a:lstStyle/>
+          <a:p>
+            <a:pPr algn="ctr"/>
+          </a:p>
+        </p:txBody>
+      </p:sp>
+      <p:sp>
+        <p:nvSpPr>
+          <p:cNvPr id="26" name="Rectangle 25"/>
+          <p:cNvSpPr/>
+          <p:nvPr/>
+        </p:nvSpPr>
+        <p:spPr>
+          <a:xfrm>
+            <a:off x="8010144" y="1170432"/>
+            <a:ext cx="3703320" cy="1664208"/>
           </a:xfrm>
           <a:prstGeom prst="rect">
             <a:avLst/>
@@ -12727,7 +13226,7 @@
           <a:solidFill>
             <a:srgbClr val="FFFFFF"/>
           </a:solidFill>
-          <a:ln w="12700">
+          <a:ln w="9525">
             <a:solidFill>
               <a:srgbClr val="E2E8F0"/>
             </a:solidFill>
@@ -12757,14 +13256,14 @@
       </p:sp>
       <p:sp>
         <p:nvSpPr>
-          <p:cNvPr id="24" name="Rectangle 23"/>
-          <p:cNvSpPr/>
-          <p:nvPr/>
-        </p:nvSpPr>
-        <p:spPr>
-          <a:xfrm>
-            <a:off x="7056913501080" y="1188720"/>
-            <a:ext cx="73152" cy="1645920"/>
+          <p:cNvPr id="27" name="Rectangle 26"/>
+          <p:cNvSpPr/>
+          <p:nvPr/>
+        </p:nvSpPr>
+        <p:spPr>
+          <a:xfrm>
+            <a:off x="8010144" y="1170432"/>
+            <a:ext cx="73152" cy="1664208"/>
           </a:xfrm>
           <a:prstGeom prst="rect">
             <a:avLst/>
@@ -12800,14 +13299,14 @@
       </p:sp>
       <p:sp>
         <p:nvSpPr>
-          <p:cNvPr id="25" name="TextBox 24"/>
-          <p:cNvSpPr txBox="1"/>
-          <p:nvPr/>
-        </p:nvSpPr>
-        <p:spPr>
-          <a:xfrm>
-            <a:off x="7056913638240" y="1280160"/>
-            <a:ext cx="3547871" cy="274320"/>
+          <p:cNvPr id="28" name="TextBox 27"/>
+          <p:cNvSpPr txBox="1"/>
+          <p:nvPr/>
+        </p:nvSpPr>
+        <p:spPr>
+          <a:xfrm>
+            <a:off x="8147304" y="1261872"/>
+            <a:ext cx="3502152" cy="274320"/>
           </a:xfrm>
           <a:prstGeom prst="rect">
             <a:avLst/>
@@ -12834,14 +13333,14 @@
       </p:sp>
       <p:sp>
         <p:nvSpPr>
-          <p:cNvPr id="26" name="TextBox 25"/>
-          <p:cNvSpPr txBox="1"/>
-          <p:nvPr/>
-        </p:nvSpPr>
-        <p:spPr>
-          <a:xfrm>
-            <a:off x="7056913638240" y="1572768"/>
-            <a:ext cx="3547871" cy="512064"/>
+          <p:cNvPr id="29" name="TextBox 28"/>
+          <p:cNvSpPr txBox="1"/>
+          <p:nvPr/>
+        </p:nvSpPr>
+        <p:spPr>
+          <a:xfrm>
+            <a:off x="8147304" y="1572768"/>
+            <a:ext cx="3502152" cy="475488"/>
           </a:xfrm>
           <a:prstGeom prst="rect">
             <a:avLst/>
@@ -12861,21 +13360,21 @@
                   <a:srgbClr val="64748B"/>
                 </a:solidFill>
               </a:rPr>
-              <a:t>Full-text search across title, summary, and service. Filter by AWS service, feature type, and date range. All state is stored in the URL — results are bookmarkable.</a:t>
-            </a:r>
-          </a:p>
-        </p:txBody>
-      </p:sp>
-      <p:sp>
-        <p:nvSpPr>
-          <p:cNvPr id="27" name="Rectangle 26"/>
-          <p:cNvSpPr/>
-          <p:nvPr/>
-        </p:nvSpPr>
-        <p:spPr>
-          <a:xfrm>
-            <a:off x="7056913638240" y="2155698"/>
-            <a:ext cx="109728" cy="109728"/>
+              <a:t>Full-text search across title, summary and service. Filter by service, type, date. URL-based state.</a:t>
+            </a:r>
+          </a:p>
+        </p:txBody>
+      </p:sp>
+      <p:sp>
+        <p:nvSpPr>
+          <p:cNvPr id="30" name="Rectangle 29"/>
+          <p:cNvSpPr/>
+          <p:nvPr/>
+        </p:nvSpPr>
+        <p:spPr>
+          <a:xfrm>
+            <a:off x="8147304" y="2232964"/>
+            <a:ext cx="91440" cy="91440"/>
           </a:xfrm>
           <a:prstGeom prst="rect">
             <a:avLst/>
@@ -12911,47 +13410,48 @@
       </p:sp>
       <p:sp>
         <p:nvSpPr>
-          <p:cNvPr id="28" name="TextBox 27"/>
-          <p:cNvSpPr txBox="1"/>
-          <p:nvPr/>
-        </p:nvSpPr>
-        <p:spPr>
-          <a:xfrm>
-            <a:off x="7056913839408" y="2121408"/>
-            <a:ext cx="3346703" cy="256032"/>
-          </a:xfrm>
-          <a:prstGeom prst="rect">
-            <a:avLst/>
-          </a:prstGeom>
-          <a:noFill/>
-        </p:spPr>
-        <p:txBody>
-          <a:bodyPr wrap="square">
-            <a:spAutoFit/>
-          </a:bodyPr>
-          <a:lstStyle/>
-          <a:p>
-            <a:r>
-              <a:rPr sz="900">
+          <p:cNvPr id="31" name="TextBox 30"/>
+          <p:cNvSpPr txBox="1"/>
+          <p:nvPr/>
+        </p:nvSpPr>
+        <p:spPr>
+          <a:xfrm>
+            <a:off x="8311896" y="2084832"/>
+            <a:ext cx="3337560" cy="256032"/>
+          </a:xfrm>
+          <a:prstGeom prst="rect">
+            <a:avLst/>
+          </a:prstGeom>
+          <a:noFill/>
+        </p:spPr>
+        <p:txBody>
+          <a:bodyPr wrap="square">
+            <a:spAutoFit/>
+          </a:bodyPr>
+          <a:lstStyle/>
+          <a:p>
+            <a:pPr algn="l"/>
+            <a:r>
+              <a:rPr sz="900" b="0" i="0">
                 <a:solidFill>
                   <a:srgbClr val="1E293B"/>
                 </a:solidFill>
               </a:rPr>
-              <a:t>Search 'lambda timeout' and find it in seconds</a:t>
-            </a:r>
-          </a:p>
-        </p:txBody>
-      </p:sp>
-      <p:sp>
-        <p:nvSpPr>
-          <p:cNvPr id="29" name="Rectangle 28"/>
-          <p:cNvSpPr/>
-          <p:nvPr/>
-        </p:nvSpPr>
-        <p:spPr>
-          <a:xfrm>
-            <a:off x="7056913638240" y="2448306"/>
-            <a:ext cx="109728" cy="109728"/>
+              <a:t>Search 'lambda timeout' — instant results</a:t>
+            </a:r>
+          </a:p>
+        </p:txBody>
+      </p:sp>
+      <p:sp>
+        <p:nvSpPr>
+          <p:cNvPr id="32" name="Rectangle 31"/>
+          <p:cNvSpPr/>
+          <p:nvPr/>
+        </p:nvSpPr>
+        <p:spPr>
+          <a:xfrm>
+            <a:off x="8147304" y="2525572"/>
+            <a:ext cx="91440" cy="91440"/>
           </a:xfrm>
           <a:prstGeom prst="rect">
             <a:avLst/>
@@ -12987,47 +13487,91 @@
       </p:sp>
       <p:sp>
         <p:nvSpPr>
-          <p:cNvPr id="30" name="TextBox 29"/>
-          <p:cNvSpPr txBox="1"/>
-          <p:nvPr/>
-        </p:nvSpPr>
-        <p:spPr>
-          <a:xfrm>
-            <a:off x="7056913839408" y="2414016"/>
-            <a:ext cx="3346703" cy="256032"/>
-          </a:xfrm>
-          <a:prstGeom prst="rect">
-            <a:avLst/>
-          </a:prstGeom>
-          <a:noFill/>
-        </p:spPr>
-        <p:txBody>
-          <a:bodyPr wrap="square">
-            <a:spAutoFit/>
-          </a:bodyPr>
-          <a:lstStyle/>
-          <a:p>
-            <a:r>
-              <a:rPr sz="900">
+          <p:cNvPr id="33" name="TextBox 32"/>
+          <p:cNvSpPr txBox="1"/>
+          <p:nvPr/>
+        </p:nvSpPr>
+        <p:spPr>
+          <a:xfrm>
+            <a:off x="8311896" y="2377440"/>
+            <a:ext cx="3337560" cy="256032"/>
+          </a:xfrm>
+          <a:prstGeom prst="rect">
+            <a:avLst/>
+          </a:prstGeom>
+          <a:noFill/>
+        </p:spPr>
+        <p:txBody>
+          <a:bodyPr wrap="square">
+            <a:spAutoFit/>
+          </a:bodyPr>
+          <a:lstStyle/>
+          <a:p>
+            <a:pPr algn="l"/>
+            <a:r>
+              <a:rPr sz="900" b="0" i="0">
                 <a:solidFill>
                   <a:srgbClr val="1E293B"/>
                 </a:solidFill>
               </a:rPr>
-              <a:t>Filter by service: amazon-ec2, aws-lambda, amazon-rds…</a:t>
-            </a:r>
-          </a:p>
-        </p:txBody>
-      </p:sp>
-      <p:sp>
-        <p:nvSpPr>
-          <p:cNvPr id="31" name="Rectangle 30"/>
-          <p:cNvSpPr/>
-          <p:nvPr/>
-        </p:nvSpPr>
-        <p:spPr>
-          <a:xfrm>
-            <a:off x="411480" y="1588643172720"/>
-            <a:ext cx="3749039" cy="1645920"/>
+              <a:t>Date range: what changed in Q1 2026?</a:t>
+            </a:r>
+          </a:p>
+        </p:txBody>
+      </p:sp>
+      <p:sp>
+        <p:nvSpPr>
+          <p:cNvPr id="34" name="Rectangle 33"/>
+          <p:cNvSpPr/>
+          <p:nvPr/>
+        </p:nvSpPr>
+        <p:spPr>
+          <a:xfrm>
+            <a:off x="411480" y="2953512"/>
+            <a:ext cx="3703320" cy="1664208"/>
+          </a:xfrm>
+          <a:prstGeom prst="rect">
+            <a:avLst/>
+          </a:prstGeom>
+          <a:solidFill>
+            <a:srgbClr val="CBD5E1"/>
+          </a:solidFill>
+          <a:ln>
+            <a:noFill/>
+          </a:ln>
+        </p:spPr>
+        <p:style>
+          <a:lnRef idx="1">
+            <a:schemeClr val="accent1"/>
+          </a:lnRef>
+          <a:fillRef idx="3">
+            <a:schemeClr val="accent1"/>
+          </a:fillRef>
+          <a:effectRef idx="2">
+            <a:schemeClr val="accent1"/>
+          </a:effectRef>
+          <a:fontRef idx="minor">
+            <a:schemeClr val="lt1"/>
+          </a:fontRef>
+        </p:style>
+        <p:txBody>
+          <a:bodyPr rtlCol="0" anchor="ctr"/>
+          <a:lstStyle/>
+          <a:p>
+            <a:pPr algn="ctr"/>
+          </a:p>
+        </p:txBody>
+      </p:sp>
+      <p:sp>
+        <p:nvSpPr>
+          <p:cNvPr id="35" name="Rectangle 34"/>
+          <p:cNvSpPr/>
+          <p:nvPr/>
+        </p:nvSpPr>
+        <p:spPr>
+          <a:xfrm>
+            <a:off x="384048" y="2926080"/>
+            <a:ext cx="3703320" cy="1664208"/>
           </a:xfrm>
           <a:prstGeom prst="rect">
             <a:avLst/>
@@ -13035,7 +13579,7 @@
           <a:solidFill>
             <a:srgbClr val="FFFFFF"/>
           </a:solidFill>
-          <a:ln w="12700">
+          <a:ln w="9525">
             <a:solidFill>
               <a:srgbClr val="E2E8F0"/>
             </a:solidFill>
@@ -13065,14 +13609,14 @@
       </p:sp>
       <p:sp>
         <p:nvSpPr>
-          <p:cNvPr id="32" name="Rectangle 31"/>
-          <p:cNvSpPr/>
-          <p:nvPr/>
-        </p:nvSpPr>
-        <p:spPr>
-          <a:xfrm>
-            <a:off x="411480" y="1588643172720"/>
-            <a:ext cx="73152" cy="1645920"/>
+          <p:cNvPr id="36" name="Rectangle 35"/>
+          <p:cNvSpPr/>
+          <p:nvPr/>
+        </p:nvSpPr>
+        <p:spPr>
+          <a:xfrm>
+            <a:off x="384048" y="2926080"/>
+            <a:ext cx="73152" cy="1664208"/>
           </a:xfrm>
           <a:prstGeom prst="rect">
             <a:avLst/>
@@ -13108,14 +13652,14 @@
       </p:sp>
       <p:sp>
         <p:nvSpPr>
-          <p:cNvPr id="33" name="TextBox 32"/>
-          <p:cNvSpPr txBox="1"/>
-          <p:nvPr/>
-        </p:nvSpPr>
-        <p:spPr>
-          <a:xfrm>
-            <a:off x="548640" y="1588643264160"/>
-            <a:ext cx="3547871" cy="274320"/>
+          <p:cNvPr id="37" name="TextBox 36"/>
+          <p:cNvSpPr txBox="1"/>
+          <p:nvPr/>
+        </p:nvSpPr>
+        <p:spPr>
+          <a:xfrm>
+            <a:off x="521208" y="3017520"/>
+            <a:ext cx="3502152" cy="274320"/>
           </a:xfrm>
           <a:prstGeom prst="rect">
             <a:avLst/>
@@ -13142,14 +13686,14 @@
       </p:sp>
       <p:sp>
         <p:nvSpPr>
-          <p:cNvPr id="34" name="TextBox 33"/>
-          <p:cNvSpPr txBox="1"/>
-          <p:nvPr/>
-        </p:nvSpPr>
-        <p:spPr>
-          <a:xfrm>
-            <a:off x="548640" y="1588643556768"/>
-            <a:ext cx="3547871" cy="512064"/>
+          <p:cNvPr id="38" name="TextBox 37"/>
+          <p:cNvSpPr txBox="1"/>
+          <p:nvPr/>
+        </p:nvSpPr>
+        <p:spPr>
+          <a:xfrm>
+            <a:off x="521208" y="3328416"/>
+            <a:ext cx="3502152" cy="475488"/>
           </a:xfrm>
           <a:prstGeom prst="rect">
             <a:avLst/>
@@ -13169,21 +13713,21 @@
                   <a:srgbClr val="64748B"/>
                 </a:solidFill>
               </a:rPr>
-              <a:t>Bedrock classifies every announcement into one of 8 types so admins can instantly filter for what matters most to their team.</a:t>
-            </a:r>
-          </a:p>
-        </p:txBody>
-      </p:sp>
-      <p:sp>
-        <p:nvSpPr>
-          <p:cNvPr id="35" name="Rectangle 34"/>
-          <p:cNvSpPr/>
-          <p:nvPr/>
-        </p:nvSpPr>
-        <p:spPr>
-          <a:xfrm>
-            <a:off x="548640" y="1588644139698"/>
-            <a:ext cx="109728" cy="109728"/>
+              <a:t>Bedrock classifies every item into one of 8 types: new-feature, GA, preview, deprecation, and more.</a:t>
+            </a:r>
+          </a:p>
+        </p:txBody>
+      </p:sp>
+      <p:sp>
+        <p:nvSpPr>
+          <p:cNvPr id="39" name="Rectangle 38"/>
+          <p:cNvSpPr/>
+          <p:nvPr/>
+        </p:nvSpPr>
+        <p:spPr>
+          <a:xfrm>
+            <a:off x="521208" y="3988612"/>
+            <a:ext cx="91440" cy="91440"/>
           </a:xfrm>
           <a:prstGeom prst="rect">
             <a:avLst/>
@@ -13219,47 +13763,48 @@
       </p:sp>
       <p:sp>
         <p:nvSpPr>
-          <p:cNvPr id="36" name="TextBox 35"/>
-          <p:cNvSpPr txBox="1"/>
-          <p:nvPr/>
-        </p:nvSpPr>
-        <p:spPr>
-          <a:xfrm>
-            <a:off x="749808" y="1588644105408"/>
-            <a:ext cx="3346703" cy="256032"/>
-          </a:xfrm>
-          <a:prstGeom prst="rect">
-            <a:avLst/>
-          </a:prstGeom>
-          <a:noFill/>
-        </p:spPr>
-        <p:txBody>
-          <a:bodyPr wrap="square">
-            <a:spAutoFit/>
-          </a:bodyPr>
-          <a:lstStyle/>
-          <a:p>
-            <a:r>
-              <a:rPr sz="900">
+          <p:cNvPr id="40" name="TextBox 39"/>
+          <p:cNvSpPr txBox="1"/>
+          <p:nvPr/>
+        </p:nvSpPr>
+        <p:spPr>
+          <a:xfrm>
+            <a:off x="685800" y="3840480"/>
+            <a:ext cx="3337560" cy="256032"/>
+          </a:xfrm>
+          <a:prstGeom prst="rect">
+            <a:avLst/>
+          </a:prstGeom>
+          <a:noFill/>
+        </p:spPr>
+        <p:txBody>
+          <a:bodyPr wrap="square">
+            <a:spAutoFit/>
+          </a:bodyPr>
+          <a:lstStyle/>
+          <a:p>
+            <a:pPr algn="l"/>
+            <a:r>
+              <a:rPr sz="900" b="0" i="0">
                 <a:solidFill>
                   <a:srgbClr val="1E293B"/>
                 </a:solidFill>
               </a:rPr>
-              <a:t>new-feature · enhancement · preview · general-availability</a:t>
-            </a:r>
-          </a:p>
-        </p:txBody>
-      </p:sp>
-      <p:sp>
-        <p:nvSpPr>
-          <p:cNvPr id="37" name="Rectangle 36"/>
-          <p:cNvSpPr/>
-          <p:nvPr/>
-        </p:nvSpPr>
-        <p:spPr>
-          <a:xfrm>
-            <a:off x="548640" y="1588644432306"/>
-            <a:ext cx="109728" cy="109728"/>
+              <a:t>Color-coded badges for instant scanning</a:t>
+            </a:r>
+          </a:p>
+        </p:txBody>
+      </p:sp>
+      <p:sp>
+        <p:nvSpPr>
+          <p:cNvPr id="41" name="Rectangle 40"/>
+          <p:cNvSpPr/>
+          <p:nvPr/>
+        </p:nvSpPr>
+        <p:spPr>
+          <a:xfrm>
+            <a:off x="521208" y="4281220"/>
+            <a:ext cx="91440" cy="91440"/>
           </a:xfrm>
           <a:prstGeom prst="rect">
             <a:avLst/>
@@ -13295,47 +13840,91 @@
       </p:sp>
       <p:sp>
         <p:nvSpPr>
-          <p:cNvPr id="38" name="TextBox 37"/>
-          <p:cNvSpPr txBox="1"/>
-          <p:nvPr/>
-        </p:nvSpPr>
-        <p:spPr>
-          <a:xfrm>
-            <a:off x="749808" y="1588644398016"/>
-            <a:ext cx="3346703" cy="256032"/>
-          </a:xfrm>
-          <a:prstGeom prst="rect">
-            <a:avLst/>
-          </a:prstGeom>
-          <a:noFill/>
-        </p:spPr>
-        <p:txBody>
-          <a:bodyPr wrap="square">
-            <a:spAutoFit/>
-          </a:bodyPr>
-          <a:lstStyle/>
-          <a:p>
-            <a:r>
-              <a:rPr sz="900">
+          <p:cNvPr id="42" name="TextBox 41"/>
+          <p:cNvSpPr txBox="1"/>
+          <p:nvPr/>
+        </p:nvSpPr>
+        <p:spPr>
+          <a:xfrm>
+            <a:off x="685800" y="4133088"/>
+            <a:ext cx="3337560" cy="256032"/>
+          </a:xfrm>
+          <a:prstGeom prst="rect">
+            <a:avLst/>
+          </a:prstGeom>
+          <a:noFill/>
+        </p:spPr>
+        <p:txBody>
+          <a:bodyPr wrap="square">
+            <a:spAutoFit/>
+          </a:bodyPr>
+          <a:lstStyle/>
+          <a:p>
+            <a:pPr algn="l"/>
+            <a:r>
+              <a:rPr sz="900" b="0" i="0">
                 <a:solidFill>
                   <a:srgbClr val="1E293B"/>
                 </a:solidFill>
               </a:rPr>
-              <a:t>deprecation · price-change · region-expansion · integration</a:t>
-            </a:r>
-          </a:p>
-        </p:txBody>
-      </p:sp>
-      <p:sp>
-        <p:nvSpPr>
-          <p:cNvPr id="39" name="Rectangle 38"/>
-          <p:cNvSpPr/>
-          <p:nvPr/>
-        </p:nvSpPr>
-        <p:spPr>
-          <a:xfrm>
-            <a:off x="3528456956280" y="1588643172720"/>
-            <a:ext cx="3749039" cy="1645920"/>
+              <a:t>Filter dashboard to only what matters today</a:t>
+            </a:r>
+          </a:p>
+        </p:txBody>
+      </p:sp>
+      <p:sp>
+        <p:nvSpPr>
+          <p:cNvPr id="43" name="Rectangle 42"/>
+          <p:cNvSpPr/>
+          <p:nvPr/>
+        </p:nvSpPr>
+        <p:spPr>
+          <a:xfrm>
+            <a:off x="4224528" y="2953512"/>
+            <a:ext cx="3703320" cy="1664208"/>
+          </a:xfrm>
+          <a:prstGeom prst="rect">
+            <a:avLst/>
+          </a:prstGeom>
+          <a:solidFill>
+            <a:srgbClr val="CBD5E1"/>
+          </a:solidFill>
+          <a:ln>
+            <a:noFill/>
+          </a:ln>
+        </p:spPr>
+        <p:style>
+          <a:lnRef idx="1">
+            <a:schemeClr val="accent1"/>
+          </a:lnRef>
+          <a:fillRef idx="3">
+            <a:schemeClr val="accent1"/>
+          </a:fillRef>
+          <a:effectRef idx="2">
+            <a:schemeClr val="accent1"/>
+          </a:effectRef>
+          <a:fontRef idx="minor">
+            <a:schemeClr val="lt1"/>
+          </a:fontRef>
+        </p:style>
+        <p:txBody>
+          <a:bodyPr rtlCol="0" anchor="ctr"/>
+          <a:lstStyle/>
+          <a:p>
+            <a:pPr algn="ctr"/>
+          </a:p>
+        </p:txBody>
+      </p:sp>
+      <p:sp>
+        <p:nvSpPr>
+          <p:cNvPr id="44" name="Rectangle 43"/>
+          <p:cNvSpPr/>
+          <p:nvPr/>
+        </p:nvSpPr>
+        <p:spPr>
+          <a:xfrm>
+            <a:off x="4197096" y="2926080"/>
+            <a:ext cx="3703320" cy="1664208"/>
           </a:xfrm>
           <a:prstGeom prst="rect">
             <a:avLst/>
@@ -13343,7 +13932,7 @@
           <a:solidFill>
             <a:srgbClr val="FFFFFF"/>
           </a:solidFill>
-          <a:ln w="12700">
+          <a:ln w="9525">
             <a:solidFill>
               <a:srgbClr val="E2E8F0"/>
             </a:solidFill>
@@ -13373,14 +13962,14 @@
       </p:sp>
       <p:sp>
         <p:nvSpPr>
-          <p:cNvPr id="40" name="Rectangle 39"/>
-          <p:cNvSpPr/>
-          <p:nvPr/>
-        </p:nvSpPr>
-        <p:spPr>
-          <a:xfrm>
-            <a:off x="3528456956280" y="1588643172720"/>
-            <a:ext cx="73152" cy="1645920"/>
+          <p:cNvPr id="45" name="Rectangle 44"/>
+          <p:cNvSpPr/>
+          <p:nvPr/>
+        </p:nvSpPr>
+        <p:spPr>
+          <a:xfrm>
+            <a:off x="4197096" y="2926080"/>
+            <a:ext cx="73152" cy="1664208"/>
           </a:xfrm>
           <a:prstGeom prst="rect">
             <a:avLst/>
@@ -13416,14 +14005,14 @@
       </p:sp>
       <p:sp>
         <p:nvSpPr>
-          <p:cNvPr id="41" name="TextBox 40"/>
-          <p:cNvSpPr txBox="1"/>
-          <p:nvPr/>
-        </p:nvSpPr>
-        <p:spPr>
-          <a:xfrm>
-            <a:off x="3528457093440" y="1588643264160"/>
-            <a:ext cx="3547871" cy="274320"/>
+          <p:cNvPr id="46" name="TextBox 45"/>
+          <p:cNvSpPr txBox="1"/>
+          <p:nvPr/>
+        </p:nvSpPr>
+        <p:spPr>
+          <a:xfrm>
+            <a:off x="4334256" y="3017520"/>
+            <a:ext cx="3502152" cy="274320"/>
           </a:xfrm>
           <a:prstGeom prst="rect">
             <a:avLst/>
@@ -13443,21 +14032,21 @@
                   <a:srgbClr val="1E293B"/>
                 </a:solidFill>
               </a:rPr>
-              <a:t>Shareable URLs &amp; Detail Pages</a:t>
-            </a:r>
-          </a:p>
-        </p:txBody>
-      </p:sp>
-      <p:sp>
-        <p:nvSpPr>
-          <p:cNvPr id="42" name="TextBox 41"/>
-          <p:cNvSpPr txBox="1"/>
-          <p:nvPr/>
-        </p:nvSpPr>
-        <p:spPr>
-          <a:xfrm>
-            <a:off x="3528457093440" y="1588643556768"/>
-            <a:ext cx="3547871" cy="512064"/>
+              <a:t>Shareable URLs</a:t>
+            </a:r>
+          </a:p>
+        </p:txBody>
+      </p:sp>
+      <p:sp>
+        <p:nvSpPr>
+          <p:cNvPr id="47" name="TextBox 46"/>
+          <p:cNvSpPr txBox="1"/>
+          <p:nvPr/>
+        </p:nvSpPr>
+        <p:spPr>
+          <a:xfrm>
+            <a:off x="4334256" y="3328416"/>
+            <a:ext cx="3502152" cy="475488"/>
           </a:xfrm>
           <a:prstGeom prst="rect">
             <a:avLst/>
@@ -13477,21 +14066,21 @@
                   <a:srgbClr val="64748B"/>
                 </a:solidFill>
               </a:rPr>
-              <a:t>Every search query and feature detail has a unique URL. Share a filtered view with your team or bookmark a specific announcement for later review.</a:t>
-            </a:r>
-          </a:p>
-        </p:txBody>
-      </p:sp>
-      <p:sp>
-        <p:nvSpPr>
-          <p:cNvPr id="43" name="Rectangle 42"/>
-          <p:cNvSpPr/>
-          <p:nvPr/>
-        </p:nvSpPr>
-        <p:spPr>
-          <a:xfrm>
-            <a:off x="3528457093440" y="1588644139698"/>
-            <a:ext cx="109728" cy="109728"/>
+              <a:t>All filters live in the URL. Copy the link and share a specific filtered view with any team member.</a:t>
+            </a:r>
+          </a:p>
+        </p:txBody>
+      </p:sp>
+      <p:sp>
+        <p:nvSpPr>
+          <p:cNvPr id="48" name="Rectangle 47"/>
+          <p:cNvSpPr/>
+          <p:nvPr/>
+        </p:nvSpPr>
+        <p:spPr>
+          <a:xfrm>
+            <a:off x="4334256" y="3988612"/>
+            <a:ext cx="91440" cy="91440"/>
           </a:xfrm>
           <a:prstGeom prst="rect">
             <a:avLst/>
@@ -13527,47 +14116,48 @@
       </p:sp>
       <p:sp>
         <p:nvSpPr>
-          <p:cNvPr id="44" name="TextBox 43"/>
-          <p:cNvSpPr txBox="1"/>
-          <p:nvPr/>
-        </p:nvSpPr>
-        <p:spPr>
-          <a:xfrm>
-            <a:off x="3528457294608" y="1588644105408"/>
-            <a:ext cx="3346703" cy="256032"/>
-          </a:xfrm>
-          <a:prstGeom prst="rect">
-            <a:avLst/>
-          </a:prstGeom>
-          <a:noFill/>
-        </p:spPr>
-        <p:txBody>
-          <a:bodyPr wrap="square">
-            <a:spAutoFit/>
-          </a:bodyPr>
-          <a:lstStyle/>
-          <a:p>
-            <a:r>
-              <a:rPr sz="900">
+          <p:cNvPr id="49" name="TextBox 48"/>
+          <p:cNvSpPr txBox="1"/>
+          <p:nvPr/>
+        </p:nvSpPr>
+        <p:spPr>
+          <a:xfrm>
+            <a:off x="4498848" y="3840480"/>
+            <a:ext cx="3337560" cy="256032"/>
+          </a:xfrm>
+          <a:prstGeom prst="rect">
+            <a:avLst/>
+          </a:prstGeom>
+          <a:noFill/>
+        </p:spPr>
+        <p:txBody>
+          <a:bodyPr wrap="square">
+            <a:spAutoFit/>
+          </a:bodyPr>
+          <a:lstStyle/>
+          <a:p>
+            <a:pPr algn="l"/>
+            <a:r>
+              <a:rPr sz="900" b="0" i="0">
                 <a:solidFill>
                   <a:srgbClr val="1E293B"/>
                 </a:solidFill>
               </a:rPr>
-              <a:t>URL encodes all filters — copy/paste to share with colleagues</a:t>
-            </a:r>
-          </a:p>
-        </p:txBody>
-      </p:sp>
-      <p:sp>
-        <p:nvSpPr>
-          <p:cNvPr id="45" name="Rectangle 44"/>
-          <p:cNvSpPr/>
-          <p:nvPr/>
-        </p:nvSpPr>
-        <p:spPr>
-          <a:xfrm>
-            <a:off x="3528457093440" y="1588644432306"/>
-            <a:ext cx="109728" cy="109728"/>
+              <a:t>Bookmark filtered views</a:t>
+            </a:r>
+          </a:p>
+        </p:txBody>
+      </p:sp>
+      <p:sp>
+        <p:nvSpPr>
+          <p:cNvPr id="50" name="Rectangle 49"/>
+          <p:cNvSpPr/>
+          <p:nvPr/>
+        </p:nvSpPr>
+        <p:spPr>
+          <a:xfrm>
+            <a:off x="4334256" y="4281220"/>
+            <a:ext cx="91440" cy="91440"/>
           </a:xfrm>
           <a:prstGeom prst="rect">
             <a:avLst/>
@@ -13603,47 +14193,91 @@
       </p:sp>
       <p:sp>
         <p:nvSpPr>
-          <p:cNvPr id="46" name="TextBox 45"/>
-          <p:cNvSpPr txBox="1"/>
-          <p:nvPr/>
-        </p:nvSpPr>
-        <p:spPr>
-          <a:xfrm>
-            <a:off x="3528457294608" y="1588644398016"/>
-            <a:ext cx="3346703" cy="256032"/>
-          </a:xfrm>
-          <a:prstGeom prst="rect">
-            <a:avLst/>
-          </a:prstGeom>
-          <a:noFill/>
-        </p:spPr>
-        <p:txBody>
-          <a:bodyPr wrap="square">
-            <a:spAutoFit/>
-          </a:bodyPr>
-          <a:lstStyle/>
-          <a:p>
-            <a:r>
-              <a:rPr sz="900">
+          <p:cNvPr id="51" name="TextBox 50"/>
+          <p:cNvSpPr txBox="1"/>
+          <p:nvPr/>
+        </p:nvSpPr>
+        <p:spPr>
+          <a:xfrm>
+            <a:off x="4498848" y="4133088"/>
+            <a:ext cx="3337560" cy="256032"/>
+          </a:xfrm>
+          <a:prstGeom prst="rect">
+            <a:avLst/>
+          </a:prstGeom>
+          <a:noFill/>
+        </p:spPr>
+        <p:txBody>
+          <a:bodyPr wrap="square">
+            <a:spAutoFit/>
+          </a:bodyPr>
+          <a:lstStyle/>
+          <a:p>
+            <a:pPr algn="l"/>
+            <a:r>
+              <a:rPr sz="900" b="0" i="0">
                 <a:solidFill>
                   <a:srgbClr val="1E293B"/>
                 </a:solidFill>
               </a:rPr>
-              <a:t>Detail page shows full summary, all key points, and AWS link</a:t>
-            </a:r>
-          </a:p>
-        </p:txBody>
-      </p:sp>
-      <p:sp>
-        <p:nvSpPr>
-          <p:cNvPr id="47" name="Rectangle 46"/>
-          <p:cNvSpPr/>
-          <p:nvPr/>
-        </p:nvSpPr>
-        <p:spPr>
-          <a:xfrm>
-            <a:off x="7056913501080" y="1588643172720"/>
-            <a:ext cx="3749039" cy="1645920"/>
+              <a:t>Back button preserves search context</a:t>
+            </a:r>
+          </a:p>
+        </p:txBody>
+      </p:sp>
+      <p:sp>
+        <p:nvSpPr>
+          <p:cNvPr id="52" name="Rectangle 51"/>
+          <p:cNvSpPr/>
+          <p:nvPr/>
+        </p:nvSpPr>
+        <p:spPr>
+          <a:xfrm>
+            <a:off x="8037576" y="2953512"/>
+            <a:ext cx="3703320" cy="1664208"/>
+          </a:xfrm>
+          <a:prstGeom prst="rect">
+            <a:avLst/>
+          </a:prstGeom>
+          <a:solidFill>
+            <a:srgbClr val="CBD5E1"/>
+          </a:solidFill>
+          <a:ln>
+            <a:noFill/>
+          </a:ln>
+        </p:spPr>
+        <p:style>
+          <a:lnRef idx="1">
+            <a:schemeClr val="accent1"/>
+          </a:lnRef>
+          <a:fillRef idx="3">
+            <a:schemeClr val="accent1"/>
+          </a:fillRef>
+          <a:effectRef idx="2">
+            <a:schemeClr val="accent1"/>
+          </a:effectRef>
+          <a:fontRef idx="minor">
+            <a:schemeClr val="lt1"/>
+          </a:fontRef>
+        </p:style>
+        <p:txBody>
+          <a:bodyPr rtlCol="0" anchor="ctr"/>
+          <a:lstStyle/>
+          <a:p>
+            <a:pPr algn="ctr"/>
+          </a:p>
+        </p:txBody>
+      </p:sp>
+      <p:sp>
+        <p:nvSpPr>
+          <p:cNvPr id="53" name="Rectangle 52"/>
+          <p:cNvSpPr/>
+          <p:nvPr/>
+        </p:nvSpPr>
+        <p:spPr>
+          <a:xfrm>
+            <a:off x="8010144" y="2926080"/>
+            <a:ext cx="3703320" cy="1664208"/>
           </a:xfrm>
           <a:prstGeom prst="rect">
             <a:avLst/>
@@ -13651,7 +14285,7 @@
           <a:solidFill>
             <a:srgbClr val="FFFFFF"/>
           </a:solidFill>
-          <a:ln w="12700">
+          <a:ln w="9525">
             <a:solidFill>
               <a:srgbClr val="E2E8F0"/>
             </a:solidFill>
@@ -13681,14 +14315,14 @@
       </p:sp>
       <p:sp>
         <p:nvSpPr>
-          <p:cNvPr id="48" name="Rectangle 47"/>
-          <p:cNvSpPr/>
-          <p:nvPr/>
-        </p:nvSpPr>
-        <p:spPr>
-          <a:xfrm>
-            <a:off x="7056913501080" y="1588643172720"/>
-            <a:ext cx="73152" cy="1645920"/>
+          <p:cNvPr id="54" name="Rectangle 53"/>
+          <p:cNvSpPr/>
+          <p:nvPr/>
+        </p:nvSpPr>
+        <p:spPr>
+          <a:xfrm>
+            <a:off x="8010144" y="2926080"/>
+            <a:ext cx="73152" cy="1664208"/>
           </a:xfrm>
           <a:prstGeom prst="rect">
             <a:avLst/>
@@ -13724,14 +14358,14 @@
       </p:sp>
       <p:sp>
         <p:nvSpPr>
-          <p:cNvPr id="49" name="TextBox 48"/>
-          <p:cNvSpPr txBox="1"/>
-          <p:nvPr/>
-        </p:nvSpPr>
-        <p:spPr>
-          <a:xfrm>
-            <a:off x="7056913638240" y="1588643264160"/>
-            <a:ext cx="3547871" cy="274320"/>
+          <p:cNvPr id="55" name="TextBox 54"/>
+          <p:cNvSpPr txBox="1"/>
+          <p:nvPr/>
+        </p:nvSpPr>
+        <p:spPr>
+          <a:xfrm>
+            <a:off x="8147304" y="3017520"/>
+            <a:ext cx="3502152" cy="274320"/>
           </a:xfrm>
           <a:prstGeom prst="rect">
             <a:avLst/>
@@ -13751,21 +14385,21 @@
                   <a:srgbClr val="1E293B"/>
                 </a:solidFill>
               </a:rPr>
-              <a:t>Operational Reliability</a:t>
-            </a:r>
-          </a:p>
-        </p:txBody>
-      </p:sp>
-      <p:sp>
-        <p:nvSpPr>
-          <p:cNvPr id="50" name="TextBox 49"/>
-          <p:cNvSpPr txBox="1"/>
-          <p:nvPr/>
-        </p:nvSpPr>
-        <p:spPr>
-          <a:xfrm>
-            <a:off x="7056913638240" y="1588643556768"/>
-            <a:ext cx="3547871" cy="512064"/>
+              <a:t>Reliability Built-In</a:t>
+            </a:r>
+          </a:p>
+        </p:txBody>
+      </p:sp>
+      <p:sp>
+        <p:nvSpPr>
+          <p:cNvPr id="56" name="TextBox 55"/>
+          <p:cNvSpPr txBox="1"/>
+          <p:nvPr/>
+        </p:nvSpPr>
+        <p:spPr>
+          <a:xfrm>
+            <a:off x="8147304" y="3328416"/>
+            <a:ext cx="3502152" cy="475488"/>
           </a:xfrm>
           <a:prstGeom prst="rect">
             <a:avLst/>
@@ -13785,21 +14419,21 @@
                   <a:srgbClr val="64748B"/>
                 </a:solidFill>
               </a:rPr>
-              <a:t>SQS DLQ catches failed summaries, CloudWatch alarms fire on errors, and IAM least-privilege policies protect all resources.</a:t>
-            </a:r>
-          </a:p>
-        </p:txBody>
-      </p:sp>
-      <p:sp>
-        <p:nvSpPr>
-          <p:cNvPr id="51" name="Rectangle 50"/>
-          <p:cNvSpPr/>
-          <p:nvPr/>
-        </p:nvSpPr>
-        <p:spPr>
-          <a:xfrm>
-            <a:off x="7056913638240" y="1588644139698"/>
-            <a:ext cx="109728" cy="109728"/>
+              <a:t>SQS DLQ retries failures 3×. CloudWatch alarms on errors and DLQ depth. IAM least-privilege.</a:t>
+            </a:r>
+          </a:p>
+        </p:txBody>
+      </p:sp>
+      <p:sp>
+        <p:nvSpPr>
+          <p:cNvPr id="57" name="Rectangle 56"/>
+          <p:cNvSpPr/>
+          <p:nvPr/>
+        </p:nvSpPr>
+        <p:spPr>
+          <a:xfrm>
+            <a:off x="8147304" y="3988612"/>
+            <a:ext cx="91440" cy="91440"/>
           </a:xfrm>
           <a:prstGeom prst="rect">
             <a:avLst/>
@@ -13835,47 +14469,48 @@
       </p:sp>
       <p:sp>
         <p:nvSpPr>
-          <p:cNvPr id="52" name="TextBox 51"/>
-          <p:cNvSpPr txBox="1"/>
-          <p:nvPr/>
-        </p:nvSpPr>
-        <p:spPr>
-          <a:xfrm>
-            <a:off x="7056913839408" y="1588644105408"/>
-            <a:ext cx="3346703" cy="256032"/>
-          </a:xfrm>
-          <a:prstGeom prst="rect">
-            <a:avLst/>
-          </a:prstGeom>
-          <a:noFill/>
-        </p:spPr>
-        <p:txBody>
-          <a:bodyPr wrap="square">
-            <a:spAutoFit/>
-          </a:bodyPr>
-          <a:lstStyle/>
-          <a:p>
-            <a:r>
-              <a:rPr sz="900">
+          <p:cNvPr id="58" name="TextBox 57"/>
+          <p:cNvSpPr txBox="1"/>
+          <p:nvPr/>
+        </p:nvSpPr>
+        <p:spPr>
+          <a:xfrm>
+            <a:off x="8311896" y="3840480"/>
+            <a:ext cx="3337560" cy="256032"/>
+          </a:xfrm>
+          <a:prstGeom prst="rect">
+            <a:avLst/>
+          </a:prstGeom>
+          <a:noFill/>
+        </p:spPr>
+        <p:txBody>
+          <a:bodyPr wrap="square">
+            <a:spAutoFit/>
+          </a:bodyPr>
+          <a:lstStyle/>
+          <a:p>
+            <a:pPr algn="l"/>
+            <a:r>
+              <a:rPr sz="900" b="0" i="0">
                 <a:solidFill>
                   <a:srgbClr val="1E293B"/>
                 </a:solidFill>
               </a:rPr>
-              <a:t>DLQ retries up to 3× before dead-lettering</a:t>
-            </a:r>
-          </a:p>
-        </p:txBody>
-      </p:sp>
-      <p:sp>
-        <p:nvSpPr>
-          <p:cNvPr id="53" name="Rectangle 52"/>
-          <p:cNvSpPr/>
-          <p:nvPr/>
-        </p:nvSpPr>
-        <p:spPr>
-          <a:xfrm>
-            <a:off x="7056913638240" y="1588644432306"/>
-            <a:ext cx="109728" cy="109728"/>
+              <a:t>DLQ 7-day retention — no announcement lost</a:t>
+            </a:r>
+          </a:p>
+        </p:txBody>
+      </p:sp>
+      <p:sp>
+        <p:nvSpPr>
+          <p:cNvPr id="59" name="Rectangle 58"/>
+          <p:cNvSpPr/>
+          <p:nvPr/>
+        </p:nvSpPr>
+        <p:spPr>
+          <a:xfrm>
+            <a:off x="8147304" y="4281220"/>
+            <a:ext cx="91440" cy="91440"/>
           </a:xfrm>
           <a:prstGeom prst="rect">
             <a:avLst/>
@@ -13911,33 +14546,34 @@
       </p:sp>
       <p:sp>
         <p:nvSpPr>
-          <p:cNvPr id="54" name="TextBox 53"/>
-          <p:cNvSpPr txBox="1"/>
-          <p:nvPr/>
-        </p:nvSpPr>
-        <p:spPr>
-          <a:xfrm>
-            <a:off x="7056913839408" y="1588644398016"/>
-            <a:ext cx="3346703" cy="256032"/>
-          </a:xfrm>
-          <a:prstGeom prst="rect">
-            <a:avLst/>
-          </a:prstGeom>
-          <a:noFill/>
-        </p:spPr>
-        <p:txBody>
-          <a:bodyPr wrap="square">
-            <a:spAutoFit/>
-          </a:bodyPr>
-          <a:lstStyle/>
-          <a:p>
-            <a:r>
-              <a:rPr sz="900">
+          <p:cNvPr id="60" name="TextBox 59"/>
+          <p:cNvSpPr txBox="1"/>
+          <p:nvPr/>
+        </p:nvSpPr>
+        <p:spPr>
+          <a:xfrm>
+            <a:off x="8311896" y="4133088"/>
+            <a:ext cx="3337560" cy="256032"/>
+          </a:xfrm>
+          <a:prstGeom prst="rect">
+            <a:avLst/>
+          </a:prstGeom>
+          <a:noFill/>
+        </p:spPr>
+        <p:txBody>
+          <a:bodyPr wrap="square">
+            <a:spAutoFit/>
+          </a:bodyPr>
+          <a:lstStyle/>
+          <a:p>
+            <a:pPr algn="l"/>
+            <a:r>
+              <a:rPr sz="900" b="0" i="0">
                 <a:solidFill>
                   <a:srgbClr val="1E293B"/>
                 </a:solidFill>
               </a:rPr>
-              <a:t>CloudWatch alarms on Summarizer errors and DLQ depth</a:t>
+              <a:t>CloudWatch alarms on errors and DLQ</a:t>
             </a:r>
           </a:p>
         </p:txBody>
@@ -13969,7 +14605,7 @@
         <p:spPr>
           <a:xfrm>
             <a:off x="0" y="0"/>
-            <a:ext cx="12188952" cy="6858000"/>
+            <a:ext cx="12192000" cy="6858000"/>
           </a:xfrm>
           <a:prstGeom prst="rect">
             <a:avLst/>
@@ -14011,8 +14647,8 @@
         </p:nvSpPr>
         <p:spPr>
           <a:xfrm>
-            <a:off x="0" y="6748272"/>
-            <a:ext cx="12188952" cy="109728"/>
+            <a:off x="0" y="6766560"/>
+            <a:ext cx="12192000" cy="91440"/>
           </a:xfrm>
           <a:prstGeom prst="rect">
             <a:avLst/>
@@ -14054,8 +14690,8 @@
         </p:nvSpPr>
         <p:spPr>
           <a:xfrm>
-            <a:off x="502920" y="256032"/>
-            <a:ext cx="3657600" cy="274320"/>
+            <a:off x="502920" y="201168"/>
+            <a:ext cx="5486400" cy="256032"/>
           </a:xfrm>
           <a:prstGeom prst="rect">
             <a:avLst/>
@@ -14088,8 +14724,8 @@
         </p:nvSpPr>
         <p:spPr>
           <a:xfrm>
-            <a:off x="502920" y="402336"/>
-            <a:ext cx="8229600" cy="438912"/>
+            <a:off x="502920" y="384048"/>
+            <a:ext cx="8686800" cy="457200"/>
           </a:xfrm>
           <a:prstGeom prst="rect">
             <a:avLst/>
@@ -14130,8 +14766,8 @@
         </p:blipFill>
         <p:spPr>
           <a:xfrm>
-            <a:off x="320040" y="914400"/>
-            <a:ext cx="11567160" cy="5440680"/>
+            <a:off x="320040" y="896112"/>
+            <a:ext cx="11539728" cy="5486400"/>
           </a:xfrm>
           <a:prstGeom prst="rect">
             <a:avLst/>
@@ -14146,14 +14782,14 @@
         </p:nvSpPr>
         <p:spPr>
           <a:xfrm>
-            <a:off x="365760" y="960120"/>
-            <a:ext cx="2834640" cy="274320"/>
-          </a:xfrm>
-          <a:prstGeom prst="rect">
-            <a:avLst/>
-          </a:prstGeom>
-          <a:solidFill>
-            <a:srgbClr val="232F3E"/>
+            <a:off x="347472" y="932688"/>
+            <a:ext cx="2606040" cy="292608"/>
+          </a:xfrm>
+          <a:prstGeom prst="rect">
+            <a:avLst/>
+          </a:prstGeom>
+          <a:solidFill>
+            <a:srgbClr val="0D1A26"/>
           </a:solidFill>
           <a:ln>
             <a:noFill/>
@@ -14189,8 +14825,8 @@
         </p:nvSpPr>
         <p:spPr>
           <a:xfrm>
-            <a:off x="438912" y="996696"/>
-            <a:ext cx="2743200" cy="237744"/>
+            <a:off x="420624" y="978408"/>
+            <a:ext cx="2487168" cy="219456"/>
           </a:xfrm>
           <a:prstGeom prst="rect">
             <a:avLst/>
@@ -14210,7 +14846,7 @@
                   <a:srgbClr val="FF9900"/>
                 </a:solidFill>
               </a:rPr>
-              <a:t>▶  Live search bar with 300ms debounce</a:t>
+              <a:t>▶  Live search with 300ms debounce</a:t>
             </a:r>
           </a:p>
         </p:txBody>
@@ -14223,14 +14859,14 @@
         </p:nvSpPr>
         <p:spPr>
           <a:xfrm>
-            <a:off x="365760" y="1417320"/>
-            <a:ext cx="2834640" cy="274320"/>
-          </a:xfrm>
-          <a:prstGeom prst="rect">
-            <a:avLst/>
-          </a:prstGeom>
-          <a:solidFill>
-            <a:srgbClr val="232F3E"/>
+            <a:off x="347472" y="1335024"/>
+            <a:ext cx="2606040" cy="292608"/>
+          </a:xfrm>
+          <a:prstGeom prst="rect">
+            <a:avLst/>
+          </a:prstGeom>
+          <a:solidFill>
+            <a:srgbClr val="0D1A26"/>
           </a:solidFill>
           <a:ln>
             <a:noFill/>
@@ -14266,8 +14902,8 @@
         </p:nvSpPr>
         <p:spPr>
           <a:xfrm>
-            <a:off x="438912" y="1453896"/>
-            <a:ext cx="2743200" cy="237744"/>
+            <a:off x="420624" y="1380744"/>
+            <a:ext cx="2487168" cy="219456"/>
           </a:xfrm>
           <a:prstGeom prst="rect">
             <a:avLst/>
@@ -14287,7 +14923,7 @@
                   <a:srgbClr val="FF9900"/>
                 </a:solidFill>
               </a:rPr>
-              <a:t>▶  Smart filters: service, type, date range, sort order</a:t>
+              <a:t>▶  Service / type / date / sort filters</a:t>
             </a:r>
           </a:p>
         </p:txBody>
@@ -14300,14 +14936,14 @@
         </p:nvSpPr>
         <p:spPr>
           <a:xfrm>
-            <a:off x="365760" y="1920240"/>
-            <a:ext cx="2834640" cy="274320"/>
-          </a:xfrm>
-          <a:prstGeom prst="rect">
-            <a:avLst/>
-          </a:prstGeom>
-          <a:solidFill>
-            <a:srgbClr val="232F3E"/>
+            <a:off x="347472" y="1737360"/>
+            <a:ext cx="2606040" cy="292608"/>
+          </a:xfrm>
+          <a:prstGeom prst="rect">
+            <a:avLst/>
+          </a:prstGeom>
+          <a:solidFill>
+            <a:srgbClr val="0D1A26"/>
           </a:solidFill>
           <a:ln>
             <a:noFill/>
@@ -14343,8 +14979,8 @@
         </p:nvSpPr>
         <p:spPr>
           <a:xfrm>
-            <a:off x="438912" y="1956816"/>
-            <a:ext cx="2743200" cy="237744"/>
+            <a:off x="420624" y="1783080"/>
+            <a:ext cx="2487168" cy="219456"/>
           </a:xfrm>
           <a:prstGeom prst="rect">
             <a:avLst/>
@@ -14377,14 +15013,14 @@
         </p:nvSpPr>
         <p:spPr>
           <a:xfrm>
-            <a:off x="8321040" y="960120"/>
-            <a:ext cx="2834640" cy="274320"/>
-          </a:xfrm>
-          <a:prstGeom prst="rect">
-            <a:avLst/>
-          </a:prstGeom>
-          <a:solidFill>
-            <a:srgbClr val="232F3E"/>
+            <a:off x="8549640" y="932688"/>
+            <a:ext cx="2606040" cy="292608"/>
+          </a:xfrm>
+          <a:prstGeom prst="rect">
+            <a:avLst/>
+          </a:prstGeom>
+          <a:solidFill>
+            <a:srgbClr val="0D1A26"/>
           </a:solidFill>
           <a:ln>
             <a:noFill/>
@@ -14420,8 +15056,8 @@
         </p:nvSpPr>
         <p:spPr>
           <a:xfrm>
-            <a:off x="8394192" y="996696"/>
-            <a:ext cx="2743200" cy="237744"/>
+            <a:off x="8622792" y="978408"/>
+            <a:ext cx="2487168" cy="219456"/>
           </a:xfrm>
           <a:prstGeom prst="rect">
             <a:avLst/>
@@ -14454,14 +15090,14 @@
         </p:nvSpPr>
         <p:spPr>
           <a:xfrm>
-            <a:off x="8321040" y="1417320"/>
-            <a:ext cx="2834640" cy="274320"/>
-          </a:xfrm>
-          <a:prstGeom prst="rect">
-            <a:avLst/>
-          </a:prstGeom>
-          <a:solidFill>
-            <a:srgbClr val="232F3E"/>
+            <a:off x="8549640" y="1335024"/>
+            <a:ext cx="2606040" cy="292608"/>
+          </a:xfrm>
+          <a:prstGeom prst="rect">
+            <a:avLst/>
+          </a:prstGeom>
+          <a:solidFill>
+            <a:srgbClr val="0D1A26"/>
           </a:solidFill>
           <a:ln>
             <a:noFill/>
@@ -14497,8 +15133,8 @@
         </p:nvSpPr>
         <p:spPr>
           <a:xfrm>
-            <a:off x="8394192" y="1453896"/>
-            <a:ext cx="2743200" cy="237744"/>
+            <a:off x="8622792" y="1380744"/>
+            <a:ext cx="2487168" cy="219456"/>
           </a:xfrm>
           <a:prstGeom prst="rect">
             <a:avLst/>
@@ -14518,7 +15154,7 @@
                   <a:srgbClr val="FF9900"/>
                 </a:solidFill>
               </a:rPr>
-              <a:t>▶  AI-extracted key points on hover</a:t>
+              <a:t>▶  AI key points — expand on hover</a:t>
             </a:r>
           </a:p>
         </p:txBody>
@@ -14531,14 +15167,14 @@
         </p:nvSpPr>
         <p:spPr>
           <a:xfrm>
-            <a:off x="8321040" y="1920240"/>
-            <a:ext cx="2834640" cy="274320"/>
-          </a:xfrm>
-          <a:prstGeom prst="rect">
-            <a:avLst/>
-          </a:prstGeom>
-          <a:solidFill>
-            <a:srgbClr val="232F3E"/>
+            <a:off x="8549640" y="1737360"/>
+            <a:ext cx="2606040" cy="292608"/>
+          </a:xfrm>
+          <a:prstGeom prst="rect">
+            <a:avLst/>
+          </a:prstGeom>
+          <a:solidFill>
+            <a:srgbClr val="0D1A26"/>
           </a:solidFill>
           <a:ln>
             <a:noFill/>
@@ -14574,8 +15210,8 @@
         </p:nvSpPr>
         <p:spPr>
           <a:xfrm>
-            <a:off x="8394192" y="1956816"/>
-            <a:ext cx="2743200" cy="237744"/>
+            <a:off x="8622792" y="1783080"/>
+            <a:ext cx="2487168" cy="219456"/>
           </a:xfrm>
           <a:prstGeom prst="rect">
             <a:avLst/>
@@ -14595,7 +15231,7 @@
                   <a:srgbClr val="FF9900"/>
                 </a:solidFill>
               </a:rPr>
-              <a:t>▶  Direct AWS announcement link</a:t>
+              <a:t>▶  Direct AWS announcement links</a:t>
             </a:r>
           </a:p>
         </p:txBody>
@@ -14627,7 +15263,7 @@
         <p:spPr>
           <a:xfrm>
             <a:off x="0" y="0"/>
-            <a:ext cx="12188952" cy="6858000"/>
+            <a:ext cx="12192000" cy="6858000"/>
           </a:xfrm>
           <a:prstGeom prst="rect">
             <a:avLst/>
@@ -14669,8 +15305,8 @@
         </p:nvSpPr>
         <p:spPr>
           <a:xfrm>
-            <a:off x="0" y="6748272"/>
-            <a:ext cx="12188952" cy="109728"/>
+            <a:off x="0" y="6766560"/>
+            <a:ext cx="12192000" cy="91440"/>
           </a:xfrm>
           <a:prstGeom prst="rect">
             <a:avLst/>
@@ -14712,8 +15348,8 @@
         </p:nvSpPr>
         <p:spPr>
           <a:xfrm>
-            <a:off x="502920" y="256032"/>
-            <a:ext cx="3657600" cy="274320"/>
+            <a:off x="502920" y="201168"/>
+            <a:ext cx="5486400" cy="256032"/>
           </a:xfrm>
           <a:prstGeom prst="rect">
             <a:avLst/>
@@ -14746,8 +15382,8 @@
         </p:nvSpPr>
         <p:spPr>
           <a:xfrm>
-            <a:off x="502920" y="402336"/>
-            <a:ext cx="8229600" cy="438912"/>
+            <a:off x="502920" y="384048"/>
+            <a:ext cx="8686800" cy="457200"/>
           </a:xfrm>
           <a:prstGeom prst="rect">
             <a:avLst/>
@@ -14788,8 +15424,8 @@
         </p:blipFill>
         <p:spPr>
           <a:xfrm>
-            <a:off x="320040" y="914400"/>
-            <a:ext cx="11567160" cy="5440680"/>
+            <a:off x="320040" y="896112"/>
+            <a:ext cx="11539728" cy="5486400"/>
           </a:xfrm>
           <a:prstGeom prst="rect">
             <a:avLst/>
@@ -14804,14 +15440,14 @@
         </p:nvSpPr>
         <p:spPr>
           <a:xfrm>
-            <a:off x="365760" y="960120"/>
-            <a:ext cx="2834640" cy="274320"/>
-          </a:xfrm>
-          <a:prstGeom prst="rect">
-            <a:avLst/>
-          </a:prstGeom>
-          <a:solidFill>
-            <a:srgbClr val="232F3E"/>
+            <a:off x="347472" y="932688"/>
+            <a:ext cx="2606040" cy="292608"/>
+          </a:xfrm>
+          <a:prstGeom prst="rect">
+            <a:avLst/>
+          </a:prstGeom>
+          <a:solidFill>
+            <a:srgbClr val="0D1A26"/>
           </a:solidFill>
           <a:ln>
             <a:noFill/>
@@ -14847,8 +15483,8 @@
         </p:nvSpPr>
         <p:spPr>
           <a:xfrm>
-            <a:off x="438912" y="996696"/>
-            <a:ext cx="2743200" cy="237744"/>
+            <a:off x="420624" y="978408"/>
+            <a:ext cx="2487168" cy="219456"/>
           </a:xfrm>
           <a:prstGeom prst="rect">
             <a:avLst/>
@@ -14868,7 +15504,7 @@
                   <a:srgbClr val="FF9900"/>
                 </a:solidFill>
               </a:rPr>
-              <a:t>▶  Context badges: date · service · domain · type</a:t>
+              <a:t>▶  Badges: date · service · domain · type</a:t>
             </a:r>
           </a:p>
         </p:txBody>
@@ -14881,14 +15517,14 @@
         </p:nvSpPr>
         <p:spPr>
           <a:xfrm>
-            <a:off x="365760" y="1417320"/>
-            <a:ext cx="2834640" cy="274320"/>
-          </a:xfrm>
-          <a:prstGeom prst="rect">
-            <a:avLst/>
-          </a:prstGeom>
-          <a:solidFill>
-            <a:srgbClr val="232F3E"/>
+            <a:off x="347472" y="1335024"/>
+            <a:ext cx="2606040" cy="292608"/>
+          </a:xfrm>
+          <a:prstGeom prst="rect">
+            <a:avLst/>
+          </a:prstGeom>
+          <a:solidFill>
+            <a:srgbClr val="0D1A26"/>
           </a:solidFill>
           <a:ln>
             <a:noFill/>
@@ -14924,8 +15560,8 @@
         </p:nvSpPr>
         <p:spPr>
           <a:xfrm>
-            <a:off x="438912" y="1453896"/>
-            <a:ext cx="2743200" cy="237744"/>
+            <a:off x="420624" y="1380744"/>
+            <a:ext cx="2487168" cy="219456"/>
           </a:xfrm>
           <a:prstGeom prst="rect">
             <a:avLst/>
@@ -14958,14 +15594,14 @@
         </p:nvSpPr>
         <p:spPr>
           <a:xfrm>
-            <a:off x="365760" y="1920240"/>
-            <a:ext cx="2834640" cy="274320"/>
-          </a:xfrm>
-          <a:prstGeom prst="rect">
-            <a:avLst/>
-          </a:prstGeom>
-          <a:solidFill>
-            <a:srgbClr val="232F3E"/>
+            <a:off x="347472" y="1737360"/>
+            <a:ext cx="2606040" cy="292608"/>
+          </a:xfrm>
+          <a:prstGeom prst="rect">
+            <a:avLst/>
+          </a:prstGeom>
+          <a:solidFill>
+            <a:srgbClr val="0D1A26"/>
           </a:solidFill>
           <a:ln>
             <a:noFill/>
@@ -15001,8 +15637,8 @@
         </p:nvSpPr>
         <p:spPr>
           <a:xfrm>
-            <a:off x="438912" y="1956816"/>
-            <a:ext cx="2743200" cy="237744"/>
+            <a:off x="420624" y="1783080"/>
+            <a:ext cx="2487168" cy="219456"/>
           </a:xfrm>
           <a:prstGeom prst="rect">
             <a:avLst/>
@@ -15035,14 +15671,14 @@
         </p:nvSpPr>
         <p:spPr>
           <a:xfrm>
-            <a:off x="8321040" y="960120"/>
-            <a:ext cx="2834640" cy="274320"/>
-          </a:xfrm>
-          <a:prstGeom prst="rect">
-            <a:avLst/>
-          </a:prstGeom>
-          <a:solidFill>
-            <a:srgbClr val="232F3E"/>
+            <a:off x="8549640" y="932688"/>
+            <a:ext cx="2606040" cy="292608"/>
+          </a:xfrm>
+          <a:prstGeom prst="rect">
+            <a:avLst/>
+          </a:prstGeom>
+          <a:solidFill>
+            <a:srgbClr val="0D1A26"/>
           </a:solidFill>
           <a:ln>
             <a:noFill/>
@@ -15078,8 +15714,8 @@
         </p:nvSpPr>
         <p:spPr>
           <a:xfrm>
-            <a:off x="8394192" y="996696"/>
-            <a:ext cx="2743200" cy="237744"/>
+            <a:off x="8622792" y="978408"/>
+            <a:ext cx="2487168" cy="219456"/>
           </a:xfrm>
           <a:prstGeom prst="rect">
             <a:avLst/>
@@ -15112,14 +15748,14 @@
         </p:nvSpPr>
         <p:spPr>
           <a:xfrm>
-            <a:off x="8321040" y="1417320"/>
-            <a:ext cx="2834640" cy="274320"/>
-          </a:xfrm>
-          <a:prstGeom prst="rect">
-            <a:avLst/>
-          </a:prstGeom>
-          <a:solidFill>
-            <a:srgbClr val="232F3E"/>
+            <a:off x="8549640" y="1335024"/>
+            <a:ext cx="2606040" cy="292608"/>
+          </a:xfrm>
+          <a:prstGeom prst="rect">
+            <a:avLst/>
+          </a:prstGeom>
+          <a:solidFill>
+            <a:srgbClr val="0D1A26"/>
           </a:solidFill>
           <a:ln>
             <a:noFill/>
@@ -15155,8 +15791,8 @@
         </p:nvSpPr>
         <p:spPr>
           <a:xfrm>
-            <a:off x="8394192" y="1453896"/>
-            <a:ext cx="2743200" cy="237744"/>
+            <a:off x="8622792" y="1380744"/>
+            <a:ext cx="2487168" cy="219456"/>
           </a:xfrm>
           <a:prstGeom prst="rect">
             <a:avLst/>
@@ -15189,14 +15825,14 @@
         </p:nvSpPr>
         <p:spPr>
           <a:xfrm>
-            <a:off x="8321040" y="1920240"/>
-            <a:ext cx="2834640" cy="274320"/>
-          </a:xfrm>
-          <a:prstGeom prst="rect">
-            <a:avLst/>
-          </a:prstGeom>
-          <a:solidFill>
-            <a:srgbClr val="232F3E"/>
+            <a:off x="8549640" y="1737360"/>
+            <a:ext cx="2606040" cy="292608"/>
+          </a:xfrm>
+          <a:prstGeom prst="rect">
+            <a:avLst/>
+          </a:prstGeom>
+          <a:solidFill>
+            <a:srgbClr val="0D1A26"/>
           </a:solidFill>
           <a:ln>
             <a:noFill/>
@@ -15232,8 +15868,8 @@
         </p:nvSpPr>
         <p:spPr>
           <a:xfrm>
-            <a:off x="8394192" y="1956816"/>
-            <a:ext cx="2743200" cy="237744"/>
+            <a:off x="8622792" y="1783080"/>
+            <a:ext cx="2487168" cy="219456"/>
           </a:xfrm>
           <a:prstGeom prst="rect">
             <a:avLst/>
@@ -15253,7 +15889,7 @@
                   <a:srgbClr val="FF9900"/>
                 </a:solidFill>
               </a:rPr>
-              <a:t>▶  Summarized-at timestamp for auditability</a:t>
+              <a:t>▶  Summarized-at timestamp for audit</a:t>
             </a:r>
           </a:p>
         </p:txBody>
@@ -15285,7 +15921,7 @@
         <p:spPr>
           <a:xfrm>
             <a:off x="0" y="0"/>
-            <a:ext cx="12188952" cy="6858000"/>
+            <a:ext cx="12192000" cy="6858000"/>
           </a:xfrm>
           <a:prstGeom prst="rect">
             <a:avLst/>
@@ -15327,8 +15963,8 @@
         </p:nvSpPr>
         <p:spPr>
           <a:xfrm>
-            <a:off x="0" y="6748272"/>
-            <a:ext cx="12188952" cy="109728"/>
+            <a:off x="0" y="6766560"/>
+            <a:ext cx="12192000" cy="91440"/>
           </a:xfrm>
           <a:prstGeom prst="rect">
             <a:avLst/>
@@ -15370,8 +16006,8 @@
         </p:nvSpPr>
         <p:spPr>
           <a:xfrm>
-            <a:off x="502920" y="256032"/>
-            <a:ext cx="3657600" cy="274320"/>
+            <a:off x="502920" y="201168"/>
+            <a:ext cx="5486400" cy="256032"/>
           </a:xfrm>
           <a:prstGeom prst="rect">
             <a:avLst/>
@@ -15391,7 +16027,7 @@
                   <a:srgbClr val="FF9900"/>
                 </a:solidFill>
               </a:rPr>
-              <a:t>LIVE DEMO — FILTER &amp; SEARCH IN ACTION</a:t>
+              <a:t>LIVE DEMO — FILTER &amp; SEARCH</a:t>
             </a:r>
           </a:p>
         </p:txBody>
@@ -15404,8 +16040,8 @@
         </p:nvSpPr>
         <p:spPr>
           <a:xfrm>
-            <a:off x="502920" y="402336"/>
-            <a:ext cx="8229600" cy="438912"/>
+            <a:off x="502920" y="384048"/>
+            <a:ext cx="10058400" cy="457200"/>
           </a:xfrm>
           <a:prstGeom prst="rect">
             <a:avLst/>
@@ -15425,7 +16061,7 @@
                   <a:srgbClr val="FFFFFF"/>
                 </a:solidFill>
               </a:rPr>
-              <a:t>Filtered View — 'bedrock' · service: amazon-bedrock · type: new-feature</a:t>
+              <a:t>Filtered: 'bedrock'  ·  service: amazon-bedrock  ·  type: new-feature</a:t>
             </a:r>
           </a:p>
         </p:txBody>
@@ -15446,8 +16082,8 @@
         </p:blipFill>
         <p:spPr>
           <a:xfrm>
-            <a:off x="320040" y="914400"/>
-            <a:ext cx="11567160" cy="5440680"/>
+            <a:off x="320040" y="896112"/>
+            <a:ext cx="11539728" cy="5486400"/>
           </a:xfrm>
           <a:prstGeom prst="rect">
             <a:avLst/>
@@ -15462,14 +16098,14 @@
         </p:nvSpPr>
         <p:spPr>
           <a:xfrm>
-            <a:off x="365760" y="960120"/>
-            <a:ext cx="2834640" cy="274320"/>
-          </a:xfrm>
-          <a:prstGeom prst="rect">
-            <a:avLst/>
-          </a:prstGeom>
-          <a:solidFill>
-            <a:srgbClr val="232F3E"/>
+            <a:off x="347472" y="932688"/>
+            <a:ext cx="2606040" cy="292608"/>
+          </a:xfrm>
+          <a:prstGeom prst="rect">
+            <a:avLst/>
+          </a:prstGeom>
+          <a:solidFill>
+            <a:srgbClr val="0D1A26"/>
           </a:solidFill>
           <a:ln>
             <a:noFill/>
@@ -15505,8 +16141,8 @@
         </p:nvSpPr>
         <p:spPr>
           <a:xfrm>
-            <a:off x="438912" y="996696"/>
-            <a:ext cx="2743200" cy="237744"/>
+            <a:off x="420624" y="978408"/>
+            <a:ext cx="2487168" cy="219456"/>
           </a:xfrm>
           <a:prstGeom prst="rect">
             <a:avLst/>
@@ -15526,7 +16162,7 @@
                   <a:srgbClr val="FF9900"/>
                 </a:solidFill>
               </a:rPr>
-              <a:t>▶  Keyword search highlights matching records</a:t>
+              <a:t>▶  Keyword highlights matching records</a:t>
             </a:r>
           </a:p>
         </p:txBody>
@@ -15539,14 +16175,14 @@
         </p:nvSpPr>
         <p:spPr>
           <a:xfrm>
-            <a:off x="365760" y="1417320"/>
-            <a:ext cx="2834640" cy="274320"/>
-          </a:xfrm>
-          <a:prstGeom prst="rect">
-            <a:avLst/>
-          </a:prstGeom>
-          <a:solidFill>
-            <a:srgbClr val="232F3E"/>
+            <a:off x="347472" y="1335024"/>
+            <a:ext cx="2606040" cy="292608"/>
+          </a:xfrm>
+          <a:prstGeom prst="rect">
+            <a:avLst/>
+          </a:prstGeom>
+          <a:solidFill>
+            <a:srgbClr val="0D1A26"/>
           </a:solidFill>
           <a:ln>
             <a:noFill/>
@@ -15582,8 +16218,8 @@
         </p:nvSpPr>
         <p:spPr>
           <a:xfrm>
-            <a:off x="438912" y="1453896"/>
-            <a:ext cx="2743200" cy="237744"/>
+            <a:off x="420624" y="1380744"/>
+            <a:ext cx="2487168" cy="219456"/>
           </a:xfrm>
           <a:prstGeom prst="rect">
             <a:avLst/>
@@ -15616,14 +16252,14 @@
         </p:nvSpPr>
         <p:spPr>
           <a:xfrm>
-            <a:off x="365760" y="1920240"/>
-            <a:ext cx="2834640" cy="274320"/>
-          </a:xfrm>
-          <a:prstGeom prst="rect">
-            <a:avLst/>
-          </a:prstGeom>
-          <a:solidFill>
-            <a:srgbClr val="232F3E"/>
+            <a:off x="347472" y="1737360"/>
+            <a:ext cx="2606040" cy="292608"/>
+          </a:xfrm>
+          <a:prstGeom prst="rect">
+            <a:avLst/>
+          </a:prstGeom>
+          <a:solidFill>
+            <a:srgbClr val="0D1A26"/>
           </a:solidFill>
           <a:ln>
             <a:noFill/>
@@ -15659,8 +16295,8 @@
         </p:nvSpPr>
         <p:spPr>
           <a:xfrm>
-            <a:off x="438912" y="1956816"/>
-            <a:ext cx="2743200" cy="237744"/>
+            <a:off x="420624" y="1783080"/>
+            <a:ext cx="2487168" cy="219456"/>
           </a:xfrm>
           <a:prstGeom prst="rect">
             <a:avLst/>
@@ -15680,7 +16316,7 @@
                   <a:srgbClr val="FF9900"/>
                 </a:solidFill>
               </a:rPr>
-              <a:t>▶  Result count updates in real-time</a:t>
+              <a:t>▶  Real-time result count</a:t>
             </a:r>
           </a:p>
         </p:txBody>
@@ -15693,14 +16329,14 @@
         </p:nvSpPr>
         <p:spPr>
           <a:xfrm>
-            <a:off x="8321040" y="960120"/>
-            <a:ext cx="2834640" cy="274320"/>
-          </a:xfrm>
-          <a:prstGeom prst="rect">
-            <a:avLst/>
-          </a:prstGeom>
-          <a:solidFill>
-            <a:srgbClr val="232F3E"/>
+            <a:off x="8549640" y="932688"/>
+            <a:ext cx="2606040" cy="292608"/>
+          </a:xfrm>
+          <a:prstGeom prst="rect">
+            <a:avLst/>
+          </a:prstGeom>
+          <a:solidFill>
+            <a:srgbClr val="0D1A26"/>
           </a:solidFill>
           <a:ln>
             <a:noFill/>
@@ -15736,8 +16372,8 @@
         </p:nvSpPr>
         <p:spPr>
           <a:xfrm>
-            <a:off x="8394192" y="996696"/>
-            <a:ext cx="2743200" cy="237744"/>
+            <a:off x="8622792" y="978408"/>
+            <a:ext cx="2487168" cy="219456"/>
           </a:xfrm>
           <a:prstGeom prst="rect">
             <a:avLst/>
@@ -15770,14 +16406,14 @@
         </p:nvSpPr>
         <p:spPr>
           <a:xfrm>
-            <a:off x="8321040" y="1417320"/>
-            <a:ext cx="2834640" cy="274320"/>
-          </a:xfrm>
-          <a:prstGeom prst="rect">
-            <a:avLst/>
-          </a:prstGeom>
-          <a:solidFill>
-            <a:srgbClr val="232F3E"/>
+            <a:off x="8549640" y="1335024"/>
+            <a:ext cx="2606040" cy="292608"/>
+          </a:xfrm>
+          <a:prstGeom prst="rect">
+            <a:avLst/>
+          </a:prstGeom>
+          <a:solidFill>
+            <a:srgbClr val="0D1A26"/>
           </a:solidFill>
           <a:ln>
             <a:noFill/>
@@ -15813,8 +16449,8 @@
         </p:nvSpPr>
         <p:spPr>
           <a:xfrm>
-            <a:off x="8394192" y="1453896"/>
-            <a:ext cx="2743200" cy="237744"/>
+            <a:off x="8622792" y="1380744"/>
+            <a:ext cx="2487168" cy="219456"/>
           </a:xfrm>
           <a:prstGeom prst="rect">
             <a:avLst/>
@@ -15834,7 +16470,7 @@
                   <a:srgbClr val="FF9900"/>
                 </a:solidFill>
               </a:rPr>
-              <a:t>▶  Infinite scroll loads next page automatically</a:t>
+              <a:t>▶  Infinite scroll auto-loads next page</a:t>
             </a:r>
           </a:p>
         </p:txBody>
@@ -15847,14 +16483,14 @@
         </p:nvSpPr>
         <p:spPr>
           <a:xfrm>
-            <a:off x="8321040" y="1920240"/>
-            <a:ext cx="2834640" cy="274320"/>
-          </a:xfrm>
-          <a:prstGeom prst="rect">
-            <a:avLst/>
-          </a:prstGeom>
-          <a:solidFill>
-            <a:srgbClr val="232F3E"/>
+            <a:off x="8549640" y="1737360"/>
+            <a:ext cx="2606040" cy="292608"/>
+          </a:xfrm>
+          <a:prstGeom prst="rect">
+            <a:avLst/>
+          </a:prstGeom>
+          <a:solidFill>
+            <a:srgbClr val="0D1A26"/>
           </a:solidFill>
           <a:ln>
             <a:noFill/>
@@ -15890,8 +16526,8 @@
         </p:nvSpPr>
         <p:spPr>
           <a:xfrm>
-            <a:off x="8394192" y="1956816"/>
-            <a:ext cx="2743200" cy="237744"/>
+            <a:off x="8622792" y="1783080"/>
+            <a:ext cx="2487168" cy="219456"/>
           </a:xfrm>
           <a:prstGeom prst="rect">
             <a:avLst/>
@@ -15943,7 +16579,7 @@
         <p:spPr>
           <a:xfrm>
             <a:off x="0" y="0"/>
-            <a:ext cx="12188952" cy="6858000"/>
+            <a:ext cx="12192000" cy="6858000"/>
           </a:xfrm>
           <a:prstGeom prst="rect">
             <a:avLst/>
@@ -15986,7 +16622,7 @@
         <p:spPr>
           <a:xfrm>
             <a:off x="0" y="0"/>
-            <a:ext cx="12188952" cy="1005840"/>
+            <a:ext cx="12192000" cy="960120"/>
           </a:xfrm>
           <a:prstGeom prst="rect">
             <a:avLst/>
@@ -16028,8 +16664,8 @@
         </p:nvSpPr>
         <p:spPr>
           <a:xfrm>
-            <a:off x="0" y="6748272"/>
-            <a:ext cx="12188952" cy="109728"/>
+            <a:off x="0" y="6766560"/>
+            <a:ext cx="12192000" cy="91440"/>
           </a:xfrm>
           <a:prstGeom prst="rect">
             <a:avLst/>
@@ -16071,7 +16707,7 @@
         </p:nvSpPr>
         <p:spPr>
           <a:xfrm>
-            <a:off x="502920" y="182880"/>
+            <a:off x="502920" y="164592"/>
             <a:ext cx="10058400" cy="512064"/>
           </a:xfrm>
           <a:prstGeom prst="rect">
@@ -16105,7 +16741,7 @@
         </p:nvSpPr>
         <p:spPr>
           <a:xfrm>
-            <a:off x="502920" y="694944"/>
+            <a:off x="502920" y="676656"/>
             <a:ext cx="10058400" cy="256032"/>
           </a:xfrm>
           <a:prstGeom prst="rect">
@@ -16139,8 +16775,51 @@
         </p:nvSpPr>
         <p:spPr>
           <a:xfrm>
-            <a:off x="411480" y="1188720"/>
-            <a:ext cx="3749039" cy="1828800"/>
+            <a:off x="411480" y="1197864"/>
+            <a:ext cx="3703320" cy="1847088"/>
+          </a:xfrm>
+          <a:prstGeom prst="rect">
+            <a:avLst/>
+          </a:prstGeom>
+          <a:solidFill>
+            <a:srgbClr val="CBD5E1"/>
+          </a:solidFill>
+          <a:ln>
+            <a:noFill/>
+          </a:ln>
+        </p:spPr>
+        <p:style>
+          <a:lnRef idx="1">
+            <a:schemeClr val="accent1"/>
+          </a:lnRef>
+          <a:fillRef idx="3">
+            <a:schemeClr val="accent1"/>
+          </a:fillRef>
+          <a:effectRef idx="2">
+            <a:schemeClr val="accent1"/>
+          </a:effectRef>
+          <a:fontRef idx="minor">
+            <a:schemeClr val="lt1"/>
+          </a:fontRef>
+        </p:style>
+        <p:txBody>
+          <a:bodyPr rtlCol="0" anchor="ctr"/>
+          <a:lstStyle/>
+          <a:p>
+            <a:pPr algn="ctr"/>
+          </a:p>
+        </p:txBody>
+      </p:sp>
+      <p:sp>
+        <p:nvSpPr>
+          <p:cNvPr id="8" name="Rectangle 7"/>
+          <p:cNvSpPr/>
+          <p:nvPr/>
+        </p:nvSpPr>
+        <p:spPr>
+          <a:xfrm>
+            <a:off x="384048" y="1170432"/>
+            <a:ext cx="3703320" cy="1847088"/>
           </a:xfrm>
           <a:prstGeom prst="rect">
             <a:avLst/>
@@ -16148,7 +16827,7 @@
           <a:solidFill>
             <a:srgbClr val="FFFFFF"/>
           </a:solidFill>
-          <a:ln w="12700">
+          <a:ln w="9525">
             <a:solidFill>
               <a:srgbClr val="E2E8F0"/>
             </a:solidFill>
@@ -16178,14 +16857,14 @@
       </p:sp>
       <p:sp>
         <p:nvSpPr>
-          <p:cNvPr id="8" name="Rectangle 7"/>
-          <p:cNvSpPr/>
-          <p:nvPr/>
-        </p:nvSpPr>
-        <p:spPr>
-          <a:xfrm>
-            <a:off x="411480" y="1188720"/>
-            <a:ext cx="3749039" cy="73152"/>
+          <p:cNvPr id="9" name="Rectangle 8"/>
+          <p:cNvSpPr/>
+          <p:nvPr/>
+        </p:nvSpPr>
+        <p:spPr>
+          <a:xfrm>
+            <a:off x="384048" y="1170432"/>
+            <a:ext cx="3703320" cy="64008"/>
           </a:xfrm>
           <a:prstGeom prst="rect">
             <a:avLst/>
@@ -16221,14 +16900,14 @@
       </p:sp>
       <p:sp>
         <p:nvSpPr>
-          <p:cNvPr id="9" name="TextBox 8"/>
-          <p:cNvSpPr txBox="1"/>
-          <p:nvPr/>
-        </p:nvSpPr>
-        <p:spPr>
-          <a:xfrm>
-            <a:off x="521208" y="1316736"/>
-            <a:ext cx="3566159" cy="274320"/>
+          <p:cNvPr id="10" name="TextBox 9"/>
+          <p:cNvSpPr txBox="1"/>
+          <p:nvPr/>
+        </p:nvSpPr>
+        <p:spPr>
+          <a:xfrm>
+            <a:off x="493776" y="1289304"/>
+            <a:ext cx="3520440" cy="274320"/>
           </a:xfrm>
           <a:prstGeom prst="rect">
             <a:avLst/>
@@ -16255,14 +16934,14 @@
       </p:sp>
       <p:sp>
         <p:nvSpPr>
-          <p:cNvPr id="10" name="TextBox 9"/>
-          <p:cNvSpPr txBox="1"/>
-          <p:nvPr/>
-        </p:nvSpPr>
-        <p:spPr>
-          <a:xfrm>
-            <a:off x="521208" y="1627632"/>
-            <a:ext cx="3566159" cy="804672"/>
+          <p:cNvPr id="11" name="TextBox 10"/>
+          <p:cNvSpPr txBox="1"/>
+          <p:nvPr/>
+        </p:nvSpPr>
+        <p:spPr>
+          <a:xfrm>
+            <a:off x="493776" y="1591056"/>
+            <a:ext cx="3520440" cy="804672"/>
           </a:xfrm>
           <a:prstGeom prst="rect">
             <a:avLst/>
@@ -16282,21 +16961,21 @@
                   <a:srgbClr val="64748B"/>
                 </a:solidFill>
               </a:rPr>
-              <a:t>Every Monday, the team opens the tracker filtered to 'last 7 days' to review everything AWS shipped. In 15 minutes instead of 2 hours, the team identifies 3-5 features worth piloting.</a:t>
-            </a:r>
-          </a:p>
-        </p:txBody>
-      </p:sp>
-      <p:sp>
-        <p:nvSpPr>
-          <p:cNvPr id="11" name="Rectangle 10"/>
-          <p:cNvSpPr/>
-          <p:nvPr/>
-        </p:nvSpPr>
-        <p:spPr>
-          <a:xfrm>
-            <a:off x="521208" y="2670048"/>
-            <a:ext cx="3529583" cy="256032"/>
+              <a:t>Every Monday: filter last 7 days, sort newest first. In 15 minutes the team identifies 3-5 features worth piloting — replacing 2 hours of manual reading.</a:t>
+            </a:r>
+          </a:p>
+        </p:txBody>
+      </p:sp>
+      <p:sp>
+        <p:nvSpPr>
+          <p:cNvPr id="12" name="Rectangle 11"/>
+          <p:cNvSpPr/>
+          <p:nvPr/>
+        </p:nvSpPr>
+        <p:spPr>
+          <a:xfrm>
+            <a:off x="493776" y="2670048"/>
+            <a:ext cx="3483864" cy="256032"/>
           </a:xfrm>
           <a:prstGeom prst="rect">
             <a:avLst/>
@@ -16332,14 +17011,14 @@
       </p:sp>
       <p:sp>
         <p:nvSpPr>
-          <p:cNvPr id="12" name="TextBox 11"/>
-          <p:cNvSpPr txBox="1"/>
-          <p:nvPr/>
-        </p:nvSpPr>
-        <p:spPr>
-          <a:xfrm>
-            <a:off x="576072" y="2688336"/>
-            <a:ext cx="3474719" cy="237744"/>
+          <p:cNvPr id="13" name="TextBox 12"/>
+          <p:cNvSpPr txBox="1"/>
+          <p:nvPr/>
+        </p:nvSpPr>
+        <p:spPr>
+          <a:xfrm>
+            <a:off x="548640" y="2688336"/>
+            <a:ext cx="3429000" cy="237744"/>
           </a:xfrm>
           <a:prstGeom prst="rect">
             <a:avLst/>
@@ -16359,21 +17038,64 @@
                   <a:srgbClr val="FF9900"/>
                 </a:solidFill>
               </a:rPr>
-              <a:t>Filter: from_date=7 days ago · sort=newest</a:t>
-            </a:r>
-          </a:p>
-        </p:txBody>
-      </p:sp>
-      <p:sp>
-        <p:nvSpPr>
-          <p:cNvPr id="13" name="Rectangle 12"/>
-          <p:cNvSpPr/>
-          <p:nvPr/>
-        </p:nvSpPr>
-        <p:spPr>
-          <a:xfrm>
-            <a:off x="3528456956280" y="1188720"/>
-            <a:ext cx="3749039" cy="1828800"/>
+              <a:t>from_date=7d ago · sort=newest</a:t>
+            </a:r>
+          </a:p>
+        </p:txBody>
+      </p:sp>
+      <p:sp>
+        <p:nvSpPr>
+          <p:cNvPr id="14" name="Rectangle 13"/>
+          <p:cNvSpPr/>
+          <p:nvPr/>
+        </p:nvSpPr>
+        <p:spPr>
+          <a:xfrm>
+            <a:off x="4224528" y="1197864"/>
+            <a:ext cx="3703320" cy="1847088"/>
+          </a:xfrm>
+          <a:prstGeom prst="rect">
+            <a:avLst/>
+          </a:prstGeom>
+          <a:solidFill>
+            <a:srgbClr val="CBD5E1"/>
+          </a:solidFill>
+          <a:ln>
+            <a:noFill/>
+          </a:ln>
+        </p:spPr>
+        <p:style>
+          <a:lnRef idx="1">
+            <a:schemeClr val="accent1"/>
+          </a:lnRef>
+          <a:fillRef idx="3">
+            <a:schemeClr val="accent1"/>
+          </a:fillRef>
+          <a:effectRef idx="2">
+            <a:schemeClr val="accent1"/>
+          </a:effectRef>
+          <a:fontRef idx="minor">
+            <a:schemeClr val="lt1"/>
+          </a:fontRef>
+        </p:style>
+        <p:txBody>
+          <a:bodyPr rtlCol="0" anchor="ctr"/>
+          <a:lstStyle/>
+          <a:p>
+            <a:pPr algn="ctr"/>
+          </a:p>
+        </p:txBody>
+      </p:sp>
+      <p:sp>
+        <p:nvSpPr>
+          <p:cNvPr id="15" name="Rectangle 14"/>
+          <p:cNvSpPr/>
+          <p:nvPr/>
+        </p:nvSpPr>
+        <p:spPr>
+          <a:xfrm>
+            <a:off x="4197096" y="1170432"/>
+            <a:ext cx="3703320" cy="1847088"/>
           </a:xfrm>
           <a:prstGeom prst="rect">
             <a:avLst/>
@@ -16381,7 +17103,7 @@
           <a:solidFill>
             <a:srgbClr val="FFFFFF"/>
           </a:solidFill>
-          <a:ln w="12700">
+          <a:ln w="9525">
             <a:solidFill>
               <a:srgbClr val="E2E8F0"/>
             </a:solidFill>
@@ -16411,14 +17133,14 @@
       </p:sp>
       <p:sp>
         <p:nvSpPr>
-          <p:cNvPr id="14" name="Rectangle 13"/>
-          <p:cNvSpPr/>
-          <p:nvPr/>
-        </p:nvSpPr>
-        <p:spPr>
-          <a:xfrm>
-            <a:off x="3528456956280" y="1188720"/>
-            <a:ext cx="3749039" cy="73152"/>
+          <p:cNvPr id="16" name="Rectangle 15"/>
+          <p:cNvSpPr/>
+          <p:nvPr/>
+        </p:nvSpPr>
+        <p:spPr>
+          <a:xfrm>
+            <a:off x="4197096" y="1170432"/>
+            <a:ext cx="3703320" cy="64008"/>
           </a:xfrm>
           <a:prstGeom prst="rect">
             <a:avLst/>
@@ -16454,14 +17176,14 @@
       </p:sp>
       <p:sp>
         <p:nvSpPr>
-          <p:cNvPr id="15" name="TextBox 14"/>
-          <p:cNvSpPr txBox="1"/>
-          <p:nvPr/>
-        </p:nvSpPr>
-        <p:spPr>
-          <a:xfrm>
-            <a:off x="3528457066008" y="1316736"/>
-            <a:ext cx="3566159" cy="274320"/>
+          <p:cNvPr id="17" name="TextBox 16"/>
+          <p:cNvSpPr txBox="1"/>
+          <p:nvPr/>
+        </p:nvSpPr>
+        <p:spPr>
+          <a:xfrm>
+            <a:off x="4306824" y="1289304"/>
+            <a:ext cx="3520440" cy="274320"/>
           </a:xfrm>
           <a:prstGeom prst="rect">
             <a:avLst/>
@@ -16488,14 +17210,14 @@
       </p:sp>
       <p:sp>
         <p:nvSpPr>
-          <p:cNvPr id="16" name="TextBox 15"/>
-          <p:cNvSpPr txBox="1"/>
-          <p:nvPr/>
-        </p:nvSpPr>
-        <p:spPr>
-          <a:xfrm>
-            <a:off x="3528457066008" y="1627632"/>
-            <a:ext cx="3566159" cy="804672"/>
+          <p:cNvPr id="18" name="TextBox 17"/>
+          <p:cNvSpPr txBox="1"/>
+          <p:nvPr/>
+        </p:nvSpPr>
+        <p:spPr>
+          <a:xfrm>
+            <a:off x="4306824" y="1591056"/>
+            <a:ext cx="3520440" cy="804672"/>
           </a:xfrm>
           <a:prstGeom prst="rect">
             <a:avLst/>
@@ -16515,21 +17237,21 @@
                   <a:srgbClr val="64748B"/>
                 </a:solidFill>
               </a:rPr>
-              <a:t>Before migrating workloads to Graviton4, search 'graviton4' to see all enhancements, GA announcements, and any related price changes — in one scrollable view.</a:t>
-            </a:r>
-          </a:p>
-        </p:txBody>
-      </p:sp>
-      <p:sp>
-        <p:nvSpPr>
-          <p:cNvPr id="17" name="Rectangle 16"/>
-          <p:cNvSpPr/>
-          <p:nvPr/>
-        </p:nvSpPr>
-        <p:spPr>
-          <a:xfrm>
-            <a:off x="3528457066008" y="2670048"/>
-            <a:ext cx="3529583" cy="256032"/>
+              <a:t>Before adopting Graviton4, search 'graviton4' to see all GA announcements, enhancements, and price changes in one scrollable timeline.</a:t>
+            </a:r>
+          </a:p>
+        </p:txBody>
+      </p:sp>
+      <p:sp>
+        <p:nvSpPr>
+          <p:cNvPr id="19" name="Rectangle 18"/>
+          <p:cNvSpPr/>
+          <p:nvPr/>
+        </p:nvSpPr>
+        <p:spPr>
+          <a:xfrm>
+            <a:off x="4306824" y="2670048"/>
+            <a:ext cx="3483864" cy="256032"/>
           </a:xfrm>
           <a:prstGeom prst="rect">
             <a:avLst/>
@@ -16565,14 +17287,14 @@
       </p:sp>
       <p:sp>
         <p:nvSpPr>
-          <p:cNvPr id="18" name="TextBox 17"/>
-          <p:cNvSpPr txBox="1"/>
-          <p:nvPr/>
-        </p:nvSpPr>
-        <p:spPr>
-          <a:xfrm>
-            <a:off x="3528457120872" y="2688336"/>
-            <a:ext cx="3474719" cy="237744"/>
+          <p:cNvPr id="20" name="TextBox 19"/>
+          <p:cNvSpPr txBox="1"/>
+          <p:nvPr/>
+        </p:nvSpPr>
+        <p:spPr>
+          <a:xfrm>
+            <a:off x="4361688" y="2688336"/>
+            <a:ext cx="3429000" cy="237744"/>
           </a:xfrm>
           <a:prstGeom prst="rect">
             <a:avLst/>
@@ -16592,21 +17314,64 @@
                   <a:srgbClr val="146EB4"/>
                 </a:solidFill>
               </a:rPr>
-              <a:t>Search: 'graviton4' · type: general-availability</a:t>
-            </a:r>
-          </a:p>
-        </p:txBody>
-      </p:sp>
-      <p:sp>
-        <p:nvSpPr>
-          <p:cNvPr id="19" name="Rectangle 18"/>
-          <p:cNvSpPr/>
-          <p:nvPr/>
-        </p:nvSpPr>
-        <p:spPr>
-          <a:xfrm>
-            <a:off x="7056913501080" y="1188720"/>
-            <a:ext cx="3749039" cy="1828800"/>
+              <a:t>q=graviton4 · type=general-availability</a:t>
+            </a:r>
+          </a:p>
+        </p:txBody>
+      </p:sp>
+      <p:sp>
+        <p:nvSpPr>
+          <p:cNvPr id="21" name="Rectangle 20"/>
+          <p:cNvSpPr/>
+          <p:nvPr/>
+        </p:nvSpPr>
+        <p:spPr>
+          <a:xfrm>
+            <a:off x="8037576" y="1197864"/>
+            <a:ext cx="3703320" cy="1847088"/>
+          </a:xfrm>
+          <a:prstGeom prst="rect">
+            <a:avLst/>
+          </a:prstGeom>
+          <a:solidFill>
+            <a:srgbClr val="CBD5E1"/>
+          </a:solidFill>
+          <a:ln>
+            <a:noFill/>
+          </a:ln>
+        </p:spPr>
+        <p:style>
+          <a:lnRef idx="1">
+            <a:schemeClr val="accent1"/>
+          </a:lnRef>
+          <a:fillRef idx="3">
+            <a:schemeClr val="accent1"/>
+          </a:fillRef>
+          <a:effectRef idx="2">
+            <a:schemeClr val="accent1"/>
+          </a:effectRef>
+          <a:fontRef idx="minor">
+            <a:schemeClr val="lt1"/>
+          </a:fontRef>
+        </p:style>
+        <p:txBody>
+          <a:bodyPr rtlCol="0" anchor="ctr"/>
+          <a:lstStyle/>
+          <a:p>
+            <a:pPr algn="ctr"/>
+          </a:p>
+        </p:txBody>
+      </p:sp>
+      <p:sp>
+        <p:nvSpPr>
+          <p:cNvPr id="22" name="Rectangle 21"/>
+          <p:cNvSpPr/>
+          <p:nvPr/>
+        </p:nvSpPr>
+        <p:spPr>
+          <a:xfrm>
+            <a:off x="8010144" y="1170432"/>
+            <a:ext cx="3703320" cy="1847088"/>
           </a:xfrm>
           <a:prstGeom prst="rect">
             <a:avLst/>
@@ -16614,7 +17379,7 @@
           <a:solidFill>
             <a:srgbClr val="FFFFFF"/>
           </a:solidFill>
-          <a:ln w="12700">
+          <a:ln w="9525">
             <a:solidFill>
               <a:srgbClr val="E2E8F0"/>
             </a:solidFill>
@@ -16644,14 +17409,14 @@
       </p:sp>
       <p:sp>
         <p:nvSpPr>
-          <p:cNvPr id="20" name="Rectangle 19"/>
-          <p:cNvSpPr/>
-          <p:nvPr/>
-        </p:nvSpPr>
-        <p:spPr>
-          <a:xfrm>
-            <a:off x="7056913501080" y="1188720"/>
-            <a:ext cx="3749039" cy="73152"/>
+          <p:cNvPr id="23" name="Rectangle 22"/>
+          <p:cNvSpPr/>
+          <p:nvPr/>
+        </p:nvSpPr>
+        <p:spPr>
+          <a:xfrm>
+            <a:off x="8010144" y="1170432"/>
+            <a:ext cx="3703320" cy="64008"/>
           </a:xfrm>
           <a:prstGeom prst="rect">
             <a:avLst/>
@@ -16687,14 +17452,14 @@
       </p:sp>
       <p:sp>
         <p:nvSpPr>
-          <p:cNvPr id="21" name="TextBox 20"/>
-          <p:cNvSpPr txBox="1"/>
-          <p:nvPr/>
-        </p:nvSpPr>
-        <p:spPr>
-          <a:xfrm>
-            <a:off x="7056913610808" y="1316736"/>
-            <a:ext cx="3566159" cy="274320"/>
+          <p:cNvPr id="24" name="TextBox 23"/>
+          <p:cNvSpPr txBox="1"/>
+          <p:nvPr/>
+        </p:nvSpPr>
+        <p:spPr>
+          <a:xfrm>
+            <a:off x="8119872" y="1289304"/>
+            <a:ext cx="3520440" cy="274320"/>
           </a:xfrm>
           <a:prstGeom prst="rect">
             <a:avLst/>
@@ -16721,14 +17486,14 @@
       </p:sp>
       <p:sp>
         <p:nvSpPr>
-          <p:cNvPr id="22" name="TextBox 21"/>
-          <p:cNvSpPr txBox="1"/>
-          <p:nvPr/>
-        </p:nvSpPr>
-        <p:spPr>
-          <a:xfrm>
-            <a:off x="7056913610808" y="1627632"/>
-            <a:ext cx="3566159" cy="804672"/>
+          <p:cNvPr id="25" name="TextBox 24"/>
+          <p:cNvSpPr txBox="1"/>
+          <p:nvPr/>
+        </p:nvSpPr>
+        <p:spPr>
+          <a:xfrm>
+            <a:off x="8119872" y="1591056"/>
+            <a:ext cx="3520440" cy="804672"/>
           </a:xfrm>
           <a:prstGeom prst="rect">
             <a:avLst/>
@@ -16748,21 +17513,21 @@
                   <a:srgbClr val="64748B"/>
                 </a:solidFill>
               </a:rPr>
-              <a:t>Filter feature_type=deprecation to build a living list of EOL services and features. Share the URL with the architecture team as a standing reference.</a:t>
-            </a:r>
-          </a:p>
-        </p:txBody>
-      </p:sp>
-      <p:sp>
-        <p:nvSpPr>
-          <p:cNvPr id="23" name="Rectangle 22"/>
-          <p:cNvSpPr/>
-          <p:nvPr/>
-        </p:nvSpPr>
-        <p:spPr>
-          <a:xfrm>
-            <a:off x="7056913610808" y="2670048"/>
-            <a:ext cx="3529583" cy="256032"/>
+              <a:t>Filter type=deprecation to build a living list of EOL services. Share the URL with the architecture team as a standing reference bookmark.</a:t>
+            </a:r>
+          </a:p>
+        </p:txBody>
+      </p:sp>
+      <p:sp>
+        <p:nvSpPr>
+          <p:cNvPr id="26" name="Rectangle 25"/>
+          <p:cNvSpPr/>
+          <p:nvPr/>
+        </p:nvSpPr>
+        <p:spPr>
+          <a:xfrm>
+            <a:off x="8119872" y="2670048"/>
+            <a:ext cx="3483864" cy="256032"/>
           </a:xfrm>
           <a:prstGeom prst="rect">
             <a:avLst/>
@@ -16798,14 +17563,14 @@
       </p:sp>
       <p:sp>
         <p:nvSpPr>
-          <p:cNvPr id="24" name="TextBox 23"/>
-          <p:cNvSpPr txBox="1"/>
-          <p:nvPr/>
-        </p:nvSpPr>
-        <p:spPr>
-          <a:xfrm>
-            <a:off x="7056913665672" y="2688336"/>
-            <a:ext cx="3474719" cy="237744"/>
+          <p:cNvPr id="27" name="TextBox 26"/>
+          <p:cNvSpPr txBox="1"/>
+          <p:nvPr/>
+        </p:nvSpPr>
+        <p:spPr>
+          <a:xfrm>
+            <a:off x="8174736" y="2688336"/>
+            <a:ext cx="3429000" cy="237744"/>
           </a:xfrm>
           <a:prstGeom prst="rect">
             <a:avLst/>
@@ -16825,21 +17590,64 @@
                   <a:srgbClr val="16A34A"/>
                 </a:solidFill>
               </a:rPr>
-              <a:t>Filter: type=deprecation · sort=oldest</a:t>
-            </a:r>
-          </a:p>
-        </p:txBody>
-      </p:sp>
-      <p:sp>
-        <p:nvSpPr>
-          <p:cNvPr id="25" name="Rectangle 24"/>
-          <p:cNvSpPr/>
-          <p:nvPr/>
-        </p:nvSpPr>
-        <p:spPr>
-          <a:xfrm>
-            <a:off x="411480" y="1739146097520"/>
-            <a:ext cx="3749039" cy="1828800"/>
+              <a:t>type=deprecation · sort=oldest</a:t>
+            </a:r>
+          </a:p>
+        </p:txBody>
+      </p:sp>
+      <p:sp>
+        <p:nvSpPr>
+          <p:cNvPr id="28" name="Rectangle 27"/>
+          <p:cNvSpPr/>
+          <p:nvPr/>
+        </p:nvSpPr>
+        <p:spPr>
+          <a:xfrm>
+            <a:off x="411480" y="3099816"/>
+            <a:ext cx="3703320" cy="1847088"/>
+          </a:xfrm>
+          <a:prstGeom prst="rect">
+            <a:avLst/>
+          </a:prstGeom>
+          <a:solidFill>
+            <a:srgbClr val="CBD5E1"/>
+          </a:solidFill>
+          <a:ln>
+            <a:noFill/>
+          </a:ln>
+        </p:spPr>
+        <p:style>
+          <a:lnRef idx="1">
+            <a:schemeClr val="accent1"/>
+          </a:lnRef>
+          <a:fillRef idx="3">
+            <a:schemeClr val="accent1"/>
+          </a:fillRef>
+          <a:effectRef idx="2">
+            <a:schemeClr val="accent1"/>
+          </a:effectRef>
+          <a:fontRef idx="minor">
+            <a:schemeClr val="lt1"/>
+          </a:fontRef>
+        </p:style>
+        <p:txBody>
+          <a:bodyPr rtlCol="0" anchor="ctr"/>
+          <a:lstStyle/>
+          <a:p>
+            <a:pPr algn="ctr"/>
+          </a:p>
+        </p:txBody>
+      </p:sp>
+      <p:sp>
+        <p:nvSpPr>
+          <p:cNvPr id="29" name="Rectangle 28"/>
+          <p:cNvSpPr/>
+          <p:nvPr/>
+        </p:nvSpPr>
+        <p:spPr>
+          <a:xfrm>
+            <a:off x="384048" y="3072384"/>
+            <a:ext cx="3703320" cy="1847088"/>
           </a:xfrm>
           <a:prstGeom prst="rect">
             <a:avLst/>
@@ -16847,7 +17655,7 @@
           <a:solidFill>
             <a:srgbClr val="FFFFFF"/>
           </a:solidFill>
-          <a:ln w="12700">
+          <a:ln w="9525">
             <a:solidFill>
               <a:srgbClr val="E2E8F0"/>
             </a:solidFill>
@@ -16877,14 +17685,14 @@
       </p:sp>
       <p:sp>
         <p:nvSpPr>
-          <p:cNvPr id="26" name="Rectangle 25"/>
-          <p:cNvSpPr/>
-          <p:nvPr/>
-        </p:nvSpPr>
-        <p:spPr>
-          <a:xfrm>
-            <a:off x="411480" y="1739146097520"/>
-            <a:ext cx="3749039" cy="73152"/>
+          <p:cNvPr id="30" name="Rectangle 29"/>
+          <p:cNvSpPr/>
+          <p:nvPr/>
+        </p:nvSpPr>
+        <p:spPr>
+          <a:xfrm>
+            <a:off x="384048" y="3072384"/>
+            <a:ext cx="3703320" cy="64008"/>
           </a:xfrm>
           <a:prstGeom prst="rect">
             <a:avLst/>
@@ -16920,14 +17728,14 @@
       </p:sp>
       <p:sp>
         <p:nvSpPr>
-          <p:cNvPr id="27" name="TextBox 26"/>
-          <p:cNvSpPr txBox="1"/>
-          <p:nvPr/>
-        </p:nvSpPr>
-        <p:spPr>
-          <a:xfrm>
-            <a:off x="521208" y="1739146225536"/>
-            <a:ext cx="3566159" cy="274320"/>
+          <p:cNvPr id="31" name="TextBox 30"/>
+          <p:cNvSpPr txBox="1"/>
+          <p:nvPr/>
+        </p:nvSpPr>
+        <p:spPr>
+          <a:xfrm>
+            <a:off x="493776" y="3191256"/>
+            <a:ext cx="3520440" cy="274320"/>
           </a:xfrm>
           <a:prstGeom prst="rect">
             <a:avLst/>
@@ -16947,21 +17755,21 @@
                   <a:srgbClr val="1E293B"/>
                 </a:solidFill>
               </a:rPr>
-              <a:t>Cost Optimization Alerts</a:t>
-            </a:r>
-          </a:p>
-        </p:txBody>
-      </p:sp>
-      <p:sp>
-        <p:nvSpPr>
-          <p:cNvPr id="28" name="TextBox 27"/>
-          <p:cNvSpPr txBox="1"/>
-          <p:nvPr/>
-        </p:nvSpPr>
-        <p:spPr>
-          <a:xfrm>
-            <a:off x="521208" y="1739146536432"/>
-            <a:ext cx="3566159" cy="804672"/>
+              <a:t>Cost Optimization</a:t>
+            </a:r>
+          </a:p>
+        </p:txBody>
+      </p:sp>
+      <p:sp>
+        <p:nvSpPr>
+          <p:cNvPr id="32" name="TextBox 31"/>
+          <p:cNvSpPr txBox="1"/>
+          <p:nvPr/>
+        </p:nvSpPr>
+        <p:spPr>
+          <a:xfrm>
+            <a:off x="493776" y="3493008"/>
+            <a:ext cx="3520440" cy="804672"/>
           </a:xfrm>
           <a:prstGeom prst="rect">
             <a:avLst/>
@@ -16981,21 +17789,21 @@
                   <a:srgbClr val="64748B"/>
                 </a:solidFill>
               </a:rPr>
-              <a:t>Filter feature_type=price-change to immediately see DynamoDB, Lambda, and S3 price reductions. Calculate savings and present the business case for migration.</a:t>
-            </a:r>
-          </a:p>
-        </p:txBody>
-      </p:sp>
-      <p:sp>
-        <p:nvSpPr>
-          <p:cNvPr id="29" name="Rectangle 28"/>
-          <p:cNvSpPr/>
-          <p:nvPr/>
-        </p:nvSpPr>
-        <p:spPr>
-          <a:xfrm>
-            <a:off x="521208" y="1739147578848"/>
-            <a:ext cx="3529583" cy="256032"/>
+              <a:t>Filter type=price-change to catch every DynamoDB, Lambda, and S3 reduction. Calculate savings and present the business case for migration.</a:t>
+            </a:r>
+          </a:p>
+        </p:txBody>
+      </p:sp>
+      <p:sp>
+        <p:nvSpPr>
+          <p:cNvPr id="33" name="Rectangle 32"/>
+          <p:cNvSpPr/>
+          <p:nvPr/>
+        </p:nvSpPr>
+        <p:spPr>
+          <a:xfrm>
+            <a:off x="493776" y="4572000"/>
+            <a:ext cx="3483864" cy="256032"/>
           </a:xfrm>
           <a:prstGeom prst="rect">
             <a:avLst/>
@@ -17031,14 +17839,14 @@
       </p:sp>
       <p:sp>
         <p:nvSpPr>
-          <p:cNvPr id="30" name="TextBox 29"/>
-          <p:cNvSpPr txBox="1"/>
-          <p:nvPr/>
-        </p:nvSpPr>
-        <p:spPr>
-          <a:xfrm>
-            <a:off x="576072" y="1739147597136"/>
-            <a:ext cx="3474719" cy="237744"/>
+          <p:cNvPr id="34" name="TextBox 33"/>
+          <p:cNvSpPr txBox="1"/>
+          <p:nvPr/>
+        </p:nvSpPr>
+        <p:spPr>
+          <a:xfrm>
+            <a:off x="548640" y="4590288"/>
+            <a:ext cx="3429000" cy="237744"/>
           </a:xfrm>
           <a:prstGeom prst="rect">
             <a:avLst/>
@@ -17058,21 +17866,64 @@
                   <a:srgbClr val="0FB5D4"/>
                 </a:solidFill>
               </a:rPr>
-              <a:t>Filter: type=price-change</a:t>
-            </a:r>
-          </a:p>
-        </p:txBody>
-      </p:sp>
-      <p:sp>
-        <p:nvSpPr>
-          <p:cNvPr id="31" name="Rectangle 30"/>
-          <p:cNvSpPr/>
-          <p:nvPr/>
-        </p:nvSpPr>
-        <p:spPr>
-          <a:xfrm>
-            <a:off x="3528456956280" y="1739146097520"/>
-            <a:ext cx="3749039" cy="1828800"/>
+              <a:t>type=price-change</a:t>
+            </a:r>
+          </a:p>
+        </p:txBody>
+      </p:sp>
+      <p:sp>
+        <p:nvSpPr>
+          <p:cNvPr id="35" name="Rectangle 34"/>
+          <p:cNvSpPr/>
+          <p:nvPr/>
+        </p:nvSpPr>
+        <p:spPr>
+          <a:xfrm>
+            <a:off x="4224528" y="3099816"/>
+            <a:ext cx="3703320" cy="1847088"/>
+          </a:xfrm>
+          <a:prstGeom prst="rect">
+            <a:avLst/>
+          </a:prstGeom>
+          <a:solidFill>
+            <a:srgbClr val="CBD5E1"/>
+          </a:solidFill>
+          <a:ln>
+            <a:noFill/>
+          </a:ln>
+        </p:spPr>
+        <p:style>
+          <a:lnRef idx="1">
+            <a:schemeClr val="accent1"/>
+          </a:lnRef>
+          <a:fillRef idx="3">
+            <a:schemeClr val="accent1"/>
+          </a:fillRef>
+          <a:effectRef idx="2">
+            <a:schemeClr val="accent1"/>
+          </a:effectRef>
+          <a:fontRef idx="minor">
+            <a:schemeClr val="lt1"/>
+          </a:fontRef>
+        </p:style>
+        <p:txBody>
+          <a:bodyPr rtlCol="0" anchor="ctr"/>
+          <a:lstStyle/>
+          <a:p>
+            <a:pPr algn="ctr"/>
+          </a:p>
+        </p:txBody>
+      </p:sp>
+      <p:sp>
+        <p:nvSpPr>
+          <p:cNvPr id="36" name="Rectangle 35"/>
+          <p:cNvSpPr/>
+          <p:nvPr/>
+        </p:nvSpPr>
+        <p:spPr>
+          <a:xfrm>
+            <a:off x="4197096" y="3072384"/>
+            <a:ext cx="3703320" cy="1847088"/>
           </a:xfrm>
           <a:prstGeom prst="rect">
             <a:avLst/>
@@ -17080,7 +17931,7 @@
           <a:solidFill>
             <a:srgbClr val="FFFFFF"/>
           </a:solidFill>
-          <a:ln w="12700">
+          <a:ln w="9525">
             <a:solidFill>
               <a:srgbClr val="E2E8F0"/>
             </a:solidFill>
@@ -17110,14 +17961,14 @@
       </p:sp>
       <p:sp>
         <p:nvSpPr>
-          <p:cNvPr id="32" name="Rectangle 31"/>
-          <p:cNvSpPr/>
-          <p:nvPr/>
-        </p:nvSpPr>
-        <p:spPr>
-          <a:xfrm>
-            <a:off x="3528456956280" y="1739146097520"/>
-            <a:ext cx="3749039" cy="73152"/>
+          <p:cNvPr id="37" name="Rectangle 36"/>
+          <p:cNvSpPr/>
+          <p:nvPr/>
+        </p:nvSpPr>
+        <p:spPr>
+          <a:xfrm>
+            <a:off x="4197096" y="3072384"/>
+            <a:ext cx="3703320" cy="64008"/>
           </a:xfrm>
           <a:prstGeom prst="rect">
             <a:avLst/>
@@ -17153,14 +18004,14 @@
       </p:sp>
       <p:sp>
         <p:nvSpPr>
-          <p:cNvPr id="33" name="TextBox 32"/>
-          <p:cNvSpPr txBox="1"/>
-          <p:nvPr/>
-        </p:nvSpPr>
-        <p:spPr>
-          <a:xfrm>
-            <a:off x="3528457066008" y="1739146225536"/>
-            <a:ext cx="3566159" cy="274320"/>
+          <p:cNvPr id="38" name="TextBox 37"/>
+          <p:cNvSpPr txBox="1"/>
+          <p:nvPr/>
+        </p:nvSpPr>
+        <p:spPr>
+          <a:xfrm>
+            <a:off x="4306824" y="3191256"/>
+            <a:ext cx="3520440" cy="274320"/>
           </a:xfrm>
           <a:prstGeom prst="rect">
             <a:avLst/>
@@ -17187,14 +18038,14 @@
       </p:sp>
       <p:sp>
         <p:nvSpPr>
-          <p:cNvPr id="34" name="TextBox 33"/>
-          <p:cNvSpPr txBox="1"/>
-          <p:nvPr/>
-        </p:nvSpPr>
-        <p:spPr>
-          <a:xfrm>
-            <a:off x="3528457066008" y="1739146536432"/>
-            <a:ext cx="3566159" cy="804672"/>
+          <p:cNvPr id="39" name="TextBox 38"/>
+          <p:cNvSpPr txBox="1"/>
+          <p:nvPr/>
+        </p:nvSpPr>
+        <p:spPr>
+          <a:xfrm>
+            <a:off x="4306824" y="3493008"/>
+            <a:ext cx="3520440" cy="804672"/>
           </a:xfrm>
           <a:prstGeom prst="rect">
             <a:avLst/>
@@ -17214,21 +18065,21 @@
                   <a:srgbClr val="64748B"/>
                 </a:solidFill>
               </a:rPr>
-              <a:t>When leadership asks 'should we adopt VPC Lattice?', search the tracker to see every feature shipped in the past year, understand the maturity trajectory.</a:t>
-            </a:r>
-          </a:p>
-        </p:txBody>
-      </p:sp>
-      <p:sp>
-        <p:nvSpPr>
-          <p:cNvPr id="35" name="Rectangle 34"/>
-          <p:cNvSpPr/>
-          <p:nvPr/>
-        </p:nvSpPr>
-        <p:spPr>
-          <a:xfrm>
-            <a:off x="3528457066008" y="1739147578848"/>
-            <a:ext cx="3529583" cy="256032"/>
+              <a:t>Leadership asks 'should we adopt VPC Lattice?' — search the tracker for a complete feature history to assess service maturity and trajectory.</a:t>
+            </a:r>
+          </a:p>
+        </p:txBody>
+      </p:sp>
+      <p:sp>
+        <p:nvSpPr>
+          <p:cNvPr id="40" name="Rectangle 39"/>
+          <p:cNvSpPr/>
+          <p:nvPr/>
+        </p:nvSpPr>
+        <p:spPr>
+          <a:xfrm>
+            <a:off x="4306824" y="4572000"/>
+            <a:ext cx="3483864" cy="256032"/>
           </a:xfrm>
           <a:prstGeom prst="rect">
             <a:avLst/>
@@ -17264,14 +18115,14 @@
       </p:sp>
       <p:sp>
         <p:nvSpPr>
-          <p:cNvPr id="36" name="TextBox 35"/>
-          <p:cNvSpPr txBox="1"/>
-          <p:nvPr/>
-        </p:nvSpPr>
-        <p:spPr>
-          <a:xfrm>
-            <a:off x="3528457120872" y="1739147597136"/>
-            <a:ext cx="3474719" cy="237744"/>
+          <p:cNvPr id="41" name="TextBox 40"/>
+          <p:cNvSpPr txBox="1"/>
+          <p:nvPr/>
+        </p:nvSpPr>
+        <p:spPr>
+          <a:xfrm>
+            <a:off x="4361688" y="4590288"/>
+            <a:ext cx="3429000" cy="237744"/>
           </a:xfrm>
           <a:prstGeom prst="rect">
             <a:avLst/>
@@ -17291,21 +18142,64 @@
                   <a:srgbClr val="8B5CF6"/>
                 </a:solidFill>
               </a:rPr>
-              <a:t>Search: 'vpc lattice' · date range: 2025-2026</a:t>
-            </a:r>
-          </a:p>
-        </p:txBody>
-      </p:sp>
-      <p:sp>
-        <p:nvSpPr>
-          <p:cNvPr id="37" name="Rectangle 36"/>
-          <p:cNvSpPr/>
-          <p:nvPr/>
-        </p:nvSpPr>
-        <p:spPr>
-          <a:xfrm>
-            <a:off x="7056913501080" y="1739146097520"/>
-            <a:ext cx="3749039" cy="1828800"/>
+              <a:t>q=vpc lattice · date=2025-2026</a:t>
+            </a:r>
+          </a:p>
+        </p:txBody>
+      </p:sp>
+      <p:sp>
+        <p:nvSpPr>
+          <p:cNvPr id="42" name="Rectangle 41"/>
+          <p:cNvSpPr/>
+          <p:nvPr/>
+        </p:nvSpPr>
+        <p:spPr>
+          <a:xfrm>
+            <a:off x="8037576" y="3099816"/>
+            <a:ext cx="3703320" cy="1847088"/>
+          </a:xfrm>
+          <a:prstGeom prst="rect">
+            <a:avLst/>
+          </a:prstGeom>
+          <a:solidFill>
+            <a:srgbClr val="CBD5E1"/>
+          </a:solidFill>
+          <a:ln>
+            <a:noFill/>
+          </a:ln>
+        </p:spPr>
+        <p:style>
+          <a:lnRef idx="1">
+            <a:schemeClr val="accent1"/>
+          </a:lnRef>
+          <a:fillRef idx="3">
+            <a:schemeClr val="accent1"/>
+          </a:fillRef>
+          <a:effectRef idx="2">
+            <a:schemeClr val="accent1"/>
+          </a:effectRef>
+          <a:fontRef idx="minor">
+            <a:schemeClr val="lt1"/>
+          </a:fontRef>
+        </p:style>
+        <p:txBody>
+          <a:bodyPr rtlCol="0" anchor="ctr"/>
+          <a:lstStyle/>
+          <a:p>
+            <a:pPr algn="ctr"/>
+          </a:p>
+        </p:txBody>
+      </p:sp>
+      <p:sp>
+        <p:nvSpPr>
+          <p:cNvPr id="43" name="Rectangle 42"/>
+          <p:cNvSpPr/>
+          <p:nvPr/>
+        </p:nvSpPr>
+        <p:spPr>
+          <a:xfrm>
+            <a:off x="8010144" y="3072384"/>
+            <a:ext cx="3703320" cy="1847088"/>
           </a:xfrm>
           <a:prstGeom prst="rect">
             <a:avLst/>
@@ -17313,7 +18207,7 @@
           <a:solidFill>
             <a:srgbClr val="FFFFFF"/>
           </a:solidFill>
-          <a:ln w="12700">
+          <a:ln w="9525">
             <a:solidFill>
               <a:srgbClr val="E2E8F0"/>
             </a:solidFill>
@@ -17343,14 +18237,14 @@
       </p:sp>
       <p:sp>
         <p:nvSpPr>
-          <p:cNvPr id="38" name="Rectangle 37"/>
-          <p:cNvSpPr/>
-          <p:nvPr/>
-        </p:nvSpPr>
-        <p:spPr>
-          <a:xfrm>
-            <a:off x="7056913501080" y="1739146097520"/>
-            <a:ext cx="3749039" cy="73152"/>
+          <p:cNvPr id="44" name="Rectangle 43"/>
+          <p:cNvSpPr/>
+          <p:nvPr/>
+        </p:nvSpPr>
+        <p:spPr>
+          <a:xfrm>
+            <a:off x="8010144" y="3072384"/>
+            <a:ext cx="3703320" cy="64008"/>
           </a:xfrm>
           <a:prstGeom prst="rect">
             <a:avLst/>
@@ -17386,14 +18280,14 @@
       </p:sp>
       <p:sp>
         <p:nvSpPr>
-          <p:cNvPr id="39" name="TextBox 38"/>
-          <p:cNvSpPr txBox="1"/>
-          <p:nvPr/>
-        </p:nvSpPr>
-        <p:spPr>
-          <a:xfrm>
-            <a:off x="7056913610808" y="1739146225536"/>
-            <a:ext cx="3566159" cy="274320"/>
+          <p:cNvPr id="45" name="TextBox 44"/>
+          <p:cNvSpPr txBox="1"/>
+          <p:nvPr/>
+        </p:nvSpPr>
+        <p:spPr>
+          <a:xfrm>
+            <a:off x="8119872" y="3191256"/>
+            <a:ext cx="3520440" cy="274320"/>
           </a:xfrm>
           <a:prstGeom prst="rect">
             <a:avLst/>
@@ -17413,21 +18307,21 @@
                   <a:srgbClr val="1E293B"/>
                 </a:solidFill>
               </a:rPr>
-              <a:t>Region Expansion Planning</a:t>
-            </a:r>
-          </a:p>
-        </p:txBody>
-      </p:sp>
-      <p:sp>
-        <p:nvSpPr>
-          <p:cNvPr id="40" name="TextBox 39"/>
-          <p:cNvSpPr txBox="1"/>
-          <p:nvPr/>
-        </p:nvSpPr>
-        <p:spPr>
-          <a:xfrm>
-            <a:off x="7056913610808" y="1739146536432"/>
-            <a:ext cx="3566159" cy="804672"/>
+              <a:t>Region Expansion Watch</a:t>
+            </a:r>
+          </a:p>
+        </p:txBody>
+      </p:sp>
+      <p:sp>
+        <p:nvSpPr>
+          <p:cNvPr id="46" name="TextBox 45"/>
+          <p:cNvSpPr txBox="1"/>
+          <p:nvPr/>
+        </p:nvSpPr>
+        <p:spPr>
+          <a:xfrm>
+            <a:off x="8119872" y="3493008"/>
+            <a:ext cx="3520440" cy="804672"/>
           </a:xfrm>
           <a:prstGeom prst="rect">
             <a:avLst/>
@@ -17447,21 +18341,21 @@
                   <a:srgbClr val="64748B"/>
                 </a:solidFill>
               </a:rPr>
-              <a:t>Filter feature_type=region-expansion for the services you use. Know the moment a service you rely on reaches your target region before checking the console.</a:t>
-            </a:r>
-          </a:p>
-        </p:txBody>
-      </p:sp>
-      <p:sp>
-        <p:nvSpPr>
-          <p:cNvPr id="41" name="Rectangle 40"/>
-          <p:cNvSpPr/>
-          <p:nvPr/>
-        </p:nvSpPr>
-        <p:spPr>
-          <a:xfrm>
-            <a:off x="7056913610808" y="1739147578848"/>
-            <a:ext cx="3529583" cy="256032"/>
+              <a:t>Filter type=region-expansion for services you use. Know the moment a needed service reaches your target region before checking the console.</a:t>
+            </a:r>
+          </a:p>
+        </p:txBody>
+      </p:sp>
+      <p:sp>
+        <p:nvSpPr>
+          <p:cNvPr id="47" name="Rectangle 46"/>
+          <p:cNvSpPr/>
+          <p:nvPr/>
+        </p:nvSpPr>
+        <p:spPr>
+          <a:xfrm>
+            <a:off x="8119872" y="4572000"/>
+            <a:ext cx="3483864" cy="256032"/>
           </a:xfrm>
           <a:prstGeom prst="rect">
             <a:avLst/>
@@ -17497,14 +18391,14 @@
       </p:sp>
       <p:sp>
         <p:nvSpPr>
-          <p:cNvPr id="42" name="TextBox 41"/>
-          <p:cNvSpPr txBox="1"/>
-          <p:nvPr/>
-        </p:nvSpPr>
-        <p:spPr>
-          <a:xfrm>
-            <a:off x="7056913665672" y="1739147597136"/>
-            <a:ext cx="3474719" cy="237744"/>
+          <p:cNvPr id="48" name="TextBox 47"/>
+          <p:cNvSpPr txBox="1"/>
+          <p:nvPr/>
+        </p:nvSpPr>
+        <p:spPr>
+          <a:xfrm>
+            <a:off x="8174736" y="4590288"/>
+            <a:ext cx="3429000" cy="237744"/>
           </a:xfrm>
           <a:prstGeom prst="rect">
             <a:avLst/>
@@ -17524,7 +18418,7 @@
                   <a:srgbClr val="EF4444"/>
                 </a:solidFill>
               </a:rPr>
-              <a:t>Filter: type=region-expansion · service=amazon-eks</a:t>
+              <a:t>type=region-expansion · service=amazon-eks</a:t>
             </a:r>
           </a:p>
         </p:txBody>
@@ -17556,7 +18450,7 @@
         <p:spPr>
           <a:xfrm>
             <a:off x="0" y="0"/>
-            <a:ext cx="12188952" cy="6858000"/>
+            <a:ext cx="12192000" cy="6858000"/>
           </a:xfrm>
           <a:prstGeom prst="rect">
             <a:avLst/>
@@ -17598,8 +18492,8 @@
         </p:nvSpPr>
         <p:spPr>
           <a:xfrm>
-            <a:off x="0" y="6748272"/>
-            <a:ext cx="12188952" cy="109728"/>
+            <a:off x="0" y="6766560"/>
+            <a:ext cx="12192000" cy="91440"/>
           </a:xfrm>
           <a:prstGeom prst="rect">
             <a:avLst/>
@@ -17641,8 +18535,8 @@
         </p:nvSpPr>
         <p:spPr>
           <a:xfrm>
-            <a:off x="502920" y="256032"/>
-            <a:ext cx="3657600" cy="274320"/>
+            <a:off x="502920" y="201168"/>
+            <a:ext cx="5486400" cy="256032"/>
           </a:xfrm>
           <a:prstGeom prst="rect">
             <a:avLst/>
@@ -17675,8 +18569,8 @@
         </p:nvSpPr>
         <p:spPr>
           <a:xfrm>
-            <a:off x="502920" y="402336"/>
-            <a:ext cx="9144000" cy="475488"/>
+            <a:off x="502920" y="384048"/>
+            <a:ext cx="9601200" cy="475488"/>
           </a:xfrm>
           <a:prstGeom prst="rect">
             <a:avLst/>
@@ -17709,8 +18603,8 @@
         </p:nvSpPr>
         <p:spPr>
           <a:xfrm>
-            <a:off x="411480" y="1005840"/>
-            <a:ext cx="5120640" cy="5303520"/>
+            <a:off x="411480" y="987552"/>
+            <a:ext cx="5029200" cy="5376672"/>
           </a:xfrm>
           <a:prstGeom prst="rect">
             <a:avLst/>
@@ -17718,7 +18612,7 @@
           <a:solidFill>
             <a:srgbClr val="1A2A3A"/>
           </a:solidFill>
-          <a:ln w="12700">
+          <a:ln w="9525">
             <a:solidFill>
               <a:srgbClr val="2D3F55"/>
             </a:solidFill>
@@ -17754,8 +18648,8 @@
         </p:nvSpPr>
         <p:spPr>
           <a:xfrm>
-            <a:off x="548640" y="1051560"/>
-            <a:ext cx="4846320" cy="274320"/>
+            <a:off x="548640" y="1042415"/>
+            <a:ext cx="4754880" cy="256032"/>
           </a:xfrm>
           <a:prstGeom prst="rect">
             <a:avLst/>
@@ -17788,8 +18682,8 @@
         </p:nvSpPr>
         <p:spPr>
           <a:xfrm>
-            <a:off x="548640" y="1389888"/>
-            <a:ext cx="4846320" cy="4480560"/>
+            <a:off x="548640" y="1353312"/>
+            <a:ext cx="4754880" cy="4846320"/>
           </a:xfrm>
           <a:prstGeom prst="rect">
             <a:avLst/>
@@ -17804,13 +18698,21 @@
           <a:p>
             <a:pPr algn="l"/>
             <a:r>
-              <a:rPr sz="850" b="0" i="0">
+              <a:rPr sz="900" b="0" i="0">
                 <a:solidFill>
                   <a:srgbClr val="7DD3FC"/>
                 </a:solidFill>
               </a:rPr>
-              <a:t>&lt;title&gt;Amazon Bedrock Knowledge Bases now supports semantic reranking for improved retrieval-augmented generation (RAG) accuracy&lt;/title&gt;
-&lt;description&gt;&lt;![CDATA[&lt;p&gt;Amazon Bedrock Knowledge Bases now supports semantic reranking, a technique that improves the accuracy of retrieved results for Retrieval Augmented Generation (RAG) applications...&lt;/p&gt;&lt;p&gt;With semantic reranking, you can now configure Knowledge Bases to use a cross-encoder model to rerank the initially retrieved documents or chunks based on their relevance to the query. This additional reranking step helps to improve the relevancy of retrieved results, which can reduce hallucinations and improve the quality of responses generated by foundation models...&lt;/p&gt;]]&gt;&lt;/description&gt;
+              <a:t>&lt;title&gt;Amazon Bedrock Knowledge Bases now supports
+semantic reranking for improved RAG accuracy&lt;/title&gt;
+&lt;description&gt;
+  &lt;p&gt;Amazon Bedrock Knowledge Bases now supports
+  semantic reranking, a technique that improves
+  retrieved results for RAG applications...&lt;/p&gt;
+  &lt;p&gt;A cross-encoder model reranks initially retrieved
+  chunks based on query relevance, reducing
+  hallucinations and improving response quality...&lt;/p&gt;
+&lt;/description&gt;
 &lt;category&gt;general:products/amazon-bedrock&lt;/category&gt;
 &lt;category&gt;marketing:marchitecture/ai-ml&lt;/category&gt;</a:t>
             </a:r>
@@ -17825,8 +18727,8 @@
         </p:nvSpPr>
         <p:spPr>
           <a:xfrm>
-            <a:off x="5669280" y="3291840"/>
-            <a:ext cx="914400" cy="457200"/>
+            <a:off x="5596128" y="3246120"/>
+            <a:ext cx="822960" cy="457200"/>
           </a:xfrm>
           <a:prstGeom prst="rect">
             <a:avLst/>
@@ -17859,8 +18761,8 @@
         </p:nvSpPr>
         <p:spPr>
           <a:xfrm>
-            <a:off x="5486400" y="3749039"/>
-            <a:ext cx="1234440" cy="292608"/>
+            <a:off x="5468112" y="3767328"/>
+            <a:ext cx="1078992" cy="329184"/>
           </a:xfrm>
           <a:prstGeom prst="rect">
             <a:avLst/>
@@ -17894,8 +18796,8 @@
         </p:nvSpPr>
         <p:spPr>
           <a:xfrm>
-            <a:off x="6675120" y="1005840"/>
-            <a:ext cx="5120640" cy="5303520"/>
+            <a:off x="6601968" y="987552"/>
+            <a:ext cx="5029200" cy="5376672"/>
           </a:xfrm>
           <a:prstGeom prst="rect">
             <a:avLst/>
@@ -17903,7 +18805,7 @@
           <a:solidFill>
             <a:srgbClr val="0D2A1A"/>
           </a:solidFill>
-          <a:ln w="12700">
+          <a:ln w="9525">
             <a:solidFill>
               <a:srgbClr val="16A34A"/>
             </a:solidFill>
@@ -17939,8 +18841,8 @@
         </p:nvSpPr>
         <p:spPr>
           <a:xfrm>
-            <a:off x="6858000" y="1051560"/>
-            <a:ext cx="4846320" cy="274320"/>
+            <a:off x="6748272" y="1042415"/>
+            <a:ext cx="4754880" cy="256032"/>
           </a:xfrm>
           <a:prstGeom prst="rect">
             <a:avLst/>
@@ -17973,8 +18875,8 @@
         </p:nvSpPr>
         <p:spPr>
           <a:xfrm>
-            <a:off x="6858000" y="1389888"/>
-            <a:ext cx="4846320" cy="237744"/>
+            <a:off x="6748272" y="1353312"/>
+            <a:ext cx="4754880" cy="237744"/>
           </a:xfrm>
           <a:prstGeom prst="rect">
             <a:avLst/>
@@ -18007,8 +18909,8 @@
         </p:nvSpPr>
         <p:spPr>
           <a:xfrm>
-            <a:off x="6858000" y="1627632"/>
-            <a:ext cx="4846320" cy="914400"/>
+            <a:off x="6748272" y="1609344"/>
+            <a:ext cx="4754880" cy="868680"/>
           </a:xfrm>
           <a:prstGeom prst="rect">
             <a:avLst/>
@@ -18041,8 +18943,8 @@
         </p:nvSpPr>
         <p:spPr>
           <a:xfrm>
-            <a:off x="6858000" y="2450592"/>
-            <a:ext cx="4846320" cy="237744"/>
+            <a:off x="6748272" y="2505456"/>
+            <a:ext cx="4754880" cy="237744"/>
           </a:xfrm>
           <a:prstGeom prst="rect">
             <a:avLst/>
@@ -18075,8 +18977,8 @@
         </p:nvSpPr>
         <p:spPr>
           <a:xfrm>
-            <a:off x="6858000" y="2688336"/>
-            <a:ext cx="4846320" cy="914400"/>
+            <a:off x="6748272" y="2761488"/>
+            <a:ext cx="4754880" cy="868680"/>
           </a:xfrm>
           <a:prstGeom prst="rect">
             <a:avLst/>
@@ -18096,7 +18998,12 @@
                   <a:srgbClr val="BBF7D0"/>
                 </a:solidFill>
               </a:rPr>
-              <a:t>Amazon Bedrock Knowledge Bases introduces semantic reranking to improve retrieval accuracy in RAG workflows. A cross-encoder model rescores retrieved chunks by relevance, significantly reducing hallucinations. Enable with a single API parameter. Supports Amazon Rerank 1.0 and Cohere Rerank 3.5.</a:t>
+              <a:t>Amazon Bedrock Knowledge Bases introduces semantic
+reranking to improve retrieval accuracy in RAG
+workflows. A cross-encoder model rescores retrieved
+chunks by relevance, significantly reducing
+hallucinations. Enable with a single API parameter.
+Supports Amazon Rerank 1.0 and Cohere Rerank 3.5.</a:t>
             </a:r>
           </a:p>
         </p:txBody>
@@ -18109,8 +19016,8 @@
         </p:nvSpPr>
         <p:spPr>
           <a:xfrm>
-            <a:off x="6858000" y="3511296"/>
-            <a:ext cx="4846320" cy="237744"/>
+            <a:off x="6748272" y="3657600"/>
+            <a:ext cx="4754880" cy="237744"/>
           </a:xfrm>
           <a:prstGeom prst="rect">
             <a:avLst/>
@@ -18143,8 +19050,8 @@
         </p:nvSpPr>
         <p:spPr>
           <a:xfrm>
-            <a:off x="6858000" y="3749040"/>
-            <a:ext cx="4846320" cy="914400"/>
+            <a:off x="6748272" y="3913632"/>
+            <a:ext cx="4754880" cy="868680"/>
           </a:xfrm>
           <a:prstGeom prst="rect">
             <a:avLst/>
@@ -18166,7 +19073,8 @@
               </a:rPr>
               <a:t>• Reduces hallucinations by rescoring chunks
 • Supports Rerank 1.0 + Cohere Rerank 3.5
-• Single RetrievalConfiguration API param</a:t>
+• Single RetrievalConfiguration API param
+• No infra changes required</a:t>
             </a:r>
           </a:p>
         </p:txBody>

--- a/AWS_Features_Tracker_Innovation_Demo.pptx
+++ b/AWS_Features_Tracker_Innovation_Demo.pptx
@@ -14724,8 +14724,8 @@
         </p:nvSpPr>
         <p:spPr>
           <a:xfrm>
-            <a:off x="502920" y="384048"/>
-            <a:ext cx="8686800" cy="457200"/>
+            <a:off x="320040" y="274320"/>
+            <a:ext cx="8686800" cy="475488"/>
           </a:xfrm>
           <a:prstGeom prst="rect">
             <a:avLst/>
@@ -14740,7 +14740,7 @@
           <a:p>
             <a:pPr algn="l"/>
             <a:r>
-              <a:rPr sz="2200" b="1" i="0">
+              <a:rPr sz="2000" b="1" i="0">
                 <a:solidFill>
                   <a:srgbClr val="FFFFFF"/>
                 </a:solidFill>
@@ -14766,8 +14766,8 @@
         </p:blipFill>
         <p:spPr>
           <a:xfrm>
-            <a:off x="320040" y="896112"/>
-            <a:ext cx="11539728" cy="5486400"/>
+            <a:off x="320040" y="841248"/>
+            <a:ext cx="7662672" cy="5907024"/>
           </a:xfrm>
           <a:prstGeom prst="rect">
             <a:avLst/>
@@ -14782,14 +14782,14 @@
         </p:nvSpPr>
         <p:spPr>
           <a:xfrm>
-            <a:off x="347472" y="932688"/>
-            <a:ext cx="2606040" cy="292608"/>
-          </a:xfrm>
-          <a:prstGeom prst="rect">
-            <a:avLst/>
-          </a:prstGeom>
-          <a:solidFill>
-            <a:srgbClr val="0D1A26"/>
+            <a:off x="8092440" y="841248"/>
+            <a:ext cx="2852928" cy="5907024"/>
+          </a:xfrm>
+          <a:prstGeom prst="rect">
+            <a:avLst/>
+          </a:prstGeom>
+          <a:solidFill>
+            <a:srgbClr val="0D1A2E"/>
           </a:solidFill>
           <a:ln>
             <a:noFill/>
@@ -14819,14 +14819,57 @@
       </p:sp>
       <p:sp>
         <p:nvSpPr>
-          <p:cNvPr id="8" name="TextBox 7"/>
+          <p:cNvPr id="8" name="Rectangle 7"/>
+          <p:cNvSpPr/>
+          <p:nvPr/>
+        </p:nvSpPr>
+        <p:spPr>
+          <a:xfrm>
+            <a:off x="8092440" y="841248"/>
+            <a:ext cx="54864" cy="5907024"/>
+          </a:xfrm>
+          <a:prstGeom prst="rect">
+            <a:avLst/>
+          </a:prstGeom>
+          <a:solidFill>
+            <a:srgbClr val="FF9900"/>
+          </a:solidFill>
+          <a:ln>
+            <a:noFill/>
+          </a:ln>
+        </p:spPr>
+        <p:style>
+          <a:lnRef idx="1">
+            <a:schemeClr val="accent1"/>
+          </a:lnRef>
+          <a:fillRef idx="3">
+            <a:schemeClr val="accent1"/>
+          </a:fillRef>
+          <a:effectRef idx="2">
+            <a:schemeClr val="accent1"/>
+          </a:effectRef>
+          <a:fontRef idx="minor">
+            <a:schemeClr val="lt1"/>
+          </a:fontRef>
+        </p:style>
+        <p:txBody>
+          <a:bodyPr rtlCol="0" anchor="ctr"/>
+          <a:lstStyle/>
+          <a:p>
+            <a:pPr algn="ctr"/>
+          </a:p>
+        </p:txBody>
+      </p:sp>
+      <p:sp>
+        <p:nvSpPr>
+          <p:cNvPr id="9" name="TextBox 8"/>
           <p:cNvSpPr txBox="1"/>
           <p:nvPr/>
         </p:nvSpPr>
         <p:spPr>
           <a:xfrm>
-            <a:off x="420624" y="978408"/>
-            <a:ext cx="2487168" cy="219456"/>
+            <a:off x="8257032" y="1005840"/>
+            <a:ext cx="2596896" cy="256032"/>
           </a:xfrm>
           <a:prstGeom prst="rect">
             <a:avLst/>
@@ -14841,32 +14884,32 @@
           <a:p>
             <a:pPr algn="l"/>
             <a:r>
-              <a:rPr sz="900" b="0" i="0">
+              <a:rPr sz="800" b="1" i="0">
                 <a:solidFill>
                   <a:srgbClr val="FF9900"/>
                 </a:solidFill>
               </a:rPr>
-              <a:t>▶  Live search with 300ms debounce</a:t>
-            </a:r>
-          </a:p>
-        </p:txBody>
-      </p:sp>
-      <p:sp>
-        <p:nvSpPr>
-          <p:cNvPr id="9" name="Rectangle 8"/>
-          <p:cNvSpPr/>
-          <p:nvPr/>
-        </p:nvSpPr>
-        <p:spPr>
-          <a:xfrm>
-            <a:off x="347472" y="1335024"/>
-            <a:ext cx="2606040" cy="292608"/>
-          </a:xfrm>
-          <a:prstGeom prst="rect">
-            <a:avLst/>
-          </a:prstGeom>
-          <a:solidFill>
-            <a:srgbClr val="0D1A26"/>
+              <a:t>KEY HIGHLIGHTS</a:t>
+            </a:r>
+          </a:p>
+        </p:txBody>
+      </p:sp>
+      <p:sp>
+        <p:nvSpPr>
+          <p:cNvPr id="10" name="Rectangle 9"/>
+          <p:cNvSpPr/>
+          <p:nvPr/>
+        </p:nvSpPr>
+        <p:spPr>
+          <a:xfrm>
+            <a:off x="8257032" y="1371600"/>
+            <a:ext cx="2596896" cy="749808"/>
+          </a:xfrm>
+          <a:prstGeom prst="rect">
+            <a:avLst/>
+          </a:prstGeom>
+          <a:solidFill>
+            <a:srgbClr val="1A2A3E"/>
           </a:solidFill>
           <a:ln>
             <a:noFill/>
@@ -14896,14 +14939,57 @@
       </p:sp>
       <p:sp>
         <p:nvSpPr>
-          <p:cNvPr id="10" name="TextBox 9"/>
+          <p:cNvPr id="11" name="Rectangle 10"/>
+          <p:cNvSpPr/>
+          <p:nvPr/>
+        </p:nvSpPr>
+        <p:spPr>
+          <a:xfrm>
+            <a:off x="8257032" y="1371600"/>
+            <a:ext cx="36576" cy="749808"/>
+          </a:xfrm>
+          <a:prstGeom prst="rect">
+            <a:avLst/>
+          </a:prstGeom>
+          <a:solidFill>
+            <a:srgbClr val="FF9900"/>
+          </a:solidFill>
+          <a:ln>
+            <a:noFill/>
+          </a:ln>
+        </p:spPr>
+        <p:style>
+          <a:lnRef idx="1">
+            <a:schemeClr val="accent1"/>
+          </a:lnRef>
+          <a:fillRef idx="3">
+            <a:schemeClr val="accent1"/>
+          </a:fillRef>
+          <a:effectRef idx="2">
+            <a:schemeClr val="accent1"/>
+          </a:effectRef>
+          <a:fontRef idx="minor">
+            <a:schemeClr val="lt1"/>
+          </a:fontRef>
+        </p:style>
+        <p:txBody>
+          <a:bodyPr rtlCol="0" anchor="ctr"/>
+          <a:lstStyle/>
+          <a:p>
+            <a:pPr algn="ctr"/>
+          </a:p>
+        </p:txBody>
+      </p:sp>
+      <p:sp>
+        <p:nvSpPr>
+          <p:cNvPr id="12" name="TextBox 11"/>
           <p:cNvSpPr txBox="1"/>
           <p:nvPr/>
         </p:nvSpPr>
         <p:spPr>
           <a:xfrm>
-            <a:off x="420624" y="1380744"/>
-            <a:ext cx="2487168" cy="219456"/>
+            <a:off x="8348472" y="1463040"/>
+            <a:ext cx="2468880" cy="594360"/>
           </a:xfrm>
           <a:prstGeom prst="rect">
             <a:avLst/>
@@ -14918,32 +15004,33 @@
           <a:p>
             <a:pPr algn="l"/>
             <a:r>
-              <a:rPr sz="900" b="0" i="0">
-                <a:solidFill>
-                  <a:srgbClr val="FF9900"/>
+              <a:rPr sz="1000" b="0" i="0">
+                <a:solidFill>
+                  <a:srgbClr val="E2E8F0"/>
                 </a:solidFill>
               </a:rPr>
-              <a:t>▶  Service / type / date / sort filters</a:t>
-            </a:r>
-          </a:p>
-        </p:txBody>
-      </p:sp>
-      <p:sp>
-        <p:nvSpPr>
-          <p:cNvPr id="11" name="Rectangle 10"/>
-          <p:cNvSpPr/>
-          <p:nvPr/>
-        </p:nvSpPr>
-        <p:spPr>
-          <a:xfrm>
-            <a:off x="347472" y="1737360"/>
-            <a:ext cx="2606040" cy="292608"/>
-          </a:xfrm>
-          <a:prstGeom prst="rect">
-            <a:avLst/>
-          </a:prstGeom>
-          <a:solidFill>
-            <a:srgbClr val="0D1A26"/>
+              <a:t>Live search bar
+with 300ms debounce</a:t>
+            </a:r>
+          </a:p>
+        </p:txBody>
+      </p:sp>
+      <p:sp>
+        <p:nvSpPr>
+          <p:cNvPr id="13" name="Rectangle 12"/>
+          <p:cNvSpPr/>
+          <p:nvPr/>
+        </p:nvSpPr>
+        <p:spPr>
+          <a:xfrm>
+            <a:off x="8257032" y="2231136"/>
+            <a:ext cx="2596896" cy="749808"/>
+          </a:xfrm>
+          <a:prstGeom prst="rect">
+            <a:avLst/>
+          </a:prstGeom>
+          <a:solidFill>
+            <a:srgbClr val="1A2A3E"/>
           </a:solidFill>
           <a:ln>
             <a:noFill/>
@@ -14973,14 +15060,57 @@
       </p:sp>
       <p:sp>
         <p:nvSpPr>
-          <p:cNvPr id="12" name="TextBox 11"/>
+          <p:cNvPr id="14" name="Rectangle 13"/>
+          <p:cNvSpPr/>
+          <p:nvPr/>
+        </p:nvSpPr>
+        <p:spPr>
+          <a:xfrm>
+            <a:off x="8257032" y="2231136"/>
+            <a:ext cx="36576" cy="749808"/>
+          </a:xfrm>
+          <a:prstGeom prst="rect">
+            <a:avLst/>
+          </a:prstGeom>
+          <a:solidFill>
+            <a:srgbClr val="FF9900"/>
+          </a:solidFill>
+          <a:ln>
+            <a:noFill/>
+          </a:ln>
+        </p:spPr>
+        <p:style>
+          <a:lnRef idx="1">
+            <a:schemeClr val="accent1"/>
+          </a:lnRef>
+          <a:fillRef idx="3">
+            <a:schemeClr val="accent1"/>
+          </a:fillRef>
+          <a:effectRef idx="2">
+            <a:schemeClr val="accent1"/>
+          </a:effectRef>
+          <a:fontRef idx="minor">
+            <a:schemeClr val="lt1"/>
+          </a:fontRef>
+        </p:style>
+        <p:txBody>
+          <a:bodyPr rtlCol="0" anchor="ctr"/>
+          <a:lstStyle/>
+          <a:p>
+            <a:pPr algn="ctr"/>
+          </a:p>
+        </p:txBody>
+      </p:sp>
+      <p:sp>
+        <p:nvSpPr>
+          <p:cNvPr id="15" name="TextBox 14"/>
           <p:cNvSpPr txBox="1"/>
           <p:nvPr/>
         </p:nvSpPr>
         <p:spPr>
           <a:xfrm>
-            <a:off x="420624" y="1783080"/>
-            <a:ext cx="2487168" cy="219456"/>
+            <a:off x="8348472" y="2322576"/>
+            <a:ext cx="2468880" cy="594360"/>
           </a:xfrm>
           <a:prstGeom prst="rect">
             <a:avLst/>
@@ -14995,32 +15125,33 @@
           <a:p>
             <a:pPr algn="l"/>
             <a:r>
-              <a:rPr sz="900" b="0" i="0">
-                <a:solidFill>
-                  <a:srgbClr val="FF9900"/>
+              <a:rPr sz="1000" b="0" i="0">
+                <a:solidFill>
+                  <a:srgbClr val="E2E8F0"/>
                 </a:solidFill>
               </a:rPr>
-              <a:t>▶  Result count always visible</a:t>
-            </a:r>
-          </a:p>
-        </p:txBody>
-      </p:sp>
-      <p:sp>
-        <p:nvSpPr>
-          <p:cNvPr id="13" name="Rectangle 12"/>
-          <p:cNvSpPr/>
-          <p:nvPr/>
-        </p:nvSpPr>
-        <p:spPr>
-          <a:xfrm>
-            <a:off x="8549640" y="932688"/>
-            <a:ext cx="2606040" cy="292608"/>
-          </a:xfrm>
-          <a:prstGeom prst="rect">
-            <a:avLst/>
-          </a:prstGeom>
-          <a:solidFill>
-            <a:srgbClr val="0D1A26"/>
+              <a:t>Filters: service,
+type, date, sort order</a:t>
+            </a:r>
+          </a:p>
+        </p:txBody>
+      </p:sp>
+      <p:sp>
+        <p:nvSpPr>
+          <p:cNvPr id="16" name="Rectangle 15"/>
+          <p:cNvSpPr/>
+          <p:nvPr/>
+        </p:nvSpPr>
+        <p:spPr>
+          <a:xfrm>
+            <a:off x="8257032" y="3090672"/>
+            <a:ext cx="2596896" cy="749808"/>
+          </a:xfrm>
+          <a:prstGeom prst="rect">
+            <a:avLst/>
+          </a:prstGeom>
+          <a:solidFill>
+            <a:srgbClr val="1A2A3E"/>
           </a:solidFill>
           <a:ln>
             <a:noFill/>
@@ -15050,14 +15181,57 @@
       </p:sp>
       <p:sp>
         <p:nvSpPr>
-          <p:cNvPr id="14" name="TextBox 13"/>
+          <p:cNvPr id="17" name="Rectangle 16"/>
+          <p:cNvSpPr/>
+          <p:nvPr/>
+        </p:nvSpPr>
+        <p:spPr>
+          <a:xfrm>
+            <a:off x="8257032" y="3090672"/>
+            <a:ext cx="36576" cy="749808"/>
+          </a:xfrm>
+          <a:prstGeom prst="rect">
+            <a:avLst/>
+          </a:prstGeom>
+          <a:solidFill>
+            <a:srgbClr val="FF9900"/>
+          </a:solidFill>
+          <a:ln>
+            <a:noFill/>
+          </a:ln>
+        </p:spPr>
+        <p:style>
+          <a:lnRef idx="1">
+            <a:schemeClr val="accent1"/>
+          </a:lnRef>
+          <a:fillRef idx="3">
+            <a:schemeClr val="accent1"/>
+          </a:fillRef>
+          <a:effectRef idx="2">
+            <a:schemeClr val="accent1"/>
+          </a:effectRef>
+          <a:fontRef idx="minor">
+            <a:schemeClr val="lt1"/>
+          </a:fontRef>
+        </p:style>
+        <p:txBody>
+          <a:bodyPr rtlCol="0" anchor="ctr"/>
+          <a:lstStyle/>
+          <a:p>
+            <a:pPr algn="ctr"/>
+          </a:p>
+        </p:txBody>
+      </p:sp>
+      <p:sp>
+        <p:nvSpPr>
+          <p:cNvPr id="18" name="TextBox 17"/>
           <p:cNvSpPr txBox="1"/>
           <p:nvPr/>
         </p:nvSpPr>
         <p:spPr>
           <a:xfrm>
-            <a:off x="8622792" y="978408"/>
-            <a:ext cx="2487168" cy="219456"/>
+            <a:off x="8348472" y="3182112"/>
+            <a:ext cx="2468880" cy="594360"/>
           </a:xfrm>
           <a:prstGeom prst="rect">
             <a:avLst/>
@@ -15072,32 +15246,33 @@
           <a:p>
             <a:pPr algn="l"/>
             <a:r>
-              <a:rPr sz="900" b="0" i="0">
-                <a:solidFill>
-                  <a:srgbClr val="FF9900"/>
+              <a:rPr sz="1000" b="0" i="0">
+                <a:solidFill>
+                  <a:srgbClr val="E2E8F0"/>
                 </a:solidFill>
               </a:rPr>
-              <a:t>▶  Color-coded feature type badges</a:t>
-            </a:r>
-          </a:p>
-        </p:txBody>
-      </p:sp>
-      <p:sp>
-        <p:nvSpPr>
-          <p:cNvPr id="15" name="Rectangle 14"/>
-          <p:cNvSpPr/>
-          <p:nvPr/>
-        </p:nvSpPr>
-        <p:spPr>
-          <a:xfrm>
-            <a:off x="8549640" y="1335024"/>
-            <a:ext cx="2606040" cy="292608"/>
-          </a:xfrm>
-          <a:prstGeom prst="rect">
-            <a:avLst/>
-          </a:prstGeom>
-          <a:solidFill>
-            <a:srgbClr val="0D1A26"/>
+              <a:t>Result count
+always visible</a:t>
+            </a:r>
+          </a:p>
+        </p:txBody>
+      </p:sp>
+      <p:sp>
+        <p:nvSpPr>
+          <p:cNvPr id="19" name="Rectangle 18"/>
+          <p:cNvSpPr/>
+          <p:nvPr/>
+        </p:nvSpPr>
+        <p:spPr>
+          <a:xfrm>
+            <a:off x="8257032" y="3950208"/>
+            <a:ext cx="2596896" cy="749808"/>
+          </a:xfrm>
+          <a:prstGeom prst="rect">
+            <a:avLst/>
+          </a:prstGeom>
+          <a:solidFill>
+            <a:srgbClr val="1A2A3E"/>
           </a:solidFill>
           <a:ln>
             <a:noFill/>
@@ -15127,14 +15302,57 @@
       </p:sp>
       <p:sp>
         <p:nvSpPr>
-          <p:cNvPr id="16" name="TextBox 15"/>
+          <p:cNvPr id="20" name="Rectangle 19"/>
+          <p:cNvSpPr/>
+          <p:nvPr/>
+        </p:nvSpPr>
+        <p:spPr>
+          <a:xfrm>
+            <a:off x="8257032" y="3950208"/>
+            <a:ext cx="36576" cy="749808"/>
+          </a:xfrm>
+          <a:prstGeom prst="rect">
+            <a:avLst/>
+          </a:prstGeom>
+          <a:solidFill>
+            <a:srgbClr val="FF9900"/>
+          </a:solidFill>
+          <a:ln>
+            <a:noFill/>
+          </a:ln>
+        </p:spPr>
+        <p:style>
+          <a:lnRef idx="1">
+            <a:schemeClr val="accent1"/>
+          </a:lnRef>
+          <a:fillRef idx="3">
+            <a:schemeClr val="accent1"/>
+          </a:fillRef>
+          <a:effectRef idx="2">
+            <a:schemeClr val="accent1"/>
+          </a:effectRef>
+          <a:fontRef idx="minor">
+            <a:schemeClr val="lt1"/>
+          </a:fontRef>
+        </p:style>
+        <p:txBody>
+          <a:bodyPr rtlCol="0" anchor="ctr"/>
+          <a:lstStyle/>
+          <a:p>
+            <a:pPr algn="ctr"/>
+          </a:p>
+        </p:txBody>
+      </p:sp>
+      <p:sp>
+        <p:nvSpPr>
+          <p:cNvPr id="21" name="TextBox 20"/>
           <p:cNvSpPr txBox="1"/>
           <p:nvPr/>
         </p:nvSpPr>
         <p:spPr>
           <a:xfrm>
-            <a:off x="8622792" y="1380744"/>
-            <a:ext cx="2487168" cy="219456"/>
+            <a:off x="8348472" y="4041648"/>
+            <a:ext cx="2468880" cy="594360"/>
           </a:xfrm>
           <a:prstGeom prst="rect">
             <a:avLst/>
@@ -15149,32 +15367,33 @@
           <a:p>
             <a:pPr algn="l"/>
             <a:r>
-              <a:rPr sz="900" b="0" i="0">
-                <a:solidFill>
-                  <a:srgbClr val="FF9900"/>
+              <a:rPr sz="1000" b="0" i="0">
+                <a:solidFill>
+                  <a:srgbClr val="E2E8F0"/>
                 </a:solidFill>
               </a:rPr>
-              <a:t>▶  AI key points — expand on hover</a:t>
-            </a:r>
-          </a:p>
-        </p:txBody>
-      </p:sp>
-      <p:sp>
-        <p:nvSpPr>
-          <p:cNvPr id="17" name="Rectangle 16"/>
-          <p:cNvSpPr/>
-          <p:nvPr/>
-        </p:nvSpPr>
-        <p:spPr>
-          <a:xfrm>
-            <a:off x="8549640" y="1737360"/>
-            <a:ext cx="2606040" cy="292608"/>
-          </a:xfrm>
-          <a:prstGeom prst="rect">
-            <a:avLst/>
-          </a:prstGeom>
-          <a:solidFill>
-            <a:srgbClr val="0D1A26"/>
+              <a:t>Color-coded
+feature type badges</a:t>
+            </a:r>
+          </a:p>
+        </p:txBody>
+      </p:sp>
+      <p:sp>
+        <p:nvSpPr>
+          <p:cNvPr id="22" name="Rectangle 21"/>
+          <p:cNvSpPr/>
+          <p:nvPr/>
+        </p:nvSpPr>
+        <p:spPr>
+          <a:xfrm>
+            <a:off x="8257032" y="4809744"/>
+            <a:ext cx="2596896" cy="749808"/>
+          </a:xfrm>
+          <a:prstGeom prst="rect">
+            <a:avLst/>
+          </a:prstGeom>
+          <a:solidFill>
+            <a:srgbClr val="1A2A3E"/>
           </a:solidFill>
           <a:ln>
             <a:noFill/>
@@ -15204,14 +15423,57 @@
       </p:sp>
       <p:sp>
         <p:nvSpPr>
-          <p:cNvPr id="18" name="TextBox 17"/>
+          <p:cNvPr id="23" name="Rectangle 22"/>
+          <p:cNvSpPr/>
+          <p:nvPr/>
+        </p:nvSpPr>
+        <p:spPr>
+          <a:xfrm>
+            <a:off x="8257032" y="4809744"/>
+            <a:ext cx="36576" cy="749808"/>
+          </a:xfrm>
+          <a:prstGeom prst="rect">
+            <a:avLst/>
+          </a:prstGeom>
+          <a:solidFill>
+            <a:srgbClr val="FF9900"/>
+          </a:solidFill>
+          <a:ln>
+            <a:noFill/>
+          </a:ln>
+        </p:spPr>
+        <p:style>
+          <a:lnRef idx="1">
+            <a:schemeClr val="accent1"/>
+          </a:lnRef>
+          <a:fillRef idx="3">
+            <a:schemeClr val="accent1"/>
+          </a:fillRef>
+          <a:effectRef idx="2">
+            <a:schemeClr val="accent1"/>
+          </a:effectRef>
+          <a:fontRef idx="minor">
+            <a:schemeClr val="lt1"/>
+          </a:fontRef>
+        </p:style>
+        <p:txBody>
+          <a:bodyPr rtlCol="0" anchor="ctr"/>
+          <a:lstStyle/>
+          <a:p>
+            <a:pPr algn="ctr"/>
+          </a:p>
+        </p:txBody>
+      </p:sp>
+      <p:sp>
+        <p:nvSpPr>
+          <p:cNvPr id="24" name="TextBox 23"/>
           <p:cNvSpPr txBox="1"/>
           <p:nvPr/>
         </p:nvSpPr>
         <p:spPr>
           <a:xfrm>
-            <a:off x="8622792" y="1783080"/>
-            <a:ext cx="2487168" cy="219456"/>
+            <a:off x="8348472" y="4901184"/>
+            <a:ext cx="2468880" cy="594360"/>
           </a:xfrm>
           <a:prstGeom prst="rect">
             <a:avLst/>
@@ -15226,12 +15488,134 @@
           <a:p>
             <a:pPr algn="l"/>
             <a:r>
-              <a:rPr sz="900" b="0" i="0">
-                <a:solidFill>
-                  <a:srgbClr val="FF9900"/>
+              <a:rPr sz="1000" b="0" i="0">
+                <a:solidFill>
+                  <a:srgbClr val="E2E8F0"/>
                 </a:solidFill>
               </a:rPr>
-              <a:t>▶  Direct AWS announcement links</a:t>
+              <a:t>AI key points
+expandable per card</a:t>
+            </a:r>
+          </a:p>
+        </p:txBody>
+      </p:sp>
+      <p:sp>
+        <p:nvSpPr>
+          <p:cNvPr id="25" name="Rectangle 24"/>
+          <p:cNvSpPr/>
+          <p:nvPr/>
+        </p:nvSpPr>
+        <p:spPr>
+          <a:xfrm>
+            <a:off x="8257032" y="5669279"/>
+            <a:ext cx="2596896" cy="749808"/>
+          </a:xfrm>
+          <a:prstGeom prst="rect">
+            <a:avLst/>
+          </a:prstGeom>
+          <a:solidFill>
+            <a:srgbClr val="1A2A3E"/>
+          </a:solidFill>
+          <a:ln>
+            <a:noFill/>
+          </a:ln>
+        </p:spPr>
+        <p:style>
+          <a:lnRef idx="1">
+            <a:schemeClr val="accent1"/>
+          </a:lnRef>
+          <a:fillRef idx="3">
+            <a:schemeClr val="accent1"/>
+          </a:fillRef>
+          <a:effectRef idx="2">
+            <a:schemeClr val="accent1"/>
+          </a:effectRef>
+          <a:fontRef idx="minor">
+            <a:schemeClr val="lt1"/>
+          </a:fontRef>
+        </p:style>
+        <p:txBody>
+          <a:bodyPr rtlCol="0" anchor="ctr"/>
+          <a:lstStyle/>
+          <a:p>
+            <a:pPr algn="ctr"/>
+          </a:p>
+        </p:txBody>
+      </p:sp>
+      <p:sp>
+        <p:nvSpPr>
+          <p:cNvPr id="26" name="Rectangle 25"/>
+          <p:cNvSpPr/>
+          <p:nvPr/>
+        </p:nvSpPr>
+        <p:spPr>
+          <a:xfrm>
+            <a:off x="8257032" y="5669279"/>
+            <a:ext cx="36576" cy="749808"/>
+          </a:xfrm>
+          <a:prstGeom prst="rect">
+            <a:avLst/>
+          </a:prstGeom>
+          <a:solidFill>
+            <a:srgbClr val="FF9900"/>
+          </a:solidFill>
+          <a:ln>
+            <a:noFill/>
+          </a:ln>
+        </p:spPr>
+        <p:style>
+          <a:lnRef idx="1">
+            <a:schemeClr val="accent1"/>
+          </a:lnRef>
+          <a:fillRef idx="3">
+            <a:schemeClr val="accent1"/>
+          </a:fillRef>
+          <a:effectRef idx="2">
+            <a:schemeClr val="accent1"/>
+          </a:effectRef>
+          <a:fontRef idx="minor">
+            <a:schemeClr val="lt1"/>
+          </a:fontRef>
+        </p:style>
+        <p:txBody>
+          <a:bodyPr rtlCol="0" anchor="ctr"/>
+          <a:lstStyle/>
+          <a:p>
+            <a:pPr algn="ctr"/>
+          </a:p>
+        </p:txBody>
+      </p:sp>
+      <p:sp>
+        <p:nvSpPr>
+          <p:cNvPr id="27" name="TextBox 26"/>
+          <p:cNvSpPr txBox="1"/>
+          <p:nvPr/>
+        </p:nvSpPr>
+        <p:spPr>
+          <a:xfrm>
+            <a:off x="8348472" y="5760719"/>
+            <a:ext cx="2468880" cy="594360"/>
+          </a:xfrm>
+          <a:prstGeom prst="rect">
+            <a:avLst/>
+          </a:prstGeom>
+          <a:noFill/>
+        </p:spPr>
+        <p:txBody>
+          <a:bodyPr wrap="square">
+            <a:spAutoFit/>
+          </a:bodyPr>
+          <a:lstStyle/>
+          <a:p>
+            <a:pPr algn="l"/>
+            <a:r>
+              <a:rPr sz="1000" b="0" i="0">
+                <a:solidFill>
+                  <a:srgbClr val="E2E8F0"/>
+                </a:solidFill>
+              </a:rPr>
+              <a:t>Direct link to
+AWS announcement</a:t>
             </a:r>
           </a:p>
         </p:txBody>
@@ -15382,8 +15766,8 @@
         </p:nvSpPr>
         <p:spPr>
           <a:xfrm>
-            <a:off x="502920" y="384048"/>
-            <a:ext cx="8686800" cy="457200"/>
+            <a:off x="320040" y="274320"/>
+            <a:ext cx="8686800" cy="475488"/>
           </a:xfrm>
           <a:prstGeom prst="rect">
             <a:avLst/>
@@ -15398,7 +15782,7 @@
           <a:p>
             <a:pPr algn="l"/>
             <a:r>
-              <a:rPr sz="2200" b="1" i="0">
+              <a:rPr sz="2000" b="1" i="0">
                 <a:solidFill>
                   <a:srgbClr val="FFFFFF"/>
                 </a:solidFill>
@@ -15424,8 +15808,8 @@
         </p:blipFill>
         <p:spPr>
           <a:xfrm>
-            <a:off x="320040" y="896112"/>
-            <a:ext cx="11539728" cy="5486400"/>
+            <a:off x="320040" y="841248"/>
+            <a:ext cx="7662672" cy="5907024"/>
           </a:xfrm>
           <a:prstGeom prst="rect">
             <a:avLst/>
@@ -15440,14 +15824,14 @@
         </p:nvSpPr>
         <p:spPr>
           <a:xfrm>
-            <a:off x="347472" y="932688"/>
-            <a:ext cx="2606040" cy="292608"/>
-          </a:xfrm>
-          <a:prstGeom prst="rect">
-            <a:avLst/>
-          </a:prstGeom>
-          <a:solidFill>
-            <a:srgbClr val="0D1A26"/>
+            <a:off x="8092440" y="841248"/>
+            <a:ext cx="2852928" cy="5907024"/>
+          </a:xfrm>
+          <a:prstGeom prst="rect">
+            <a:avLst/>
+          </a:prstGeom>
+          <a:solidFill>
+            <a:srgbClr val="0D1A2E"/>
           </a:solidFill>
           <a:ln>
             <a:noFill/>
@@ -15477,14 +15861,57 @@
       </p:sp>
       <p:sp>
         <p:nvSpPr>
-          <p:cNvPr id="8" name="TextBox 7"/>
+          <p:cNvPr id="8" name="Rectangle 7"/>
+          <p:cNvSpPr/>
+          <p:nvPr/>
+        </p:nvSpPr>
+        <p:spPr>
+          <a:xfrm>
+            <a:off x="8092440" y="841248"/>
+            <a:ext cx="54864" cy="5907024"/>
+          </a:xfrm>
+          <a:prstGeom prst="rect">
+            <a:avLst/>
+          </a:prstGeom>
+          <a:solidFill>
+            <a:srgbClr val="FF9900"/>
+          </a:solidFill>
+          <a:ln>
+            <a:noFill/>
+          </a:ln>
+        </p:spPr>
+        <p:style>
+          <a:lnRef idx="1">
+            <a:schemeClr val="accent1"/>
+          </a:lnRef>
+          <a:fillRef idx="3">
+            <a:schemeClr val="accent1"/>
+          </a:fillRef>
+          <a:effectRef idx="2">
+            <a:schemeClr val="accent1"/>
+          </a:effectRef>
+          <a:fontRef idx="minor">
+            <a:schemeClr val="lt1"/>
+          </a:fontRef>
+        </p:style>
+        <p:txBody>
+          <a:bodyPr rtlCol="0" anchor="ctr"/>
+          <a:lstStyle/>
+          <a:p>
+            <a:pPr algn="ctr"/>
+          </a:p>
+        </p:txBody>
+      </p:sp>
+      <p:sp>
+        <p:nvSpPr>
+          <p:cNvPr id="9" name="TextBox 8"/>
           <p:cNvSpPr txBox="1"/>
           <p:nvPr/>
         </p:nvSpPr>
         <p:spPr>
           <a:xfrm>
-            <a:off x="420624" y="978408"/>
-            <a:ext cx="2487168" cy="219456"/>
+            <a:off x="8257032" y="1005840"/>
+            <a:ext cx="2596896" cy="256032"/>
           </a:xfrm>
           <a:prstGeom prst="rect">
             <a:avLst/>
@@ -15499,32 +15926,32 @@
           <a:p>
             <a:pPr algn="l"/>
             <a:r>
-              <a:rPr sz="900" b="0" i="0">
+              <a:rPr sz="800" b="1" i="0">
                 <a:solidFill>
                   <a:srgbClr val="FF9900"/>
                 </a:solidFill>
               </a:rPr>
-              <a:t>▶  Badges: date · service · domain · type</a:t>
-            </a:r>
-          </a:p>
-        </p:txBody>
-      </p:sp>
-      <p:sp>
-        <p:nvSpPr>
-          <p:cNvPr id="9" name="Rectangle 8"/>
-          <p:cNvSpPr/>
-          <p:nvPr/>
-        </p:nvSpPr>
-        <p:spPr>
-          <a:xfrm>
-            <a:off x="347472" y="1335024"/>
-            <a:ext cx="2606040" cy="292608"/>
-          </a:xfrm>
-          <a:prstGeom prst="rect">
-            <a:avLst/>
-          </a:prstGeom>
-          <a:solidFill>
-            <a:srgbClr val="0D1A26"/>
+              <a:t>KEY HIGHLIGHTS</a:t>
+            </a:r>
+          </a:p>
+        </p:txBody>
+      </p:sp>
+      <p:sp>
+        <p:nvSpPr>
+          <p:cNvPr id="10" name="Rectangle 9"/>
+          <p:cNvSpPr/>
+          <p:nvPr/>
+        </p:nvSpPr>
+        <p:spPr>
+          <a:xfrm>
+            <a:off x="8257032" y="1371600"/>
+            <a:ext cx="2596896" cy="749808"/>
+          </a:xfrm>
+          <a:prstGeom prst="rect">
+            <a:avLst/>
+          </a:prstGeom>
+          <a:solidFill>
+            <a:srgbClr val="1A2A3E"/>
           </a:solidFill>
           <a:ln>
             <a:noFill/>
@@ -15554,14 +15981,57 @@
       </p:sp>
       <p:sp>
         <p:nvSpPr>
-          <p:cNvPr id="10" name="TextBox 9"/>
+          <p:cNvPr id="11" name="Rectangle 10"/>
+          <p:cNvSpPr/>
+          <p:nvPr/>
+        </p:nvSpPr>
+        <p:spPr>
+          <a:xfrm>
+            <a:off x="8257032" y="1371600"/>
+            <a:ext cx="36576" cy="749808"/>
+          </a:xfrm>
+          <a:prstGeom prst="rect">
+            <a:avLst/>
+          </a:prstGeom>
+          <a:solidFill>
+            <a:srgbClr val="FF9900"/>
+          </a:solidFill>
+          <a:ln>
+            <a:noFill/>
+          </a:ln>
+        </p:spPr>
+        <p:style>
+          <a:lnRef idx="1">
+            <a:schemeClr val="accent1"/>
+          </a:lnRef>
+          <a:fillRef idx="3">
+            <a:schemeClr val="accent1"/>
+          </a:fillRef>
+          <a:effectRef idx="2">
+            <a:schemeClr val="accent1"/>
+          </a:effectRef>
+          <a:fontRef idx="minor">
+            <a:schemeClr val="lt1"/>
+          </a:fontRef>
+        </p:style>
+        <p:txBody>
+          <a:bodyPr rtlCol="0" anchor="ctr"/>
+          <a:lstStyle/>
+          <a:p>
+            <a:pPr algn="ctr"/>
+          </a:p>
+        </p:txBody>
+      </p:sp>
+      <p:sp>
+        <p:nvSpPr>
+          <p:cNvPr id="12" name="TextBox 11"/>
           <p:cNvSpPr txBox="1"/>
           <p:nvPr/>
         </p:nvSpPr>
         <p:spPr>
           <a:xfrm>
-            <a:off x="420624" y="1380744"/>
-            <a:ext cx="2487168" cy="219456"/>
+            <a:off x="8348472" y="1463040"/>
+            <a:ext cx="2468880" cy="594360"/>
           </a:xfrm>
           <a:prstGeom prst="rect">
             <a:avLst/>
@@ -15576,32 +16046,33 @@
           <a:p>
             <a:pPr algn="l"/>
             <a:r>
-              <a:rPr sz="900" b="0" i="0">
-                <a:solidFill>
-                  <a:srgbClr val="FF9900"/>
+              <a:rPr sz="1000" b="0" i="0">
+                <a:solidFill>
+                  <a:srgbClr val="E2E8F0"/>
                 </a:solidFill>
               </a:rPr>
-              <a:t>▶  3–5 sentence AI summary, engineer-focused</a:t>
-            </a:r>
-          </a:p>
-        </p:txBody>
-      </p:sp>
-      <p:sp>
-        <p:nvSpPr>
-          <p:cNvPr id="11" name="Rectangle 10"/>
-          <p:cNvSpPr/>
-          <p:nvPr/>
-        </p:nvSpPr>
-        <p:spPr>
-          <a:xfrm>
-            <a:off x="347472" y="1737360"/>
-            <a:ext cx="2606040" cy="292608"/>
-          </a:xfrm>
-          <a:prstGeom prst="rect">
-            <a:avLst/>
-          </a:prstGeom>
-          <a:solidFill>
-            <a:srgbClr val="0D1A26"/>
+              <a:t>Badges: date,
+service, domain, type</a:t>
+            </a:r>
+          </a:p>
+        </p:txBody>
+      </p:sp>
+      <p:sp>
+        <p:nvSpPr>
+          <p:cNvPr id="13" name="Rectangle 12"/>
+          <p:cNvSpPr/>
+          <p:nvPr/>
+        </p:nvSpPr>
+        <p:spPr>
+          <a:xfrm>
+            <a:off x="8257032" y="2231136"/>
+            <a:ext cx="2596896" cy="749808"/>
+          </a:xfrm>
+          <a:prstGeom prst="rect">
+            <a:avLst/>
+          </a:prstGeom>
+          <a:solidFill>
+            <a:srgbClr val="1A2A3E"/>
           </a:solidFill>
           <a:ln>
             <a:noFill/>
@@ -15631,14 +16102,57 @@
       </p:sp>
       <p:sp>
         <p:nvSpPr>
-          <p:cNvPr id="12" name="TextBox 11"/>
+          <p:cNvPr id="14" name="Rectangle 13"/>
+          <p:cNvSpPr/>
+          <p:nvPr/>
+        </p:nvSpPr>
+        <p:spPr>
+          <a:xfrm>
+            <a:off x="8257032" y="2231136"/>
+            <a:ext cx="36576" cy="749808"/>
+          </a:xfrm>
+          <a:prstGeom prst="rect">
+            <a:avLst/>
+          </a:prstGeom>
+          <a:solidFill>
+            <a:srgbClr val="FF9900"/>
+          </a:solidFill>
+          <a:ln>
+            <a:noFill/>
+          </a:ln>
+        </p:spPr>
+        <p:style>
+          <a:lnRef idx="1">
+            <a:schemeClr val="accent1"/>
+          </a:lnRef>
+          <a:fillRef idx="3">
+            <a:schemeClr val="accent1"/>
+          </a:fillRef>
+          <a:effectRef idx="2">
+            <a:schemeClr val="accent1"/>
+          </a:effectRef>
+          <a:fontRef idx="minor">
+            <a:schemeClr val="lt1"/>
+          </a:fontRef>
+        </p:style>
+        <p:txBody>
+          <a:bodyPr rtlCol="0" anchor="ctr"/>
+          <a:lstStyle/>
+          <a:p>
+            <a:pPr algn="ctr"/>
+          </a:p>
+        </p:txBody>
+      </p:sp>
+      <p:sp>
+        <p:nvSpPr>
+          <p:cNvPr id="15" name="TextBox 14"/>
           <p:cNvSpPr txBox="1"/>
           <p:nvPr/>
         </p:nvSpPr>
         <p:spPr>
           <a:xfrm>
-            <a:off x="420624" y="1783080"/>
-            <a:ext cx="2487168" cy="219456"/>
+            <a:off x="8348472" y="2322576"/>
+            <a:ext cx="2468880" cy="594360"/>
           </a:xfrm>
           <a:prstGeom prst="rect">
             <a:avLst/>
@@ -15653,32 +16167,33 @@
           <a:p>
             <a:pPr algn="l"/>
             <a:r>
-              <a:rPr sz="900" b="0" i="0">
-                <a:solidFill>
-                  <a:srgbClr val="FF9900"/>
+              <a:rPr sz="1000" b="0" i="0">
+                <a:solidFill>
+                  <a:srgbClr val="E2E8F0"/>
                 </a:solidFill>
               </a:rPr>
-              <a:t>▶  Structured key points for rapid evaluation</a:t>
-            </a:r>
-          </a:p>
-        </p:txBody>
-      </p:sp>
-      <p:sp>
-        <p:nvSpPr>
-          <p:cNvPr id="13" name="Rectangle 12"/>
-          <p:cNvSpPr/>
-          <p:nvPr/>
-        </p:nvSpPr>
-        <p:spPr>
-          <a:xfrm>
-            <a:off x="8549640" y="932688"/>
-            <a:ext cx="2606040" cy="292608"/>
-          </a:xfrm>
-          <a:prstGeom prst="rect">
-            <a:avLst/>
-          </a:prstGeom>
-          <a:solidFill>
-            <a:srgbClr val="0D1A26"/>
+              <a:t>3–5 sentence AI
+summary, engineer-focused</a:t>
+            </a:r>
+          </a:p>
+        </p:txBody>
+      </p:sp>
+      <p:sp>
+        <p:nvSpPr>
+          <p:cNvPr id="16" name="Rectangle 15"/>
+          <p:cNvSpPr/>
+          <p:nvPr/>
+        </p:nvSpPr>
+        <p:spPr>
+          <a:xfrm>
+            <a:off x="8257032" y="3090672"/>
+            <a:ext cx="2596896" cy="749808"/>
+          </a:xfrm>
+          <a:prstGeom prst="rect">
+            <a:avLst/>
+          </a:prstGeom>
+          <a:solidFill>
+            <a:srgbClr val="1A2A3E"/>
           </a:solidFill>
           <a:ln>
             <a:noFill/>
@@ -15708,14 +16223,57 @@
       </p:sp>
       <p:sp>
         <p:nvSpPr>
-          <p:cNvPr id="14" name="TextBox 13"/>
+          <p:cNvPr id="17" name="Rectangle 16"/>
+          <p:cNvSpPr/>
+          <p:nvPr/>
+        </p:nvSpPr>
+        <p:spPr>
+          <a:xfrm>
+            <a:off x="8257032" y="3090672"/>
+            <a:ext cx="36576" cy="749808"/>
+          </a:xfrm>
+          <a:prstGeom prst="rect">
+            <a:avLst/>
+          </a:prstGeom>
+          <a:solidFill>
+            <a:srgbClr val="FF9900"/>
+          </a:solidFill>
+          <a:ln>
+            <a:noFill/>
+          </a:ln>
+        </p:spPr>
+        <p:style>
+          <a:lnRef idx="1">
+            <a:schemeClr val="accent1"/>
+          </a:lnRef>
+          <a:fillRef idx="3">
+            <a:schemeClr val="accent1"/>
+          </a:fillRef>
+          <a:effectRef idx="2">
+            <a:schemeClr val="accent1"/>
+          </a:effectRef>
+          <a:fontRef idx="minor">
+            <a:schemeClr val="lt1"/>
+          </a:fontRef>
+        </p:style>
+        <p:txBody>
+          <a:bodyPr rtlCol="0" anchor="ctr"/>
+          <a:lstStyle/>
+          <a:p>
+            <a:pPr algn="ctr"/>
+          </a:p>
+        </p:txBody>
+      </p:sp>
+      <p:sp>
+        <p:nvSpPr>
+          <p:cNvPr id="18" name="TextBox 17"/>
           <p:cNvSpPr txBox="1"/>
           <p:nvPr/>
         </p:nvSpPr>
         <p:spPr>
           <a:xfrm>
-            <a:off x="8622792" y="978408"/>
-            <a:ext cx="2487168" cy="219456"/>
+            <a:off x="8348472" y="3182112"/>
+            <a:ext cx="2468880" cy="594360"/>
           </a:xfrm>
           <a:prstGeom prst="rect">
             <a:avLst/>
@@ -15730,32 +16288,33 @@
           <a:p>
             <a:pPr algn="l"/>
             <a:r>
-              <a:rPr sz="900" b="0" i="0">
-                <a:solidFill>
-                  <a:srgbClr val="FF9900"/>
+              <a:rPr sz="1000" b="0" i="0">
+                <a:solidFill>
+                  <a:srgbClr val="E2E8F0"/>
                 </a:solidFill>
               </a:rPr>
-              <a:t>▶  Link to original AWS announcement</a:t>
-            </a:r>
-          </a:p>
-        </p:txBody>
-      </p:sp>
-      <p:sp>
-        <p:nvSpPr>
-          <p:cNvPr id="15" name="Rectangle 14"/>
-          <p:cNvSpPr/>
-          <p:nvPr/>
-        </p:nvSpPr>
-        <p:spPr>
-          <a:xfrm>
-            <a:off x="8549640" y="1335024"/>
-            <a:ext cx="2606040" cy="292608"/>
-          </a:xfrm>
-          <a:prstGeom prst="rect">
-            <a:avLst/>
-          </a:prstGeom>
-          <a:solidFill>
-            <a:srgbClr val="0D1A26"/>
+              <a:t>Structured key
+points for evaluation</a:t>
+            </a:r>
+          </a:p>
+        </p:txBody>
+      </p:sp>
+      <p:sp>
+        <p:nvSpPr>
+          <p:cNvPr id="19" name="Rectangle 18"/>
+          <p:cNvSpPr/>
+          <p:nvPr/>
+        </p:nvSpPr>
+        <p:spPr>
+          <a:xfrm>
+            <a:off x="8257032" y="3950208"/>
+            <a:ext cx="2596896" cy="749808"/>
+          </a:xfrm>
+          <a:prstGeom prst="rect">
+            <a:avLst/>
+          </a:prstGeom>
+          <a:solidFill>
+            <a:srgbClr val="1A2A3E"/>
           </a:solidFill>
           <a:ln>
             <a:noFill/>
@@ -15785,14 +16344,57 @@
       </p:sp>
       <p:sp>
         <p:nvSpPr>
-          <p:cNvPr id="16" name="TextBox 15"/>
+          <p:cNvPr id="20" name="Rectangle 19"/>
+          <p:cNvSpPr/>
+          <p:nvPr/>
+        </p:nvSpPr>
+        <p:spPr>
+          <a:xfrm>
+            <a:off x="8257032" y="3950208"/>
+            <a:ext cx="36576" cy="749808"/>
+          </a:xfrm>
+          <a:prstGeom prst="rect">
+            <a:avLst/>
+          </a:prstGeom>
+          <a:solidFill>
+            <a:srgbClr val="FF9900"/>
+          </a:solidFill>
+          <a:ln>
+            <a:noFill/>
+          </a:ln>
+        </p:spPr>
+        <p:style>
+          <a:lnRef idx="1">
+            <a:schemeClr val="accent1"/>
+          </a:lnRef>
+          <a:fillRef idx="3">
+            <a:schemeClr val="accent1"/>
+          </a:fillRef>
+          <a:effectRef idx="2">
+            <a:schemeClr val="accent1"/>
+          </a:effectRef>
+          <a:fontRef idx="minor">
+            <a:schemeClr val="lt1"/>
+          </a:fontRef>
+        </p:style>
+        <p:txBody>
+          <a:bodyPr rtlCol="0" anchor="ctr"/>
+          <a:lstStyle/>
+          <a:p>
+            <a:pPr algn="ctr"/>
+          </a:p>
+        </p:txBody>
+      </p:sp>
+      <p:sp>
+        <p:nvSpPr>
+          <p:cNvPr id="21" name="TextBox 20"/>
           <p:cNvSpPr txBox="1"/>
           <p:nvPr/>
         </p:nvSpPr>
         <p:spPr>
           <a:xfrm>
-            <a:off x="8622792" y="1380744"/>
-            <a:ext cx="2487168" cy="219456"/>
+            <a:off x="8348472" y="4041648"/>
+            <a:ext cx="2468880" cy="594360"/>
           </a:xfrm>
           <a:prstGeom prst="rect">
             <a:avLst/>
@@ -15807,32 +16409,33 @@
           <a:p>
             <a:pPr algn="l"/>
             <a:r>
-              <a:rPr sz="900" b="0" i="0">
-                <a:solidFill>
-                  <a:srgbClr val="FF9900"/>
+              <a:rPr sz="1000" b="0" i="0">
+                <a:solidFill>
+                  <a:srgbClr val="E2E8F0"/>
                 </a:solidFill>
               </a:rPr>
-              <a:t>▶  Back button preserves search state</a:t>
-            </a:r>
-          </a:p>
-        </p:txBody>
-      </p:sp>
-      <p:sp>
-        <p:nvSpPr>
-          <p:cNvPr id="17" name="Rectangle 16"/>
-          <p:cNvSpPr/>
-          <p:nvPr/>
-        </p:nvSpPr>
-        <p:spPr>
-          <a:xfrm>
-            <a:off x="8549640" y="1737360"/>
-            <a:ext cx="2606040" cy="292608"/>
-          </a:xfrm>
-          <a:prstGeom prst="rect">
-            <a:avLst/>
-          </a:prstGeom>
-          <a:solidFill>
-            <a:srgbClr val="0D1A26"/>
+              <a:t>One-click link to
+AWS announcement</a:t>
+            </a:r>
+          </a:p>
+        </p:txBody>
+      </p:sp>
+      <p:sp>
+        <p:nvSpPr>
+          <p:cNvPr id="22" name="Rectangle 21"/>
+          <p:cNvSpPr/>
+          <p:nvPr/>
+        </p:nvSpPr>
+        <p:spPr>
+          <a:xfrm>
+            <a:off x="8257032" y="4809744"/>
+            <a:ext cx="2596896" cy="749808"/>
+          </a:xfrm>
+          <a:prstGeom prst="rect">
+            <a:avLst/>
+          </a:prstGeom>
+          <a:solidFill>
+            <a:srgbClr val="1A2A3E"/>
           </a:solidFill>
           <a:ln>
             <a:noFill/>
@@ -15862,14 +16465,57 @@
       </p:sp>
       <p:sp>
         <p:nvSpPr>
-          <p:cNvPr id="18" name="TextBox 17"/>
+          <p:cNvPr id="23" name="Rectangle 22"/>
+          <p:cNvSpPr/>
+          <p:nvPr/>
+        </p:nvSpPr>
+        <p:spPr>
+          <a:xfrm>
+            <a:off x="8257032" y="4809744"/>
+            <a:ext cx="36576" cy="749808"/>
+          </a:xfrm>
+          <a:prstGeom prst="rect">
+            <a:avLst/>
+          </a:prstGeom>
+          <a:solidFill>
+            <a:srgbClr val="FF9900"/>
+          </a:solidFill>
+          <a:ln>
+            <a:noFill/>
+          </a:ln>
+        </p:spPr>
+        <p:style>
+          <a:lnRef idx="1">
+            <a:schemeClr val="accent1"/>
+          </a:lnRef>
+          <a:fillRef idx="3">
+            <a:schemeClr val="accent1"/>
+          </a:fillRef>
+          <a:effectRef idx="2">
+            <a:schemeClr val="accent1"/>
+          </a:effectRef>
+          <a:fontRef idx="minor">
+            <a:schemeClr val="lt1"/>
+          </a:fontRef>
+        </p:style>
+        <p:txBody>
+          <a:bodyPr rtlCol="0" anchor="ctr"/>
+          <a:lstStyle/>
+          <a:p>
+            <a:pPr algn="ctr"/>
+          </a:p>
+        </p:txBody>
+      </p:sp>
+      <p:sp>
+        <p:nvSpPr>
+          <p:cNvPr id="24" name="TextBox 23"/>
           <p:cNvSpPr txBox="1"/>
           <p:nvPr/>
         </p:nvSpPr>
         <p:spPr>
           <a:xfrm>
-            <a:off x="8622792" y="1783080"/>
-            <a:ext cx="2487168" cy="219456"/>
+            <a:off x="8348472" y="4901184"/>
+            <a:ext cx="2468880" cy="594360"/>
           </a:xfrm>
           <a:prstGeom prst="rect">
             <a:avLst/>
@@ -15884,12 +16530,134 @@
           <a:p>
             <a:pPr algn="l"/>
             <a:r>
-              <a:rPr sz="900" b="0" i="0">
-                <a:solidFill>
-                  <a:srgbClr val="FF9900"/>
+              <a:rPr sz="1000" b="0" i="0">
+                <a:solidFill>
+                  <a:srgbClr val="E2E8F0"/>
                 </a:solidFill>
               </a:rPr>
-              <a:t>▶  Summarized-at timestamp for audit</a:t>
+              <a:t>Back button
+preserves search state</a:t>
+            </a:r>
+          </a:p>
+        </p:txBody>
+      </p:sp>
+      <p:sp>
+        <p:nvSpPr>
+          <p:cNvPr id="25" name="Rectangle 24"/>
+          <p:cNvSpPr/>
+          <p:nvPr/>
+        </p:nvSpPr>
+        <p:spPr>
+          <a:xfrm>
+            <a:off x="8257032" y="5669279"/>
+            <a:ext cx="2596896" cy="749808"/>
+          </a:xfrm>
+          <a:prstGeom prst="rect">
+            <a:avLst/>
+          </a:prstGeom>
+          <a:solidFill>
+            <a:srgbClr val="1A2A3E"/>
+          </a:solidFill>
+          <a:ln>
+            <a:noFill/>
+          </a:ln>
+        </p:spPr>
+        <p:style>
+          <a:lnRef idx="1">
+            <a:schemeClr val="accent1"/>
+          </a:lnRef>
+          <a:fillRef idx="3">
+            <a:schemeClr val="accent1"/>
+          </a:fillRef>
+          <a:effectRef idx="2">
+            <a:schemeClr val="accent1"/>
+          </a:effectRef>
+          <a:fontRef idx="minor">
+            <a:schemeClr val="lt1"/>
+          </a:fontRef>
+        </p:style>
+        <p:txBody>
+          <a:bodyPr rtlCol="0" anchor="ctr"/>
+          <a:lstStyle/>
+          <a:p>
+            <a:pPr algn="ctr"/>
+          </a:p>
+        </p:txBody>
+      </p:sp>
+      <p:sp>
+        <p:nvSpPr>
+          <p:cNvPr id="26" name="Rectangle 25"/>
+          <p:cNvSpPr/>
+          <p:nvPr/>
+        </p:nvSpPr>
+        <p:spPr>
+          <a:xfrm>
+            <a:off x="8257032" y="5669279"/>
+            <a:ext cx="36576" cy="749808"/>
+          </a:xfrm>
+          <a:prstGeom prst="rect">
+            <a:avLst/>
+          </a:prstGeom>
+          <a:solidFill>
+            <a:srgbClr val="FF9900"/>
+          </a:solidFill>
+          <a:ln>
+            <a:noFill/>
+          </a:ln>
+        </p:spPr>
+        <p:style>
+          <a:lnRef idx="1">
+            <a:schemeClr val="accent1"/>
+          </a:lnRef>
+          <a:fillRef idx="3">
+            <a:schemeClr val="accent1"/>
+          </a:fillRef>
+          <a:effectRef idx="2">
+            <a:schemeClr val="accent1"/>
+          </a:effectRef>
+          <a:fontRef idx="minor">
+            <a:schemeClr val="lt1"/>
+          </a:fontRef>
+        </p:style>
+        <p:txBody>
+          <a:bodyPr rtlCol="0" anchor="ctr"/>
+          <a:lstStyle/>
+          <a:p>
+            <a:pPr algn="ctr"/>
+          </a:p>
+        </p:txBody>
+      </p:sp>
+      <p:sp>
+        <p:nvSpPr>
+          <p:cNvPr id="27" name="TextBox 26"/>
+          <p:cNvSpPr txBox="1"/>
+          <p:nvPr/>
+        </p:nvSpPr>
+        <p:spPr>
+          <a:xfrm>
+            <a:off x="8348472" y="5760719"/>
+            <a:ext cx="2468880" cy="594360"/>
+          </a:xfrm>
+          <a:prstGeom prst="rect">
+            <a:avLst/>
+          </a:prstGeom>
+          <a:noFill/>
+        </p:spPr>
+        <p:txBody>
+          <a:bodyPr wrap="square">
+            <a:spAutoFit/>
+          </a:bodyPr>
+          <a:lstStyle/>
+          <a:p>
+            <a:pPr algn="l"/>
+            <a:r>
+              <a:rPr sz="1000" b="0" i="0">
+                <a:solidFill>
+                  <a:srgbClr val="E2E8F0"/>
+                </a:solidFill>
+              </a:rPr>
+              <a:t>Summarized-at
+timestamp for audit</a:t>
             </a:r>
           </a:p>
         </p:txBody>
@@ -16040,8 +16808,8 @@
         </p:nvSpPr>
         <p:spPr>
           <a:xfrm>
-            <a:off x="502920" y="384048"/>
-            <a:ext cx="10058400" cy="457200"/>
+            <a:off x="320040" y="274320"/>
+            <a:ext cx="8686800" cy="475488"/>
           </a:xfrm>
           <a:prstGeom prst="rect">
             <a:avLst/>
@@ -16056,7 +16824,7 @@
           <a:p>
             <a:pPr algn="l"/>
             <a:r>
-              <a:rPr sz="2200" b="1" i="0">
+              <a:rPr sz="2000" b="1" i="0">
                 <a:solidFill>
                   <a:srgbClr val="FFFFFF"/>
                 </a:solidFill>
@@ -16082,8 +16850,8 @@
         </p:blipFill>
         <p:spPr>
           <a:xfrm>
-            <a:off x="320040" y="896112"/>
-            <a:ext cx="11539728" cy="5486400"/>
+            <a:off x="320040" y="841248"/>
+            <a:ext cx="7662672" cy="5907024"/>
           </a:xfrm>
           <a:prstGeom prst="rect">
             <a:avLst/>
@@ -16098,14 +16866,14 @@
         </p:nvSpPr>
         <p:spPr>
           <a:xfrm>
-            <a:off x="347472" y="932688"/>
-            <a:ext cx="2606040" cy="292608"/>
-          </a:xfrm>
-          <a:prstGeom prst="rect">
-            <a:avLst/>
-          </a:prstGeom>
-          <a:solidFill>
-            <a:srgbClr val="0D1A26"/>
+            <a:off x="8092440" y="841248"/>
+            <a:ext cx="2852928" cy="5907024"/>
+          </a:xfrm>
+          <a:prstGeom prst="rect">
+            <a:avLst/>
+          </a:prstGeom>
+          <a:solidFill>
+            <a:srgbClr val="0D1A2E"/>
           </a:solidFill>
           <a:ln>
             <a:noFill/>
@@ -16135,14 +16903,57 @@
       </p:sp>
       <p:sp>
         <p:nvSpPr>
-          <p:cNvPr id="8" name="TextBox 7"/>
+          <p:cNvPr id="8" name="Rectangle 7"/>
+          <p:cNvSpPr/>
+          <p:nvPr/>
+        </p:nvSpPr>
+        <p:spPr>
+          <a:xfrm>
+            <a:off x="8092440" y="841248"/>
+            <a:ext cx="54864" cy="5907024"/>
+          </a:xfrm>
+          <a:prstGeom prst="rect">
+            <a:avLst/>
+          </a:prstGeom>
+          <a:solidFill>
+            <a:srgbClr val="FF9900"/>
+          </a:solidFill>
+          <a:ln>
+            <a:noFill/>
+          </a:ln>
+        </p:spPr>
+        <p:style>
+          <a:lnRef idx="1">
+            <a:schemeClr val="accent1"/>
+          </a:lnRef>
+          <a:fillRef idx="3">
+            <a:schemeClr val="accent1"/>
+          </a:fillRef>
+          <a:effectRef idx="2">
+            <a:schemeClr val="accent1"/>
+          </a:effectRef>
+          <a:fontRef idx="minor">
+            <a:schemeClr val="lt1"/>
+          </a:fontRef>
+        </p:style>
+        <p:txBody>
+          <a:bodyPr rtlCol="0" anchor="ctr"/>
+          <a:lstStyle/>
+          <a:p>
+            <a:pPr algn="ctr"/>
+          </a:p>
+        </p:txBody>
+      </p:sp>
+      <p:sp>
+        <p:nvSpPr>
+          <p:cNvPr id="9" name="TextBox 8"/>
           <p:cNvSpPr txBox="1"/>
           <p:nvPr/>
         </p:nvSpPr>
         <p:spPr>
           <a:xfrm>
-            <a:off x="420624" y="978408"/>
-            <a:ext cx="2487168" cy="219456"/>
+            <a:off x="8257032" y="1005840"/>
+            <a:ext cx="2596896" cy="256032"/>
           </a:xfrm>
           <a:prstGeom prst="rect">
             <a:avLst/>
@@ -16157,32 +16968,32 @@
           <a:p>
             <a:pPr algn="l"/>
             <a:r>
-              <a:rPr sz="900" b="0" i="0">
+              <a:rPr sz="800" b="1" i="0">
                 <a:solidFill>
                   <a:srgbClr val="FF9900"/>
                 </a:solidFill>
               </a:rPr>
-              <a:t>▶  Keyword highlights matching records</a:t>
-            </a:r>
-          </a:p>
-        </p:txBody>
-      </p:sp>
-      <p:sp>
-        <p:nvSpPr>
-          <p:cNvPr id="9" name="Rectangle 8"/>
-          <p:cNvSpPr/>
-          <p:nvPr/>
-        </p:nvSpPr>
-        <p:spPr>
-          <a:xfrm>
-            <a:off x="347472" y="1335024"/>
-            <a:ext cx="2606040" cy="292608"/>
-          </a:xfrm>
-          <a:prstGeom prst="rect">
-            <a:avLst/>
-          </a:prstGeom>
-          <a:solidFill>
-            <a:srgbClr val="0D1A26"/>
+              <a:t>KEY HIGHLIGHTS</a:t>
+            </a:r>
+          </a:p>
+        </p:txBody>
+      </p:sp>
+      <p:sp>
+        <p:nvSpPr>
+          <p:cNvPr id="10" name="Rectangle 9"/>
+          <p:cNvSpPr/>
+          <p:nvPr/>
+        </p:nvSpPr>
+        <p:spPr>
+          <a:xfrm>
+            <a:off x="8257032" y="1371600"/>
+            <a:ext cx="2596896" cy="749808"/>
+          </a:xfrm>
+          <a:prstGeom prst="rect">
+            <a:avLst/>
+          </a:prstGeom>
+          <a:solidFill>
+            <a:srgbClr val="1A2A3E"/>
           </a:solidFill>
           <a:ln>
             <a:noFill/>
@@ -16212,14 +17023,57 @@
       </p:sp>
       <p:sp>
         <p:nvSpPr>
-          <p:cNvPr id="10" name="TextBox 9"/>
+          <p:cNvPr id="11" name="Rectangle 10"/>
+          <p:cNvSpPr/>
+          <p:nvPr/>
+        </p:nvSpPr>
+        <p:spPr>
+          <a:xfrm>
+            <a:off x="8257032" y="1371600"/>
+            <a:ext cx="36576" cy="749808"/>
+          </a:xfrm>
+          <a:prstGeom prst="rect">
+            <a:avLst/>
+          </a:prstGeom>
+          <a:solidFill>
+            <a:srgbClr val="FF9900"/>
+          </a:solidFill>
+          <a:ln>
+            <a:noFill/>
+          </a:ln>
+        </p:spPr>
+        <p:style>
+          <a:lnRef idx="1">
+            <a:schemeClr val="accent1"/>
+          </a:lnRef>
+          <a:fillRef idx="3">
+            <a:schemeClr val="accent1"/>
+          </a:fillRef>
+          <a:effectRef idx="2">
+            <a:schemeClr val="accent1"/>
+          </a:effectRef>
+          <a:fontRef idx="minor">
+            <a:schemeClr val="lt1"/>
+          </a:fontRef>
+        </p:style>
+        <p:txBody>
+          <a:bodyPr rtlCol="0" anchor="ctr"/>
+          <a:lstStyle/>
+          <a:p>
+            <a:pPr algn="ctr"/>
+          </a:p>
+        </p:txBody>
+      </p:sp>
+      <p:sp>
+        <p:nvSpPr>
+          <p:cNvPr id="12" name="TextBox 11"/>
           <p:cNvSpPr txBox="1"/>
           <p:nvPr/>
         </p:nvSpPr>
         <p:spPr>
           <a:xfrm>
-            <a:off x="420624" y="1380744"/>
-            <a:ext cx="2487168" cy="219456"/>
+            <a:off x="8348472" y="1463040"/>
+            <a:ext cx="2468880" cy="594360"/>
           </a:xfrm>
           <a:prstGeom prst="rect">
             <a:avLst/>
@@ -16234,32 +17088,33 @@
           <a:p>
             <a:pPr algn="l"/>
             <a:r>
-              <a:rPr sz="900" b="0" i="0">
-                <a:solidFill>
-                  <a:srgbClr val="FF9900"/>
+              <a:rPr sz="1000" b="0" i="0">
+                <a:solidFill>
+                  <a:srgbClr val="E2E8F0"/>
                 </a:solidFill>
               </a:rPr>
-              <a:t>▶  Active filter pills shown in header</a:t>
-            </a:r>
-          </a:p>
-        </p:txBody>
-      </p:sp>
-      <p:sp>
-        <p:nvSpPr>
-          <p:cNvPr id="11" name="Rectangle 10"/>
-          <p:cNvSpPr/>
-          <p:nvPr/>
-        </p:nvSpPr>
-        <p:spPr>
-          <a:xfrm>
-            <a:off x="347472" y="1737360"/>
-            <a:ext cx="2606040" cy="292608"/>
-          </a:xfrm>
-          <a:prstGeom prst="rect">
-            <a:avLst/>
-          </a:prstGeom>
-          <a:solidFill>
-            <a:srgbClr val="0D1A26"/>
+              <a:t>Keyword search
+matches title &amp; summary</a:t>
+            </a:r>
+          </a:p>
+        </p:txBody>
+      </p:sp>
+      <p:sp>
+        <p:nvSpPr>
+          <p:cNvPr id="13" name="Rectangle 12"/>
+          <p:cNvSpPr/>
+          <p:nvPr/>
+        </p:nvSpPr>
+        <p:spPr>
+          <a:xfrm>
+            <a:off x="8257032" y="2231136"/>
+            <a:ext cx="2596896" cy="749808"/>
+          </a:xfrm>
+          <a:prstGeom prst="rect">
+            <a:avLst/>
+          </a:prstGeom>
+          <a:solidFill>
+            <a:srgbClr val="1A2A3E"/>
           </a:solidFill>
           <a:ln>
             <a:noFill/>
@@ -16289,14 +17144,57 @@
       </p:sp>
       <p:sp>
         <p:nvSpPr>
-          <p:cNvPr id="12" name="TextBox 11"/>
+          <p:cNvPr id="14" name="Rectangle 13"/>
+          <p:cNvSpPr/>
+          <p:nvPr/>
+        </p:nvSpPr>
+        <p:spPr>
+          <a:xfrm>
+            <a:off x="8257032" y="2231136"/>
+            <a:ext cx="36576" cy="749808"/>
+          </a:xfrm>
+          <a:prstGeom prst="rect">
+            <a:avLst/>
+          </a:prstGeom>
+          <a:solidFill>
+            <a:srgbClr val="FF9900"/>
+          </a:solidFill>
+          <a:ln>
+            <a:noFill/>
+          </a:ln>
+        </p:spPr>
+        <p:style>
+          <a:lnRef idx="1">
+            <a:schemeClr val="accent1"/>
+          </a:lnRef>
+          <a:fillRef idx="3">
+            <a:schemeClr val="accent1"/>
+          </a:fillRef>
+          <a:effectRef idx="2">
+            <a:schemeClr val="accent1"/>
+          </a:effectRef>
+          <a:fontRef idx="minor">
+            <a:schemeClr val="lt1"/>
+          </a:fontRef>
+        </p:style>
+        <p:txBody>
+          <a:bodyPr rtlCol="0" anchor="ctr"/>
+          <a:lstStyle/>
+          <a:p>
+            <a:pPr algn="ctr"/>
+          </a:p>
+        </p:txBody>
+      </p:sp>
+      <p:sp>
+        <p:nvSpPr>
+          <p:cNvPr id="15" name="TextBox 14"/>
           <p:cNvSpPr txBox="1"/>
           <p:nvPr/>
         </p:nvSpPr>
         <p:spPr>
           <a:xfrm>
-            <a:off x="420624" y="1783080"/>
-            <a:ext cx="2487168" cy="219456"/>
+            <a:off x="8348472" y="2322576"/>
+            <a:ext cx="2468880" cy="594360"/>
           </a:xfrm>
           <a:prstGeom prst="rect">
             <a:avLst/>
@@ -16311,32 +17209,33 @@
           <a:p>
             <a:pPr algn="l"/>
             <a:r>
-              <a:rPr sz="900" b="0" i="0">
-                <a:solidFill>
-                  <a:srgbClr val="FF9900"/>
+              <a:rPr sz="1000" b="0" i="0">
+                <a:solidFill>
+                  <a:srgbClr val="E2E8F0"/>
                 </a:solidFill>
               </a:rPr>
-              <a:t>▶  Real-time result count</a:t>
-            </a:r>
-          </a:p>
-        </p:txBody>
-      </p:sp>
-      <p:sp>
-        <p:nvSpPr>
-          <p:cNvPr id="13" name="Rectangle 12"/>
-          <p:cNvSpPr/>
-          <p:nvPr/>
-        </p:nvSpPr>
-        <p:spPr>
-          <a:xfrm>
-            <a:off x="8549640" y="932688"/>
-            <a:ext cx="2606040" cy="292608"/>
-          </a:xfrm>
-          <a:prstGeom prst="rect">
-            <a:avLst/>
-          </a:prstGeom>
-          <a:solidFill>
-            <a:srgbClr val="0D1A26"/>
+              <a:t>Active filter pills
+shown in header</a:t>
+            </a:r>
+          </a:p>
+        </p:txBody>
+      </p:sp>
+      <p:sp>
+        <p:nvSpPr>
+          <p:cNvPr id="16" name="Rectangle 15"/>
+          <p:cNvSpPr/>
+          <p:nvPr/>
+        </p:nvSpPr>
+        <p:spPr>
+          <a:xfrm>
+            <a:off x="8257032" y="3090672"/>
+            <a:ext cx="2596896" cy="749808"/>
+          </a:xfrm>
+          <a:prstGeom prst="rect">
+            <a:avLst/>
+          </a:prstGeom>
+          <a:solidFill>
+            <a:srgbClr val="1A2A3E"/>
           </a:solidFill>
           <a:ln>
             <a:noFill/>
@@ -16366,14 +17265,57 @@
       </p:sp>
       <p:sp>
         <p:nvSpPr>
-          <p:cNvPr id="14" name="TextBox 13"/>
+          <p:cNvPr id="17" name="Rectangle 16"/>
+          <p:cNvSpPr/>
+          <p:nvPr/>
+        </p:nvSpPr>
+        <p:spPr>
+          <a:xfrm>
+            <a:off x="8257032" y="3090672"/>
+            <a:ext cx="36576" cy="749808"/>
+          </a:xfrm>
+          <a:prstGeom prst="rect">
+            <a:avLst/>
+          </a:prstGeom>
+          <a:solidFill>
+            <a:srgbClr val="FF9900"/>
+          </a:solidFill>
+          <a:ln>
+            <a:noFill/>
+          </a:ln>
+        </p:spPr>
+        <p:style>
+          <a:lnRef idx="1">
+            <a:schemeClr val="accent1"/>
+          </a:lnRef>
+          <a:fillRef idx="3">
+            <a:schemeClr val="accent1"/>
+          </a:fillRef>
+          <a:effectRef idx="2">
+            <a:schemeClr val="accent1"/>
+          </a:effectRef>
+          <a:fontRef idx="minor">
+            <a:schemeClr val="lt1"/>
+          </a:fontRef>
+        </p:style>
+        <p:txBody>
+          <a:bodyPr rtlCol="0" anchor="ctr"/>
+          <a:lstStyle/>
+          <a:p>
+            <a:pPr algn="ctr"/>
+          </a:p>
+        </p:txBody>
+      </p:sp>
+      <p:sp>
+        <p:nvSpPr>
+          <p:cNvPr id="18" name="TextBox 17"/>
           <p:cNvSpPr txBox="1"/>
           <p:nvPr/>
         </p:nvSpPr>
         <p:spPr>
           <a:xfrm>
-            <a:off x="8622792" y="978408"/>
-            <a:ext cx="2487168" cy="219456"/>
+            <a:off x="8348472" y="3182112"/>
+            <a:ext cx="2468880" cy="594360"/>
           </a:xfrm>
           <a:prstGeom prst="rect">
             <a:avLst/>
@@ -16388,32 +17330,33 @@
           <a:p>
             <a:pPr algn="l"/>
             <a:r>
-              <a:rPr sz="900" b="0" i="0">
-                <a:solidFill>
-                  <a:srgbClr val="FF9900"/>
+              <a:rPr sz="1000" b="0" i="0">
+                <a:solidFill>
+                  <a:srgbClr val="E2E8F0"/>
                 </a:solidFill>
               </a:rPr>
-              <a:t>▶  URL captures all filters — fully shareable</a:t>
-            </a:r>
-          </a:p>
-        </p:txBody>
-      </p:sp>
-      <p:sp>
-        <p:nvSpPr>
-          <p:cNvPr id="15" name="Rectangle 14"/>
-          <p:cNvSpPr/>
-          <p:nvPr/>
-        </p:nvSpPr>
-        <p:spPr>
-          <a:xfrm>
-            <a:off x="8549640" y="1335024"/>
-            <a:ext cx="2606040" cy="292608"/>
-          </a:xfrm>
-          <a:prstGeom prst="rect">
-            <a:avLst/>
-          </a:prstGeom>
-          <a:solidFill>
-            <a:srgbClr val="0D1A26"/>
+              <a:t>Real-time
+result count</a:t>
+            </a:r>
+          </a:p>
+        </p:txBody>
+      </p:sp>
+      <p:sp>
+        <p:nvSpPr>
+          <p:cNvPr id="19" name="Rectangle 18"/>
+          <p:cNvSpPr/>
+          <p:nvPr/>
+        </p:nvSpPr>
+        <p:spPr>
+          <a:xfrm>
+            <a:off x="8257032" y="3950208"/>
+            <a:ext cx="2596896" cy="749808"/>
+          </a:xfrm>
+          <a:prstGeom prst="rect">
+            <a:avLst/>
+          </a:prstGeom>
+          <a:solidFill>
+            <a:srgbClr val="1A2A3E"/>
           </a:solidFill>
           <a:ln>
             <a:noFill/>
@@ -16443,14 +17386,57 @@
       </p:sp>
       <p:sp>
         <p:nvSpPr>
-          <p:cNvPr id="16" name="TextBox 15"/>
+          <p:cNvPr id="20" name="Rectangle 19"/>
+          <p:cNvSpPr/>
+          <p:nvPr/>
+        </p:nvSpPr>
+        <p:spPr>
+          <a:xfrm>
+            <a:off x="8257032" y="3950208"/>
+            <a:ext cx="36576" cy="749808"/>
+          </a:xfrm>
+          <a:prstGeom prst="rect">
+            <a:avLst/>
+          </a:prstGeom>
+          <a:solidFill>
+            <a:srgbClr val="FF9900"/>
+          </a:solidFill>
+          <a:ln>
+            <a:noFill/>
+          </a:ln>
+        </p:spPr>
+        <p:style>
+          <a:lnRef idx="1">
+            <a:schemeClr val="accent1"/>
+          </a:lnRef>
+          <a:fillRef idx="3">
+            <a:schemeClr val="accent1"/>
+          </a:fillRef>
+          <a:effectRef idx="2">
+            <a:schemeClr val="accent1"/>
+          </a:effectRef>
+          <a:fontRef idx="minor">
+            <a:schemeClr val="lt1"/>
+          </a:fontRef>
+        </p:style>
+        <p:txBody>
+          <a:bodyPr rtlCol="0" anchor="ctr"/>
+          <a:lstStyle/>
+          <a:p>
+            <a:pPr algn="ctr"/>
+          </a:p>
+        </p:txBody>
+      </p:sp>
+      <p:sp>
+        <p:nvSpPr>
+          <p:cNvPr id="21" name="TextBox 20"/>
           <p:cNvSpPr txBox="1"/>
           <p:nvPr/>
         </p:nvSpPr>
         <p:spPr>
           <a:xfrm>
-            <a:off x="8622792" y="1380744"/>
-            <a:ext cx="2487168" cy="219456"/>
+            <a:off x="8348472" y="4041648"/>
+            <a:ext cx="2468880" cy="594360"/>
           </a:xfrm>
           <a:prstGeom prst="rect">
             <a:avLst/>
@@ -16465,32 +17451,33 @@
           <a:p>
             <a:pPr algn="l"/>
             <a:r>
-              <a:rPr sz="900" b="0" i="0">
-                <a:solidFill>
-                  <a:srgbClr val="FF9900"/>
+              <a:rPr sz="1000" b="0" i="0">
+                <a:solidFill>
+                  <a:srgbClr val="E2E8F0"/>
                 </a:solidFill>
               </a:rPr>
-              <a:t>▶  Infinite scroll auto-loads next page</a:t>
-            </a:r>
-          </a:p>
-        </p:txBody>
-      </p:sp>
-      <p:sp>
-        <p:nvSpPr>
-          <p:cNvPr id="17" name="Rectangle 16"/>
-          <p:cNvSpPr/>
-          <p:nvPr/>
-        </p:nvSpPr>
-        <p:spPr>
-          <a:xfrm>
-            <a:off x="8549640" y="1737360"/>
-            <a:ext cx="2606040" cy="292608"/>
-          </a:xfrm>
-          <a:prstGeom prst="rect">
-            <a:avLst/>
-          </a:prstGeom>
-          <a:solidFill>
-            <a:srgbClr val="0D1A26"/>
+              <a:t>URL captures all
+filters — shareable</a:t>
+            </a:r>
+          </a:p>
+        </p:txBody>
+      </p:sp>
+      <p:sp>
+        <p:nvSpPr>
+          <p:cNvPr id="22" name="Rectangle 21"/>
+          <p:cNvSpPr/>
+          <p:nvPr/>
+        </p:nvSpPr>
+        <p:spPr>
+          <a:xfrm>
+            <a:off x="8257032" y="4809744"/>
+            <a:ext cx="2596896" cy="749808"/>
+          </a:xfrm>
+          <a:prstGeom prst="rect">
+            <a:avLst/>
+          </a:prstGeom>
+          <a:solidFill>
+            <a:srgbClr val="1A2A3E"/>
           </a:solidFill>
           <a:ln>
             <a:noFill/>
@@ -16520,14 +17507,57 @@
       </p:sp>
       <p:sp>
         <p:nvSpPr>
-          <p:cNvPr id="18" name="TextBox 17"/>
+          <p:cNvPr id="23" name="Rectangle 22"/>
+          <p:cNvSpPr/>
+          <p:nvPr/>
+        </p:nvSpPr>
+        <p:spPr>
+          <a:xfrm>
+            <a:off x="8257032" y="4809744"/>
+            <a:ext cx="36576" cy="749808"/>
+          </a:xfrm>
+          <a:prstGeom prst="rect">
+            <a:avLst/>
+          </a:prstGeom>
+          <a:solidFill>
+            <a:srgbClr val="FF9900"/>
+          </a:solidFill>
+          <a:ln>
+            <a:noFill/>
+          </a:ln>
+        </p:spPr>
+        <p:style>
+          <a:lnRef idx="1">
+            <a:schemeClr val="accent1"/>
+          </a:lnRef>
+          <a:fillRef idx="3">
+            <a:schemeClr val="accent1"/>
+          </a:fillRef>
+          <a:effectRef idx="2">
+            <a:schemeClr val="accent1"/>
+          </a:effectRef>
+          <a:fontRef idx="minor">
+            <a:schemeClr val="lt1"/>
+          </a:fontRef>
+        </p:style>
+        <p:txBody>
+          <a:bodyPr rtlCol="0" anchor="ctr"/>
+          <a:lstStyle/>
+          <a:p>
+            <a:pPr algn="ctr"/>
+          </a:p>
+        </p:txBody>
+      </p:sp>
+      <p:sp>
+        <p:nvSpPr>
+          <p:cNvPr id="24" name="TextBox 23"/>
           <p:cNvSpPr txBox="1"/>
           <p:nvPr/>
         </p:nvSpPr>
         <p:spPr>
           <a:xfrm>
-            <a:off x="8622792" y="1783080"/>
-            <a:ext cx="2487168" cy="219456"/>
+            <a:off x="8348472" y="4901184"/>
+            <a:ext cx="2468880" cy="594360"/>
           </a:xfrm>
           <a:prstGeom prst="rect">
             <a:avLst/>
@@ -16542,12 +17572,134 @@
           <a:p>
             <a:pPr algn="l"/>
             <a:r>
-              <a:rPr sz="900" b="0" i="0">
-                <a:solidFill>
-                  <a:srgbClr val="FF9900"/>
+              <a:rPr sz="1000" b="0" i="0">
+                <a:solidFill>
+                  <a:srgbClr val="E2E8F0"/>
                 </a:solidFill>
               </a:rPr>
-              <a:t>▶  Works across all 8 feature type categories</a:t>
+              <a:t>Infinite scroll
+auto-loads next page</a:t>
+            </a:r>
+          </a:p>
+        </p:txBody>
+      </p:sp>
+      <p:sp>
+        <p:nvSpPr>
+          <p:cNvPr id="25" name="Rectangle 24"/>
+          <p:cNvSpPr/>
+          <p:nvPr/>
+        </p:nvSpPr>
+        <p:spPr>
+          <a:xfrm>
+            <a:off x="8257032" y="5669279"/>
+            <a:ext cx="2596896" cy="749808"/>
+          </a:xfrm>
+          <a:prstGeom prst="rect">
+            <a:avLst/>
+          </a:prstGeom>
+          <a:solidFill>
+            <a:srgbClr val="1A2A3E"/>
+          </a:solidFill>
+          <a:ln>
+            <a:noFill/>
+          </a:ln>
+        </p:spPr>
+        <p:style>
+          <a:lnRef idx="1">
+            <a:schemeClr val="accent1"/>
+          </a:lnRef>
+          <a:fillRef idx="3">
+            <a:schemeClr val="accent1"/>
+          </a:fillRef>
+          <a:effectRef idx="2">
+            <a:schemeClr val="accent1"/>
+          </a:effectRef>
+          <a:fontRef idx="minor">
+            <a:schemeClr val="lt1"/>
+          </a:fontRef>
+        </p:style>
+        <p:txBody>
+          <a:bodyPr rtlCol="0" anchor="ctr"/>
+          <a:lstStyle/>
+          <a:p>
+            <a:pPr algn="ctr"/>
+          </a:p>
+        </p:txBody>
+      </p:sp>
+      <p:sp>
+        <p:nvSpPr>
+          <p:cNvPr id="26" name="Rectangle 25"/>
+          <p:cNvSpPr/>
+          <p:nvPr/>
+        </p:nvSpPr>
+        <p:spPr>
+          <a:xfrm>
+            <a:off x="8257032" y="5669279"/>
+            <a:ext cx="36576" cy="749808"/>
+          </a:xfrm>
+          <a:prstGeom prst="rect">
+            <a:avLst/>
+          </a:prstGeom>
+          <a:solidFill>
+            <a:srgbClr val="FF9900"/>
+          </a:solidFill>
+          <a:ln>
+            <a:noFill/>
+          </a:ln>
+        </p:spPr>
+        <p:style>
+          <a:lnRef idx="1">
+            <a:schemeClr val="accent1"/>
+          </a:lnRef>
+          <a:fillRef idx="3">
+            <a:schemeClr val="accent1"/>
+          </a:fillRef>
+          <a:effectRef idx="2">
+            <a:schemeClr val="accent1"/>
+          </a:effectRef>
+          <a:fontRef idx="minor">
+            <a:schemeClr val="lt1"/>
+          </a:fontRef>
+        </p:style>
+        <p:txBody>
+          <a:bodyPr rtlCol="0" anchor="ctr"/>
+          <a:lstStyle/>
+          <a:p>
+            <a:pPr algn="ctr"/>
+          </a:p>
+        </p:txBody>
+      </p:sp>
+      <p:sp>
+        <p:nvSpPr>
+          <p:cNvPr id="27" name="TextBox 26"/>
+          <p:cNvSpPr txBox="1"/>
+          <p:nvPr/>
+        </p:nvSpPr>
+        <p:spPr>
+          <a:xfrm>
+            <a:off x="8348472" y="5760719"/>
+            <a:ext cx="2468880" cy="594360"/>
+          </a:xfrm>
+          <a:prstGeom prst="rect">
+            <a:avLst/>
+          </a:prstGeom>
+          <a:noFill/>
+        </p:spPr>
+        <p:txBody>
+          <a:bodyPr wrap="square">
+            <a:spAutoFit/>
+          </a:bodyPr>
+          <a:lstStyle/>
+          <a:p>
+            <a:pPr algn="l"/>
+            <a:r>
+              <a:rPr sz="1000" b="0" i="0">
+                <a:solidFill>
+                  <a:srgbClr val="E2E8F0"/>
+                </a:solidFill>
+              </a:rPr>
+              <a:t>Works across
+all 8 feature types</a:t>
             </a:r>
           </a:p>
         </p:txBody>
